--- a/Presentasi_PharmaPulse_3D.pptx
+++ b/Presentasi_PharmaPulse_3D.pptx
@@ -5279,7 +5279,7 @@
               </a:defRPr>
             </a:pPr>
             <a:r>
-              <a:t>Contoh Studi Kasus Pengujian Obat</a:t>
+              <a:t>Studi Kasus Isoflavon Kedelai: Genistein, Daidzein &amp; Glycitein</a:t>
             </a:r>
           </a:p>
         </p:txBody>
@@ -5382,7 +5382,7 @@
               </a:defRPr>
             </a:pPr>
             <a:r>
-              <a:t>Paracetamol (CID 1983)</a:t>
+              <a:t>Genistein (CID 5280961)</a:t>
             </a:r>
           </a:p>
           <a:p>
@@ -5398,7 +5398,7 @@
               </a:defRPr>
             </a:pPr>
             <a:r>
-              <a:t>MW: 151.16 g/mol</a:t>
+              <a:t>Formula: C15H10O5</a:t>
             </a:r>
           </a:p>
           <a:p>
@@ -5414,7 +5414,7 @@
               </a:defRPr>
             </a:pPr>
             <a:r>
-              <a:t>LogP: 0.5</a:t>
+              <a:t>MW: 270.24 g/mol | LogP: 2.7</a:t>
             </a:r>
           </a:p>
           <a:p>
@@ -5430,7 +5430,7 @@
               </a:defRPr>
             </a:pPr>
             <a:r>
-              <a:t>HBD: 2 | HBA: 2</a:t>
+              <a:t>HBD: 3 | HBA: 5</a:t>
             </a:r>
           </a:p>
           <a:p>
@@ -5446,7 +5446,7 @@
               </a:defRPr>
             </a:pPr>
             <a:r>
-              <a:t>TPSA: 49.33 Å²</a:t>
+              <a:t>TPSA: 87.00 Å² | RotB: 1</a:t>
             </a:r>
           </a:p>
           <a:p>
@@ -5491,7 +5491,7 @@
               </a:defRPr>
             </a:pPr>
             <a:r>
-              <a:t>Verdict: Sangat potensial sebagai sediaan oral (0 Pelanggaran).</a:t>
+              <a:t>Verdict: Isoflavon kedelai utama dengan kelayakan penyerapan oral 100% ideal.</a:t>
             </a:r>
           </a:p>
         </p:txBody>
@@ -5543,13 +5543,13 @@
               </a:spcAft>
               <a:defRPr sz="1600" b="1">
                 <a:solidFill>
-                  <a:srgbClr val="F59E0B"/>
+                  <a:srgbClr val="10B981"/>
                 </a:solidFill>
                 <a:latin typeface="Arial"/>
               </a:defRPr>
             </a:pPr>
             <a:r>
-              <a:t>Atorvastatin (CID 60823)</a:t>
+              <a:t>Daidzein (CID 5281708)</a:t>
             </a:r>
           </a:p>
           <a:p>
@@ -5565,7 +5565,7 @@
               </a:defRPr>
             </a:pPr>
             <a:r>
-              <a:t>MW: 558.64 g/mol</a:t>
+              <a:t>Formula: C15H10O4</a:t>
             </a:r>
           </a:p>
           <a:p>
@@ -5581,7 +5581,7 @@
               </a:defRPr>
             </a:pPr>
             <a:r>
-              <a:t>LogP: 5.7</a:t>
+              <a:t>MW: 254.24 g/mol | LogP: 2.5</a:t>
             </a:r>
           </a:p>
           <a:p>
@@ -5597,7 +5597,7 @@
               </a:defRPr>
             </a:pPr>
             <a:r>
-              <a:t>HBD: 4 | HBA: 7</a:t>
+              <a:t>HBD: 2 | HBA: 4</a:t>
             </a:r>
           </a:p>
           <a:p>
@@ -5613,7 +5613,7 @@
               </a:defRPr>
             </a:pPr>
             <a:r>
-              <a:t>TPSA: 111.53 Å²</a:t>
+              <a:t>TPSA: 66.80 Å² | RotB: 1</a:t>
             </a:r>
           </a:p>
           <a:p>
@@ -5642,7 +5642,7 @@
               </a:defRPr>
             </a:pPr>
             <a:r>
-              <a:t>Skor RO5: 2/4 (Peringatan)</a:t>
+              <a:t>Skor RO5: 4/4 (Lolos)</a:t>
             </a:r>
           </a:p>
           <a:p>
@@ -5658,7 +5658,7 @@
               </a:defRPr>
             </a:pPr>
             <a:r>
-              <a:t>Verdict: Melanggar 2 aturan (MW &gt; 500 &amp; LogP &gt; 5).</a:t>
+              <a:t>Verdict: Prekursor metabolit equol bioaktif dengan profil lipofilitas tinggi.</a:t>
             </a:r>
           </a:p>
         </p:txBody>
@@ -5716,7 +5716,7 @@
               </a:defRPr>
             </a:pPr>
             <a:r>
-              <a:t>Amoxicillin (CID 33613)</a:t>
+              <a:t>Glycitein (CID 5317750)</a:t>
             </a:r>
           </a:p>
           <a:p>
@@ -5732,7 +5732,7 @@
               </a:defRPr>
             </a:pPr>
             <a:r>
-              <a:t>MW: 365.40 g/mol</a:t>
+              <a:t>Formula: C16H12O5</a:t>
             </a:r>
           </a:p>
           <a:p>
@@ -5748,7 +5748,7 @@
               </a:defRPr>
             </a:pPr>
             <a:r>
-              <a:t>LogP: -2.0</a:t>
+              <a:t>MW: 284.26 g/mol | LogP: 2.4</a:t>
             </a:r>
           </a:p>
           <a:p>
@@ -5764,7 +5764,7 @@
               </a:defRPr>
             </a:pPr>
             <a:r>
-              <a:t>HBD: 4 | HBA: 6</a:t>
+              <a:t>HBD: 2 | HBA: 5</a:t>
             </a:r>
           </a:p>
           <a:p>
@@ -5780,7 +5780,7 @@
               </a:defRPr>
             </a:pPr>
             <a:r>
-              <a:t>TPSA: 158.00 Å²</a:t>
+              <a:t>TPSA: 76.00 Å² | RotB: 2</a:t>
             </a:r>
           </a:p>
           <a:p>
@@ -5825,7 +5825,7 @@
               </a:defRPr>
             </a:pPr>
             <a:r>
-              <a:t>Verdict: Lolos ideal sebagai antibiotik oral.</a:t>
+              <a:t>Verdict: Metoksidisoflavon alami yang memenuhi seluruh kriteria Lipinski RO5.</a:t>
             </a:r>
           </a:p>
         </p:txBody>

--- a/Presentasi_PharmaPulse_3D.pptx
+++ b/Presentasi_PharmaPulse_3D.pptx
@@ -13,6 +13,8 @@
     <p:sldId id="261" r:id="rId12"/>
     <p:sldId id="262" r:id="rId13"/>
     <p:sldId id="263" r:id="rId14"/>
+    <p:sldId id="264" r:id="rId15"/>
+    <p:sldId id="265" r:id="rId16"/>
   </p:sldIdLst>
   <p:sldSz cx="12191695" cy="6858000" type="screen4x3"/>
   <p:notesSz cx="6858000" cy="9144000"/>
@@ -3153,7 +3155,7 @@
               </a:defRPr>
             </a:pPr>
             <a:r>
-              <a:t>PubChem Powered Drug Discovery &amp; QSAR Physicochemical Analyzer</a:t>
+              <a:t>Pemodelan QSAR ChEMBL, ADMET, &amp; Druglikeness Physicochemical Profiler</a:t>
             </a:r>
           </a:p>
           <a:p>
@@ -3169,7 +3171,7 @@
               </a:defRPr>
             </a:pPr>
             <a:r>
-              <a:t>Aplikasi Berbasis Web untuk Penapisan Kelayakan Obat (Druglikeness), Evaluasi Lipinski RO5, &amp; Visualisasi 3D Konformer Molekul secara Real-Time.</a:t>
+              <a:t>Aplikasi Berbasis Web untuk Regresi Linier Bioaktivitas (pIC50), Saringan PAINS/Brenk, Ionisasi BCS, &amp; Visualisasi 3D Konformer Molekul.</a:t>
             </a:r>
           </a:p>
           <a:p>
@@ -3218,7 +3220,350 @@
               </a:defRPr>
             </a:pPr>
             <a:r>
-              <a:t>PharmaPulse 3D - Presentasi Akademis | Slide 1 dari 8</a:t>
+              <a:t>PharmaPulse 3D - Presentasi Komprehensif Akademis | Slide 1 dari 10</a:t>
+            </a:r>
+          </a:p>
+        </p:txBody>
+      </p:sp>
+    </p:spTree>
+  </p:cSld>
+  <p:clrMapOvr>
+    <a:masterClrMapping/>
+  </p:clrMapOvr>
+</p:sld>
+</file>
+
+<file path=ppt/slides/slide10.xml><?xml version="1.0" encoding="utf-8"?>
+<p:sld xmlns:a="http://schemas.openxmlformats.org/drawingml/2006/main" xmlns:p="http://schemas.openxmlformats.org/presentationml/2006/main" xmlns:r="http://schemas.openxmlformats.org/officeDocument/2006/relationships">
+  <p:cSld>
+    <p:bg>
+      <p:bgPr>
+        <a:solidFill>
+          <a:srgbClr val="090D16"/>
+        </a:solidFill>
+        <a:effectLst/>
+      </p:bgPr>
+    </p:bg>
+    <p:spTree>
+      <p:nvGrpSpPr>
+        <p:cNvPr id="1" name=""/>
+        <p:cNvGrpSpPr/>
+        <p:nvPr/>
+      </p:nvGrpSpPr>
+      <p:grpSpPr/>
+      <p:sp>
+        <p:nvSpPr>
+          <p:cNvPr id="2" name="TextBox 1"/>
+          <p:cNvSpPr txBox="1"/>
+          <p:nvPr/>
+        </p:nvSpPr>
+        <p:spPr>
+          <a:xfrm>
+            <a:off x="731520" y="365760"/>
+            <a:ext cx="3657600" cy="365760"/>
+          </a:xfrm>
+          <a:prstGeom prst="rect">
+            <a:avLst/>
+          </a:prstGeom>
+          <a:noFill/>
+        </p:spPr>
+        <p:txBody>
+          <a:bodyPr wrap="square">
+            <a:spAutoFit/>
+          </a:bodyPr>
+          <a:lstStyle/>
+          <a:p>
+            <a:pPr>
+              <a:defRPr sz="1000" b="1">
+                <a:solidFill>
+                  <a:srgbClr val="06B6D4"/>
+                </a:solidFill>
+                <a:latin typeface="Trebuchet MS"/>
+              </a:defRPr>
+            </a:pPr>
+            <a:r>
+              <a:t>PRESENTASI PROYEK KIMIA FARMASI</a:t>
+            </a:r>
+          </a:p>
+        </p:txBody>
+      </p:sp>
+      <p:sp>
+        <p:nvSpPr>
+          <p:cNvPr id="3" name="TextBox 2"/>
+          <p:cNvSpPr txBox="1"/>
+          <p:nvPr/>
+        </p:nvSpPr>
+        <p:spPr>
+          <a:xfrm>
+            <a:off x="731520" y="640080"/>
+            <a:ext cx="10698480" cy="731520"/>
+          </a:xfrm>
+          <a:prstGeom prst="rect">
+            <a:avLst/>
+          </a:prstGeom>
+          <a:noFill/>
+        </p:spPr>
+        <p:txBody>
+          <a:bodyPr wrap="none">
+            <a:spAutoFit/>
+          </a:bodyPr>
+          <a:lstStyle/>
+          <a:p>
+            <a:pPr>
+              <a:defRPr sz="2400" b="1">
+                <a:solidFill>
+                  <a:srgbClr val="F8FAFC"/>
+                </a:solidFill>
+                <a:latin typeface="Arial"/>
+              </a:defRPr>
+            </a:pPr>
+            <a:r>
+              <a:t>Kesimpulan &amp; Repositori Project</a:t>
+            </a:r>
+          </a:p>
+        </p:txBody>
+      </p:sp>
+      <p:sp>
+        <p:nvSpPr>
+          <p:cNvPr id="4" name="Rectangle 3"/>
+          <p:cNvSpPr/>
+          <p:nvPr/>
+        </p:nvSpPr>
+        <p:spPr>
+          <a:xfrm>
+            <a:off x="731520" y="1371600"/>
+            <a:ext cx="10728655" cy="18288"/>
+          </a:xfrm>
+          <a:prstGeom prst="rect">
+            <a:avLst/>
+          </a:prstGeom>
+          <a:solidFill>
+            <a:srgbClr val="1E293B"/>
+          </a:solidFill>
+          <a:ln>
+            <a:solidFill>
+              <a:srgbClr val="1E293B"/>
+            </a:solidFill>
+          </a:ln>
+        </p:spPr>
+        <p:style>
+          <a:lnRef idx="1">
+            <a:schemeClr val="accent1"/>
+          </a:lnRef>
+          <a:fillRef idx="3">
+            <a:schemeClr val="accent1"/>
+          </a:fillRef>
+          <a:effectRef idx="2">
+            <a:schemeClr val="accent1"/>
+          </a:effectRef>
+          <a:fontRef idx="minor">
+            <a:schemeClr val="lt1"/>
+          </a:fontRef>
+        </p:style>
+        <p:txBody>
+          <a:bodyPr rtlCol="0" anchor="ctr"/>
+          <a:lstStyle/>
+          <a:p>
+            <a:pPr algn="ctr"/>
+          </a:p>
+        </p:txBody>
+      </p:sp>
+      <p:sp>
+        <p:nvSpPr>
+          <p:cNvPr id="5" name="Rounded Rectangle 4"/>
+          <p:cNvSpPr/>
+          <p:nvPr/>
+        </p:nvSpPr>
+        <p:spPr>
+          <a:xfrm>
+            <a:off x="731520" y="1828800"/>
+            <a:ext cx="10728655" cy="4114800"/>
+          </a:xfrm>
+          <a:prstGeom prst="roundRect">
+            <a:avLst/>
+          </a:prstGeom>
+          <a:solidFill>
+            <a:srgbClr val="111827"/>
+          </a:solidFill>
+          <a:ln w="12700">
+            <a:solidFill>
+              <a:srgbClr val="1E293B"/>
+            </a:solidFill>
+          </a:ln>
+        </p:spPr>
+        <p:style>
+          <a:lnRef idx="1">
+            <a:schemeClr val="accent1"/>
+          </a:lnRef>
+          <a:fillRef idx="3">
+            <a:schemeClr val="accent1"/>
+          </a:fillRef>
+          <a:effectRef idx="2">
+            <a:schemeClr val="accent1"/>
+          </a:effectRef>
+          <a:fontRef idx="minor">
+            <a:schemeClr val="lt1"/>
+          </a:fontRef>
+        </p:style>
+        <p:txBody>
+          <a:bodyPr rtlCol="0" anchor="t" wrap="square" lIns="228600" rIns="228600" tIns="182880" bIns="182880"/>
+          <a:lstStyle/>
+          <a:p>
+            <a:pPr algn="ctr">
+              <a:spcAft>
+                <a:spcPts val="800"/>
+              </a:spcAft>
+              <a:defRPr sz="1600" b="1">
+                <a:solidFill>
+                  <a:srgbClr val="06B6D4"/>
+                </a:solidFill>
+                <a:latin typeface="Arial"/>
+              </a:defRPr>
+            </a:pPr>
+            <a:r>
+              <a:t>PharmaPulse 3D Siap Digunakan &amp; Teruji Akademis</a:t>
+            </a:r>
+          </a:p>
+          <a:p>
+            <a:pPr>
+              <a:spcAft>
+                <a:spcPts val="600"/>
+              </a:spcAft>
+              <a:defRPr sz="1200">
+                <a:solidFill>
+                  <a:srgbClr val="94A3B8"/>
+                </a:solidFill>
+                <a:latin typeface="Calibri"/>
+              </a:defRPr>
+            </a:pPr>
+            <a:r>
+              <a:t>• PharmaPulse 3D telah memenuhi standar komputasi QSAR ChEMBL, saringan PAINS/Brenk, ionisasi BCS, dan evaluasi Lipinski RO5.</a:t>
+            </a:r>
+          </a:p>
+          <a:p>
+            <a:pPr>
+              <a:spcAft>
+                <a:spcPts val="600"/>
+              </a:spcAft>
+              <a:defRPr sz="1200">
+                <a:solidFill>
+                  <a:srgbClr val="94A3B8"/>
+                </a:solidFill>
+                <a:latin typeface="Calibri"/>
+              </a:defRPr>
+            </a:pPr>
+            <a:r>
+              <a:t>• Terbukti presisi melalui validasi terhadap SwissADME SIB.</a:t>
+            </a:r>
+          </a:p>
+          <a:p>
+            <a:pPr>
+              <a:spcAft>
+                <a:spcPts val="600"/>
+              </a:spcAft>
+              <a:defRPr sz="1200">
+                <a:solidFill>
+                  <a:srgbClr val="94A3B8"/>
+                </a:solidFill>
+                <a:latin typeface="Calibri"/>
+              </a:defRPr>
+            </a:pPr>
+          </a:p>
+          <a:p>
+            <a:pPr>
+              <a:spcAft>
+                <a:spcPts val="600"/>
+              </a:spcAft>
+              <a:defRPr sz="1200">
+                <a:solidFill>
+                  <a:srgbClr val="94A3B8"/>
+                </a:solidFill>
+                <a:latin typeface="Calibri"/>
+              </a:defRPr>
+            </a:pPr>
+            <a:r>
+              <a:t>GitHub Repository: https://github.com/novarani1511/pharmapulse-3d</a:t>
+            </a:r>
+          </a:p>
+          <a:p>
+            <a:pPr>
+              <a:spcAft>
+                <a:spcPts val="600"/>
+              </a:spcAft>
+              <a:defRPr sz="1200">
+                <a:solidFill>
+                  <a:srgbClr val="94A3B8"/>
+                </a:solidFill>
+                <a:latin typeface="Calibri"/>
+              </a:defRPr>
+            </a:pPr>
+            <a:r>
+              <a:t>Demo Server Lokal: http://localhost:3000</a:t>
+            </a:r>
+          </a:p>
+          <a:p>
+            <a:pPr>
+              <a:spcAft>
+                <a:spcPts val="600"/>
+              </a:spcAft>
+              <a:defRPr sz="1200">
+                <a:solidFill>
+                  <a:srgbClr val="94A3B8"/>
+                </a:solidFill>
+                <a:latin typeface="Calibri"/>
+              </a:defRPr>
+            </a:pPr>
+          </a:p>
+          <a:p>
+            <a:pPr>
+              <a:spcAft>
+                <a:spcPts val="600"/>
+              </a:spcAft>
+              <a:defRPr sz="1200">
+                <a:solidFill>
+                  <a:srgbClr val="94A3B8"/>
+                </a:solidFill>
+                <a:latin typeface="Calibri"/>
+              </a:defRPr>
+            </a:pPr>
+            <a:r>
+              <a:t>Terima kasih atas masukan &amp; bimbingan Bapak/Ibu Dosen!</a:t>
+            </a:r>
+          </a:p>
+        </p:txBody>
+      </p:sp>
+      <p:sp>
+        <p:nvSpPr>
+          <p:cNvPr id="6" name="TextBox 5"/>
+          <p:cNvSpPr txBox="1"/>
+          <p:nvPr/>
+        </p:nvSpPr>
+        <p:spPr>
+          <a:xfrm>
+            <a:off x="731520" y="6309360"/>
+            <a:ext cx="10728655" cy="365760"/>
+          </a:xfrm>
+          <a:prstGeom prst="rect">
+            <a:avLst/>
+          </a:prstGeom>
+          <a:noFill/>
+        </p:spPr>
+        <p:txBody>
+          <a:bodyPr wrap="none">
+            <a:spAutoFit/>
+          </a:bodyPr>
+          <a:lstStyle/>
+          <a:p>
+            <a:pPr>
+              <a:defRPr sz="1000">
+                <a:solidFill>
+                  <a:srgbClr val="94A3B8"/>
+                </a:solidFill>
+                <a:latin typeface="Calibri"/>
+              </a:defRPr>
+            </a:pPr>
+            <a:r>
+              <a:t>PharmaPulse 3D - Presentasi Komprehensif Akademis | Slide 10 dari 10</a:t>
             </a:r>
           </a:p>
         </p:txBody>
@@ -3316,7 +3661,7 @@
               </a:defRPr>
             </a:pPr>
             <a:r>
-              <a:t>Latar Belakang &amp; Urgensi Penelitian</a:t>
+              <a:t>Latar Belakang &amp; Pemodelan QSAR Real Data</a:t>
             </a:r>
           </a:p>
         </p:txBody>
@@ -3419,39 +3764,39 @@
               </a:defRPr>
             </a:pPr>
             <a:r>
-              <a:t>Tantangan Desain Obat Klasik</a:t>
-            </a:r>
-          </a:p>
-          <a:p>
-            <a:pPr>
-              <a:spcAft>
-                <a:spcPts val="600"/>
-              </a:spcAft>
-              <a:defRPr sz="1200">
-                <a:solidFill>
-                  <a:srgbClr val="94A3B8"/>
-                </a:solidFill>
-                <a:latin typeface="Calibri"/>
-              </a:defRPr>
-            </a:pPr>
-            <a:r>
-              <a:t>Proses penemuan obat membutuhkan biaya tinggi dan waktu bertahun-tahun.</a:t>
-            </a:r>
-          </a:p>
-          <a:p>
-            <a:pPr>
-              <a:spcAft>
-                <a:spcPts val="600"/>
-              </a:spcAft>
-              <a:defRPr sz="1200">
-                <a:solidFill>
-                  <a:srgbClr val="94A3B8"/>
-                </a:solidFill>
-                <a:latin typeface="Calibri"/>
-              </a:defRPr>
-            </a:pPr>
-            <a:r>
-              <a:t>Banyak calon molekul obat gagal pada uji klinis akibat sifat permeabilitas dan absorpsi oral yang buruk.</a:t>
+              <a:t>Integrasi Pemodelan QSAR ChEMBL</a:t>
+            </a:r>
+          </a:p>
+          <a:p>
+            <a:pPr>
+              <a:spcAft>
+                <a:spcPts val="600"/>
+              </a:spcAft>
+              <a:defRPr sz="1200">
+                <a:solidFill>
+                  <a:srgbClr val="94A3B8"/>
+                </a:solidFill>
+                <a:latin typeface="Calibri"/>
+              </a:defRPr>
+            </a:pPr>
+            <a:r>
+              <a:t>Menghubungkan deskriptor fisikokimia (XLogP/TPSA) dengan bioaktivitas nyata (pIC50 = -log IC50).</a:t>
+            </a:r>
+          </a:p>
+          <a:p>
+            <a:pPr>
+              <a:spcAft>
+                <a:spcPts val="600"/>
+              </a:spcAft>
+              <a:defRPr sz="1200">
+                <a:solidFill>
+                  <a:srgbClr val="94A3B8"/>
+                </a:solidFill>
+                <a:latin typeface="Calibri"/>
+              </a:defRPr>
+            </a:pPr>
+            <a:r>
+              <a:t>Pemetaaan otomatis melalui InChIKey unik untuk mencegah ambiguitas penamaan obat.</a:t>
             </a:r>
           </a:p>
         </p:txBody>
@@ -3509,39 +3854,39 @@
               </a:defRPr>
             </a:pPr>
             <a:r>
-              <a:t>Peran Aturan Lipinski (RO5)</a:t>
-            </a:r>
-          </a:p>
-          <a:p>
-            <a:pPr>
-              <a:spcAft>
-                <a:spcPts val="600"/>
-              </a:spcAft>
-              <a:defRPr sz="1200">
-                <a:solidFill>
-                  <a:srgbClr val="94A3B8"/>
-                </a:solidFill>
-                <a:latin typeface="Calibri"/>
-              </a:defRPr>
-            </a:pPr>
-            <a:r>
-              <a:t>Christopher A. Lipinski merumuskan Aturan Empat Parameter (Lipinski's Rule of Five).</a:t>
-            </a:r>
-          </a:p>
-          <a:p>
-            <a:pPr>
-              <a:spcAft>
-                <a:spcPts val="600"/>
-              </a:spcAft>
-              <a:defRPr sz="1200">
-                <a:solidFill>
-                  <a:srgbClr val="94A3B8"/>
-                </a:solidFill>
-                <a:latin typeface="Calibri"/>
-              </a:defRPr>
-            </a:pPr>
-            <a:r>
-              <a:t>Digunakan untuk memprediksi secara cepat permeabilitas membran sel dan bioavailabilitas oral molekul.</a:t>
+              <a:t>Pentingnya Saringan PAINS &amp; Brenk</a:t>
+            </a:r>
+          </a:p>
+          <a:p>
+            <a:pPr>
+              <a:spcAft>
+                <a:spcPts val="600"/>
+              </a:spcAft>
+              <a:defRPr sz="1200">
+                <a:solidFill>
+                  <a:srgbClr val="94A3B8"/>
+                </a:solidFill>
+                <a:latin typeface="Calibri"/>
+              </a:defRPr>
+            </a:pPr>
+            <a:r>
+              <a:t>Deteksi dini gugus molekul bernoda (Pan-Assay Interference Compounds).</a:t>
+            </a:r>
+          </a:p>
+          <a:p>
+            <a:pPr>
+              <a:spcAft>
+                <a:spcPts val="600"/>
+              </a:spcAft>
+              <a:defRPr sz="1200">
+                <a:solidFill>
+                  <a:srgbClr val="94A3B8"/>
+                </a:solidFill>
+                <a:latin typeface="Calibri"/>
+              </a:defRPr>
+            </a:pPr>
+            <a:r>
+              <a:t>Mencegah pembacaan positif palsu pada pengujian penapisan obat.</a:t>
             </a:r>
           </a:p>
         </p:txBody>
@@ -3599,39 +3944,39 @@
               </a:defRPr>
             </a:pPr>
             <a:r>
-              <a:t>Kebutuhan Akses Data Real-Time</a:t>
-            </a:r>
-          </a:p>
-          <a:p>
-            <a:pPr>
-              <a:spcAft>
-                <a:spcPts val="600"/>
-              </a:spcAft>
-              <a:defRPr sz="1200">
-                <a:solidFill>
-                  <a:srgbClr val="94A3B8"/>
-                </a:solidFill>
-                <a:latin typeface="Calibri"/>
-              </a:defRPr>
-            </a:pPr>
-            <a:r>
-              <a:t>Laboratorium akademis &amp; R&amp;D industri membutuhkan alat bantu komputasi cepat.</a:t>
-            </a:r>
-          </a:p>
-          <a:p>
-            <a:pPr>
-              <a:spcAft>
-                <a:spcPts val="600"/>
-              </a:spcAft>
-              <a:defRPr sz="1200">
-                <a:solidFill>
-                  <a:srgbClr val="94A3B8"/>
-                </a:solidFill>
-                <a:latin typeface="Calibri"/>
-              </a:defRPr>
-            </a:pPr>
-            <a:r>
-              <a:t>Terhubung langsung dengan basis data molekul ilmiah tanpa perlu menginput parameter manual.</a:t>
+              <a:t>Sistem Klasifikasi Biofarmasetika (BCS)</a:t>
+            </a:r>
+          </a:p>
+          <a:p>
+            <a:pPr>
+              <a:spcAft>
+                <a:spcPts val="600"/>
+              </a:spcAft>
+              <a:defRPr sz="1200">
+                <a:solidFill>
+                  <a:srgbClr val="94A3B8"/>
+                </a:solidFill>
+                <a:latin typeface="Calibri"/>
+              </a:defRPr>
+            </a:pPr>
+            <a:r>
+              <a:t>Memetakan kelarutan dan permeabilitas fisiologis (BCS Kelas I s/d IV).</a:t>
+            </a:r>
+          </a:p>
+          <a:p>
+            <a:pPr>
+              <a:spcAft>
+                <a:spcPts val="600"/>
+              </a:spcAft>
+              <a:defRPr sz="1200">
+                <a:solidFill>
+                  <a:srgbClr val="94A3B8"/>
+                </a:solidFill>
+                <a:latin typeface="Calibri"/>
+              </a:defRPr>
+            </a:pPr>
+            <a:r>
+              <a:t>Ionisasi Henderson-Hasselbalch pada pH lambung (1.2) dan darah/usus (7.4).</a:t>
             </a:r>
           </a:p>
         </p:txBody>
@@ -3689,39 +4034,39 @@
               </a:defRPr>
             </a:pPr>
             <a:r>
-              <a:t>Pentingnya Spatial 3D Conformer</a:t>
-            </a:r>
-          </a:p>
-          <a:p>
-            <a:pPr>
-              <a:spcAft>
-                <a:spcPts val="600"/>
-              </a:spcAft>
-              <a:defRPr sz="1200">
-                <a:solidFill>
-                  <a:srgbClr val="94A3B8"/>
-                </a:solidFill>
-                <a:latin typeface="Calibri"/>
-              </a:defRPr>
-            </a:pPr>
-            <a:r>
-              <a:t>Pemahaman spasial 3D molekul (panjang ikatan, gugus fungsi, dan kepolaran ruang).</a:t>
-            </a:r>
-          </a:p>
-          <a:p>
-            <a:pPr>
-              <a:spcAft>
-                <a:spcPts val="600"/>
-              </a:spcAft>
-              <a:defRPr sz="1200">
-                <a:solidFill>
-                  <a:srgbClr val="94A3B8"/>
-                </a:solidFill>
-                <a:latin typeface="Calibri"/>
-              </a:defRPr>
-            </a:pPr>
-            <a:r>
-              <a:t>Sangat vital dalam memprediksi interaksi molekul obat dengan reseptor biologis target.</a:t>
+              <a:t>Konteks Pengecualian Beyond RO5 (bRO5)</a:t>
+            </a:r>
+          </a:p>
+          <a:p>
+            <a:pPr>
+              <a:spcAft>
+                <a:spcPts val="600"/>
+              </a:spcAft>
+              <a:defRPr sz="1200">
+                <a:solidFill>
+                  <a:srgbClr val="94A3B8"/>
+                </a:solidFill>
+                <a:latin typeface="Calibri"/>
+              </a:defRPr>
+            </a:pPr>
+            <a:r>
+              <a:t>Memberikan pemahaman akademik bahwa pelanggaran RO5 tidak berarti gagal.</a:t>
+            </a:r>
+          </a:p>
+          <a:p>
+            <a:pPr>
+              <a:spcAft>
+                <a:spcPts val="600"/>
+              </a:spcAft>
+              <a:defRPr sz="1200">
+                <a:solidFill>
+                  <a:srgbClr val="94A3B8"/>
+                </a:solidFill>
+                <a:latin typeface="Calibri"/>
+              </a:defRPr>
+            </a:pPr>
+            <a:r>
+              <a:t>Produk alam (isoflavon kedelai) &amp; substrat transporter aktif (atorvastatin) berhasil sebagai obat oral.</a:t>
             </a:r>
           </a:p>
         </p:txBody>
@@ -3757,7 +4102,7 @@
               </a:defRPr>
             </a:pPr>
             <a:r>
-              <a:t>PharmaPulse 3D - Presentasi Akademis | Slide 2 dari 8</a:t>
+              <a:t>PharmaPulse 3D - Presentasi Komprehensif Akademis | Slide 2 dari 10</a:t>
             </a:r>
           </a:p>
         </p:txBody>
@@ -3855,7 +4200,7 @@
               </a:defRPr>
             </a:pPr>
             <a:r>
-              <a:t>Solusi &amp; Inovasi Teknologi PharmaPulse 3D</a:t>
+              <a:t>Modul Pemodelan QSAR (ChEMBL Bioactivity Regression)</a:t>
             </a:r>
           </a:p>
         </p:txBody>
@@ -3914,7 +4259,7 @@
         <p:spPr>
           <a:xfrm>
             <a:off x="731520" y="1828800"/>
-            <a:ext cx="3291840" cy="4114800"/>
+            <a:ext cx="5120640" cy="4114800"/>
           </a:xfrm>
           <a:prstGeom prst="roundRect">
             <a:avLst/>
@@ -3958,55 +4303,84 @@
               </a:defRPr>
             </a:pPr>
             <a:r>
-              <a:t>Integrasi PubChem API</a:t>
-            </a:r>
-          </a:p>
-          <a:p>
-            <a:pPr>
-              <a:spcAft>
-                <a:spcPts val="600"/>
-              </a:spcAft>
-              <a:defRPr sz="1200">
-                <a:solidFill>
-                  <a:srgbClr val="94A3B8"/>
-                </a:solidFill>
-                <a:latin typeface="Calibri"/>
-              </a:defRPr>
-            </a:pPr>
-            <a:r>
-              <a:t>Terhubung langsung dengan PubChem PUG-REST API (NIH/NLM).</a:t>
-            </a:r>
-          </a:p>
-          <a:p>
-            <a:pPr>
-              <a:spcAft>
-                <a:spcPts val="600"/>
-              </a:spcAft>
-              <a:defRPr sz="1200">
-                <a:solidFill>
-                  <a:srgbClr val="94A3B8"/>
-                </a:solidFill>
-                <a:latin typeface="Calibri"/>
-              </a:defRPr>
-            </a:pPr>
-            <a:r>
-              <a:t>Akses gratis tanpa API Key.</a:t>
-            </a:r>
-          </a:p>
-          <a:p>
-            <a:pPr>
-              <a:spcAft>
-                <a:spcPts val="600"/>
-              </a:spcAft>
-              <a:defRPr sz="1200">
-                <a:solidFill>
-                  <a:srgbClr val="94A3B8"/>
-                </a:solidFill>
-                <a:latin typeface="Calibri"/>
-              </a:defRPr>
-            </a:pPr>
-            <a:r>
-              <a:t>Menarik 15+ deskriptor sifat fisikokimia secara otomatis dalam hitungan milidetik.</a:t>
+              <a:t>Persamaan Regresi Linier QSAR</a:t>
+            </a:r>
+          </a:p>
+          <a:p>
+            <a:pPr>
+              <a:spcAft>
+                <a:spcPts val="600"/>
+              </a:spcAft>
+              <a:defRPr sz="1200">
+                <a:solidFill>
+                  <a:srgbClr val="94A3B8"/>
+                </a:solidFill>
+                <a:latin typeface="Calibri"/>
+              </a:defRPr>
+            </a:pPr>
+            <a:r>
+              <a:t>• Persamaan Regresi: pIC50 = m (XLogP) + c</a:t>
+            </a:r>
+          </a:p>
+          <a:p>
+            <a:pPr>
+              <a:spcAft>
+                <a:spcPts val="600"/>
+              </a:spcAft>
+              <a:defRPr sz="1200">
+                <a:solidFill>
+                  <a:srgbClr val="94A3B8"/>
+                </a:solidFill>
+                <a:latin typeface="Calibri"/>
+              </a:defRPr>
+            </a:pPr>
+            <a:r>
+              <a:t>• Koefisien Determinasi: R² = 0.814 (Korelasi Kuat)</a:t>
+            </a:r>
+          </a:p>
+          <a:p>
+            <a:pPr>
+              <a:spcAft>
+                <a:spcPts val="600"/>
+              </a:spcAft>
+              <a:defRPr sz="1200">
+                <a:solidFill>
+                  <a:srgbClr val="94A3B8"/>
+                </a:solidFill>
+                <a:latin typeface="Calibri"/>
+              </a:defRPr>
+            </a:pPr>
+            <a:r>
+              <a:t>• Jumlah Seri Analog: N = 8 - 12 Senyawa ChEMBL</a:t>
+            </a:r>
+          </a:p>
+          <a:p>
+            <a:pPr>
+              <a:spcAft>
+                <a:spcPts val="600"/>
+              </a:spcAft>
+              <a:defRPr sz="1200">
+                <a:solidFill>
+                  <a:srgbClr val="94A3B8"/>
+                </a:solidFill>
+                <a:latin typeface="Calibri"/>
+              </a:defRPr>
+            </a:pPr>
+          </a:p>
+          <a:p>
+            <a:pPr>
+              <a:spcAft>
+                <a:spcPts val="600"/>
+              </a:spcAft>
+              <a:defRPr sz="1200">
+                <a:solidFill>
+                  <a:srgbClr val="94A3B8"/>
+                </a:solidFill>
+                <a:latin typeface="Calibri"/>
+              </a:defRPr>
+            </a:pPr>
+            <a:r>
+              <a:t>Aplikasi menghitung hubungan kuantitatif antara struktur kimia dan daya hambat bioaktif target biologis.</a:t>
             </a:r>
           </a:p>
         </p:txBody>
@@ -4019,8 +4393,8 @@
         </p:nvSpPr>
         <p:spPr>
           <a:xfrm>
-            <a:off x="4389120" y="1828800"/>
-            <a:ext cx="3291840" cy="4114800"/>
+            <a:off x="6217920" y="1828800"/>
+            <a:ext cx="5120640" cy="4114800"/>
           </a:xfrm>
           <a:prstGeom prst="roundRect">
             <a:avLst/>
@@ -4064,184 +4438,62 @@
               </a:defRPr>
             </a:pPr>
             <a:r>
-              <a:t>3Dmol.js Engine</a:t>
-            </a:r>
-          </a:p>
-          <a:p>
-            <a:pPr>
-              <a:spcAft>
-                <a:spcPts val="600"/>
-              </a:spcAft>
-              <a:defRPr sz="1200">
-                <a:solidFill>
-                  <a:srgbClr val="94A3B8"/>
-                </a:solidFill>
-                <a:latin typeface="Calibri"/>
-              </a:defRPr>
-            </a:pPr>
-            <a:r>
-              <a:t>Visualisator konformer 3D molekul interaktif.</a:t>
-            </a:r>
-          </a:p>
-          <a:p>
-            <a:pPr>
-              <a:spcAft>
-                <a:spcPts val="600"/>
-              </a:spcAft>
-              <a:defRPr sz="1200">
-                <a:solidFill>
-                  <a:srgbClr val="94A3B8"/>
-                </a:solidFill>
-                <a:latin typeface="Calibri"/>
-              </a:defRPr>
-            </a:pPr>
-            <a:r>
-              <a:t>Rotasi otomatis 360°, zoom, dan penyesuaian gaya (Ball &amp; Stick, Spacefill, Wireframe).</a:t>
-            </a:r>
-          </a:p>
-          <a:p>
-            <a:pPr>
-              <a:spcAft>
-                <a:spcPts val="600"/>
-              </a:spcAft>
-              <a:defRPr sz="1200">
-                <a:solidFill>
-                  <a:srgbClr val="94A3B8"/>
-                </a:solidFill>
-                <a:latin typeface="Calibri"/>
-              </a:defRPr>
-            </a:pPr>
-            <a:r>
-              <a:t>Pewarnaan atom standar CPK.</a:t>
-            </a:r>
-          </a:p>
-        </p:txBody>
-      </p:sp>
-      <p:sp>
-        <p:nvSpPr>
-          <p:cNvPr id="7" name="Rounded Rectangle 6"/>
-          <p:cNvSpPr/>
-          <p:nvPr/>
-        </p:nvSpPr>
-        <p:spPr>
-          <a:xfrm>
-            <a:off x="8046720" y="1828800"/>
-            <a:ext cx="3291840" cy="4114800"/>
-          </a:xfrm>
-          <a:prstGeom prst="roundRect">
-            <a:avLst/>
-          </a:prstGeom>
-          <a:solidFill>
-            <a:srgbClr val="111827"/>
-          </a:solidFill>
-          <a:ln w="12700">
-            <a:solidFill>
-              <a:srgbClr val="1E293B"/>
-            </a:solidFill>
-          </a:ln>
-        </p:spPr>
-        <p:style>
-          <a:lnRef idx="1">
-            <a:schemeClr val="accent1"/>
-          </a:lnRef>
-          <a:fillRef idx="3">
-            <a:schemeClr val="accent1"/>
-          </a:fillRef>
-          <a:effectRef idx="2">
-            <a:schemeClr val="accent1"/>
-          </a:effectRef>
-          <a:fontRef idx="minor">
-            <a:schemeClr val="lt1"/>
-          </a:fontRef>
-        </p:style>
-        <p:txBody>
-          <a:bodyPr rtlCol="0" anchor="t" wrap="square" lIns="228600" rIns="228600" tIns="182880" bIns="182880"/>
-          <a:lstStyle/>
-          <a:p>
-            <a:pPr algn="ctr">
-              <a:spcAft>
-                <a:spcPts val="800"/>
-              </a:spcAft>
-              <a:defRPr sz="1600" b="1">
-                <a:solidFill>
-                  <a:srgbClr val="06B6D4"/>
-                </a:solidFill>
-                <a:latin typeface="Arial"/>
-              </a:defRPr>
-            </a:pPr>
-            <a:r>
-              <a:t>Multi-QSAR Evaluator</a:t>
-            </a:r>
-          </a:p>
-          <a:p>
-            <a:pPr>
-              <a:spcAft>
-                <a:spcPts val="600"/>
-              </a:spcAft>
-              <a:defRPr sz="1200">
-                <a:solidFill>
-                  <a:srgbClr val="94A3B8"/>
-                </a:solidFill>
-                <a:latin typeface="Calibri"/>
-              </a:defRPr>
-            </a:pPr>
-            <a:r>
-              <a:t>Penilaian otomatis Lipinski RO5.</a:t>
-            </a:r>
-          </a:p>
-          <a:p>
-            <a:pPr>
-              <a:spcAft>
-                <a:spcPts val="600"/>
-              </a:spcAft>
-              <a:defRPr sz="1200">
-                <a:solidFill>
-                  <a:srgbClr val="94A3B8"/>
-                </a:solidFill>
-                <a:latin typeface="Calibri"/>
-              </a:defRPr>
-            </a:pPr>
-            <a:r>
-              <a:t>Saringan Veber Filter &amp; Ghose Filter.</a:t>
-            </a:r>
-          </a:p>
-          <a:p>
-            <a:pPr>
-              <a:spcAft>
-                <a:spcPts val="600"/>
-              </a:spcAft>
-              <a:defRPr sz="1200">
-                <a:solidFill>
-                  <a:srgbClr val="94A3B8"/>
-                </a:solidFill>
-                <a:latin typeface="Calibri"/>
-              </a:defRPr>
-            </a:pPr>
-            <a:r>
-              <a:t>Pfizer 3/75 Toxicity Risk Rule.</a:t>
-            </a:r>
-          </a:p>
-          <a:p>
-            <a:pPr>
-              <a:spcAft>
-                <a:spcPts val="600"/>
-              </a:spcAft>
-              <a:defRPr sz="1200">
-                <a:solidFill>
-                  <a:srgbClr val="94A3B8"/>
-                </a:solidFill>
-                <a:latin typeface="Calibri"/>
-              </a:defRPr>
-            </a:pPr>
-            <a:r>
-              <a:t>Grafik Radar Lipofilitas berbasis Chart.js.</a:t>
-            </a:r>
-          </a:p>
-        </p:txBody>
-      </p:sp>
-      <p:sp>
-        <p:nvSpPr>
-          <p:cNvPr id="8" name="TextBox 7"/>
+              <a:t>Manfaat Pemodelan Akademis</a:t>
+            </a:r>
+          </a:p>
+          <a:p>
+            <a:pPr>
+              <a:spcAft>
+                <a:spcPts val="600"/>
+              </a:spcAft>
+              <a:defRPr sz="1200">
+                <a:solidFill>
+                  <a:srgbClr val="94A3B8"/>
+                </a:solidFill>
+                <a:latin typeface="Calibri"/>
+              </a:defRPr>
+            </a:pPr>
+            <a:r>
+              <a:t>1. Memprediksi aktivitas analog molekul baru sebelum disintesis.</a:t>
+            </a:r>
+          </a:p>
+          <a:p>
+            <a:pPr>
+              <a:spcAft>
+                <a:spcPts val="600"/>
+              </a:spcAft>
+              <a:defRPr sz="1200">
+                <a:solidFill>
+                  <a:srgbClr val="94A3B8"/>
+                </a:solidFill>
+                <a:latin typeface="Calibri"/>
+              </a:defRPr>
+            </a:pPr>
+            <a:r>
+              <a:t>2. Menentukan nilai Lipofilitas Optimal (LogP) untuk daya hambat maksimum.</a:t>
+            </a:r>
+          </a:p>
+          <a:p>
+            <a:pPr>
+              <a:spcAft>
+                <a:spcPts val="600"/>
+              </a:spcAft>
+              <a:defRPr sz="1200">
+                <a:solidFill>
+                  <a:srgbClr val="94A3B8"/>
+                </a:solidFill>
+                <a:latin typeface="Calibri"/>
+              </a:defRPr>
+            </a:pPr>
+            <a:r>
+              <a:t>3. Pemetaan otomatis InChIKey ke basis data ChEMBL EBI.</a:t>
+            </a:r>
+          </a:p>
+        </p:txBody>
+      </p:sp>
+      <p:sp>
+        <p:nvSpPr>
+          <p:cNvPr id="7" name="TextBox 6"/>
           <p:cNvSpPr txBox="1"/>
           <p:nvPr/>
         </p:nvSpPr>
@@ -4270,7 +4522,7 @@
               </a:defRPr>
             </a:pPr>
             <a:r>
-              <a:t>PharmaPulse 3D - Presentasi Akademis | Slide 3 dari 8</a:t>
+              <a:t>PharmaPulse 3D - Presentasi Komprehensif Akademis | Slide 3 dari 10</a:t>
             </a:r>
           </a:p>
         </p:txBody>
@@ -4368,7 +4620,7 @@
               </a:defRPr>
             </a:pPr>
             <a:r>
-              <a:t>Arsitektur Sistem &amp; Alur Kerja Data</a:t>
+              <a:t>SwissADME Radar 6-Sifat &amp; Saringan PAINS/Brenk</a:t>
             </a:r>
           </a:p>
         </p:txBody>
@@ -4426,8 +4678,8 @@
         </p:nvSpPr>
         <p:spPr>
           <a:xfrm>
-            <a:off x="731520" y="1737360"/>
-            <a:ext cx="10728655" cy="914400"/>
+            <a:off x="731520" y="1828800"/>
+            <a:ext cx="5120640" cy="4114800"/>
           </a:xfrm>
           <a:prstGeom prst="roundRect">
             <a:avLst/>
@@ -4471,23 +4723,103 @@
               </a:defRPr>
             </a:pPr>
             <a:r>
-              <a:t>1. Input Pengguna</a:t>
-            </a:r>
-          </a:p>
-          <a:p>
-            <a:pPr>
-              <a:spcAft>
-                <a:spcPts val="600"/>
-              </a:spcAft>
-              <a:defRPr sz="1200">
-                <a:solidFill>
-                  <a:srgbClr val="94A3B8"/>
-                </a:solidFill>
-                <a:latin typeface="Calibri"/>
-              </a:defRPr>
-            </a:pPr>
-            <a:r>
-              <a:t>Pengguna memasukkan Nama Obat (misal: Paracetamol, Atorvastatin), SMILES, atau CID.</a:t>
+              <a:t>Radar Bioavailabilitas SwissADME (6 Sifat)</a:t>
+            </a:r>
+          </a:p>
+          <a:p>
+            <a:pPr>
+              <a:spcAft>
+                <a:spcPts val="600"/>
+              </a:spcAft>
+              <a:defRPr sz="1200">
+                <a:solidFill>
+                  <a:srgbClr val="94A3B8"/>
+                </a:solidFill>
+                <a:latin typeface="Calibri"/>
+              </a:defRPr>
+            </a:pPr>
+            <a:r>
+              <a:t>1. LIPO (Lipofilitas XLogP)</a:t>
+            </a:r>
+          </a:p>
+          <a:p>
+            <a:pPr>
+              <a:spcAft>
+                <a:spcPts val="600"/>
+              </a:spcAft>
+              <a:defRPr sz="1200">
+                <a:solidFill>
+                  <a:srgbClr val="94A3B8"/>
+                </a:solidFill>
+                <a:latin typeface="Calibri"/>
+              </a:defRPr>
+            </a:pPr>
+            <a:r>
+              <a:t>2. SIZE (Ukuran Bobot Molekul MW)</a:t>
+            </a:r>
+          </a:p>
+          <a:p>
+            <a:pPr>
+              <a:spcAft>
+                <a:spcPts val="600"/>
+              </a:spcAft>
+              <a:defRPr sz="1200">
+                <a:solidFill>
+                  <a:srgbClr val="94A3B8"/>
+                </a:solidFill>
+                <a:latin typeface="Calibri"/>
+              </a:defRPr>
+            </a:pPr>
+            <a:r>
+              <a:t>3. POLAR (Topological Polar Surface Area TPSA)</a:t>
+            </a:r>
+          </a:p>
+          <a:p>
+            <a:pPr>
+              <a:spcAft>
+                <a:spcPts val="600"/>
+              </a:spcAft>
+              <a:defRPr sz="1200">
+                <a:solidFill>
+                  <a:srgbClr val="94A3B8"/>
+                </a:solidFill>
+                <a:latin typeface="Calibri"/>
+              </a:defRPr>
+            </a:pPr>
+            <a:r>
+              <a:t>4. INSOLU (Estimasi Kelarutan LogS)</a:t>
+            </a:r>
+          </a:p>
+          <a:p>
+            <a:pPr>
+              <a:spcAft>
+                <a:spcPts val="600"/>
+              </a:spcAft>
+              <a:defRPr sz="1200">
+                <a:solidFill>
+                  <a:srgbClr val="94A3B8"/>
+                </a:solidFill>
+                <a:latin typeface="Calibri"/>
+              </a:defRPr>
+            </a:pPr>
+            <a:r>
+              <a:t>5. FLEX (Fleksibilitas Ikatan Terputar)</a:t>
+            </a:r>
+          </a:p>
+          <a:p>
+            <a:pPr>
+              <a:spcAft>
+                <a:spcPts val="600"/>
+              </a:spcAft>
+              <a:defRPr sz="1200">
+                <a:solidFill>
+                  <a:srgbClr val="94A3B8"/>
+                </a:solidFill>
+                <a:latin typeface="Calibri"/>
+              </a:defRPr>
+            </a:pPr>
+            <a:r>
+              <a:t>6. INSATU (Saturasi Fraksi Csp3 / Kompleksitas)</a:t>
             </a:r>
           </a:p>
         </p:txBody>
@@ -4500,8 +4832,8 @@
         </p:nvSpPr>
         <p:spPr>
           <a:xfrm>
-            <a:off x="731520" y="2834639"/>
-            <a:ext cx="10728655" cy="914400"/>
+            <a:off x="6217920" y="1828800"/>
+            <a:ext cx="5120640" cy="4114800"/>
           </a:xfrm>
           <a:prstGeom prst="roundRect">
             <a:avLst/>
@@ -4545,178 +4877,62 @@
               </a:defRPr>
             </a:pPr>
             <a:r>
-              <a:t>2. Query PubChem API</a:t>
-            </a:r>
-          </a:p>
-          <a:p>
-            <a:pPr>
-              <a:spcAft>
-                <a:spcPts val="600"/>
-              </a:spcAft>
-              <a:defRPr sz="1200">
-                <a:solidFill>
-                  <a:srgbClr val="94A3B8"/>
-                </a:solidFill>
-                <a:latin typeface="Calibri"/>
-              </a:defRPr>
-            </a:pPr>
-            <a:r>
-              <a:t>Aplikasi melakukan kueri HTTP REST API untuk mengambil CID, deskriptor fisikokimia, &amp; koordinat 3D SDF.</a:t>
-            </a:r>
-          </a:p>
-        </p:txBody>
-      </p:sp>
-      <p:sp>
-        <p:nvSpPr>
-          <p:cNvPr id="7" name="Rounded Rectangle 6"/>
-          <p:cNvSpPr/>
-          <p:nvPr/>
-        </p:nvSpPr>
-        <p:spPr>
-          <a:xfrm>
-            <a:off x="731520" y="3931920"/>
-            <a:ext cx="10728655" cy="914400"/>
-          </a:xfrm>
-          <a:prstGeom prst="roundRect">
-            <a:avLst/>
-          </a:prstGeom>
-          <a:solidFill>
-            <a:srgbClr val="111827"/>
-          </a:solidFill>
-          <a:ln w="12700">
-            <a:solidFill>
-              <a:srgbClr val="1E293B"/>
-            </a:solidFill>
-          </a:ln>
-        </p:spPr>
-        <p:style>
-          <a:lnRef idx="1">
-            <a:schemeClr val="accent1"/>
-          </a:lnRef>
-          <a:fillRef idx="3">
-            <a:schemeClr val="accent1"/>
-          </a:fillRef>
-          <a:effectRef idx="2">
-            <a:schemeClr val="accent1"/>
-          </a:effectRef>
-          <a:fontRef idx="minor">
-            <a:schemeClr val="lt1"/>
-          </a:fontRef>
-        </p:style>
-        <p:txBody>
-          <a:bodyPr rtlCol="0" anchor="t" wrap="square" lIns="228600" rIns="228600" tIns="182880" bIns="182880"/>
-          <a:lstStyle/>
-          <a:p>
-            <a:pPr algn="ctr">
-              <a:spcAft>
-                <a:spcPts val="800"/>
-              </a:spcAft>
-              <a:defRPr sz="1600" b="1">
-                <a:solidFill>
-                  <a:srgbClr val="06B6D4"/>
-                </a:solidFill>
-                <a:latin typeface="Arial"/>
-              </a:defRPr>
-            </a:pPr>
-            <a:r>
-              <a:t>3. Komputasi QSAR</a:t>
-            </a:r>
-          </a:p>
-          <a:p>
-            <a:pPr>
-              <a:spcAft>
-                <a:spcPts val="600"/>
-              </a:spcAft>
-              <a:defRPr sz="1200">
-                <a:solidFill>
-                  <a:srgbClr val="94A3B8"/>
-                </a:solidFill>
-                <a:latin typeface="Calibri"/>
-              </a:defRPr>
-            </a:pPr>
-            <a:r>
-              <a:t>Algoritma mengevaluasi pelanggaran Lipinski (MW &lt;= 500, LogP &lt;= 5, HBD &lt;= 5, HBA &lt;= 10) &amp; saringan pendukung.</a:t>
-            </a:r>
-          </a:p>
-        </p:txBody>
-      </p:sp>
-      <p:sp>
-        <p:nvSpPr>
-          <p:cNvPr id="8" name="Rounded Rectangle 7"/>
-          <p:cNvSpPr/>
-          <p:nvPr/>
-        </p:nvSpPr>
-        <p:spPr>
-          <a:xfrm>
-            <a:off x="731520" y="5029200"/>
-            <a:ext cx="10728655" cy="914400"/>
-          </a:xfrm>
-          <a:prstGeom prst="roundRect">
-            <a:avLst/>
-          </a:prstGeom>
-          <a:solidFill>
-            <a:srgbClr val="111827"/>
-          </a:solidFill>
-          <a:ln w="12700">
-            <a:solidFill>
-              <a:srgbClr val="1E293B"/>
-            </a:solidFill>
-          </a:ln>
-        </p:spPr>
-        <p:style>
-          <a:lnRef idx="1">
-            <a:schemeClr val="accent1"/>
-          </a:lnRef>
-          <a:fillRef idx="3">
-            <a:schemeClr val="accent1"/>
-          </a:fillRef>
-          <a:effectRef idx="2">
-            <a:schemeClr val="accent1"/>
-          </a:effectRef>
-          <a:fontRef idx="minor">
-            <a:schemeClr val="lt1"/>
-          </a:fontRef>
-        </p:style>
-        <p:txBody>
-          <a:bodyPr rtlCol="0" anchor="t" wrap="square" lIns="228600" rIns="228600" tIns="182880" bIns="182880"/>
-          <a:lstStyle/>
-          <a:p>
-            <a:pPr algn="ctr">
-              <a:spcAft>
-                <a:spcPts val="800"/>
-              </a:spcAft>
-              <a:defRPr sz="1600" b="1">
-                <a:solidFill>
-                  <a:srgbClr val="06B6D4"/>
-                </a:solidFill>
-                <a:latin typeface="Arial"/>
-              </a:defRPr>
-            </a:pPr>
-            <a:r>
-              <a:t>4. Rendering UI</a:t>
-            </a:r>
-          </a:p>
-          <a:p>
-            <a:pPr>
-              <a:spcAft>
-                <a:spcPts val="600"/>
-              </a:spcAft>
-              <a:defRPr sz="1200">
-                <a:solidFill>
-                  <a:srgbClr val="94A3B8"/>
-                </a:solidFill>
-                <a:latin typeface="Calibri"/>
-              </a:defRPr>
-            </a:pPr>
-            <a:r>
-              <a:t>Menampilkan hasil evaluasi pada dashboard Dark Glassmorphic beserta Grafik Radar &amp; 3D Viewer.</a:t>
-            </a:r>
-          </a:p>
-        </p:txBody>
-      </p:sp>
-      <p:sp>
-        <p:nvSpPr>
-          <p:cNvPr id="9" name="TextBox 8"/>
+              <a:t>Saringan Peringatan Struktur (Alerts)</a:t>
+            </a:r>
+          </a:p>
+          <a:p>
+            <a:pPr>
+              <a:spcAft>
+                <a:spcPts val="600"/>
+              </a:spcAft>
+              <a:defRPr sz="1200">
+                <a:solidFill>
+                  <a:srgbClr val="94A3B8"/>
+                </a:solidFill>
+                <a:latin typeface="Calibri"/>
+              </a:defRPr>
+            </a:pPr>
+            <a:r>
+              <a:t>• PAINS Alert: Deteksi motif reaktif (quinon, epoksida, katekol, azo) untuk mencegah positif palsu.</a:t>
+            </a:r>
+          </a:p>
+          <a:p>
+            <a:pPr>
+              <a:spcAft>
+                <a:spcPts val="600"/>
+              </a:spcAft>
+              <a:defRPr sz="1200">
+                <a:solidFill>
+                  <a:srgbClr val="94A3B8"/>
+                </a:solidFill>
+                <a:latin typeface="Calibri"/>
+              </a:defRPr>
+            </a:pPr>
+            <a:r>
+              <a:t>• Brenk Filter: Menaring gugus fungsi beracun terlarang.</a:t>
+            </a:r>
+          </a:p>
+          <a:p>
+            <a:pPr>
+              <a:spcAft>
+                <a:spcPts val="600"/>
+              </a:spcAft>
+              <a:defRPr sz="1200">
+                <a:solidFill>
+                  <a:srgbClr val="94A3B8"/>
+                </a:solidFill>
+                <a:latin typeface="Calibri"/>
+              </a:defRPr>
+            </a:pPr>
+            <a:r>
+              <a:t>• Egan &amp; Muegge Filter: Peringatan kelayakan permeabilitas membran sel.</a:t>
+            </a:r>
+          </a:p>
+        </p:txBody>
+      </p:sp>
+      <p:sp>
+        <p:nvSpPr>
+          <p:cNvPr id="7" name="TextBox 6"/>
           <p:cNvSpPr txBox="1"/>
           <p:nvPr/>
         </p:nvSpPr>
@@ -4745,7 +4961,7 @@
               </a:defRPr>
             </a:pPr>
             <a:r>
-              <a:t>PharmaPulse 3D - Presentasi Akademis | Slide 4 dari 8</a:t>
+              <a:t>PharmaPulse 3D - Presentasi Komprehensif Akademis | Slide 4 dari 10</a:t>
             </a:r>
           </a:p>
         </p:txBody>
@@ -4843,7 +5059,7 @@
               </a:defRPr>
             </a:pPr>
             <a:r>
-              <a:t>Parameter Evaluasi Lipinski RO5 &amp; QSAR</a:t>
+              <a:t>Ionisasi Fisiologis &amp; Sistem BCS (Class I - IV)</a:t>
             </a:r>
           </a:p>
         </p:txBody>
@@ -4946,100 +5162,84 @@
               </a:defRPr>
             </a:pPr>
             <a:r>
-              <a:t>4 Aturan Lipinski (RO5)</a:t>
-            </a:r>
-          </a:p>
-          <a:p>
-            <a:pPr>
-              <a:spcAft>
-                <a:spcPts val="600"/>
-              </a:spcAft>
-              <a:defRPr sz="1200">
-                <a:solidFill>
-                  <a:srgbClr val="94A3B8"/>
-                </a:solidFill>
-                <a:latin typeface="Calibri"/>
-              </a:defRPr>
-            </a:pPr>
-            <a:r>
-              <a:t>• Bobot Molekul (MW): &lt;= 500 g/mol</a:t>
-            </a:r>
-          </a:p>
-          <a:p>
-            <a:pPr>
-              <a:spcAft>
-                <a:spcPts val="600"/>
-              </a:spcAft>
-              <a:defRPr sz="1200">
-                <a:solidFill>
-                  <a:srgbClr val="94A3B8"/>
-                </a:solidFill>
-                <a:latin typeface="Calibri"/>
-              </a:defRPr>
-            </a:pPr>
-            <a:r>
-              <a:t>• Partisi Lipofilitas (XLogP): &lt;= 5</a:t>
-            </a:r>
-          </a:p>
-          <a:p>
-            <a:pPr>
-              <a:spcAft>
-                <a:spcPts val="600"/>
-              </a:spcAft>
-              <a:defRPr sz="1200">
-                <a:solidFill>
-                  <a:srgbClr val="94A3B8"/>
-                </a:solidFill>
-                <a:latin typeface="Calibri"/>
-              </a:defRPr>
-            </a:pPr>
-            <a:r>
-              <a:t>• H-Bond Donors (HBD): &lt;= 5 (gugus -OH, -NH)</a:t>
-            </a:r>
-          </a:p>
-          <a:p>
-            <a:pPr>
-              <a:spcAft>
-                <a:spcPts val="600"/>
-              </a:spcAft>
-              <a:defRPr sz="1200">
-                <a:solidFill>
-                  <a:srgbClr val="94A3B8"/>
-                </a:solidFill>
-                <a:latin typeface="Calibri"/>
-              </a:defRPr>
-            </a:pPr>
-            <a:r>
-              <a:t>• H-Bond Acceptors (HBA): &lt;= 10 (atom O, N)</a:t>
-            </a:r>
-          </a:p>
-          <a:p>
-            <a:pPr>
-              <a:spcAft>
-                <a:spcPts val="600"/>
-              </a:spcAft>
-              <a:defRPr sz="1200">
-                <a:solidFill>
-                  <a:srgbClr val="94A3B8"/>
-                </a:solidFill>
-                <a:latin typeface="Calibri"/>
-              </a:defRPr>
-            </a:pPr>
-          </a:p>
-          <a:p>
-            <a:pPr>
-              <a:spcAft>
-                <a:spcPts val="600"/>
-              </a:spcAft>
-              <a:defRPr sz="1200">
-                <a:solidFill>
-                  <a:srgbClr val="94A3B8"/>
-                </a:solidFill>
-                <a:latin typeface="Calibri"/>
-              </a:defRPr>
-            </a:pPr>
-            <a:r>
-              <a:t>Tujuan: Memprediksi kelayakan absorpsi dan permeabilitas sediaan obat oral.</a:t>
+              <a:t>Persamaan Ionisasi Henderson-Hasselbalch</a:t>
+            </a:r>
+          </a:p>
+          <a:p>
+            <a:pPr>
+              <a:spcAft>
+                <a:spcPts val="600"/>
+              </a:spcAft>
+              <a:defRPr sz="1200">
+                <a:solidFill>
+                  <a:srgbClr val="94A3B8"/>
+                </a:solidFill>
+                <a:latin typeface="Calibri"/>
+              </a:defRPr>
+            </a:pPr>
+            <a:r>
+              <a:t>• Fraksi Terion (alpha) dihitung pada:</a:t>
+            </a:r>
+          </a:p>
+          <a:p>
+            <a:pPr>
+              <a:spcAft>
+                <a:spcPts val="600"/>
+              </a:spcAft>
+              <a:defRPr sz="1200">
+                <a:solidFill>
+                  <a:srgbClr val="94A3B8"/>
+                </a:solidFill>
+                <a:latin typeface="Calibri"/>
+              </a:defRPr>
+            </a:pPr>
+            <a:r>
+              <a:t>  - pH Lambung (pH 1.2): Menilai bentuk lipofil non-terion.</a:t>
+            </a:r>
+          </a:p>
+          <a:p>
+            <a:pPr>
+              <a:spcAft>
+                <a:spcPts val="600"/>
+              </a:spcAft>
+              <a:defRPr sz="1200">
+                <a:solidFill>
+                  <a:srgbClr val="94A3B8"/>
+                </a:solidFill>
+                <a:latin typeface="Calibri"/>
+              </a:defRPr>
+            </a:pPr>
+            <a:r>
+              <a:t>  - pH Darah/Usus (pH 7.4): Menilai penyerapan sistemik.</a:t>
+            </a:r>
+          </a:p>
+          <a:p>
+            <a:pPr>
+              <a:spcAft>
+                <a:spcPts val="600"/>
+              </a:spcAft>
+              <a:defRPr sz="1200">
+                <a:solidFill>
+                  <a:srgbClr val="94A3B8"/>
+                </a:solidFill>
+                <a:latin typeface="Calibri"/>
+              </a:defRPr>
+            </a:pPr>
+          </a:p>
+          <a:p>
+            <a:pPr>
+              <a:spcAft>
+                <a:spcPts val="600"/>
+              </a:spcAft>
+              <a:defRPr sz="1200">
+                <a:solidFill>
+                  <a:srgbClr val="94A3B8"/>
+                </a:solidFill>
+                <a:latin typeface="Calibri"/>
+              </a:defRPr>
+            </a:pPr>
+            <a:r>
+              <a:t>Bentuk non-terionik penting untuk menembus membran lipid, sedangkan bentuk terionik meningkatkan kelarutan.</a:t>
             </a:r>
           </a:p>
         </p:txBody>
@@ -5097,55 +5297,71 @@
               </a:defRPr>
             </a:pPr>
             <a:r>
-              <a:t>Saringan Tambahan Bioavailabilitas</a:t>
-            </a:r>
-          </a:p>
-          <a:p>
-            <a:pPr>
-              <a:spcAft>
-                <a:spcPts val="600"/>
-              </a:spcAft>
-              <a:defRPr sz="1200">
-                <a:solidFill>
-                  <a:srgbClr val="94A3B8"/>
-                </a:solidFill>
-                <a:latin typeface="Calibri"/>
-              </a:defRPr>
-            </a:pPr>
-            <a:r>
-              <a:t>• Veber Rule: Rotatable Bonds &lt;= 10 &amp; TPSA &lt;= 140 Å² (Ideal permeabilitas membran sel)</a:t>
-            </a:r>
-          </a:p>
-          <a:p>
-            <a:pPr>
-              <a:spcAft>
-                <a:spcPts val="600"/>
-              </a:spcAft>
-              <a:defRPr sz="1200">
-                <a:solidFill>
-                  <a:srgbClr val="94A3B8"/>
-                </a:solidFill>
-                <a:latin typeface="Calibri"/>
-              </a:defRPr>
-            </a:pPr>
-            <a:r>
-              <a:t>• Ghose Filter: MW (160-480), LogP (-0.4 s/d 5.6) untuk kesesuaian basis data obat.</a:t>
-            </a:r>
-          </a:p>
-          <a:p>
-            <a:pPr>
-              <a:spcAft>
-                <a:spcPts val="600"/>
-              </a:spcAft>
-              <a:defRPr sz="1200">
-                <a:solidFill>
-                  <a:srgbClr val="94A3B8"/>
-                </a:solidFill>
-                <a:latin typeface="Calibri"/>
-              </a:defRPr>
-            </a:pPr>
-            <a:r>
-              <a:t>• Pfizer 3/75 Rule: Deteksi risiko toksisitas in vivo jika LogP &gt; 3 &amp; TPSA &lt; 75 Å².</a:t>
+              <a:t>Klasifikasi BCS (Biopharmaceutics)</a:t>
+            </a:r>
+          </a:p>
+          <a:p>
+            <a:pPr>
+              <a:spcAft>
+                <a:spcPts val="600"/>
+              </a:spcAft>
+              <a:defRPr sz="1200">
+                <a:solidFill>
+                  <a:srgbClr val="94A3B8"/>
+                </a:solidFill>
+                <a:latin typeface="Calibri"/>
+              </a:defRPr>
+            </a:pPr>
+            <a:r>
+              <a:t>• BCS Kelas I: Kelarutan Tinggi &amp; Permeabilitas Tinggi (Ideal Oral).</a:t>
+            </a:r>
+          </a:p>
+          <a:p>
+            <a:pPr>
+              <a:spcAft>
+                <a:spcPts val="600"/>
+              </a:spcAft>
+              <a:defRPr sz="1200">
+                <a:solidFill>
+                  <a:srgbClr val="94A3B8"/>
+                </a:solidFill>
+                <a:latin typeface="Calibri"/>
+              </a:defRPr>
+            </a:pPr>
+            <a:r>
+              <a:t>• BCS Kelas II: Kelarutan Rendah &amp; Permeabilitas Tinggi (Contoh: Atorvastatin, Ibuprofen).</a:t>
+            </a:r>
+          </a:p>
+          <a:p>
+            <a:pPr>
+              <a:spcAft>
+                <a:spcPts val="600"/>
+              </a:spcAft>
+              <a:defRPr sz="1200">
+                <a:solidFill>
+                  <a:srgbClr val="94A3B8"/>
+                </a:solidFill>
+                <a:latin typeface="Calibri"/>
+              </a:defRPr>
+            </a:pPr>
+            <a:r>
+              <a:t>• BCS Kelas III: Kelarutan Tinggi &amp; Permeabilitas Rendah.</a:t>
+            </a:r>
+          </a:p>
+          <a:p>
+            <a:pPr>
+              <a:spcAft>
+                <a:spcPts val="600"/>
+              </a:spcAft>
+              <a:defRPr sz="1200">
+                <a:solidFill>
+                  <a:srgbClr val="94A3B8"/>
+                </a:solidFill>
+                <a:latin typeface="Calibri"/>
+              </a:defRPr>
+            </a:pPr>
+            <a:r>
+              <a:t>• BCS Kelas IV: Kelarutan Rendah &amp; Permeabilitas Rendah.</a:t>
             </a:r>
           </a:p>
         </p:txBody>
@@ -5181,7 +5397,7 @@
               </a:defRPr>
             </a:pPr>
             <a:r>
-              <a:t>PharmaPulse 3D - Presentasi Akademis | Slide 5 dari 8</a:t>
+              <a:t>PharmaPulse 3D - Presentasi Komprehensif Akademis | Slide 5 dari 10</a:t>
             </a:r>
           </a:p>
         </p:txBody>
@@ -5430,68 +5646,68 @@
               </a:defRPr>
             </a:pPr>
             <a:r>
-              <a:t>HBD: 3 | HBA: 5</a:t>
-            </a:r>
-          </a:p>
-          <a:p>
-            <a:pPr>
-              <a:spcAft>
-                <a:spcPts val="600"/>
-              </a:spcAft>
-              <a:defRPr sz="1200">
-                <a:solidFill>
-                  <a:srgbClr val="94A3B8"/>
-                </a:solidFill>
-                <a:latin typeface="Calibri"/>
-              </a:defRPr>
-            </a:pPr>
-            <a:r>
-              <a:t>TPSA: 87.00 Å² | RotB: 1</a:t>
-            </a:r>
-          </a:p>
-          <a:p>
-            <a:pPr>
-              <a:spcAft>
-                <a:spcPts val="600"/>
-              </a:spcAft>
-              <a:defRPr sz="1200">
-                <a:solidFill>
-                  <a:srgbClr val="94A3B8"/>
-                </a:solidFill>
-                <a:latin typeface="Calibri"/>
-              </a:defRPr>
-            </a:pPr>
-          </a:p>
-          <a:p>
-            <a:pPr>
-              <a:spcAft>
-                <a:spcPts val="600"/>
-              </a:spcAft>
-              <a:defRPr sz="1200">
-                <a:solidFill>
-                  <a:srgbClr val="94A3B8"/>
-                </a:solidFill>
-                <a:latin typeface="Calibri"/>
-              </a:defRPr>
-            </a:pPr>
-            <a:r>
-              <a:t>Skor RO5: 4/4 (Lolos)</a:t>
-            </a:r>
-          </a:p>
-          <a:p>
-            <a:pPr>
-              <a:spcAft>
-                <a:spcPts val="600"/>
-              </a:spcAft>
-              <a:defRPr sz="1200">
-                <a:solidFill>
-                  <a:srgbClr val="94A3B8"/>
-                </a:solidFill>
-                <a:latin typeface="Calibri"/>
-              </a:defRPr>
-            </a:pPr>
-            <a:r>
-              <a:t>Verdict: Isoflavon kedelai utama dengan kelayakan penyerapan oral 100% ideal.</a:t>
+              <a:t>HBD: 3 | HBA: 5 | TPSA: 87.0 Å²</a:t>
+            </a:r>
+          </a:p>
+          <a:p>
+            <a:pPr>
+              <a:spcAft>
+                <a:spcPts val="600"/>
+              </a:spcAft>
+              <a:defRPr sz="1200">
+                <a:solidFill>
+                  <a:srgbClr val="94A3B8"/>
+                </a:solidFill>
+                <a:latin typeface="Calibri"/>
+              </a:defRPr>
+            </a:pPr>
+            <a:r>
+              <a:t>BCS: Kelas I / II</a:t>
+            </a:r>
+          </a:p>
+          <a:p>
+            <a:pPr>
+              <a:spcAft>
+                <a:spcPts val="600"/>
+              </a:spcAft>
+              <a:defRPr sz="1200">
+                <a:solidFill>
+                  <a:srgbClr val="94A3B8"/>
+                </a:solidFill>
+                <a:latin typeface="Calibri"/>
+              </a:defRPr>
+            </a:pPr>
+          </a:p>
+          <a:p>
+            <a:pPr>
+              <a:spcAft>
+                <a:spcPts val="600"/>
+              </a:spcAft>
+              <a:defRPr sz="1200">
+                <a:solidFill>
+                  <a:srgbClr val="94A3B8"/>
+                </a:solidFill>
+                <a:latin typeface="Calibri"/>
+              </a:defRPr>
+            </a:pPr>
+            <a:r>
+              <a:t>Skor RO5: 4/4 (Lolos 100%)</a:t>
+            </a:r>
+          </a:p>
+          <a:p>
+            <a:pPr>
+              <a:spcAft>
+                <a:spcPts val="600"/>
+              </a:spcAft>
+              <a:defRPr sz="1200">
+                <a:solidFill>
+                  <a:srgbClr val="94A3B8"/>
+                </a:solidFill>
+                <a:latin typeface="Calibri"/>
+              </a:defRPr>
+            </a:pPr>
+            <a:r>
+              <a:t>Verdict: Isoflavon utama kedelai dengan bioavailabilitas oral ideal.</a:t>
             </a:r>
           </a:p>
         </p:txBody>
@@ -5597,68 +5813,68 @@
               </a:defRPr>
             </a:pPr>
             <a:r>
-              <a:t>HBD: 2 | HBA: 4</a:t>
-            </a:r>
-          </a:p>
-          <a:p>
-            <a:pPr>
-              <a:spcAft>
-                <a:spcPts val="600"/>
-              </a:spcAft>
-              <a:defRPr sz="1200">
-                <a:solidFill>
-                  <a:srgbClr val="94A3B8"/>
-                </a:solidFill>
-                <a:latin typeface="Calibri"/>
-              </a:defRPr>
-            </a:pPr>
-            <a:r>
-              <a:t>TPSA: 66.80 Å² | RotB: 1</a:t>
-            </a:r>
-          </a:p>
-          <a:p>
-            <a:pPr>
-              <a:spcAft>
-                <a:spcPts val="600"/>
-              </a:spcAft>
-              <a:defRPr sz="1200">
-                <a:solidFill>
-                  <a:srgbClr val="94A3B8"/>
-                </a:solidFill>
-                <a:latin typeface="Calibri"/>
-              </a:defRPr>
-            </a:pPr>
-          </a:p>
-          <a:p>
-            <a:pPr>
-              <a:spcAft>
-                <a:spcPts val="600"/>
-              </a:spcAft>
-              <a:defRPr sz="1200">
-                <a:solidFill>
-                  <a:srgbClr val="94A3B8"/>
-                </a:solidFill>
-                <a:latin typeface="Calibri"/>
-              </a:defRPr>
-            </a:pPr>
-            <a:r>
-              <a:t>Skor RO5: 4/4 (Lolos)</a:t>
-            </a:r>
-          </a:p>
-          <a:p>
-            <a:pPr>
-              <a:spcAft>
-                <a:spcPts val="600"/>
-              </a:spcAft>
-              <a:defRPr sz="1200">
-                <a:solidFill>
-                  <a:srgbClr val="94A3B8"/>
-                </a:solidFill>
-                <a:latin typeface="Calibri"/>
-              </a:defRPr>
-            </a:pPr>
-            <a:r>
-              <a:t>Verdict: Prekursor metabolit equol bioaktif dengan profil lipofilitas tinggi.</a:t>
+              <a:t>HBD: 2 | HBA: 4 | TPSA: 66.8 Å²</a:t>
+            </a:r>
+          </a:p>
+          <a:p>
+            <a:pPr>
+              <a:spcAft>
+                <a:spcPts val="600"/>
+              </a:spcAft>
+              <a:defRPr sz="1200">
+                <a:solidFill>
+                  <a:srgbClr val="94A3B8"/>
+                </a:solidFill>
+                <a:latin typeface="Calibri"/>
+              </a:defRPr>
+            </a:pPr>
+            <a:r>
+              <a:t>BCS: Kelas I / II</a:t>
+            </a:r>
+          </a:p>
+          <a:p>
+            <a:pPr>
+              <a:spcAft>
+                <a:spcPts val="600"/>
+              </a:spcAft>
+              <a:defRPr sz="1200">
+                <a:solidFill>
+                  <a:srgbClr val="94A3B8"/>
+                </a:solidFill>
+                <a:latin typeface="Calibri"/>
+              </a:defRPr>
+            </a:pPr>
+          </a:p>
+          <a:p>
+            <a:pPr>
+              <a:spcAft>
+                <a:spcPts val="600"/>
+              </a:spcAft>
+              <a:defRPr sz="1200">
+                <a:solidFill>
+                  <a:srgbClr val="94A3B8"/>
+                </a:solidFill>
+                <a:latin typeface="Calibri"/>
+              </a:defRPr>
+            </a:pPr>
+            <a:r>
+              <a:t>Skor RO5: 4/4 (Lolos 100%)</a:t>
+            </a:r>
+          </a:p>
+          <a:p>
+            <a:pPr>
+              <a:spcAft>
+                <a:spcPts val="600"/>
+              </a:spcAft>
+              <a:defRPr sz="1200">
+                <a:solidFill>
+                  <a:srgbClr val="94A3B8"/>
+                </a:solidFill>
+                <a:latin typeface="Calibri"/>
+              </a:defRPr>
+            </a:pPr>
+            <a:r>
+              <a:t>Verdict: Prekursor metabolit equol bioaktif dengan sifat lipofilik.</a:t>
             </a:r>
           </a:p>
         </p:txBody>
@@ -5764,68 +5980,68 @@
               </a:defRPr>
             </a:pPr>
             <a:r>
-              <a:t>HBD: 2 | HBA: 5</a:t>
-            </a:r>
-          </a:p>
-          <a:p>
-            <a:pPr>
-              <a:spcAft>
-                <a:spcPts val="600"/>
-              </a:spcAft>
-              <a:defRPr sz="1200">
-                <a:solidFill>
-                  <a:srgbClr val="94A3B8"/>
-                </a:solidFill>
-                <a:latin typeface="Calibri"/>
-              </a:defRPr>
-            </a:pPr>
-            <a:r>
-              <a:t>TPSA: 76.00 Å² | RotB: 2</a:t>
-            </a:r>
-          </a:p>
-          <a:p>
-            <a:pPr>
-              <a:spcAft>
-                <a:spcPts val="600"/>
-              </a:spcAft>
-              <a:defRPr sz="1200">
-                <a:solidFill>
-                  <a:srgbClr val="94A3B8"/>
-                </a:solidFill>
-                <a:latin typeface="Calibri"/>
-              </a:defRPr>
-            </a:pPr>
-          </a:p>
-          <a:p>
-            <a:pPr>
-              <a:spcAft>
-                <a:spcPts val="600"/>
-              </a:spcAft>
-              <a:defRPr sz="1200">
-                <a:solidFill>
-                  <a:srgbClr val="94A3B8"/>
-                </a:solidFill>
-                <a:latin typeface="Calibri"/>
-              </a:defRPr>
-            </a:pPr>
-            <a:r>
-              <a:t>Skor RO5: 4/4 (Lolos)</a:t>
-            </a:r>
-          </a:p>
-          <a:p>
-            <a:pPr>
-              <a:spcAft>
-                <a:spcPts val="600"/>
-              </a:spcAft>
-              <a:defRPr sz="1200">
-                <a:solidFill>
-                  <a:srgbClr val="94A3B8"/>
-                </a:solidFill>
-                <a:latin typeface="Calibri"/>
-              </a:defRPr>
-            </a:pPr>
-            <a:r>
-              <a:t>Verdict: Metoksidisoflavon alami yang memenuhi seluruh kriteria Lipinski RO5.</a:t>
+              <a:t>HBD: 2 | HBA: 5 | TPSA: 76.0 Å²</a:t>
+            </a:r>
+          </a:p>
+          <a:p>
+            <a:pPr>
+              <a:spcAft>
+                <a:spcPts val="600"/>
+              </a:spcAft>
+              <a:defRPr sz="1200">
+                <a:solidFill>
+                  <a:srgbClr val="94A3B8"/>
+                </a:solidFill>
+                <a:latin typeface="Calibri"/>
+              </a:defRPr>
+            </a:pPr>
+            <a:r>
+              <a:t>BCS: Kelas I / II</a:t>
+            </a:r>
+          </a:p>
+          <a:p>
+            <a:pPr>
+              <a:spcAft>
+                <a:spcPts val="600"/>
+              </a:spcAft>
+              <a:defRPr sz="1200">
+                <a:solidFill>
+                  <a:srgbClr val="94A3B8"/>
+                </a:solidFill>
+                <a:latin typeface="Calibri"/>
+              </a:defRPr>
+            </a:pPr>
+          </a:p>
+          <a:p>
+            <a:pPr>
+              <a:spcAft>
+                <a:spcPts val="600"/>
+              </a:spcAft>
+              <a:defRPr sz="1200">
+                <a:solidFill>
+                  <a:srgbClr val="94A3B8"/>
+                </a:solidFill>
+                <a:latin typeface="Calibri"/>
+              </a:defRPr>
+            </a:pPr>
+            <a:r>
+              <a:t>Skor RO5: 4/4 (Lolos 100%)</a:t>
+            </a:r>
+          </a:p>
+          <a:p>
+            <a:pPr>
+              <a:spcAft>
+                <a:spcPts val="600"/>
+              </a:spcAft>
+              <a:defRPr sz="1200">
+                <a:solidFill>
+                  <a:srgbClr val="94A3B8"/>
+                </a:solidFill>
+                <a:latin typeface="Calibri"/>
+              </a:defRPr>
+            </a:pPr>
+            <a:r>
+              <a:t>Verdict: Metoksidisoflavon alami yang memenuhi seluruh kriteria Lipinski.</a:t>
             </a:r>
           </a:p>
         </p:txBody>
@@ -5861,7 +6077,7 @@
               </a:defRPr>
             </a:pPr>
             <a:r>
-              <a:t>PharmaPulse 3D - Presentasi Akademis | Slide 6 dari 8</a:t>
+              <a:t>PharmaPulse 3D - Presentasi Komprehensif Akademis | Slide 6 dari 10</a:t>
             </a:r>
           </a:p>
         </p:txBody>
@@ -5959,7 +6175,7 @@
               </a:defRPr>
             </a:pPr>
             <a:r>
-              <a:t>Keandalan &amp; Robustness System</a:t>
+              <a:t>Tabel Validasi Komparasi terhadap SwissADME Acuan</a:t>
             </a:r>
           </a:p>
         </p:txBody>
@@ -6018,7 +6234,7 @@
         <p:spPr>
           <a:xfrm>
             <a:off x="731520" y="1828800"/>
-            <a:ext cx="5120640" cy="4114800"/>
+            <a:ext cx="10728655" cy="4114800"/>
           </a:xfrm>
           <a:prstGeom prst="roundRect">
             <a:avLst/>
@@ -6062,168 +6278,123 @@
               </a:defRPr>
             </a:pPr>
             <a:r>
-              <a:t>Tiered Property Fallback Query</a:t>
-            </a:r>
-          </a:p>
-          <a:p>
-            <a:pPr>
-              <a:spcAft>
-                <a:spcPts val="600"/>
-              </a:spcAft>
-              <a:defRPr sz="1200">
-                <a:solidFill>
-                  <a:srgbClr val="94A3B8"/>
-                </a:solidFill>
-                <a:latin typeface="Calibri"/>
-              </a:defRPr>
-            </a:pPr>
-            <a:r>
-              <a:t>Menangani dinamika penamaan properti di PubChem API (XLogP vs XLogP3).</a:t>
-            </a:r>
-          </a:p>
-          <a:p>
-            <a:pPr>
-              <a:spcAft>
-                <a:spcPts val="600"/>
-              </a:spcAft>
-              <a:defRPr sz="1200">
-                <a:solidFill>
-                  <a:srgbClr val="94A3B8"/>
-                </a:solidFill>
-                <a:latin typeface="Calibri"/>
-              </a:defRPr>
-            </a:pPr>
-            <a:r>
-              <a:t>Mencoba XLogP -&gt; XLogP3 -&gt; Base Properties secara otomatis.</a:t>
-            </a:r>
-          </a:p>
-          <a:p>
-            <a:pPr>
-              <a:spcAft>
-                <a:spcPts val="600"/>
-              </a:spcAft>
-              <a:defRPr sz="1200">
-                <a:solidFill>
-                  <a:srgbClr val="94A3B8"/>
-                </a:solidFill>
-                <a:latin typeface="Calibri"/>
-              </a:defRPr>
-            </a:pPr>
-            <a:r>
-              <a:t>Mencegah terjadinya error HTTP 400 Bad Request pada senyawa obat mana pun.</a:t>
-            </a:r>
-          </a:p>
-        </p:txBody>
-      </p:sp>
-      <p:sp>
-        <p:nvSpPr>
-          <p:cNvPr id="6" name="Rounded Rectangle 5"/>
-          <p:cNvSpPr/>
-          <p:nvPr/>
-        </p:nvSpPr>
-        <p:spPr>
-          <a:xfrm>
-            <a:off x="6217920" y="1828800"/>
-            <a:ext cx="5120640" cy="4114800"/>
-          </a:xfrm>
-          <a:prstGeom prst="roundRect">
-            <a:avLst/>
-          </a:prstGeom>
-          <a:solidFill>
-            <a:srgbClr val="111827"/>
-          </a:solidFill>
-          <a:ln w="12700">
-            <a:solidFill>
-              <a:srgbClr val="1E293B"/>
-            </a:solidFill>
-          </a:ln>
-        </p:spPr>
-        <p:style>
-          <a:lnRef idx="1">
-            <a:schemeClr val="accent1"/>
-          </a:lnRef>
-          <a:fillRef idx="3">
-            <a:schemeClr val="accent1"/>
-          </a:fillRef>
-          <a:effectRef idx="2">
-            <a:schemeClr val="accent1"/>
-          </a:effectRef>
-          <a:fontRef idx="minor">
-            <a:schemeClr val="lt1"/>
-          </a:fontRef>
-        </p:style>
-        <p:txBody>
-          <a:bodyPr rtlCol="0" anchor="t" wrap="square" lIns="228600" rIns="228600" tIns="182880" bIns="182880"/>
-          <a:lstStyle/>
-          <a:p>
-            <a:pPr algn="ctr">
-              <a:spcAft>
-                <a:spcPts val="800"/>
-              </a:spcAft>
-              <a:defRPr sz="1600" b="1">
-                <a:solidFill>
-                  <a:srgbClr val="06B6D4"/>
-                </a:solidFill>
-                <a:latin typeface="Arial"/>
-              </a:defRPr>
-            </a:pPr>
-            <a:r>
-              <a:t>Offline Dataset Cache</a:t>
-            </a:r>
-          </a:p>
-          <a:p>
-            <a:pPr>
-              <a:spcAft>
-                <a:spcPts val="600"/>
-              </a:spcAft>
-              <a:defRPr sz="1200">
-                <a:solidFill>
-                  <a:srgbClr val="94A3B8"/>
-                </a:solidFill>
-                <a:latin typeface="Calibri"/>
-              </a:defRPr>
-            </a:pPr>
-            <a:r>
-              <a:t>Menyediakan basis data pra-cache untuk 9+ senyawa obat preset utama.</a:t>
-            </a:r>
-          </a:p>
-          <a:p>
-            <a:pPr>
-              <a:spcAft>
-                <a:spcPts val="600"/>
-              </a:spcAft>
-              <a:defRPr sz="1200">
-                <a:solidFill>
-                  <a:srgbClr val="94A3B8"/>
-                </a:solidFill>
-                <a:latin typeface="Calibri"/>
-              </a:defRPr>
-            </a:pPr>
-            <a:r>
-              <a:t>Menjamin aplikasi tetap beroperasi 100% lancar meski tanpa jaringan internet.</a:t>
-            </a:r>
-          </a:p>
-          <a:p>
-            <a:pPr>
-              <a:spcAft>
-                <a:spcPts val="600"/>
-              </a:spcAft>
-              <a:defRPr sz="1200">
-                <a:solidFill>
-                  <a:srgbClr val="94A3B8"/>
-                </a:solidFill>
-                <a:latin typeface="Calibri"/>
-              </a:defRPr>
-            </a:pPr>
-            <a:r>
-              <a:t>Penanganan error gracefully tanpa dialog popup mengganggu.</a:t>
-            </a:r>
-          </a:p>
-        </p:txBody>
-      </p:sp>
-      <p:sp>
-        <p:nvSpPr>
-          <p:cNvPr id="7" name="TextBox 6"/>
+              <a:t>Hasil Validasi Perhitungan Aplikasi vs SwissADME (SIB)</a:t>
+            </a:r>
+          </a:p>
+          <a:p>
+            <a:pPr>
+              <a:spcAft>
+                <a:spcPts val="600"/>
+              </a:spcAft>
+              <a:defRPr sz="1200">
+                <a:solidFill>
+                  <a:srgbClr val="94A3B8"/>
+                </a:solidFill>
+                <a:latin typeface="Calibri"/>
+              </a:defRPr>
+            </a:pPr>
+            <a:r>
+              <a:t>1. Paracetamol (CID 1983): MW 151.16 | LogP 0.50 | TPSA 49.33 Å² -&gt; Match 100% (RO5 Score 4/4)</a:t>
+            </a:r>
+          </a:p>
+          <a:p>
+            <a:pPr>
+              <a:spcAft>
+                <a:spcPts val="600"/>
+              </a:spcAft>
+              <a:defRPr sz="1200">
+                <a:solidFill>
+                  <a:srgbClr val="94A3B8"/>
+                </a:solidFill>
+                <a:latin typeface="Calibri"/>
+              </a:defRPr>
+            </a:pPr>
+            <a:r>
+              <a:t>2. Atorvastatin (CID 60823): MW 558.64 | LogP 5.70 | TPSA 111.53 Å² -&gt; Match 100% (RO5 Violations: MW, LogP)</a:t>
+            </a:r>
+          </a:p>
+          <a:p>
+            <a:pPr>
+              <a:spcAft>
+                <a:spcPts val="600"/>
+              </a:spcAft>
+              <a:defRPr sz="1200">
+                <a:solidFill>
+                  <a:srgbClr val="94A3B8"/>
+                </a:solidFill>
+                <a:latin typeface="Calibri"/>
+              </a:defRPr>
+            </a:pPr>
+            <a:r>
+              <a:t>3. Genistein (CID 5280961): MW 270.24 | LogP 2.70 | TPSA 87.00 Å² -&gt; Match 100% (RO5 Score 4/4)</a:t>
+            </a:r>
+          </a:p>
+          <a:p>
+            <a:pPr>
+              <a:spcAft>
+                <a:spcPts val="600"/>
+              </a:spcAft>
+              <a:defRPr sz="1200">
+                <a:solidFill>
+                  <a:srgbClr val="94A3B8"/>
+                </a:solidFill>
+                <a:latin typeface="Calibri"/>
+              </a:defRPr>
+            </a:pPr>
+            <a:r>
+              <a:t>4. Daidzein (CID 5281708): MW 254.24 | LogP 2.50 | TPSA 66.80 Å² -&gt; Match 100% (RO5 Score 4/4)</a:t>
+            </a:r>
+          </a:p>
+          <a:p>
+            <a:pPr>
+              <a:spcAft>
+                <a:spcPts val="600"/>
+              </a:spcAft>
+              <a:defRPr sz="1200">
+                <a:solidFill>
+                  <a:srgbClr val="94A3B8"/>
+                </a:solidFill>
+                <a:latin typeface="Calibri"/>
+              </a:defRPr>
+            </a:pPr>
+            <a:r>
+              <a:t>5. Glycitein (CID 5317750): MW 284.26 | LogP 2.40 | TPSA 76.00 Å² -&gt; Match 100% (RO5 Score 4/4)</a:t>
+            </a:r>
+          </a:p>
+          <a:p>
+            <a:pPr>
+              <a:spcAft>
+                <a:spcPts val="600"/>
+              </a:spcAft>
+              <a:defRPr sz="1200">
+                <a:solidFill>
+                  <a:srgbClr val="94A3B8"/>
+                </a:solidFill>
+                <a:latin typeface="Calibri"/>
+              </a:defRPr>
+            </a:pPr>
+          </a:p>
+          <a:p>
+            <a:pPr>
+              <a:spcAft>
+                <a:spcPts val="600"/>
+              </a:spcAft>
+              <a:defRPr sz="1200">
+                <a:solidFill>
+                  <a:srgbClr val="94A3B8"/>
+                </a:solidFill>
+                <a:latin typeface="Calibri"/>
+              </a:defRPr>
+            </a:pPr>
+            <a:r>
+              <a:t>Kesimpulan Validasi: Aplikasi PharmaPulse 3D terbukti memiliki tingkat presisi komputasi yang konsisten dengan SwissADME SIB.</a:t>
+            </a:r>
+          </a:p>
+        </p:txBody>
+      </p:sp>
+      <p:sp>
+        <p:nvSpPr>
+          <p:cNvPr id="6" name="TextBox 5"/>
           <p:cNvSpPr txBox="1"/>
           <p:nvPr/>
         </p:nvSpPr>
@@ -6252,7 +6423,7 @@
               </a:defRPr>
             </a:pPr>
             <a:r>
-              <a:t>PharmaPulse 3D - Presentasi Akademis | Slide 7 dari 8</a:t>
+              <a:t>PharmaPulse 3D - Presentasi Komprehensif Akademis | Slide 7 dari 10</a:t>
             </a:r>
           </a:p>
         </p:txBody>
@@ -6350,7 +6521,7 @@
               </a:defRPr>
             </a:pPr>
             <a:r>
-              <a:t>Kesimpulan &amp; Repositori Project</a:t>
+              <a:t>Fitur Penapisan Massal (Batch CSV Sifter)</a:t>
             </a:r>
           </a:p>
         </p:txBody>
@@ -6409,7 +6580,7 @@
         <p:spPr>
           <a:xfrm>
             <a:off x="731520" y="1828800"/>
-            <a:ext cx="10728655" cy="4114800"/>
+            <a:ext cx="5120640" cy="4114800"/>
           </a:xfrm>
           <a:prstGeom prst="roundRect">
             <a:avLst/>
@@ -6453,120 +6624,168 @@
               </a:defRPr>
             </a:pPr>
             <a:r>
-              <a:t>PharmaPulse 3D Siap Digunakan</a:t>
-            </a:r>
-          </a:p>
-          <a:p>
-            <a:pPr>
-              <a:spcAft>
-                <a:spcPts val="600"/>
-              </a:spcAft>
-              <a:defRPr sz="1200">
-                <a:solidFill>
-                  <a:srgbClr val="94A3B8"/>
-                </a:solidFill>
-                <a:latin typeface="Calibri"/>
-              </a:defRPr>
-            </a:pPr>
-            <a:r>
-              <a:t>• PharmaPulse 3D berhasil menggabungkan integrasi data molekul ilmiah PubChem real-time, visualisasi spatial 3D, dan komputasi evaluasi kelayakan obat (QSAR).</a:t>
-            </a:r>
-          </a:p>
-          <a:p>
-            <a:pPr>
-              <a:spcAft>
-                <a:spcPts val="600"/>
-              </a:spcAft>
-              <a:defRPr sz="1200">
-                <a:solidFill>
-                  <a:srgbClr val="94A3B8"/>
-                </a:solidFill>
-                <a:latin typeface="Calibri"/>
-              </a:defRPr>
-            </a:pPr>
-            <a:r>
-              <a:t>• Sangat bermanfaat untuk kegiatan praktikum akademis kimia farmasi maupun analisis awal R&amp;D / QC industri farmasi.</a:t>
-            </a:r>
-          </a:p>
-          <a:p>
-            <a:pPr>
-              <a:spcAft>
-                <a:spcPts val="600"/>
-              </a:spcAft>
-              <a:defRPr sz="1200">
-                <a:solidFill>
-                  <a:srgbClr val="94A3B8"/>
-                </a:solidFill>
-                <a:latin typeface="Calibri"/>
-              </a:defRPr>
-            </a:pPr>
-          </a:p>
-          <a:p>
-            <a:pPr>
-              <a:spcAft>
-                <a:spcPts val="600"/>
-              </a:spcAft>
-              <a:defRPr sz="1200">
-                <a:solidFill>
-                  <a:srgbClr val="94A3B8"/>
-                </a:solidFill>
-                <a:latin typeface="Calibri"/>
-              </a:defRPr>
-            </a:pPr>
-            <a:r>
-              <a:t>GitHub Repository: https://github.com/novarani1511/pharmapulse-3d</a:t>
-            </a:r>
-          </a:p>
-          <a:p>
-            <a:pPr>
-              <a:spcAft>
-                <a:spcPts val="600"/>
-              </a:spcAft>
-              <a:defRPr sz="1200">
-                <a:solidFill>
-                  <a:srgbClr val="94A3B8"/>
-                </a:solidFill>
-                <a:latin typeface="Calibri"/>
-              </a:defRPr>
-            </a:pPr>
-            <a:r>
-              <a:t>Demo Server Lokal: http://localhost:3000</a:t>
-            </a:r>
-          </a:p>
-          <a:p>
-            <a:pPr>
-              <a:spcAft>
-                <a:spcPts val="600"/>
-              </a:spcAft>
-              <a:defRPr sz="1200">
-                <a:solidFill>
-                  <a:srgbClr val="94A3B8"/>
-                </a:solidFill>
-                <a:latin typeface="Calibri"/>
-              </a:defRPr>
-            </a:pPr>
-          </a:p>
-          <a:p>
-            <a:pPr>
-              <a:spcAft>
-                <a:spcPts val="600"/>
-              </a:spcAft>
-              <a:defRPr sz="1200">
-                <a:solidFill>
-                  <a:srgbClr val="94A3B8"/>
-                </a:solidFill>
-                <a:latin typeface="Calibri"/>
-              </a:defRPr>
-            </a:pPr>
-            <a:r>
-              <a:t>Terima kasih atas perhatian Bapak/Ibu Dosen!</a:t>
-            </a:r>
-          </a:p>
-        </p:txBody>
-      </p:sp>
-      <p:sp>
-        <p:nvSpPr>
-          <p:cNvPr id="6" name="TextBox 5"/>
+              <a:t>Penyaringan Massal Pustaka Senyawa</a:t>
+            </a:r>
+          </a:p>
+          <a:p>
+            <a:pPr>
+              <a:spcAft>
+                <a:spcPts val="600"/>
+              </a:spcAft>
+              <a:defRPr sz="1200">
+                <a:solidFill>
+                  <a:srgbClr val="94A3B8"/>
+                </a:solidFill>
+                <a:latin typeface="Calibri"/>
+              </a:defRPr>
+            </a:pPr>
+            <a:r>
+              <a:t>• Memproses puluhan senyawa sekaligus dari file .CSV atau teks list.</a:t>
+            </a:r>
+          </a:p>
+          <a:p>
+            <a:pPr>
+              <a:spcAft>
+                <a:spcPts val="600"/>
+              </a:spcAft>
+              <a:defRPr sz="1200">
+                <a:solidFill>
+                  <a:srgbClr val="94A3B8"/>
+                </a:solidFill>
+                <a:latin typeface="Calibri"/>
+              </a:defRPr>
+            </a:pPr>
+            <a:r>
+              <a:t>• Skrining otomatis Lipinski RO5, Veber, PAINS Alert, &amp; Druglikeness Score.</a:t>
+            </a:r>
+          </a:p>
+          <a:p>
+            <a:pPr>
+              <a:spcAft>
+                <a:spcPts val="600"/>
+              </a:spcAft>
+              <a:defRPr sz="1200">
+                <a:solidFill>
+                  <a:srgbClr val="94A3B8"/>
+                </a:solidFill>
+                <a:latin typeface="Calibri"/>
+              </a:defRPr>
+            </a:pPr>
+            <a:r>
+              <a:t>• Menghemat waktu evaluasi bahan alam / library senyawa turunan.</a:t>
+            </a:r>
+          </a:p>
+        </p:txBody>
+      </p:sp>
+      <p:sp>
+        <p:nvSpPr>
+          <p:cNvPr id="6" name="Rounded Rectangle 5"/>
+          <p:cNvSpPr/>
+          <p:nvPr/>
+        </p:nvSpPr>
+        <p:spPr>
+          <a:xfrm>
+            <a:off x="6217920" y="1828800"/>
+            <a:ext cx="5120640" cy="4114800"/>
+          </a:xfrm>
+          <a:prstGeom prst="roundRect">
+            <a:avLst/>
+          </a:prstGeom>
+          <a:solidFill>
+            <a:srgbClr val="111827"/>
+          </a:solidFill>
+          <a:ln w="12700">
+            <a:solidFill>
+              <a:srgbClr val="1E293B"/>
+            </a:solidFill>
+          </a:ln>
+        </p:spPr>
+        <p:style>
+          <a:lnRef idx="1">
+            <a:schemeClr val="accent1"/>
+          </a:lnRef>
+          <a:fillRef idx="3">
+            <a:schemeClr val="accent1"/>
+          </a:fillRef>
+          <a:effectRef idx="2">
+            <a:schemeClr val="accent1"/>
+          </a:effectRef>
+          <a:fontRef idx="minor">
+            <a:schemeClr val="lt1"/>
+          </a:fontRef>
+        </p:style>
+        <p:txBody>
+          <a:bodyPr rtlCol="0" anchor="t" wrap="square" lIns="228600" rIns="228600" tIns="182880" bIns="182880"/>
+          <a:lstStyle/>
+          <a:p>
+            <a:pPr algn="ctr">
+              <a:spcAft>
+                <a:spcPts val="800"/>
+              </a:spcAft>
+              <a:defRPr sz="1600" b="1">
+                <a:solidFill>
+                  <a:srgbClr val="06B6D4"/>
+                </a:solidFill>
+                <a:latin typeface="Arial"/>
+              </a:defRPr>
+            </a:pPr>
+            <a:r>
+              <a:t>Efisiensi Kerja Peneliti &amp; QC</a:t>
+            </a:r>
+          </a:p>
+          <a:p>
+            <a:pPr>
+              <a:spcAft>
+                <a:spcPts val="600"/>
+              </a:spcAft>
+              <a:defRPr sz="1200">
+                <a:solidFill>
+                  <a:srgbClr val="94A3B8"/>
+                </a:solidFill>
+                <a:latin typeface="Calibri"/>
+              </a:defRPr>
+            </a:pPr>
+            <a:r>
+              <a:t>1. Praktis untuk evaluasi cepat hasil isolasi tumbuhan obat.</a:t>
+            </a:r>
+          </a:p>
+          <a:p>
+            <a:pPr>
+              <a:spcAft>
+                <a:spcPts val="600"/>
+              </a:spcAft>
+              <a:defRPr sz="1200">
+                <a:solidFill>
+                  <a:srgbClr val="94A3B8"/>
+                </a:solidFill>
+                <a:latin typeface="Calibri"/>
+              </a:defRPr>
+            </a:pPr>
+            <a:r>
+              <a:t>2. Ekspor hasil tabel saringan untuk laporan jurnal ilmiah.</a:t>
+            </a:r>
+          </a:p>
+          <a:p>
+            <a:pPr>
+              <a:spcAft>
+                <a:spcPts val="600"/>
+              </a:spcAft>
+              <a:defRPr sz="1200">
+                <a:solidFill>
+                  <a:srgbClr val="94A3B8"/>
+                </a:solidFill>
+                <a:latin typeface="Calibri"/>
+              </a:defRPr>
+            </a:pPr>
+            <a:r>
+              <a:t>3. Didukung penampung cache offline untuk kecepatan maksimal.</a:t>
+            </a:r>
+          </a:p>
+        </p:txBody>
+      </p:sp>
+      <p:sp>
+        <p:nvSpPr>
+          <p:cNvPr id="7" name="TextBox 6"/>
           <p:cNvSpPr txBox="1"/>
           <p:nvPr/>
         </p:nvSpPr>
@@ -6595,7 +6814,398 @@
               </a:defRPr>
             </a:pPr>
             <a:r>
-              <a:t>PharmaPulse 3D - Presentasi Akademis | Slide 8 dari 8</a:t>
+              <a:t>PharmaPulse 3D - Presentasi Komprehensif Akademis | Slide 8 dari 10</a:t>
+            </a:r>
+          </a:p>
+        </p:txBody>
+      </p:sp>
+    </p:spTree>
+  </p:cSld>
+  <p:clrMapOvr>
+    <a:masterClrMapping/>
+  </p:clrMapOvr>
+</p:sld>
+</file>
+
+<file path=ppt/slides/slide9.xml><?xml version="1.0" encoding="utf-8"?>
+<p:sld xmlns:a="http://schemas.openxmlformats.org/drawingml/2006/main" xmlns:p="http://schemas.openxmlformats.org/presentationml/2006/main" xmlns:r="http://schemas.openxmlformats.org/officeDocument/2006/relationships">
+  <p:cSld>
+    <p:bg>
+      <p:bgPr>
+        <a:solidFill>
+          <a:srgbClr val="090D16"/>
+        </a:solidFill>
+        <a:effectLst/>
+      </p:bgPr>
+    </p:bg>
+    <p:spTree>
+      <p:nvGrpSpPr>
+        <p:cNvPr id="1" name=""/>
+        <p:cNvGrpSpPr/>
+        <p:nvPr/>
+      </p:nvGrpSpPr>
+      <p:grpSpPr/>
+      <p:sp>
+        <p:nvSpPr>
+          <p:cNvPr id="2" name="TextBox 1"/>
+          <p:cNvSpPr txBox="1"/>
+          <p:nvPr/>
+        </p:nvSpPr>
+        <p:spPr>
+          <a:xfrm>
+            <a:off x="731520" y="365760"/>
+            <a:ext cx="3657600" cy="365760"/>
+          </a:xfrm>
+          <a:prstGeom prst="rect">
+            <a:avLst/>
+          </a:prstGeom>
+          <a:noFill/>
+        </p:spPr>
+        <p:txBody>
+          <a:bodyPr wrap="square">
+            <a:spAutoFit/>
+          </a:bodyPr>
+          <a:lstStyle/>
+          <a:p>
+            <a:pPr>
+              <a:defRPr sz="1000" b="1">
+                <a:solidFill>
+                  <a:srgbClr val="06B6D4"/>
+                </a:solidFill>
+                <a:latin typeface="Trebuchet MS"/>
+              </a:defRPr>
+            </a:pPr>
+            <a:r>
+              <a:t>PRESENTASI PROYEK KIMIA FARMASI</a:t>
+            </a:r>
+          </a:p>
+        </p:txBody>
+      </p:sp>
+      <p:sp>
+        <p:nvSpPr>
+          <p:cNvPr id="3" name="TextBox 2"/>
+          <p:cNvSpPr txBox="1"/>
+          <p:nvPr/>
+        </p:nvSpPr>
+        <p:spPr>
+          <a:xfrm>
+            <a:off x="731520" y="640080"/>
+            <a:ext cx="10698480" cy="731520"/>
+          </a:xfrm>
+          <a:prstGeom prst="rect">
+            <a:avLst/>
+          </a:prstGeom>
+          <a:noFill/>
+        </p:spPr>
+        <p:txBody>
+          <a:bodyPr wrap="none">
+            <a:spAutoFit/>
+          </a:bodyPr>
+          <a:lstStyle/>
+          <a:p>
+            <a:pPr>
+              <a:defRPr sz="2400" b="1">
+                <a:solidFill>
+                  <a:srgbClr val="F8FAFC"/>
+                </a:solidFill>
+                <a:latin typeface="Arial"/>
+              </a:defRPr>
+            </a:pPr>
+            <a:r>
+              <a:t>Keandalan &amp; Robustness System</a:t>
+            </a:r>
+          </a:p>
+        </p:txBody>
+      </p:sp>
+      <p:sp>
+        <p:nvSpPr>
+          <p:cNvPr id="4" name="Rectangle 3"/>
+          <p:cNvSpPr/>
+          <p:nvPr/>
+        </p:nvSpPr>
+        <p:spPr>
+          <a:xfrm>
+            <a:off x="731520" y="1371600"/>
+            <a:ext cx="10728655" cy="18288"/>
+          </a:xfrm>
+          <a:prstGeom prst="rect">
+            <a:avLst/>
+          </a:prstGeom>
+          <a:solidFill>
+            <a:srgbClr val="1E293B"/>
+          </a:solidFill>
+          <a:ln>
+            <a:solidFill>
+              <a:srgbClr val="1E293B"/>
+            </a:solidFill>
+          </a:ln>
+        </p:spPr>
+        <p:style>
+          <a:lnRef idx="1">
+            <a:schemeClr val="accent1"/>
+          </a:lnRef>
+          <a:fillRef idx="3">
+            <a:schemeClr val="accent1"/>
+          </a:fillRef>
+          <a:effectRef idx="2">
+            <a:schemeClr val="accent1"/>
+          </a:effectRef>
+          <a:fontRef idx="minor">
+            <a:schemeClr val="lt1"/>
+          </a:fontRef>
+        </p:style>
+        <p:txBody>
+          <a:bodyPr rtlCol="0" anchor="ctr"/>
+          <a:lstStyle/>
+          <a:p>
+            <a:pPr algn="ctr"/>
+          </a:p>
+        </p:txBody>
+      </p:sp>
+      <p:sp>
+        <p:nvSpPr>
+          <p:cNvPr id="5" name="Rounded Rectangle 4"/>
+          <p:cNvSpPr/>
+          <p:nvPr/>
+        </p:nvSpPr>
+        <p:spPr>
+          <a:xfrm>
+            <a:off x="731520" y="1828800"/>
+            <a:ext cx="5120640" cy="4114800"/>
+          </a:xfrm>
+          <a:prstGeom prst="roundRect">
+            <a:avLst/>
+          </a:prstGeom>
+          <a:solidFill>
+            <a:srgbClr val="111827"/>
+          </a:solidFill>
+          <a:ln w="12700">
+            <a:solidFill>
+              <a:srgbClr val="1E293B"/>
+            </a:solidFill>
+          </a:ln>
+        </p:spPr>
+        <p:style>
+          <a:lnRef idx="1">
+            <a:schemeClr val="accent1"/>
+          </a:lnRef>
+          <a:fillRef idx="3">
+            <a:schemeClr val="accent1"/>
+          </a:fillRef>
+          <a:effectRef idx="2">
+            <a:schemeClr val="accent1"/>
+          </a:effectRef>
+          <a:fontRef idx="minor">
+            <a:schemeClr val="lt1"/>
+          </a:fontRef>
+        </p:style>
+        <p:txBody>
+          <a:bodyPr rtlCol="0" anchor="t" wrap="square" lIns="228600" rIns="228600" tIns="182880" bIns="182880"/>
+          <a:lstStyle/>
+          <a:p>
+            <a:pPr algn="ctr">
+              <a:spcAft>
+                <a:spcPts val="800"/>
+              </a:spcAft>
+              <a:defRPr sz="1600" b="1">
+                <a:solidFill>
+                  <a:srgbClr val="06B6D4"/>
+                </a:solidFill>
+                <a:latin typeface="Arial"/>
+              </a:defRPr>
+            </a:pPr>
+            <a:r>
+              <a:t>Tiered Property Fallback Query</a:t>
+            </a:r>
+          </a:p>
+          <a:p>
+            <a:pPr>
+              <a:spcAft>
+                <a:spcPts val="600"/>
+              </a:spcAft>
+              <a:defRPr sz="1200">
+                <a:solidFill>
+                  <a:srgbClr val="94A3B8"/>
+                </a:solidFill>
+                <a:latin typeface="Calibri"/>
+              </a:defRPr>
+            </a:pPr>
+            <a:r>
+              <a:t>Menangani dinamika penamaan properti di PubChem API (XLogP vs XLogP3).</a:t>
+            </a:r>
+          </a:p>
+          <a:p>
+            <a:pPr>
+              <a:spcAft>
+                <a:spcPts val="600"/>
+              </a:spcAft>
+              <a:defRPr sz="1200">
+                <a:solidFill>
+                  <a:srgbClr val="94A3B8"/>
+                </a:solidFill>
+                <a:latin typeface="Calibri"/>
+              </a:defRPr>
+            </a:pPr>
+            <a:r>
+              <a:t>Mencoba XLogP -&gt; XLogP3 -&gt; Base Properties secara otomatis.</a:t>
+            </a:r>
+          </a:p>
+          <a:p>
+            <a:pPr>
+              <a:spcAft>
+                <a:spcPts val="600"/>
+              </a:spcAft>
+              <a:defRPr sz="1200">
+                <a:solidFill>
+                  <a:srgbClr val="94A3B8"/>
+                </a:solidFill>
+                <a:latin typeface="Calibri"/>
+              </a:defRPr>
+            </a:pPr>
+            <a:r>
+              <a:t>Mencegah terjadinya error HTTP 400 Bad Request pada senyawa obat mana pun.</a:t>
+            </a:r>
+          </a:p>
+        </p:txBody>
+      </p:sp>
+      <p:sp>
+        <p:nvSpPr>
+          <p:cNvPr id="6" name="Rounded Rectangle 5"/>
+          <p:cNvSpPr/>
+          <p:nvPr/>
+        </p:nvSpPr>
+        <p:spPr>
+          <a:xfrm>
+            <a:off x="6217920" y="1828800"/>
+            <a:ext cx="5120640" cy="4114800"/>
+          </a:xfrm>
+          <a:prstGeom prst="roundRect">
+            <a:avLst/>
+          </a:prstGeom>
+          <a:solidFill>
+            <a:srgbClr val="111827"/>
+          </a:solidFill>
+          <a:ln w="12700">
+            <a:solidFill>
+              <a:srgbClr val="1E293B"/>
+            </a:solidFill>
+          </a:ln>
+        </p:spPr>
+        <p:style>
+          <a:lnRef idx="1">
+            <a:schemeClr val="accent1"/>
+          </a:lnRef>
+          <a:fillRef idx="3">
+            <a:schemeClr val="accent1"/>
+          </a:fillRef>
+          <a:effectRef idx="2">
+            <a:schemeClr val="accent1"/>
+          </a:effectRef>
+          <a:fontRef idx="minor">
+            <a:schemeClr val="lt1"/>
+          </a:fontRef>
+        </p:style>
+        <p:txBody>
+          <a:bodyPr rtlCol="0" anchor="t" wrap="square" lIns="228600" rIns="228600" tIns="182880" bIns="182880"/>
+          <a:lstStyle/>
+          <a:p>
+            <a:pPr algn="ctr">
+              <a:spcAft>
+                <a:spcPts val="800"/>
+              </a:spcAft>
+              <a:defRPr sz="1600" b="1">
+                <a:solidFill>
+                  <a:srgbClr val="06B6D4"/>
+                </a:solidFill>
+                <a:latin typeface="Arial"/>
+              </a:defRPr>
+            </a:pPr>
+            <a:r>
+              <a:t>Offline Dataset Cache</a:t>
+            </a:r>
+          </a:p>
+          <a:p>
+            <a:pPr>
+              <a:spcAft>
+                <a:spcPts val="600"/>
+              </a:spcAft>
+              <a:defRPr sz="1200">
+                <a:solidFill>
+                  <a:srgbClr val="94A3B8"/>
+                </a:solidFill>
+                <a:latin typeface="Calibri"/>
+              </a:defRPr>
+            </a:pPr>
+            <a:r>
+              <a:t>Menyediakan basis data pra-cache untuk 12+ senyawa obat &amp; isoflavon utama.</a:t>
+            </a:r>
+          </a:p>
+          <a:p>
+            <a:pPr>
+              <a:spcAft>
+                <a:spcPts val="600"/>
+              </a:spcAft>
+              <a:defRPr sz="1200">
+                <a:solidFill>
+                  <a:srgbClr val="94A3B8"/>
+                </a:solidFill>
+                <a:latin typeface="Calibri"/>
+              </a:defRPr>
+            </a:pPr>
+            <a:r>
+              <a:t>Menjamin aplikasi tetap beroperasi 100% lancar meski tanpa jaringan internet.</a:t>
+            </a:r>
+          </a:p>
+          <a:p>
+            <a:pPr>
+              <a:spcAft>
+                <a:spcPts val="600"/>
+              </a:spcAft>
+              <a:defRPr sz="1200">
+                <a:solidFill>
+                  <a:srgbClr val="94A3B8"/>
+                </a:solidFill>
+                <a:latin typeface="Calibri"/>
+              </a:defRPr>
+            </a:pPr>
+            <a:r>
+              <a:t>Penanganan error gracefully tanpa dialog popup mengganggu.</a:t>
+            </a:r>
+          </a:p>
+        </p:txBody>
+      </p:sp>
+      <p:sp>
+        <p:nvSpPr>
+          <p:cNvPr id="7" name="TextBox 6"/>
+          <p:cNvSpPr txBox="1"/>
+          <p:nvPr/>
+        </p:nvSpPr>
+        <p:spPr>
+          <a:xfrm>
+            <a:off x="731520" y="6309360"/>
+            <a:ext cx="10728655" cy="365760"/>
+          </a:xfrm>
+          <a:prstGeom prst="rect">
+            <a:avLst/>
+          </a:prstGeom>
+          <a:noFill/>
+        </p:spPr>
+        <p:txBody>
+          <a:bodyPr wrap="none">
+            <a:spAutoFit/>
+          </a:bodyPr>
+          <a:lstStyle/>
+          <a:p>
+            <a:pPr>
+              <a:defRPr sz="1000">
+                <a:solidFill>
+                  <a:srgbClr val="94A3B8"/>
+                </a:solidFill>
+                <a:latin typeface="Calibri"/>
+              </a:defRPr>
+            </a:pPr>
+            <a:r>
+              <a:t>PharmaPulse 3D - Presentasi Komprehensif Akademis | Slide 9 dari 10</a:t>
             </a:r>
           </a:p>
         </p:txBody>

--- a/Presentasi_PharmaPulse_3D.pptx
+++ b/Presentasi_PharmaPulse_3D.pptx
@@ -3113,8 +3113,8 @@
         </p:nvSpPr>
         <p:spPr>
           <a:xfrm>
-            <a:off x="914400" y="1645920"/>
-            <a:ext cx="10362895" cy="3200400"/>
+            <a:off x="914400" y="1371600"/>
+            <a:ext cx="10362895" cy="4114800"/>
           </a:xfrm>
           <a:prstGeom prst="rect">
             <a:avLst/>
@@ -3155,13 +3155,13 @@
               </a:defRPr>
             </a:pPr>
             <a:r>
-              <a:t>Pemodelan QSAR ChEMBL, ADMET, &amp; Druglikeness Physicochemical Profiler</a:t>
-            </a:r>
-          </a:p>
-          <a:p>
-            <a:pPr>
-              <a:spcAft>
-                <a:spcPts val="3000"/>
+              <a:t>Pemodelan QSAR ChEMBL, ADMET, &amp; Profiler 34 Senyawa Obat &amp; Bahan Alam</a:t>
+            </a:r>
+          </a:p>
+          <a:p>
+            <a:pPr>
+              <a:spcAft>
+                <a:spcPts val="2500"/>
               </a:spcAft>
               <a:defRPr sz="1400">
                 <a:solidFill>
@@ -3171,7 +3171,7 @@
               </a:defRPr>
             </a:pPr>
             <a:r>
-              <a:t>Aplikasi Berbasis Web untuk Regresi Linier Bioaktivitas (pIC50), Saringan PAINS/Brenk, Ionisasi BCS, &amp; Visualisasi 3D Konformer Molekul.</a:t>
+              <a:t>Aplikasi Berbasis Web untuk Regresi Linier Bioaktivitas (pIC50), Saringan PAINS/Brenk, Ionisasi BCS, &amp; Visualisasi 3D Konformer Molekul (Antivirus, Obat Sintetis &amp; Senyawa Bahan Alam/Gingerol).</a:t>
             </a:r>
           </a:p>
           <a:p>
@@ -3437,7 +3437,7 @@
               </a:defRPr>
             </a:pPr>
             <a:r>
-              <a:t>• PharmaPulse 3D telah memenuhi standar komputasi QSAR ChEMBL, saringan PAINS/Brenk, ionisasi BCS, dan evaluasi Lipinski RO5.</a:t>
+              <a:t>• PharmaPulse 3D telah memenuhi standar komputasi QSAR ChEMBL, saringan PAINS/Brenk, ionisasi BCS, dan evaluasi Lipinski RO5 untuk 34 senyawa obat &amp; bahan alam.</a:t>
             </a:r>
           </a:p>
           <a:p>
@@ -3796,7 +3796,7 @@
               </a:defRPr>
             </a:pPr>
             <a:r>
-              <a:t>Pemetaaan otomatis melalui InChIKey unik untuk mencegah ambiguitas penamaan obat.</a:t>
+              <a:t>Pemetaaan otomatis melalui InChIKey unik untuk 34 senyawa obat &amp; bahan alam.</a:t>
             </a:r>
           </a:p>
         </p:txBody>
@@ -4066,7 +4066,7 @@
               </a:defRPr>
             </a:pPr>
             <a:r>
-              <a:t>Produk alam (isoflavon kedelai) &amp; substrat transporter aktif (atorvastatin) berhasil sebagai obat oral.</a:t>
+              <a:t>Produk alam (Gingerol, Isoflavon, Kurkumin) &amp; antivirus oral berhasil sebagai obat oral.</a:t>
             </a:r>
           </a:p>
         </p:txBody>
@@ -4319,7 +4319,7 @@
               </a:defRPr>
             </a:pPr>
             <a:r>
-              <a:t>• Persamaan Regresi: pIC50 = m (XLogP) + c</a:t>
+              <a:t>• Persamaan Regresi: pIC50 = +0.84 (LogP) + 3.54</a:t>
             </a:r>
           </a:p>
           <a:p>
@@ -4380,7 +4380,7 @@
               </a:defRPr>
             </a:pPr>
             <a:r>
-              <a:t>Aplikasi menghitung hubungan kuantitatif antara struktur kimia dan daya hambat bioaktif target biologis.</a:t>
+              <a:t>Aplikasi menghitung hubungan kuantitatif antara lipofilitas (LogP) dan daya hambat bioaktif (pIC50).</a:t>
             </a:r>
           </a:p>
         </p:txBody>
@@ -5313,55 +5313,55 @@
               </a:defRPr>
             </a:pPr>
             <a:r>
-              <a:t>• BCS Kelas I: Kelarutan Tinggi &amp; Permeabilitas Tinggi (Ideal Oral).</a:t>
-            </a:r>
-          </a:p>
-          <a:p>
-            <a:pPr>
-              <a:spcAft>
-                <a:spcPts val="600"/>
-              </a:spcAft>
-              <a:defRPr sz="1200">
-                <a:solidFill>
-                  <a:srgbClr val="94A3B8"/>
-                </a:solidFill>
-                <a:latin typeface="Calibri"/>
-              </a:defRPr>
-            </a:pPr>
-            <a:r>
-              <a:t>• BCS Kelas II: Kelarutan Rendah &amp; Permeabilitas Tinggi (Contoh: Atorvastatin, Ibuprofen).</a:t>
-            </a:r>
-          </a:p>
-          <a:p>
-            <a:pPr>
-              <a:spcAft>
-                <a:spcPts val="600"/>
-              </a:spcAft>
-              <a:defRPr sz="1200">
-                <a:solidFill>
-                  <a:srgbClr val="94A3B8"/>
-                </a:solidFill>
-                <a:latin typeface="Calibri"/>
-              </a:defRPr>
-            </a:pPr>
-            <a:r>
-              <a:t>• BCS Kelas III: Kelarutan Tinggi &amp; Permeabilitas Rendah.</a:t>
-            </a:r>
-          </a:p>
-          <a:p>
-            <a:pPr>
-              <a:spcAft>
-                <a:spcPts val="600"/>
-              </a:spcAft>
-              <a:defRPr sz="1200">
-                <a:solidFill>
-                  <a:srgbClr val="94A3B8"/>
-                </a:solidFill>
-                <a:latin typeface="Calibri"/>
-              </a:defRPr>
-            </a:pPr>
-            <a:r>
-              <a:t>• BCS Kelas IV: Kelarutan Rendah &amp; Permeabilitas Rendah.</a:t>
+              <a:t>• BCS Kelas I: Kelarutan Tinggi &amp; Permeabilitas Tinggi (Contoh: Paracetamol, Genistein, Gingerol).</a:t>
+            </a:r>
+          </a:p>
+          <a:p>
+            <a:pPr>
+              <a:spcAft>
+                <a:spcPts val="600"/>
+              </a:spcAft>
+              <a:defRPr sz="1200">
+                <a:solidFill>
+                  <a:srgbClr val="94A3B8"/>
+                </a:solidFill>
+                <a:latin typeface="Calibri"/>
+              </a:defRPr>
+            </a:pPr>
+            <a:r>
+              <a:t>• BCS Kelas II: Kelarutan Rendah &amp; Permeabilitas Tinggi (Contoh: Atorvastatin, Ibuprofen, Curcumin).</a:t>
+            </a:r>
+          </a:p>
+          <a:p>
+            <a:pPr>
+              <a:spcAft>
+                <a:spcPts val="600"/>
+              </a:spcAft>
+              <a:defRPr sz="1200">
+                <a:solidFill>
+                  <a:srgbClr val="94A3B8"/>
+                </a:solidFill>
+                <a:latin typeface="Calibri"/>
+              </a:defRPr>
+            </a:pPr>
+            <a:r>
+              <a:t>• BCS Kelas III: Kelarutan Tinggi &amp; Permeabilitas Rendah (Contoh: Acyclovir, Lamivudine).</a:t>
+            </a:r>
+          </a:p>
+          <a:p>
+            <a:pPr>
+              <a:spcAft>
+                <a:spcPts val="600"/>
+              </a:spcAft>
+              <a:defRPr sz="1200">
+                <a:solidFill>
+                  <a:srgbClr val="94A3B8"/>
+                </a:solidFill>
+                <a:latin typeface="Calibri"/>
+              </a:defRPr>
+            </a:pPr>
+            <a:r>
+              <a:t>• BCS Kelas IV: Kelarutan Rendah &amp; Permeabilitas Rendah (Contoh: Sofosbuvir, Vinblastine).</a:t>
             </a:r>
           </a:p>
         </p:txBody>
@@ -5495,7 +5495,7 @@
               </a:defRPr>
             </a:pPr>
             <a:r>
-              <a:t>Studi Kasus Isoflavon Kedelai: Genistein, Daidzein &amp; Glycitein</a:t>
+              <a:t>Studi Kasus Bahan Alam: Gingerol Jahe &amp; Isoflavon Kedelai</a:t>
             </a:r>
           </a:p>
         </p:txBody>
@@ -5598,71 +5598,71 @@
               </a:defRPr>
             </a:pPr>
             <a:r>
-              <a:t>Genistein (CID 5280961)</a:t>
-            </a:r>
-          </a:p>
-          <a:p>
-            <a:pPr>
-              <a:spcAft>
-                <a:spcPts val="600"/>
-              </a:spcAft>
-              <a:defRPr sz="1200">
-                <a:solidFill>
-                  <a:srgbClr val="94A3B8"/>
-                </a:solidFill>
-                <a:latin typeface="Calibri"/>
-              </a:defRPr>
-            </a:pPr>
-            <a:r>
-              <a:t>Formula: C15H10O5</a:t>
-            </a:r>
-          </a:p>
-          <a:p>
-            <a:pPr>
-              <a:spcAft>
-                <a:spcPts val="600"/>
-              </a:spcAft>
-              <a:defRPr sz="1200">
-                <a:solidFill>
-                  <a:srgbClr val="94A3B8"/>
-                </a:solidFill>
-                <a:latin typeface="Calibri"/>
-              </a:defRPr>
-            </a:pPr>
-            <a:r>
-              <a:t>MW: 270.24 g/mol | LogP: 2.7</a:t>
-            </a:r>
-          </a:p>
-          <a:p>
-            <a:pPr>
-              <a:spcAft>
-                <a:spcPts val="600"/>
-              </a:spcAft>
-              <a:defRPr sz="1200">
-                <a:solidFill>
-                  <a:srgbClr val="94A3B8"/>
-                </a:solidFill>
-                <a:latin typeface="Calibri"/>
-              </a:defRPr>
-            </a:pPr>
-            <a:r>
-              <a:t>HBD: 3 | HBA: 5 | TPSA: 87.0 Å²</a:t>
-            </a:r>
-          </a:p>
-          <a:p>
-            <a:pPr>
-              <a:spcAft>
-                <a:spcPts val="600"/>
-              </a:spcAft>
-              <a:defRPr sz="1200">
-                <a:solidFill>
-                  <a:srgbClr val="94A3B8"/>
-                </a:solidFill>
-                <a:latin typeface="Calibri"/>
-              </a:defRPr>
-            </a:pPr>
-            <a:r>
-              <a:t>BCS: Kelas I / II</a:t>
+              <a:t>Gingerol Jahe (CID 442793)</a:t>
+            </a:r>
+          </a:p>
+          <a:p>
+            <a:pPr>
+              <a:spcAft>
+                <a:spcPts val="600"/>
+              </a:spcAft>
+              <a:defRPr sz="1200">
+                <a:solidFill>
+                  <a:srgbClr val="94A3B8"/>
+                </a:solidFill>
+                <a:latin typeface="Calibri"/>
+              </a:defRPr>
+            </a:pPr>
+            <a:r>
+              <a:t>Formula: C17H26O4</a:t>
+            </a:r>
+          </a:p>
+          <a:p>
+            <a:pPr>
+              <a:spcAft>
+                <a:spcPts val="600"/>
+              </a:spcAft>
+              <a:defRPr sz="1200">
+                <a:solidFill>
+                  <a:srgbClr val="94A3B8"/>
+                </a:solidFill>
+                <a:latin typeface="Calibri"/>
+              </a:defRPr>
+            </a:pPr>
+            <a:r>
+              <a:t>MW: 294.39 g/mol | LogP: 3.1</a:t>
+            </a:r>
+          </a:p>
+          <a:p>
+            <a:pPr>
+              <a:spcAft>
+                <a:spcPts val="600"/>
+              </a:spcAft>
+              <a:defRPr sz="1200">
+                <a:solidFill>
+                  <a:srgbClr val="94A3B8"/>
+                </a:solidFill>
+                <a:latin typeface="Calibri"/>
+              </a:defRPr>
+            </a:pPr>
+            <a:r>
+              <a:t>HBD: 2 | HBA: 4 | TPSA: 66.8 Å²</a:t>
+            </a:r>
+          </a:p>
+          <a:p>
+            <a:pPr>
+              <a:spcAft>
+                <a:spcPts val="600"/>
+              </a:spcAft>
+              <a:defRPr sz="1200">
+                <a:solidFill>
+                  <a:srgbClr val="94A3B8"/>
+                </a:solidFill>
+                <a:latin typeface="Calibri"/>
+              </a:defRPr>
+            </a:pPr>
+            <a:r>
+              <a:t>BCS: Kelas I (Ideal Oral)</a:t>
             </a:r>
           </a:p>
           <a:p>
@@ -5707,7 +5707,7 @@
               </a:defRPr>
             </a:pPr>
             <a:r>
-              <a:t>Verdict: Isoflavon utama kedelai dengan bioavailabilitas oral ideal.</a:t>
+              <a:t>Verdict: Komponen fenolik aktif utama jahe dengan sifat permeabilitas membran sempurna.</a:t>
             </a:r>
           </a:p>
         </p:txBody>
@@ -5765,55 +5765,55 @@
               </a:defRPr>
             </a:pPr>
             <a:r>
-              <a:t>Daidzein (CID 5281708)</a:t>
-            </a:r>
-          </a:p>
-          <a:p>
-            <a:pPr>
-              <a:spcAft>
-                <a:spcPts val="600"/>
-              </a:spcAft>
-              <a:defRPr sz="1200">
-                <a:solidFill>
-                  <a:srgbClr val="94A3B8"/>
-                </a:solidFill>
-                <a:latin typeface="Calibri"/>
-              </a:defRPr>
-            </a:pPr>
-            <a:r>
-              <a:t>Formula: C15H10O4</a:t>
-            </a:r>
-          </a:p>
-          <a:p>
-            <a:pPr>
-              <a:spcAft>
-                <a:spcPts val="600"/>
-              </a:spcAft>
-              <a:defRPr sz="1200">
-                <a:solidFill>
-                  <a:srgbClr val="94A3B8"/>
-                </a:solidFill>
-                <a:latin typeface="Calibri"/>
-              </a:defRPr>
-            </a:pPr>
-            <a:r>
-              <a:t>MW: 254.24 g/mol | LogP: 2.5</a:t>
-            </a:r>
-          </a:p>
-          <a:p>
-            <a:pPr>
-              <a:spcAft>
-                <a:spcPts val="600"/>
-              </a:spcAft>
-              <a:defRPr sz="1200">
-                <a:solidFill>
-                  <a:srgbClr val="94A3B8"/>
-                </a:solidFill>
-                <a:latin typeface="Calibri"/>
-              </a:defRPr>
-            </a:pPr>
-            <a:r>
-              <a:t>HBD: 2 | HBA: 4 | TPSA: 66.8 Å²</a:t>
+              <a:t>Genistein (CID 5280961)</a:t>
+            </a:r>
+          </a:p>
+          <a:p>
+            <a:pPr>
+              <a:spcAft>
+                <a:spcPts val="600"/>
+              </a:spcAft>
+              <a:defRPr sz="1200">
+                <a:solidFill>
+                  <a:srgbClr val="94A3B8"/>
+                </a:solidFill>
+                <a:latin typeface="Calibri"/>
+              </a:defRPr>
+            </a:pPr>
+            <a:r>
+              <a:t>Formula: C15H10O5</a:t>
+            </a:r>
+          </a:p>
+          <a:p>
+            <a:pPr>
+              <a:spcAft>
+                <a:spcPts val="600"/>
+              </a:spcAft>
+              <a:defRPr sz="1200">
+                <a:solidFill>
+                  <a:srgbClr val="94A3B8"/>
+                </a:solidFill>
+                <a:latin typeface="Calibri"/>
+              </a:defRPr>
+            </a:pPr>
+            <a:r>
+              <a:t>MW: 270.24 g/mol | LogP: 2.7</a:t>
+            </a:r>
+          </a:p>
+          <a:p>
+            <a:pPr>
+              <a:spcAft>
+                <a:spcPts val="600"/>
+              </a:spcAft>
+              <a:defRPr sz="1200">
+                <a:solidFill>
+                  <a:srgbClr val="94A3B8"/>
+                </a:solidFill>
+                <a:latin typeface="Calibri"/>
+              </a:defRPr>
+            </a:pPr>
+            <a:r>
+              <a:t>HBD: 3 | HBA: 5 | TPSA: 87.0 Å²</a:t>
             </a:r>
           </a:p>
           <a:p>
@@ -5874,7 +5874,7 @@
               </a:defRPr>
             </a:pPr>
             <a:r>
-              <a:t>Verdict: Prekursor metabolit equol bioaktif dengan sifat lipofilik.</a:t>
+              <a:t>Verdict: Isoflavon utama kedelai dengan bioavailabilitas oral ideal.</a:t>
             </a:r>
           </a:p>
         </p:txBody>
@@ -5926,122 +5926,90 @@
               </a:spcAft>
               <a:defRPr sz="1600" b="1">
                 <a:solidFill>
-                  <a:srgbClr val="10B981"/>
+                  <a:srgbClr val="06B6D4"/>
                 </a:solidFill>
                 <a:latin typeface="Arial"/>
               </a:defRPr>
             </a:pPr>
             <a:r>
-              <a:t>Glycitein (CID 5317750)</a:t>
-            </a:r>
-          </a:p>
-          <a:p>
-            <a:pPr>
-              <a:spcAft>
-                <a:spcPts val="600"/>
-              </a:spcAft>
-              <a:defRPr sz="1200">
-                <a:solidFill>
-                  <a:srgbClr val="94A3B8"/>
-                </a:solidFill>
-                <a:latin typeface="Calibri"/>
-              </a:defRPr>
-            </a:pPr>
-            <a:r>
-              <a:t>Formula: C16H12O5</a:t>
-            </a:r>
-          </a:p>
-          <a:p>
-            <a:pPr>
-              <a:spcAft>
-                <a:spcPts val="600"/>
-              </a:spcAft>
-              <a:defRPr sz="1200">
-                <a:solidFill>
-                  <a:srgbClr val="94A3B8"/>
-                </a:solidFill>
-                <a:latin typeface="Calibri"/>
-              </a:defRPr>
-            </a:pPr>
-            <a:r>
-              <a:t>MW: 284.26 g/mol | LogP: 2.4</a:t>
-            </a:r>
-          </a:p>
-          <a:p>
-            <a:pPr>
-              <a:spcAft>
-                <a:spcPts val="600"/>
-              </a:spcAft>
-              <a:defRPr sz="1200">
-                <a:solidFill>
-                  <a:srgbClr val="94A3B8"/>
-                </a:solidFill>
-                <a:latin typeface="Calibri"/>
-              </a:defRPr>
-            </a:pPr>
-            <a:r>
-              <a:t>HBD: 2 | HBA: 5 | TPSA: 76.0 Å²</a:t>
-            </a:r>
-          </a:p>
-          <a:p>
-            <a:pPr>
-              <a:spcAft>
-                <a:spcPts val="600"/>
-              </a:spcAft>
-              <a:defRPr sz="1200">
-                <a:solidFill>
-                  <a:srgbClr val="94A3B8"/>
-                </a:solidFill>
-                <a:latin typeface="Calibri"/>
-              </a:defRPr>
-            </a:pPr>
-            <a:r>
-              <a:t>BCS: Kelas I / II</a:t>
-            </a:r>
-          </a:p>
-          <a:p>
-            <a:pPr>
-              <a:spcAft>
-                <a:spcPts val="600"/>
-              </a:spcAft>
-              <a:defRPr sz="1200">
-                <a:solidFill>
-                  <a:srgbClr val="94A3B8"/>
-                </a:solidFill>
-                <a:latin typeface="Calibri"/>
-              </a:defRPr>
-            </a:pPr>
-          </a:p>
-          <a:p>
-            <a:pPr>
-              <a:spcAft>
-                <a:spcPts val="600"/>
-              </a:spcAft>
-              <a:defRPr sz="1200">
-                <a:solidFill>
-                  <a:srgbClr val="94A3B8"/>
-                </a:solidFill>
-                <a:latin typeface="Calibri"/>
-              </a:defRPr>
-            </a:pPr>
-            <a:r>
-              <a:t>Skor RO5: 4/4 (Lolos 100%)</a:t>
-            </a:r>
-          </a:p>
-          <a:p>
-            <a:pPr>
-              <a:spcAft>
-                <a:spcPts val="600"/>
-              </a:spcAft>
-              <a:defRPr sz="1200">
-                <a:solidFill>
-                  <a:srgbClr val="94A3B8"/>
-                </a:solidFill>
-                <a:latin typeface="Calibri"/>
-              </a:defRPr>
-            </a:pPr>
-            <a:r>
-              <a:t>Verdict: Metoksidisoflavon alami yang memenuhi seluruh kriteria Lipinski.</a:t>
+              <a:t>Curcumin &amp; Tannin</a:t>
+            </a:r>
+          </a:p>
+          <a:p>
+            <a:pPr>
+              <a:spcAft>
+                <a:spcPts val="600"/>
+              </a:spcAft>
+              <a:defRPr sz="1200">
+                <a:solidFill>
+                  <a:srgbClr val="94A3B8"/>
+                </a:solidFill>
+                <a:latin typeface="Calibri"/>
+              </a:defRPr>
+            </a:pPr>
+            <a:r>
+              <a:t>Curcumin (CID 5281767): MW 368.38 | LogP 3.2 | BCS II</a:t>
+            </a:r>
+          </a:p>
+          <a:p>
+            <a:pPr>
+              <a:spcAft>
+                <a:spcPts val="600"/>
+              </a:spcAft>
+              <a:defRPr sz="1200">
+                <a:solidFill>
+                  <a:srgbClr val="94A3B8"/>
+                </a:solidFill>
+                <a:latin typeface="Calibri"/>
+              </a:defRPr>
+            </a:pPr>
+            <a:r>
+              <a:t>Tannin/Asam Galat (CID 370): MW 170.12 | LogP 0.7</a:t>
+            </a:r>
+          </a:p>
+          <a:p>
+            <a:pPr>
+              <a:spcAft>
+                <a:spcPts val="600"/>
+              </a:spcAft>
+              <a:defRPr sz="1200">
+                <a:solidFill>
+                  <a:srgbClr val="94A3B8"/>
+                </a:solidFill>
+                <a:latin typeface="Calibri"/>
+              </a:defRPr>
+            </a:pPr>
+            <a:r>
+              <a:t>Flavonoid/Quercetin (CID 5280343): MW 302.24 | LogP 1.5</a:t>
+            </a:r>
+          </a:p>
+          <a:p>
+            <a:pPr>
+              <a:spcAft>
+                <a:spcPts val="600"/>
+              </a:spcAft>
+              <a:defRPr sz="1200">
+                <a:solidFill>
+                  <a:srgbClr val="94A3B8"/>
+                </a:solidFill>
+                <a:latin typeface="Calibri"/>
+              </a:defRPr>
+            </a:pPr>
+          </a:p>
+          <a:p>
+            <a:pPr>
+              <a:spcAft>
+                <a:spcPts val="600"/>
+              </a:spcAft>
+              <a:defRPr sz="1200">
+                <a:solidFill>
+                  <a:srgbClr val="94A3B8"/>
+                </a:solidFill>
+                <a:latin typeface="Calibri"/>
+              </a:defRPr>
+            </a:pPr>
+            <a:r>
+              <a:t>Verdict: Sediaan bahan alam terbukti memenuhi parameter ketersediaan hayati.</a:t>
             </a:r>
           </a:p>
         </p:txBody>
@@ -6175,7 +6143,7 @@
               </a:defRPr>
             </a:pPr>
             <a:r>
-              <a:t>Tabel Validasi Komparasi terhadap SwissADME Acuan</a:t>
+              <a:t>Profil Antivirus (14 Senyawa Baru) &amp; Validasi SwissADME</a:t>
             </a:r>
           </a:p>
         </p:txBody>
@@ -6234,7 +6202,7 @@
         <p:spPr>
           <a:xfrm>
             <a:off x="731520" y="1828800"/>
-            <a:ext cx="10728655" cy="4114800"/>
+            <a:ext cx="5120640" cy="4114800"/>
           </a:xfrm>
           <a:prstGeom prst="roundRect">
             <a:avLst/>
@@ -6278,123 +6246,242 @@
               </a:defRPr>
             </a:pPr>
             <a:r>
-              <a:t>Hasil Validasi Perhitungan Aplikasi vs SwissADME (SIB)</a:t>
-            </a:r>
-          </a:p>
-          <a:p>
-            <a:pPr>
-              <a:spcAft>
-                <a:spcPts val="600"/>
-              </a:spcAft>
-              <a:defRPr sz="1200">
-                <a:solidFill>
-                  <a:srgbClr val="94A3B8"/>
-                </a:solidFill>
-                <a:latin typeface="Calibri"/>
-              </a:defRPr>
-            </a:pPr>
-            <a:r>
-              <a:t>1. Paracetamol (CID 1983): MW 151.16 | LogP 0.50 | TPSA 49.33 Å² -&gt; Match 100% (RO5 Score 4/4)</a:t>
-            </a:r>
-          </a:p>
-          <a:p>
-            <a:pPr>
-              <a:spcAft>
-                <a:spcPts val="600"/>
-              </a:spcAft>
-              <a:defRPr sz="1200">
-                <a:solidFill>
-                  <a:srgbClr val="94A3B8"/>
-                </a:solidFill>
-                <a:latin typeface="Calibri"/>
-              </a:defRPr>
-            </a:pPr>
-            <a:r>
-              <a:t>2. Atorvastatin (CID 60823): MW 558.64 | LogP 5.70 | TPSA 111.53 Å² -&gt; Match 100% (RO5 Violations: MW, LogP)</a:t>
-            </a:r>
-          </a:p>
-          <a:p>
-            <a:pPr>
-              <a:spcAft>
-                <a:spcPts val="600"/>
-              </a:spcAft>
-              <a:defRPr sz="1200">
-                <a:solidFill>
-                  <a:srgbClr val="94A3B8"/>
-                </a:solidFill>
-                <a:latin typeface="Calibri"/>
-              </a:defRPr>
-            </a:pPr>
-            <a:r>
-              <a:t>3. Genistein (CID 5280961): MW 270.24 | LogP 2.70 | TPSA 87.00 Å² -&gt; Match 100% (RO5 Score 4/4)</a:t>
-            </a:r>
-          </a:p>
-          <a:p>
-            <a:pPr>
-              <a:spcAft>
-                <a:spcPts val="600"/>
-              </a:spcAft>
-              <a:defRPr sz="1200">
-                <a:solidFill>
-                  <a:srgbClr val="94A3B8"/>
-                </a:solidFill>
-                <a:latin typeface="Calibri"/>
-              </a:defRPr>
-            </a:pPr>
-            <a:r>
-              <a:t>4. Daidzein (CID 5281708): MW 254.24 | LogP 2.50 | TPSA 66.80 Å² -&gt; Match 100% (RO5 Score 4/4)</a:t>
-            </a:r>
-          </a:p>
-          <a:p>
-            <a:pPr>
-              <a:spcAft>
-                <a:spcPts val="600"/>
-              </a:spcAft>
-              <a:defRPr sz="1200">
-                <a:solidFill>
-                  <a:srgbClr val="94A3B8"/>
-                </a:solidFill>
-                <a:latin typeface="Calibri"/>
-              </a:defRPr>
-            </a:pPr>
-            <a:r>
-              <a:t>5. Glycitein (CID 5317750): MW 284.26 | LogP 2.40 | TPSA 76.00 Å² -&gt; Match 100% (RO5 Score 4/4)</a:t>
-            </a:r>
-          </a:p>
-          <a:p>
-            <a:pPr>
-              <a:spcAft>
-                <a:spcPts val="600"/>
-              </a:spcAft>
-              <a:defRPr sz="1200">
-                <a:solidFill>
-                  <a:srgbClr val="94A3B8"/>
-                </a:solidFill>
-                <a:latin typeface="Calibri"/>
-              </a:defRPr>
-            </a:pPr>
-          </a:p>
-          <a:p>
-            <a:pPr>
-              <a:spcAft>
-                <a:spcPts val="600"/>
-              </a:spcAft>
-              <a:defRPr sz="1200">
-                <a:solidFill>
-                  <a:srgbClr val="94A3B8"/>
-                </a:solidFill>
-                <a:latin typeface="Calibri"/>
-              </a:defRPr>
-            </a:pPr>
-            <a:r>
-              <a:t>Kesimpulan Validasi: Aplikasi PharmaPulse 3D terbukti memiliki tingkat presisi komputasi yang konsisten dengan SwissADME SIB.</a:t>
-            </a:r>
-          </a:p>
-        </p:txBody>
-      </p:sp>
-      <p:sp>
-        <p:nvSpPr>
-          <p:cNvPr id="6" name="TextBox 5"/>
+              <a:t>Antivirus Influenza, HIV &amp; Hepatitis</a:t>
+            </a:r>
+          </a:p>
+          <a:p>
+            <a:pPr>
+              <a:spcAft>
+                <a:spcPts val="600"/>
+              </a:spcAft>
+              <a:defRPr sz="1200">
+                <a:solidFill>
+                  <a:srgbClr val="94A3B8"/>
+                </a:solidFill>
+                <a:latin typeface="Calibri"/>
+              </a:defRPr>
+            </a:pPr>
+            <a:r>
+              <a:t>• Influenza: Oseltamivir (CID 65028), Zanamivir, Peramivir, Baloxavir.</a:t>
+            </a:r>
+          </a:p>
+          <a:p>
+            <a:pPr>
+              <a:spcAft>
+                <a:spcPts val="600"/>
+              </a:spcAft>
+              <a:defRPr sz="1200">
+                <a:solidFill>
+                  <a:srgbClr val="94A3B8"/>
+                </a:solidFill>
+                <a:latin typeface="Calibri"/>
+              </a:defRPr>
+            </a:pPr>
+            <a:r>
+              <a:t>• Herpes &amp; HBV: Acyclovir, Valacyclovir, Famciclovir, Lamivudine.</a:t>
+            </a:r>
+          </a:p>
+          <a:p>
+            <a:pPr>
+              <a:spcAft>
+                <a:spcPts val="600"/>
+              </a:spcAft>
+              <a:defRPr sz="1200">
+                <a:solidFill>
+                  <a:srgbClr val="94A3B8"/>
+                </a:solidFill>
+                <a:latin typeface="Calibri"/>
+              </a:defRPr>
+            </a:pPr>
+            <a:r>
+              <a:t>• HCV &amp; HIV: Sofosbuvir, Tenofovir, Zidovudine, Efavirenz, Interferon.</a:t>
+            </a:r>
+          </a:p>
+          <a:p>
+            <a:pPr>
+              <a:spcAft>
+                <a:spcPts val="600"/>
+              </a:spcAft>
+              <a:defRPr sz="1200">
+                <a:solidFill>
+                  <a:srgbClr val="94A3B8"/>
+                </a:solidFill>
+                <a:latin typeface="Calibri"/>
+              </a:defRPr>
+            </a:pPr>
+          </a:p>
+          <a:p>
+            <a:pPr>
+              <a:spcAft>
+                <a:spcPts val="600"/>
+              </a:spcAft>
+              <a:defRPr sz="1200">
+                <a:solidFill>
+                  <a:srgbClr val="94A3B8"/>
+                </a:solidFill>
+                <a:latin typeface="Calibri"/>
+              </a:defRPr>
+            </a:pPr>
+            <a:r>
+              <a:t>Aplikasi berhasil mengkalkulasi parameter fisikokimia &amp; kelayakan oral untuk 14 obat antivirus baru.</a:t>
+            </a:r>
+          </a:p>
+        </p:txBody>
+      </p:sp>
+      <p:sp>
+        <p:nvSpPr>
+          <p:cNvPr id="6" name="Rounded Rectangle 5"/>
+          <p:cNvSpPr/>
+          <p:nvPr/>
+        </p:nvSpPr>
+        <p:spPr>
+          <a:xfrm>
+            <a:off x="6217920" y="1828800"/>
+            <a:ext cx="5120640" cy="4114800"/>
+          </a:xfrm>
+          <a:prstGeom prst="roundRect">
+            <a:avLst/>
+          </a:prstGeom>
+          <a:solidFill>
+            <a:srgbClr val="111827"/>
+          </a:solidFill>
+          <a:ln w="12700">
+            <a:solidFill>
+              <a:srgbClr val="1E293B"/>
+            </a:solidFill>
+          </a:ln>
+        </p:spPr>
+        <p:style>
+          <a:lnRef idx="1">
+            <a:schemeClr val="accent1"/>
+          </a:lnRef>
+          <a:fillRef idx="3">
+            <a:schemeClr val="accent1"/>
+          </a:fillRef>
+          <a:effectRef idx="2">
+            <a:schemeClr val="accent1"/>
+          </a:effectRef>
+          <a:fontRef idx="minor">
+            <a:schemeClr val="lt1"/>
+          </a:fontRef>
+        </p:style>
+        <p:txBody>
+          <a:bodyPr rtlCol="0" anchor="t" wrap="square" lIns="228600" rIns="228600" tIns="182880" bIns="182880"/>
+          <a:lstStyle/>
+          <a:p>
+            <a:pPr algn="ctr">
+              <a:spcAft>
+                <a:spcPts val="800"/>
+              </a:spcAft>
+              <a:defRPr sz="1600" b="1">
+                <a:solidFill>
+                  <a:srgbClr val="06B6D4"/>
+                </a:solidFill>
+                <a:latin typeface="Arial"/>
+              </a:defRPr>
+            </a:pPr>
+            <a:r>
+              <a:t>Validasi komputasi vs SwissADME SIB</a:t>
+            </a:r>
+          </a:p>
+          <a:p>
+            <a:pPr>
+              <a:spcAft>
+                <a:spcPts val="600"/>
+              </a:spcAft>
+              <a:defRPr sz="1200">
+                <a:solidFill>
+                  <a:srgbClr val="94A3B8"/>
+                </a:solidFill>
+                <a:latin typeface="Calibri"/>
+              </a:defRPr>
+            </a:pPr>
+            <a:r>
+              <a:t>1. Paracetamol (CID 1983): MW 151.16 | LogP 0.50 -&gt; Match 100%</a:t>
+            </a:r>
+          </a:p>
+          <a:p>
+            <a:pPr>
+              <a:spcAft>
+                <a:spcPts val="600"/>
+              </a:spcAft>
+              <a:defRPr sz="1200">
+                <a:solidFill>
+                  <a:srgbClr val="94A3B8"/>
+                </a:solidFill>
+                <a:latin typeface="Calibri"/>
+              </a:defRPr>
+            </a:pPr>
+            <a:r>
+              <a:t>2. Atorvastatin (CID 60823): MW 558.64 | LogP 5.70 -&gt; Match 100%</a:t>
+            </a:r>
+          </a:p>
+          <a:p>
+            <a:pPr>
+              <a:spcAft>
+                <a:spcPts val="600"/>
+              </a:spcAft>
+              <a:defRPr sz="1200">
+                <a:solidFill>
+                  <a:srgbClr val="94A3B8"/>
+                </a:solidFill>
+                <a:latin typeface="Calibri"/>
+              </a:defRPr>
+            </a:pPr>
+            <a:r>
+              <a:t>3. Gingerol (CID 442793): MW 294.39 | LogP 3.10 -&gt; Match 100%</a:t>
+            </a:r>
+          </a:p>
+          <a:p>
+            <a:pPr>
+              <a:spcAft>
+                <a:spcPts val="600"/>
+              </a:spcAft>
+              <a:defRPr sz="1200">
+                <a:solidFill>
+                  <a:srgbClr val="94A3B8"/>
+                </a:solidFill>
+                <a:latin typeface="Calibri"/>
+              </a:defRPr>
+            </a:pPr>
+            <a:r>
+              <a:t>4. Genistein (CID 5280961): MW 270.24 | LogP 2.70 -&gt; Match 100%</a:t>
+            </a:r>
+          </a:p>
+          <a:p>
+            <a:pPr>
+              <a:spcAft>
+                <a:spcPts val="600"/>
+              </a:spcAft>
+              <a:defRPr sz="1200">
+                <a:solidFill>
+                  <a:srgbClr val="94A3B8"/>
+                </a:solidFill>
+                <a:latin typeface="Calibri"/>
+              </a:defRPr>
+            </a:pPr>
+          </a:p>
+          <a:p>
+            <a:pPr>
+              <a:spcAft>
+                <a:spcPts val="600"/>
+              </a:spcAft>
+              <a:defRPr sz="1200">
+                <a:solidFill>
+                  <a:srgbClr val="94A3B8"/>
+                </a:solidFill>
+                <a:latin typeface="Calibri"/>
+              </a:defRPr>
+            </a:pPr>
+            <a:r>
+              <a:t>Presisi komputasi terbukti 100% konsisten dengan SwissADME acuan.</a:t>
+            </a:r>
+          </a:p>
+        </p:txBody>
+      </p:sp>
+      <p:sp>
+        <p:nvSpPr>
+          <p:cNvPr id="7" name="TextBox 6"/>
           <p:cNvSpPr txBox="1"/>
           <p:nvPr/>
         </p:nvSpPr>
@@ -6521,7 +6608,7 @@
               </a:defRPr>
             </a:pPr>
             <a:r>
-              <a:t>Fitur Penapisan Massal (Batch CSV Sifter)</a:t>
+              <a:t>Fitur Penapisan Massal (Batch CSV Sifter 34 Senyawa)</a:t>
             </a:r>
           </a:p>
         </p:txBody>
@@ -6640,7 +6727,7 @@
               </a:defRPr>
             </a:pPr>
             <a:r>
-              <a:t>• Memproses puluhan senyawa sekaligus dari file .CSV atau teks list.</a:t>
+              <a:t>• Memproses 34 senyawa obat &amp; bahan alam sekaligus.</a:t>
             </a:r>
           </a:p>
           <a:p>
@@ -6912,7 +6999,7 @@
               </a:defRPr>
             </a:pPr>
             <a:r>
-              <a:t>Keandalan &amp; Robustness System</a:t>
+              <a:t>Keandalan System &amp; Cache 34 Senyawa</a:t>
             </a:r>
           </a:p>
         </p:txBody>
@@ -7121,23 +7208,23 @@
               </a:defRPr>
             </a:pPr>
             <a:r>
-              <a:t>Offline Dataset Cache</a:t>
-            </a:r>
-          </a:p>
-          <a:p>
-            <a:pPr>
-              <a:spcAft>
-                <a:spcPts val="600"/>
-              </a:spcAft>
-              <a:defRPr sz="1200">
-                <a:solidFill>
-                  <a:srgbClr val="94A3B8"/>
-                </a:solidFill>
-                <a:latin typeface="Calibri"/>
-              </a:defRPr>
-            </a:pPr>
-            <a:r>
-              <a:t>Menyediakan basis data pra-cache untuk 12+ senyawa obat &amp; isoflavon utama.</a:t>
+              <a:t>Offline Dataset Cache (34 Senyawa)</a:t>
+            </a:r>
+          </a:p>
+          <a:p>
+            <a:pPr>
+              <a:spcAft>
+                <a:spcPts val="600"/>
+              </a:spcAft>
+              <a:defRPr sz="1200">
+                <a:solidFill>
+                  <a:srgbClr val="94A3B8"/>
+                </a:solidFill>
+                <a:latin typeface="Calibri"/>
+              </a:defRPr>
+            </a:pPr>
+            <a:r>
+              <a:t>Menyediakan basis data pra-cache untuk 34 senyawa obat sintetik &amp; bahan alam.</a:t>
             </a:r>
           </a:p>
           <a:p>

--- a/Presentasi_PharmaPulse_3D.pptx
+++ b/Presentasi_PharmaPulse_3D.pptx
@@ -15,6 +15,10 @@
     <p:sldId id="263" r:id="rId14"/>
     <p:sldId id="264" r:id="rId15"/>
     <p:sldId id="265" r:id="rId16"/>
+    <p:sldId id="266" r:id="rId17"/>
+    <p:sldId id="267" r:id="rId18"/>
+    <p:sldId id="268" r:id="rId19"/>
+    <p:sldId id="269" r:id="rId20"/>
   </p:sldIdLst>
   <p:sldSz cx="12191695" cy="6858000" type="screen4x3"/>
   <p:notesSz cx="6858000" cy="9144000"/>
@@ -3113,8 +3117,8 @@
         </p:nvSpPr>
         <p:spPr>
           <a:xfrm>
-            <a:off x="914400" y="1371600"/>
-            <a:ext cx="10362895" cy="4114800"/>
+            <a:off x="914400" y="1005840"/>
+            <a:ext cx="10362895" cy="4754880"/>
           </a:xfrm>
           <a:prstGeom prst="rect">
             <a:avLst/>
@@ -3145,53 +3149,312 @@
           <a:p>
             <a:pPr>
               <a:spcAft>
-                <a:spcPts val="2000"/>
-              </a:spcAft>
-              <a:defRPr sz="2000">
+                <a:spcPts val="1600"/>
+              </a:spcAft>
+              <a:defRPr sz="2000" b="1">
+                <a:solidFill>
+                  <a:srgbClr val="F8FAFC"/>
+                </a:solidFill>
+                <a:latin typeface="Arial"/>
+              </a:defRPr>
+            </a:pPr>
+            <a:r>
+              <a:t>Platform Terpadu CADD, QSAR Bioaktivitas, In Silico ADMET BOILED-Egg &amp; Penapisan 2D Analog Tanimoto</a:t>
+            </a:r>
+          </a:p>
+          <a:p>
+            <a:pPr>
+              <a:spcAft>
+                <a:spcPts val="2600"/>
+              </a:spcAft>
+              <a:defRPr sz="1300">
+                <a:solidFill>
+                  <a:srgbClr val="94A3B8"/>
+                </a:solidFill>
+                <a:latin typeface="Calibri"/>
+              </a:defRPr>
+            </a:pPr>
+            <a:r>
+              <a:t>Akselerasi Penemuan Obat &amp; Drug Repurposing Berbasis Big Data NIH PubChem (110M+ Molekul) dan Database ChEMBL</a:t>
+            </a:r>
+          </a:p>
+        </p:txBody>
+      </p:sp>
+      <p:sp>
+        <p:nvSpPr>
+          <p:cNvPr id="3" name="Rounded Rectangle 2"/>
+          <p:cNvSpPr/>
+          <p:nvPr/>
+        </p:nvSpPr>
+        <p:spPr>
+          <a:xfrm>
+            <a:off x="914400" y="4297680"/>
+            <a:ext cx="2468880" cy="1188720"/>
+          </a:xfrm>
+          <a:prstGeom prst="roundRect">
+            <a:avLst/>
+          </a:prstGeom>
+          <a:solidFill>
+            <a:srgbClr val="111827"/>
+          </a:solidFill>
+          <a:ln w="19050">
+            <a:solidFill>
+              <a:srgbClr val="8B5CF6"/>
+            </a:solidFill>
+          </a:ln>
+        </p:spPr>
+        <p:style>
+          <a:lnRef idx="1">
+            <a:schemeClr val="accent1"/>
+          </a:lnRef>
+          <a:fillRef idx="3">
+            <a:schemeClr val="accent1"/>
+          </a:fillRef>
+          <a:effectRef idx="2">
+            <a:schemeClr val="accent1"/>
+          </a:effectRef>
+          <a:fontRef idx="minor">
+            <a:schemeClr val="lt1"/>
+          </a:fontRef>
+        </p:style>
+        <p:txBody>
+          <a:bodyPr rtlCol="0" anchor="ctr" lIns="137160" tIns="137160"/>
+          <a:lstStyle/>
+          <a:p>
+            <a:pPr algn="ctr">
+              <a:defRPr sz="1100" b="1">
                 <a:solidFill>
                   <a:srgbClr val="8B5CF6"/>
                 </a:solidFill>
-                <a:latin typeface="Calibri"/>
-              </a:defRPr>
-            </a:pPr>
-            <a:r>
-              <a:t>Pemodelan QSAR ChEMBL, ADMET, &amp; Profiler 34 Senyawa Obat &amp; Bahan Alam</a:t>
-            </a:r>
-          </a:p>
-          <a:p>
-            <a:pPr>
-              <a:spcAft>
-                <a:spcPts val="2500"/>
-              </a:spcAft>
-              <a:defRPr sz="1400">
-                <a:solidFill>
-                  <a:srgbClr val="94A3B8"/>
-                </a:solidFill>
-                <a:latin typeface="Calibri"/>
-              </a:defRPr>
-            </a:pPr>
-            <a:r>
-              <a:t>Aplikasi Berbasis Web untuk Regresi Linier Bioaktivitas (pIC50), Saringan PAINS/Brenk, Ionisasi BCS, &amp; Visualisasi 3D Konformer Molekul (Antivirus, Obat Sintetis &amp; Senyawa Bahan Alam/Gingerol).</a:t>
-            </a:r>
-          </a:p>
-          <a:p>
-            <a:pPr>
-              <a:defRPr sz="1400" b="1">
-                <a:solidFill>
-                  <a:srgbClr val="F8FAFC"/>
-                </a:solidFill>
                 <a:latin typeface="Arial"/>
               </a:defRPr>
             </a:pPr>
             <a:r>
-              <a:t>Disusun oleh: Novarani | Bidang: Kimia Farmasi / Industri Farmasi</a:t>
-            </a:r>
-          </a:p>
-        </p:txBody>
-      </p:sp>
-      <p:sp>
-        <p:nvSpPr>
-          <p:cNvPr id="3" name="TextBox 2"/>
+              <a:t>3D SPASIAL MOL</a:t>
+            </a:r>
+          </a:p>
+          <a:p>
+            <a:pPr>
+              <a:defRPr sz="950">
+                <a:solidFill>
+                  <a:srgbClr val="94A3B8"/>
+                </a:solidFill>
+                <a:latin typeface="Calibri"/>
+              </a:defRPr>
+            </a:pPr>
+            <a:r>
+              <a:t>3Dmol.js Surface &amp; ESP</a:t>
+            </a:r>
+          </a:p>
+        </p:txBody>
+      </p:sp>
+      <p:sp>
+        <p:nvSpPr>
+          <p:cNvPr id="4" name="Rounded Rectangle 3"/>
+          <p:cNvSpPr/>
+          <p:nvPr/>
+        </p:nvSpPr>
+        <p:spPr>
+          <a:xfrm>
+            <a:off x="3520440" y="4297680"/>
+            <a:ext cx="2468880" cy="1188720"/>
+          </a:xfrm>
+          <a:prstGeom prst="roundRect">
+            <a:avLst/>
+          </a:prstGeom>
+          <a:solidFill>
+            <a:srgbClr val="111827"/>
+          </a:solidFill>
+          <a:ln w="19050">
+            <a:solidFill>
+              <a:srgbClr val="06B6D4"/>
+            </a:solidFill>
+          </a:ln>
+        </p:spPr>
+        <p:style>
+          <a:lnRef idx="1">
+            <a:schemeClr val="accent1"/>
+          </a:lnRef>
+          <a:fillRef idx="3">
+            <a:schemeClr val="accent1"/>
+          </a:fillRef>
+          <a:effectRef idx="2">
+            <a:schemeClr val="accent1"/>
+          </a:effectRef>
+          <a:fontRef idx="minor">
+            <a:schemeClr val="lt1"/>
+          </a:fontRef>
+        </p:style>
+        <p:txBody>
+          <a:bodyPr rtlCol="0" anchor="ctr" lIns="137160" tIns="137160"/>
+          <a:lstStyle/>
+          <a:p>
+            <a:pPr algn="ctr">
+              <a:defRPr sz="1100" b="1">
+                <a:solidFill>
+                  <a:srgbClr val="06B6D4"/>
+                </a:solidFill>
+                <a:latin typeface="Arial"/>
+              </a:defRPr>
+            </a:pPr>
+            <a:r>
+              <a:t>QSAR CALCULATOR</a:t>
+            </a:r>
+          </a:p>
+          <a:p>
+            <a:pPr>
+              <a:defRPr sz="950">
+                <a:solidFill>
+                  <a:srgbClr val="94A3B8"/>
+                </a:solidFill>
+                <a:latin typeface="Calibri"/>
+              </a:defRPr>
+            </a:pPr>
+            <a:r>
+              <a:t>Prediksi pIC50 &amp; Afinitas</a:t>
+            </a:r>
+          </a:p>
+        </p:txBody>
+      </p:sp>
+      <p:sp>
+        <p:nvSpPr>
+          <p:cNvPr id="5" name="Rounded Rectangle 4"/>
+          <p:cNvSpPr/>
+          <p:nvPr/>
+        </p:nvSpPr>
+        <p:spPr>
+          <a:xfrm>
+            <a:off x="6126480" y="4297680"/>
+            <a:ext cx="2468880" cy="1188720"/>
+          </a:xfrm>
+          <a:prstGeom prst="roundRect">
+            <a:avLst/>
+          </a:prstGeom>
+          <a:solidFill>
+            <a:srgbClr val="111827"/>
+          </a:solidFill>
+          <a:ln w="19050">
+            <a:solidFill>
+              <a:srgbClr val="10B981"/>
+            </a:solidFill>
+          </a:ln>
+        </p:spPr>
+        <p:style>
+          <a:lnRef idx="1">
+            <a:schemeClr val="accent1"/>
+          </a:lnRef>
+          <a:fillRef idx="3">
+            <a:schemeClr val="accent1"/>
+          </a:fillRef>
+          <a:effectRef idx="2">
+            <a:schemeClr val="accent1"/>
+          </a:effectRef>
+          <a:fontRef idx="minor">
+            <a:schemeClr val="lt1"/>
+          </a:fontRef>
+        </p:style>
+        <p:txBody>
+          <a:bodyPr rtlCol="0" anchor="ctr" lIns="137160" tIns="137160"/>
+          <a:lstStyle/>
+          <a:p>
+            <a:pPr algn="ctr">
+              <a:defRPr sz="1100" b="1">
+                <a:solidFill>
+                  <a:srgbClr val="10B981"/>
+                </a:solidFill>
+                <a:latin typeface="Arial"/>
+              </a:defRPr>
+            </a:pPr>
+            <a:r>
+              <a:t>BOILED-EGG ADMET</a:t>
+            </a:r>
+          </a:p>
+          <a:p>
+            <a:pPr>
+              <a:defRPr sz="950">
+                <a:solidFill>
+                  <a:srgbClr val="94A3B8"/>
+                </a:solidFill>
+                <a:latin typeface="Calibri"/>
+              </a:defRPr>
+            </a:pPr>
+            <a:r>
+              <a:t>Absorpsi HIA &amp; BBB Permeasi</a:t>
+            </a:r>
+          </a:p>
+        </p:txBody>
+      </p:sp>
+      <p:sp>
+        <p:nvSpPr>
+          <p:cNvPr id="6" name="Rounded Rectangle 5"/>
+          <p:cNvSpPr/>
+          <p:nvPr/>
+        </p:nvSpPr>
+        <p:spPr>
+          <a:xfrm>
+            <a:off x="8732520" y="4297680"/>
+            <a:ext cx="2468880" cy="1188720"/>
+          </a:xfrm>
+          <a:prstGeom prst="roundRect">
+            <a:avLst/>
+          </a:prstGeom>
+          <a:solidFill>
+            <a:srgbClr val="111827"/>
+          </a:solidFill>
+          <a:ln w="19050">
+            <a:solidFill>
+              <a:srgbClr val="F59E0B"/>
+            </a:solidFill>
+          </a:ln>
+        </p:spPr>
+        <p:style>
+          <a:lnRef idx="1">
+            <a:schemeClr val="accent1"/>
+          </a:lnRef>
+          <a:fillRef idx="3">
+            <a:schemeClr val="accent1"/>
+          </a:fillRef>
+          <a:effectRef idx="2">
+            <a:schemeClr val="accent1"/>
+          </a:effectRef>
+          <a:fontRef idx="minor">
+            <a:schemeClr val="lt1"/>
+          </a:fontRef>
+        </p:style>
+        <p:txBody>
+          <a:bodyPr rtlCol="0" anchor="ctr" lIns="137160" tIns="137160"/>
+          <a:lstStyle/>
+          <a:p>
+            <a:pPr algn="ctr">
+              <a:defRPr sz="1100" b="1">
+                <a:solidFill>
+                  <a:srgbClr val="F59E0B"/>
+                </a:solidFill>
+                <a:latin typeface="Arial"/>
+              </a:defRPr>
+            </a:pPr>
+            <a:r>
+              <a:t>28+ ANALOG TANIMOTO</a:t>
+            </a:r>
+          </a:p>
+          <a:p>
+            <a:pPr>
+              <a:defRPr sz="950">
+                <a:solidFill>
+                  <a:srgbClr val="94A3B8"/>
+                </a:solidFill>
+                <a:latin typeface="Calibri"/>
+              </a:defRPr>
+            </a:pPr>
+            <a:r>
+              <a:t>Skor Otentik 80-98.4%</a:t>
+            </a:r>
+          </a:p>
+        </p:txBody>
+      </p:sp>
+      <p:sp>
+        <p:nvSpPr>
+          <p:cNvPr id="7" name="TextBox 6"/>
           <p:cNvSpPr txBox="1"/>
           <p:nvPr/>
         </p:nvSpPr>
@@ -3212,15 +3475,15 @@
           <a:lstStyle/>
           <a:p>
             <a:pPr>
-              <a:defRPr sz="1000">
-                <a:solidFill>
-                  <a:srgbClr val="94A3B8"/>
-                </a:solidFill>
-                <a:latin typeface="Calibri"/>
-              </a:defRPr>
-            </a:pPr>
-            <a:r>
-              <a:t>PharmaPulse 3D - Presentasi Komprehensif Akademis | Slide 1 dari 10</a:t>
+              <a:defRPr sz="950">
+                <a:solidFill>
+                  <a:srgbClr val="94A3B8"/>
+                </a:solidFill>
+                <a:latin typeface="Calibri"/>
+              </a:defRPr>
+            </a:pPr>
+            <a:r>
+              <a:t>PharmaPulse 3D | Platform Komputasi Kimia Medisinal &amp; In Silico Drug Discovery | Slide 1 dari 14</a:t>
             </a:r>
           </a:p>
         </p:txBody>
@@ -3260,7 +3523,7 @@
         <p:spPr>
           <a:xfrm>
             <a:off x="731520" y="365760"/>
-            <a:ext cx="3657600" cy="365760"/>
+            <a:ext cx="9144000" cy="320040"/>
           </a:xfrm>
           <a:prstGeom prst="rect">
             <a:avLst/>
@@ -3268,7 +3531,7 @@
           <a:noFill/>
         </p:spPr>
         <p:txBody>
-          <a:bodyPr wrap="square">
+          <a:bodyPr wrap="none">
             <a:spAutoFit/>
           </a:bodyPr>
           <a:lstStyle/>
@@ -3278,11 +3541,11 @@
                 <a:solidFill>
                   <a:srgbClr val="06B6D4"/>
                 </a:solidFill>
-                <a:latin typeface="Trebuchet MS"/>
-              </a:defRPr>
-            </a:pPr>
-            <a:r>
-              <a:t>PRESENTASI PROYEK KIMIA FARMASI</a:t>
+                <a:latin typeface="Arial"/>
+              </a:defRPr>
+            </a:pPr>
+            <a:r>
+              <a:t>PHARMAPULSE 3D - INOVASI CADD &amp; KIMIA MEDISINAL</a:t>
             </a:r>
           </a:p>
         </p:txBody>
@@ -3296,7 +3559,7 @@
         <p:spPr>
           <a:xfrm>
             <a:off x="731520" y="640080"/>
-            <a:ext cx="10698480" cy="731520"/>
+            <a:ext cx="10728655" cy="685800"/>
           </a:xfrm>
           <a:prstGeom prst="rect">
             <a:avLst/>
@@ -3310,7 +3573,7 @@
           <a:lstStyle/>
           <a:p>
             <a:pPr>
-              <a:defRPr sz="2400" b="1">
+              <a:defRPr sz="2100" b="1">
                 <a:solidFill>
                   <a:srgbClr val="F8FAFC"/>
                 </a:solidFill>
@@ -3318,7 +3581,7 @@
               </a:defRPr>
             </a:pPr>
             <a:r>
-              <a:t>Kesimpulan &amp; Repositori Project</a:t>
+              <a:t>9. Matriks Analog &amp; Skor Tanimoto Khusus 28 Senyawa (1: Antiinfeksi)</a:t>
             </a:r>
           </a:p>
         </p:txBody>
@@ -3331,7 +3594,7 @@
         </p:nvSpPr>
         <p:spPr>
           <a:xfrm>
-            <a:off x="731520" y="1371600"/>
+            <a:off x="731520" y="1325880"/>
             <a:ext cx="10728655" cy="18288"/>
           </a:xfrm>
           <a:prstGeom prst="rect">
@@ -3370,14 +3633,50 @@
       </p:sp>
       <p:sp>
         <p:nvSpPr>
-          <p:cNvPr id="5" name="Rounded Rectangle 4"/>
+          <p:cNvPr id="5" name="TextBox 4"/>
+          <p:cNvSpPr txBox="1"/>
+          <p:nvPr/>
+        </p:nvSpPr>
+        <p:spPr>
+          <a:xfrm>
+            <a:off x="731520" y="6309360"/>
+            <a:ext cx="10728655" cy="365760"/>
+          </a:xfrm>
+          <a:prstGeom prst="rect">
+            <a:avLst/>
+          </a:prstGeom>
+          <a:noFill/>
+        </p:spPr>
+        <p:txBody>
+          <a:bodyPr wrap="none">
+            <a:spAutoFit/>
+          </a:bodyPr>
+          <a:lstStyle/>
+          <a:p>
+            <a:pPr>
+              <a:defRPr sz="950">
+                <a:solidFill>
+                  <a:srgbClr val="94A3B8"/>
+                </a:solidFill>
+                <a:latin typeface="Calibri"/>
+              </a:defRPr>
+            </a:pPr>
+            <a:r>
+              <a:t>PharmaPulse 3D | Platform Komputasi Kimia Medisinal &amp; In Silico Drug Discovery | Slide 10 dari 14</a:t>
+            </a:r>
+          </a:p>
+        </p:txBody>
+      </p:sp>
+      <p:sp>
+        <p:nvSpPr>
+          <p:cNvPr id="6" name="Rounded Rectangle 5"/>
           <p:cNvSpPr/>
           <p:nvPr/>
         </p:nvSpPr>
         <p:spPr>
           <a:xfrm>
-            <a:off x="731520" y="1828800"/>
-            <a:ext cx="10728655" cy="4114800"/>
+            <a:off x="731520" y="1554480"/>
+            <a:ext cx="3383280" cy="4480560"/>
           </a:xfrm>
           <a:prstGeom prst="roundRect">
             <a:avLst/>
@@ -3406,14 +3705,14 @@
           </a:fontRef>
         </p:style>
         <p:txBody>
-          <a:bodyPr rtlCol="0" anchor="t" wrap="square" lIns="228600" rIns="228600" tIns="182880" bIns="182880"/>
+          <a:bodyPr rtlCol="0" anchor="t" wrap="square" lIns="201168" rIns="201168" tIns="164592" bIns="164592"/>
           <a:lstStyle/>
           <a:p>
             <a:pPr algn="ctr">
               <a:spcAft>
-                <a:spcPts val="800"/>
-              </a:spcAft>
-              <a:defRPr sz="1600" b="1">
+                <a:spcPts val="700"/>
+              </a:spcAft>
+              <a:defRPr sz="1400" b="1">
                 <a:solidFill>
                   <a:srgbClr val="06B6D4"/>
                 </a:solidFill>
@@ -3421,120 +3720,865 @@
               </a:defRPr>
             </a:pPr>
             <a:r>
-              <a:t>PharmaPulse 3D Siap Digunakan &amp; Teruji Akademis</a:t>
-            </a:r>
-          </a:p>
-          <a:p>
-            <a:pPr>
-              <a:spcAft>
-                <a:spcPts val="600"/>
-              </a:spcAft>
-              <a:defRPr sz="1200">
-                <a:solidFill>
-                  <a:srgbClr val="94A3B8"/>
-                </a:solidFill>
-                <a:latin typeface="Calibri"/>
-              </a:defRPr>
-            </a:pPr>
-            <a:r>
-              <a:t>• PharmaPulse 3D telah memenuhi standar komputasi QSAR ChEMBL, saringan PAINS/Brenk, ionisasi BCS, dan evaluasi Lipinski RO5 untuk 34 senyawa obat &amp; bahan alam.</a:t>
-            </a:r>
-          </a:p>
-          <a:p>
-            <a:pPr>
-              <a:spcAft>
-                <a:spcPts val="600"/>
-              </a:spcAft>
-              <a:defRPr sz="1200">
-                <a:solidFill>
-                  <a:srgbClr val="94A3B8"/>
-                </a:solidFill>
-                <a:latin typeface="Calibri"/>
-              </a:defRPr>
-            </a:pPr>
-            <a:r>
-              <a:t>• Terbukti presisi melalui validasi terhadap SwissADME SIB.</a:t>
-            </a:r>
-          </a:p>
-          <a:p>
-            <a:pPr>
-              <a:spcAft>
-                <a:spcPts val="600"/>
-              </a:spcAft>
-              <a:defRPr sz="1200">
-                <a:solidFill>
-                  <a:srgbClr val="94A3B8"/>
-                </a:solidFill>
-                <a:latin typeface="Calibri"/>
-              </a:defRPr>
-            </a:pPr>
-          </a:p>
-          <a:p>
-            <a:pPr>
-              <a:spcAft>
-                <a:spcPts val="600"/>
-              </a:spcAft>
-              <a:defRPr sz="1200">
-                <a:solidFill>
-                  <a:srgbClr val="94A3B8"/>
-                </a:solidFill>
-                <a:latin typeface="Calibri"/>
-              </a:defRPr>
-            </a:pPr>
-            <a:r>
-              <a:t>GitHub Repository: https://github.com/novarani1511/pharmapulse-3d</a:t>
-            </a:r>
-          </a:p>
-          <a:p>
-            <a:pPr>
-              <a:spcAft>
-                <a:spcPts val="600"/>
-              </a:spcAft>
-              <a:defRPr sz="1200">
-                <a:solidFill>
-                  <a:srgbClr val="94A3B8"/>
-                </a:solidFill>
-                <a:latin typeface="Calibri"/>
-              </a:defRPr>
-            </a:pPr>
-            <a:r>
-              <a:t>Demo Server Lokal: http://localhost:3000</a:t>
-            </a:r>
-          </a:p>
-          <a:p>
-            <a:pPr>
-              <a:spcAft>
-                <a:spcPts val="600"/>
-              </a:spcAft>
-              <a:defRPr sz="1200">
-                <a:solidFill>
-                  <a:srgbClr val="94A3B8"/>
-                </a:solidFill>
-                <a:latin typeface="Calibri"/>
-              </a:defRPr>
-            </a:pPr>
-          </a:p>
-          <a:p>
-            <a:pPr>
-              <a:spcAft>
-                <a:spcPts val="600"/>
-              </a:spcAft>
-              <a:defRPr sz="1200">
-                <a:solidFill>
-                  <a:srgbClr val="94A3B8"/>
-                </a:solidFill>
-                <a:latin typeface="Calibri"/>
-              </a:defRPr>
-            </a:pPr>
-            <a:r>
-              <a:t>Terima kasih atas masukan &amp; bimbingan Bapak/Ibu Dosen!</a:t>
-            </a:r>
-          </a:p>
-        </p:txBody>
-      </p:sp>
-      <p:sp>
-        <p:nvSpPr>
-          <p:cNvPr id="6" name="TextBox 5"/>
+              <a:t>Antibakteri &amp; Antimalaria</a:t>
+            </a:r>
+          </a:p>
+          <a:p>
+            <a:pPr>
+              <a:spcAft>
+                <a:spcPts val="400"/>
+              </a:spcAft>
+              <a:defRPr sz="1050">
+                <a:solidFill>
+                  <a:srgbClr val="94A3B8"/>
+                </a:solidFill>
+                <a:latin typeface="Calibri"/>
+              </a:defRPr>
+            </a:pPr>
+            <a:r>
+              <a:t>- Amoxicillin (Target: PBP-1A/2):</a:t>
+            </a:r>
+          </a:p>
+          <a:p>
+            <a:pPr>
+              <a:spcAft>
+                <a:spcPts val="400"/>
+              </a:spcAft>
+              <a:defRPr sz="1050">
+                <a:solidFill>
+                  <a:srgbClr val="94A3B8"/>
+                </a:solidFill>
+                <a:latin typeface="Calibri"/>
+              </a:defRPr>
+            </a:pPr>
+            <a:r>
+              <a:t>  * Ampicillin (94.6%)</a:t>
+            </a:r>
+          </a:p>
+          <a:p>
+            <a:pPr>
+              <a:spcAft>
+                <a:spcPts val="400"/>
+              </a:spcAft>
+              <a:defRPr sz="1050">
+                <a:solidFill>
+                  <a:srgbClr val="94A3B8"/>
+                </a:solidFill>
+                <a:latin typeface="Calibri"/>
+              </a:defRPr>
+            </a:pPr>
+            <a:r>
+              <a:t>  * Cephalexin (88.7%)</a:t>
+            </a:r>
+          </a:p>
+          <a:p>
+            <a:pPr>
+              <a:spcAft>
+                <a:spcPts val="400"/>
+              </a:spcAft>
+              <a:defRPr sz="1050">
+                <a:solidFill>
+                  <a:srgbClr val="94A3B8"/>
+                </a:solidFill>
+                <a:latin typeface="Calibri"/>
+              </a:defRPr>
+            </a:pPr>
+            <a:r>
+              <a:t>  * Penicillin V (86.3%)</a:t>
+            </a:r>
+          </a:p>
+          <a:p>
+            <a:pPr>
+              <a:spcAft>
+                <a:spcPts val="400"/>
+              </a:spcAft>
+              <a:defRPr sz="1050">
+                <a:solidFill>
+                  <a:srgbClr val="94A3B8"/>
+                </a:solidFill>
+                <a:latin typeface="Calibri"/>
+              </a:defRPr>
+            </a:pPr>
+            <a:r>
+              <a:t>  * Cloxacillin (84.8%)</a:t>
+            </a:r>
+          </a:p>
+          <a:p>
+            <a:pPr>
+              <a:spcAft>
+                <a:spcPts val="400"/>
+              </a:spcAft>
+              <a:defRPr sz="1050">
+                <a:solidFill>
+                  <a:srgbClr val="94A3B8"/>
+                </a:solidFill>
+                <a:latin typeface="Calibri"/>
+              </a:defRPr>
+            </a:pPr>
+            <a:r>
+              <a:t>  * Piperacillin (82.9%)</a:t>
+            </a:r>
+          </a:p>
+          <a:p>
+            <a:pPr>
+              <a:spcAft>
+                <a:spcPts val="400"/>
+              </a:spcAft>
+              <a:defRPr sz="1050">
+                <a:solidFill>
+                  <a:srgbClr val="94A3B8"/>
+                </a:solidFill>
+                <a:latin typeface="Calibri"/>
+              </a:defRPr>
+            </a:pPr>
+            <a:r>
+              <a:t>- Artemisinin (Target: PfATP6 / SERCA):</a:t>
+            </a:r>
+          </a:p>
+          <a:p>
+            <a:pPr>
+              <a:spcAft>
+                <a:spcPts val="400"/>
+              </a:spcAft>
+              <a:defRPr sz="1050">
+                <a:solidFill>
+                  <a:srgbClr val="94A3B8"/>
+                </a:solidFill>
+                <a:latin typeface="Calibri"/>
+              </a:defRPr>
+            </a:pPr>
+            <a:r>
+              <a:t>  * Dihydroartemisinin (96.2%)</a:t>
+            </a:r>
+          </a:p>
+          <a:p>
+            <a:pPr>
+              <a:spcAft>
+                <a:spcPts val="400"/>
+              </a:spcAft>
+              <a:defRPr sz="1050">
+                <a:solidFill>
+                  <a:srgbClr val="94A3B8"/>
+                </a:solidFill>
+                <a:latin typeface="Calibri"/>
+              </a:defRPr>
+            </a:pPr>
+            <a:r>
+              <a:t>  * Artesunate (93.8%)</a:t>
+            </a:r>
+          </a:p>
+          <a:p>
+            <a:pPr>
+              <a:spcAft>
+                <a:spcPts val="400"/>
+              </a:spcAft>
+              <a:defRPr sz="1050">
+                <a:solidFill>
+                  <a:srgbClr val="94A3B8"/>
+                </a:solidFill>
+                <a:latin typeface="Calibri"/>
+              </a:defRPr>
+            </a:pPr>
+            <a:r>
+              <a:t>  * Artemether (91.5%)</a:t>
+            </a:r>
+          </a:p>
+          <a:p>
+            <a:pPr>
+              <a:spcAft>
+                <a:spcPts val="400"/>
+              </a:spcAft>
+              <a:defRPr sz="1050">
+                <a:solidFill>
+                  <a:srgbClr val="94A3B8"/>
+                </a:solidFill>
+                <a:latin typeface="Calibri"/>
+              </a:defRPr>
+            </a:pPr>
+            <a:r>
+              <a:t>  * Arteether (89.2%)</a:t>
+            </a:r>
+          </a:p>
+          <a:p>
+            <a:pPr>
+              <a:spcAft>
+                <a:spcPts val="400"/>
+              </a:spcAft>
+              <a:defRPr sz="1050">
+                <a:solidFill>
+                  <a:srgbClr val="94A3B8"/>
+                </a:solidFill>
+                <a:latin typeface="Calibri"/>
+              </a:defRPr>
+            </a:pPr>
+            <a:r>
+              <a:t>  * Deoxyartemisinin (85.7%)</a:t>
+            </a:r>
+          </a:p>
+          <a:p>
+            <a:pPr>
+              <a:spcAft>
+                <a:spcPts val="400"/>
+              </a:spcAft>
+              <a:defRPr sz="1050">
+                <a:solidFill>
+                  <a:srgbClr val="94A3B8"/>
+                </a:solidFill>
+                <a:latin typeface="Calibri"/>
+              </a:defRPr>
+            </a:pPr>
+            <a:r>
+              <a:t>- Quinine (Target: Hemozoin / Ion Channels):</a:t>
+            </a:r>
+          </a:p>
+          <a:p>
+            <a:pPr>
+              <a:spcAft>
+                <a:spcPts val="400"/>
+              </a:spcAft>
+              <a:defRPr sz="1050">
+                <a:solidFill>
+                  <a:srgbClr val="94A3B8"/>
+                </a:solidFill>
+                <a:latin typeface="Calibri"/>
+              </a:defRPr>
+            </a:pPr>
+            <a:r>
+              <a:t>  * Quinidine (98.4%) | Chloroquine (86.8%)</a:t>
+            </a:r>
+          </a:p>
+        </p:txBody>
+      </p:sp>
+      <p:sp>
+        <p:nvSpPr>
+          <p:cNvPr id="7" name="Rounded Rectangle 6"/>
+          <p:cNvSpPr/>
+          <p:nvPr/>
+        </p:nvSpPr>
+        <p:spPr>
+          <a:xfrm>
+            <a:off x="4389120" y="1554480"/>
+            <a:ext cx="3383280" cy="4480560"/>
+          </a:xfrm>
+          <a:prstGeom prst="roundRect">
+            <a:avLst/>
+          </a:prstGeom>
+          <a:solidFill>
+            <a:srgbClr val="111827"/>
+          </a:solidFill>
+          <a:ln w="12700">
+            <a:solidFill>
+              <a:srgbClr val="1E293B"/>
+            </a:solidFill>
+          </a:ln>
+        </p:spPr>
+        <p:style>
+          <a:lnRef idx="1">
+            <a:schemeClr val="accent1"/>
+          </a:lnRef>
+          <a:fillRef idx="3">
+            <a:schemeClr val="accent1"/>
+          </a:fillRef>
+          <a:effectRef idx="2">
+            <a:schemeClr val="accent1"/>
+          </a:effectRef>
+          <a:fontRef idx="minor">
+            <a:schemeClr val="lt1"/>
+          </a:fontRef>
+        </p:style>
+        <p:txBody>
+          <a:bodyPr rtlCol="0" anchor="t" wrap="square" lIns="201168" rIns="201168" tIns="164592" bIns="164592"/>
+          <a:lstStyle/>
+          <a:p>
+            <a:pPr algn="ctr">
+              <a:spcAft>
+                <a:spcPts val="700"/>
+              </a:spcAft>
+              <a:defRPr sz="1400" b="1">
+                <a:solidFill>
+                  <a:srgbClr val="8B5CF6"/>
+                </a:solidFill>
+                <a:latin typeface="Arial"/>
+              </a:defRPr>
+            </a:pPr>
+            <a:r>
+              <a:t>Antivirus Flu &amp; Saluran Nafas</a:t>
+            </a:r>
+          </a:p>
+          <a:p>
+            <a:pPr>
+              <a:spcAft>
+                <a:spcPts val="400"/>
+              </a:spcAft>
+              <a:defRPr sz="1050">
+                <a:solidFill>
+                  <a:srgbClr val="94A3B8"/>
+                </a:solidFill>
+                <a:latin typeface="Calibri"/>
+              </a:defRPr>
+            </a:pPr>
+            <a:r>
+              <a:t>- Remdesivir (Target: RdRp nsp12):</a:t>
+            </a:r>
+          </a:p>
+          <a:p>
+            <a:pPr>
+              <a:spcAft>
+                <a:spcPts val="400"/>
+              </a:spcAft>
+              <a:defRPr sz="1050">
+                <a:solidFill>
+                  <a:srgbClr val="94A3B8"/>
+                </a:solidFill>
+                <a:latin typeface="Calibri"/>
+              </a:defRPr>
+            </a:pPr>
+            <a:r>
+              <a:t>  * GS-441524 (89.8%) | Galidesivir (88.4%)</a:t>
+            </a:r>
+          </a:p>
+          <a:p>
+            <a:pPr>
+              <a:spcAft>
+                <a:spcPts val="400"/>
+              </a:spcAft>
+              <a:defRPr sz="1050">
+                <a:solidFill>
+                  <a:srgbClr val="94A3B8"/>
+                </a:solidFill>
+                <a:latin typeface="Calibri"/>
+              </a:defRPr>
+            </a:pPr>
+            <a:r>
+              <a:t>  * Sofosbuvir (86.7%) | Molnupiravir (85.1%)</a:t>
+            </a:r>
+          </a:p>
+          <a:p>
+            <a:pPr>
+              <a:spcAft>
+                <a:spcPts val="400"/>
+              </a:spcAft>
+              <a:defRPr sz="1050">
+                <a:solidFill>
+                  <a:srgbClr val="94A3B8"/>
+                </a:solidFill>
+                <a:latin typeface="Calibri"/>
+              </a:defRPr>
+            </a:pPr>
+            <a:r>
+              <a:t>- Oseltamivir (Target: Neuraminidase NA):</a:t>
+            </a:r>
+          </a:p>
+          <a:p>
+            <a:pPr>
+              <a:spcAft>
+                <a:spcPts val="400"/>
+              </a:spcAft>
+              <a:defRPr sz="1050">
+                <a:solidFill>
+                  <a:srgbClr val="94A3B8"/>
+                </a:solidFill>
+                <a:latin typeface="Calibri"/>
+              </a:defRPr>
+            </a:pPr>
+            <a:r>
+              <a:t>  * Oseltamivir Carboxylate (95.1%)</a:t>
+            </a:r>
+          </a:p>
+          <a:p>
+            <a:pPr>
+              <a:spcAft>
+                <a:spcPts val="400"/>
+              </a:spcAft>
+              <a:defRPr sz="1050">
+                <a:solidFill>
+                  <a:srgbClr val="94A3B8"/>
+                </a:solidFill>
+                <a:latin typeface="Calibri"/>
+              </a:defRPr>
+            </a:pPr>
+            <a:r>
+              <a:t>  * Peramivir (88.9%) | Zanamivir (86.4%)</a:t>
+            </a:r>
+          </a:p>
+          <a:p>
+            <a:pPr>
+              <a:spcAft>
+                <a:spcPts val="400"/>
+              </a:spcAft>
+              <a:defRPr sz="1050">
+                <a:solidFill>
+                  <a:srgbClr val="94A3B8"/>
+                </a:solidFill>
+                <a:latin typeface="Calibri"/>
+              </a:defRPr>
+            </a:pPr>
+            <a:r>
+              <a:t>- Zanamivir (Target: Sialidase NA):</a:t>
+            </a:r>
+          </a:p>
+          <a:p>
+            <a:pPr>
+              <a:spcAft>
+                <a:spcPts val="400"/>
+              </a:spcAft>
+              <a:defRPr sz="1050">
+                <a:solidFill>
+                  <a:srgbClr val="94A3B8"/>
+                </a:solidFill>
+                <a:latin typeface="Calibri"/>
+              </a:defRPr>
+            </a:pPr>
+            <a:r>
+              <a:t>  * Laninamivir (93.4%) | Neu5Ac2en (91.2%)</a:t>
+            </a:r>
+          </a:p>
+          <a:p>
+            <a:pPr>
+              <a:spcAft>
+                <a:spcPts val="400"/>
+              </a:spcAft>
+              <a:defRPr sz="1050">
+                <a:solidFill>
+                  <a:srgbClr val="94A3B8"/>
+                </a:solidFill>
+                <a:latin typeface="Calibri"/>
+              </a:defRPr>
+            </a:pPr>
+            <a:r>
+              <a:t>- Peramivir (Target: Neuraminidase NA):</a:t>
+            </a:r>
+          </a:p>
+          <a:p>
+            <a:pPr>
+              <a:spcAft>
+                <a:spcPts val="400"/>
+              </a:spcAft>
+              <a:defRPr sz="1050">
+                <a:solidFill>
+                  <a:srgbClr val="94A3B8"/>
+                </a:solidFill>
+                <a:latin typeface="Calibri"/>
+              </a:defRPr>
+            </a:pPr>
+            <a:r>
+              <a:t>  * Oseltamivir (88.9%) | Laninamivir (83.7%)</a:t>
+            </a:r>
+          </a:p>
+          <a:p>
+            <a:pPr>
+              <a:spcAft>
+                <a:spcPts val="400"/>
+              </a:spcAft>
+              <a:defRPr sz="1050">
+                <a:solidFill>
+                  <a:srgbClr val="94A3B8"/>
+                </a:solidFill>
+                <a:latin typeface="Calibri"/>
+              </a:defRPr>
+            </a:pPr>
+            <a:r>
+              <a:t>- Baloxavir (Target: Cap-Endonuclease):</a:t>
+            </a:r>
+          </a:p>
+          <a:p>
+            <a:pPr>
+              <a:spcAft>
+                <a:spcPts val="400"/>
+              </a:spcAft>
+              <a:defRPr sz="1050">
+                <a:solidFill>
+                  <a:srgbClr val="94A3B8"/>
+                </a:solidFill>
+                <a:latin typeface="Calibri"/>
+              </a:defRPr>
+            </a:pPr>
+            <a:r>
+              <a:t>  * Baloxavir Acid (95.8%) | Pimodivir (79.6%)</a:t>
+            </a:r>
+          </a:p>
+        </p:txBody>
+      </p:sp>
+      <p:sp>
+        <p:nvSpPr>
+          <p:cNvPr id="8" name="Rounded Rectangle 7"/>
+          <p:cNvSpPr/>
+          <p:nvPr/>
+        </p:nvSpPr>
+        <p:spPr>
+          <a:xfrm>
+            <a:off x="8046720" y="1554480"/>
+            <a:ext cx="3383280" cy="4480560"/>
+          </a:xfrm>
+          <a:prstGeom prst="roundRect">
+            <a:avLst/>
+          </a:prstGeom>
+          <a:solidFill>
+            <a:srgbClr val="111827"/>
+          </a:solidFill>
+          <a:ln w="12700">
+            <a:solidFill>
+              <a:srgbClr val="1E293B"/>
+            </a:solidFill>
+          </a:ln>
+        </p:spPr>
+        <p:style>
+          <a:lnRef idx="1">
+            <a:schemeClr val="accent1"/>
+          </a:lnRef>
+          <a:fillRef idx="3">
+            <a:schemeClr val="accent1"/>
+          </a:fillRef>
+          <a:effectRef idx="2">
+            <a:schemeClr val="accent1"/>
+          </a:effectRef>
+          <a:fontRef idx="minor">
+            <a:schemeClr val="lt1"/>
+          </a:fontRef>
+        </p:style>
+        <p:txBody>
+          <a:bodyPr rtlCol="0" anchor="t" wrap="square" lIns="201168" rIns="201168" tIns="164592" bIns="164592"/>
+          <a:lstStyle/>
+          <a:p>
+            <a:pPr algn="ctr">
+              <a:spcAft>
+                <a:spcPts val="700"/>
+              </a:spcAft>
+              <a:defRPr sz="1400" b="1">
+                <a:solidFill>
+                  <a:srgbClr val="10B981"/>
+                </a:solidFill>
+                <a:latin typeface="Arial"/>
+              </a:defRPr>
+            </a:pPr>
+            <a:r>
+              <a:t>Antivirus Herpes, Hep &amp; Sitokin</a:t>
+            </a:r>
+          </a:p>
+          <a:p>
+            <a:pPr>
+              <a:spcAft>
+                <a:spcPts val="400"/>
+              </a:spcAft>
+              <a:defRPr sz="1050">
+                <a:solidFill>
+                  <a:srgbClr val="94A3B8"/>
+                </a:solidFill>
+                <a:latin typeface="Calibri"/>
+              </a:defRPr>
+            </a:pPr>
+            <a:r>
+              <a:t>- Acyclovir (Target: HSV-TK Polymerase):</a:t>
+            </a:r>
+          </a:p>
+          <a:p>
+            <a:pPr>
+              <a:spcAft>
+                <a:spcPts val="400"/>
+              </a:spcAft>
+              <a:defRPr sz="1050">
+                <a:solidFill>
+                  <a:srgbClr val="94A3B8"/>
+                </a:solidFill>
+                <a:latin typeface="Calibri"/>
+              </a:defRPr>
+            </a:pPr>
+            <a:r>
+              <a:t>  * Ganciclovir (94.1%) | Penciclovir (91.8%)</a:t>
+            </a:r>
+          </a:p>
+          <a:p>
+            <a:pPr>
+              <a:spcAft>
+                <a:spcPts val="400"/>
+              </a:spcAft>
+              <a:defRPr sz="1050">
+                <a:solidFill>
+                  <a:srgbClr val="94A3B8"/>
+                </a:solidFill>
+                <a:latin typeface="Calibri"/>
+              </a:defRPr>
+            </a:pPr>
+            <a:r>
+              <a:t>  * Valacyclovir (89.4%) | Famciclovir (85.3%)</a:t>
+            </a:r>
+          </a:p>
+          <a:p>
+            <a:pPr>
+              <a:spcAft>
+                <a:spcPts val="400"/>
+              </a:spcAft>
+              <a:defRPr sz="1050">
+                <a:solidFill>
+                  <a:srgbClr val="94A3B8"/>
+                </a:solidFill>
+                <a:latin typeface="Calibri"/>
+              </a:defRPr>
+            </a:pPr>
+            <a:r>
+              <a:t>- Valacyclovir (Target: Prodrug L-Valyl):</a:t>
+            </a:r>
+          </a:p>
+          <a:p>
+            <a:pPr>
+              <a:spcAft>
+                <a:spcPts val="400"/>
+              </a:spcAft>
+              <a:defRPr sz="1050">
+                <a:solidFill>
+                  <a:srgbClr val="94A3B8"/>
+                </a:solidFill>
+                <a:latin typeface="Calibri"/>
+              </a:defRPr>
+            </a:pPr>
+            <a:r>
+              <a:t>  * Valganciclovir (92.8%) | Acyclovir (89.4%)</a:t>
+            </a:r>
+          </a:p>
+          <a:p>
+            <a:pPr>
+              <a:spcAft>
+                <a:spcPts val="400"/>
+              </a:spcAft>
+              <a:defRPr sz="1050">
+                <a:solidFill>
+                  <a:srgbClr val="94A3B8"/>
+                </a:solidFill>
+                <a:latin typeface="Calibri"/>
+              </a:defRPr>
+            </a:pPr>
+            <a:r>
+              <a:t>- Famciclovir (Target: Prodrug Diacetyl):</a:t>
+            </a:r>
+          </a:p>
+          <a:p>
+            <a:pPr>
+              <a:spcAft>
+                <a:spcPts val="400"/>
+              </a:spcAft>
+              <a:defRPr sz="1050">
+                <a:solidFill>
+                  <a:srgbClr val="94A3B8"/>
+                </a:solidFill>
+                <a:latin typeface="Calibri"/>
+              </a:defRPr>
+            </a:pPr>
+            <a:r>
+              <a:t>  * Penciclovir (88.2%) | Acyclovir (85.3%)</a:t>
+            </a:r>
+          </a:p>
+          <a:p>
+            <a:pPr>
+              <a:spcAft>
+                <a:spcPts val="400"/>
+              </a:spcAft>
+              <a:defRPr sz="1050">
+                <a:solidFill>
+                  <a:srgbClr val="94A3B8"/>
+                </a:solidFill>
+                <a:latin typeface="Calibri"/>
+              </a:defRPr>
+            </a:pPr>
+            <a:r>
+              <a:t>- Sofosbuvir (Target: HCV NS5B RdRp):</a:t>
+            </a:r>
+          </a:p>
+          <a:p>
+            <a:pPr>
+              <a:spcAft>
+                <a:spcPts val="400"/>
+              </a:spcAft>
+              <a:defRPr sz="1050">
+                <a:solidFill>
+                  <a:srgbClr val="94A3B8"/>
+                </a:solidFill>
+                <a:latin typeface="Calibri"/>
+              </a:defRPr>
+            </a:pPr>
+            <a:r>
+              <a:t>  * Remdesivir (86.7%) | Galidesivir (84.5%)</a:t>
+            </a:r>
+          </a:p>
+          <a:p>
+            <a:pPr>
+              <a:spcAft>
+                <a:spcPts val="400"/>
+              </a:spcAft>
+              <a:defRPr sz="1050">
+                <a:solidFill>
+                  <a:srgbClr val="94A3B8"/>
+                </a:solidFill>
+                <a:latin typeface="Calibri"/>
+              </a:defRPr>
+            </a:pPr>
+            <a:r>
+              <a:t>- Interferon (Target: IFNAR1/2 / JAK-STAT):</a:t>
+            </a:r>
+          </a:p>
+          <a:p>
+            <a:pPr>
+              <a:spcAft>
+                <a:spcPts val="400"/>
+              </a:spcAft>
+              <a:defRPr sz="1050">
+                <a:solidFill>
+                  <a:srgbClr val="94A3B8"/>
+                </a:solidFill>
+                <a:latin typeface="Calibri"/>
+              </a:defRPr>
+            </a:pPr>
+            <a:r>
+              <a:t>  * Imiquimod (86.2%) | Ruxolitinib (84.8%)</a:t>
+            </a:r>
+          </a:p>
+        </p:txBody>
+      </p:sp>
+    </p:spTree>
+  </p:cSld>
+  <p:clrMapOvr>
+    <a:masterClrMapping/>
+  </p:clrMapOvr>
+</p:sld>
+</file>
+
+<file path=ppt/slides/slide11.xml><?xml version="1.0" encoding="utf-8"?>
+<p:sld xmlns:a="http://schemas.openxmlformats.org/drawingml/2006/main" xmlns:p="http://schemas.openxmlformats.org/presentationml/2006/main" xmlns:r="http://schemas.openxmlformats.org/officeDocument/2006/relationships">
+  <p:cSld>
+    <p:bg>
+      <p:bgPr>
+        <a:solidFill>
+          <a:srgbClr val="090D16"/>
+        </a:solidFill>
+        <a:effectLst/>
+      </p:bgPr>
+    </p:bg>
+    <p:spTree>
+      <p:nvGrpSpPr>
+        <p:cNvPr id="1" name=""/>
+        <p:cNvGrpSpPr/>
+        <p:nvPr/>
+      </p:nvGrpSpPr>
+      <p:grpSpPr/>
+      <p:sp>
+        <p:nvSpPr>
+          <p:cNvPr id="2" name="TextBox 1"/>
+          <p:cNvSpPr txBox="1"/>
+          <p:nvPr/>
+        </p:nvSpPr>
+        <p:spPr>
+          <a:xfrm>
+            <a:off x="731520" y="365760"/>
+            <a:ext cx="9144000" cy="320040"/>
+          </a:xfrm>
+          <a:prstGeom prst="rect">
+            <a:avLst/>
+          </a:prstGeom>
+          <a:noFill/>
+        </p:spPr>
+        <p:txBody>
+          <a:bodyPr wrap="none">
+            <a:spAutoFit/>
+          </a:bodyPr>
+          <a:lstStyle/>
+          <a:p>
+            <a:pPr>
+              <a:defRPr sz="1000" b="1">
+                <a:solidFill>
+                  <a:srgbClr val="06B6D4"/>
+                </a:solidFill>
+                <a:latin typeface="Arial"/>
+              </a:defRPr>
+            </a:pPr>
+            <a:r>
+              <a:t>PHARMAPULSE 3D - INOVASI CADD &amp; KIMIA MEDISINAL</a:t>
+            </a:r>
+          </a:p>
+        </p:txBody>
+      </p:sp>
+      <p:sp>
+        <p:nvSpPr>
+          <p:cNvPr id="3" name="TextBox 2"/>
+          <p:cNvSpPr txBox="1"/>
+          <p:nvPr/>
+        </p:nvSpPr>
+        <p:spPr>
+          <a:xfrm>
+            <a:off x="731520" y="640080"/>
+            <a:ext cx="10728655" cy="685800"/>
+          </a:xfrm>
+          <a:prstGeom prst="rect">
+            <a:avLst/>
+          </a:prstGeom>
+          <a:noFill/>
+        </p:spPr>
+        <p:txBody>
+          <a:bodyPr wrap="none">
+            <a:spAutoFit/>
+          </a:bodyPr>
+          <a:lstStyle/>
+          <a:p>
+            <a:pPr>
+              <a:defRPr sz="2100" b="1">
+                <a:solidFill>
+                  <a:srgbClr val="F8FAFC"/>
+                </a:solidFill>
+                <a:latin typeface="Arial"/>
+              </a:defRPr>
+            </a:pPr>
+            <a:r>
+              <a:t>10. Matriks Analog &amp; Tanimoto (2: HIV, Onkologi &amp; Bahan Alam)</a:t>
+            </a:r>
+          </a:p>
+        </p:txBody>
+      </p:sp>
+      <p:sp>
+        <p:nvSpPr>
+          <p:cNvPr id="4" name="Rectangle 3"/>
+          <p:cNvSpPr/>
+          <p:nvPr/>
+        </p:nvSpPr>
+        <p:spPr>
+          <a:xfrm>
+            <a:off x="731520" y="1325880"/>
+            <a:ext cx="10728655" cy="18288"/>
+          </a:xfrm>
+          <a:prstGeom prst="rect">
+            <a:avLst/>
+          </a:prstGeom>
+          <a:solidFill>
+            <a:srgbClr val="1E293B"/>
+          </a:solidFill>
+          <a:ln>
+            <a:solidFill>
+              <a:srgbClr val="1E293B"/>
+            </a:solidFill>
+          </a:ln>
+        </p:spPr>
+        <p:style>
+          <a:lnRef idx="1">
+            <a:schemeClr val="accent1"/>
+          </a:lnRef>
+          <a:fillRef idx="3">
+            <a:schemeClr val="accent1"/>
+          </a:fillRef>
+          <a:effectRef idx="2">
+            <a:schemeClr val="accent1"/>
+          </a:effectRef>
+          <a:fontRef idx="minor">
+            <a:schemeClr val="lt1"/>
+          </a:fontRef>
+        </p:style>
+        <p:txBody>
+          <a:bodyPr rtlCol="0" anchor="ctr"/>
+          <a:lstStyle/>
+          <a:p>
+            <a:pPr algn="ctr"/>
+          </a:p>
+        </p:txBody>
+      </p:sp>
+      <p:sp>
+        <p:nvSpPr>
+          <p:cNvPr id="5" name="TextBox 4"/>
           <p:cNvSpPr txBox="1"/>
           <p:nvPr/>
         </p:nvSpPr>
@@ -3555,15 +4599,2544 @@
           <a:lstStyle/>
           <a:p>
             <a:pPr>
-              <a:defRPr sz="1000">
-                <a:solidFill>
-                  <a:srgbClr val="94A3B8"/>
-                </a:solidFill>
-                <a:latin typeface="Calibri"/>
-              </a:defRPr>
-            </a:pPr>
-            <a:r>
-              <a:t>PharmaPulse 3D - Presentasi Komprehensif Akademis | Slide 10 dari 10</a:t>
+              <a:defRPr sz="950">
+                <a:solidFill>
+                  <a:srgbClr val="94A3B8"/>
+                </a:solidFill>
+                <a:latin typeface="Calibri"/>
+              </a:defRPr>
+            </a:pPr>
+            <a:r>
+              <a:t>PharmaPulse 3D | Platform Komputasi Kimia Medisinal &amp; In Silico Drug Discovery | Slide 11 dari 14</a:t>
+            </a:r>
+          </a:p>
+        </p:txBody>
+      </p:sp>
+      <p:sp>
+        <p:nvSpPr>
+          <p:cNvPr id="6" name="Rounded Rectangle 5"/>
+          <p:cNvSpPr/>
+          <p:nvPr/>
+        </p:nvSpPr>
+        <p:spPr>
+          <a:xfrm>
+            <a:off x="731520" y="1554480"/>
+            <a:ext cx="3383280" cy="4480560"/>
+          </a:xfrm>
+          <a:prstGeom prst="roundRect">
+            <a:avLst/>
+          </a:prstGeom>
+          <a:solidFill>
+            <a:srgbClr val="111827"/>
+          </a:solidFill>
+          <a:ln w="12700">
+            <a:solidFill>
+              <a:srgbClr val="1E293B"/>
+            </a:solidFill>
+          </a:ln>
+        </p:spPr>
+        <p:style>
+          <a:lnRef idx="1">
+            <a:schemeClr val="accent1"/>
+          </a:lnRef>
+          <a:fillRef idx="3">
+            <a:schemeClr val="accent1"/>
+          </a:fillRef>
+          <a:effectRef idx="2">
+            <a:schemeClr val="accent1"/>
+          </a:effectRef>
+          <a:fontRef idx="minor">
+            <a:schemeClr val="lt1"/>
+          </a:fontRef>
+        </p:style>
+        <p:txBody>
+          <a:bodyPr rtlCol="0" anchor="t" wrap="square" lIns="201168" rIns="201168" tIns="164592" bIns="164592"/>
+          <a:lstStyle/>
+          <a:p>
+            <a:pPr algn="ctr">
+              <a:spcAft>
+                <a:spcPts val="700"/>
+              </a:spcAft>
+              <a:defRPr sz="1400" b="1">
+                <a:solidFill>
+                  <a:srgbClr val="06B6D4"/>
+                </a:solidFill>
+                <a:latin typeface="Arial"/>
+              </a:defRPr>
+            </a:pPr>
+            <a:r>
+              <a:t>Antiretroviral HIV (NRTI/NNRTI)</a:t>
+            </a:r>
+          </a:p>
+          <a:p>
+            <a:pPr>
+              <a:spcAft>
+                <a:spcPts val="400"/>
+              </a:spcAft>
+              <a:defRPr sz="1050">
+                <a:solidFill>
+                  <a:srgbClr val="94A3B8"/>
+                </a:solidFill>
+                <a:latin typeface="Calibri"/>
+              </a:defRPr>
+            </a:pPr>
+            <a:r>
+              <a:t>- Lamivudine / 3TC (Target: HIV Reverse Tr.):</a:t>
+            </a:r>
+          </a:p>
+          <a:p>
+            <a:pPr>
+              <a:spcAft>
+                <a:spcPts val="400"/>
+              </a:spcAft>
+              <a:defRPr sz="1050">
+                <a:solidFill>
+                  <a:srgbClr val="94A3B8"/>
+                </a:solidFill>
+                <a:latin typeface="Calibri"/>
+              </a:defRPr>
+            </a:pPr>
+            <a:r>
+              <a:t>  * Emtricitabine / FTC (96.8%)</a:t>
+            </a:r>
+          </a:p>
+          <a:p>
+            <a:pPr>
+              <a:spcAft>
+                <a:spcPts val="400"/>
+              </a:spcAft>
+              <a:defRPr sz="1050">
+                <a:solidFill>
+                  <a:srgbClr val="94A3B8"/>
+                </a:solidFill>
+                <a:latin typeface="Calibri"/>
+              </a:defRPr>
+            </a:pPr>
+            <a:r>
+              <a:t>  * Zalcitabine / ddC (92.4%)</a:t>
+            </a:r>
+          </a:p>
+          <a:p>
+            <a:pPr>
+              <a:spcAft>
+                <a:spcPts val="400"/>
+              </a:spcAft>
+              <a:defRPr sz="1050">
+                <a:solidFill>
+                  <a:srgbClr val="94A3B8"/>
+                </a:solidFill>
+                <a:latin typeface="Calibri"/>
+              </a:defRPr>
+            </a:pPr>
+            <a:r>
+              <a:t>  * Stavudine (86.7%) | Zidovudine (84.3%)</a:t>
+            </a:r>
+          </a:p>
+          <a:p>
+            <a:pPr>
+              <a:spcAft>
+                <a:spcPts val="400"/>
+              </a:spcAft>
+              <a:defRPr sz="1050">
+                <a:solidFill>
+                  <a:srgbClr val="94A3B8"/>
+                </a:solidFill>
+                <a:latin typeface="Calibri"/>
+              </a:defRPr>
+            </a:pPr>
+            <a:r>
+              <a:t>- Tenofovir (Target: NtRTI Reverse Tr.):</a:t>
+            </a:r>
+          </a:p>
+          <a:p>
+            <a:pPr>
+              <a:spcAft>
+                <a:spcPts val="400"/>
+              </a:spcAft>
+              <a:defRPr sz="1050">
+                <a:solidFill>
+                  <a:srgbClr val="94A3B8"/>
+                </a:solidFill>
+                <a:latin typeface="Calibri"/>
+              </a:defRPr>
+            </a:pPr>
+            <a:r>
+              <a:t>  * Adefovir (93.8%) | TDF (91.5%)</a:t>
+            </a:r>
+          </a:p>
+          <a:p>
+            <a:pPr>
+              <a:spcAft>
+                <a:spcPts val="400"/>
+              </a:spcAft>
+              <a:defRPr sz="1050">
+                <a:solidFill>
+                  <a:srgbClr val="94A3B8"/>
+                </a:solidFill>
+                <a:latin typeface="Calibri"/>
+              </a:defRPr>
+            </a:pPr>
+            <a:r>
+              <a:t>  * Tenofovir Alafenamide (89.2%)</a:t>
+            </a:r>
+          </a:p>
+          <a:p>
+            <a:pPr>
+              <a:spcAft>
+                <a:spcPts val="400"/>
+              </a:spcAft>
+              <a:defRPr sz="1050">
+                <a:solidFill>
+                  <a:srgbClr val="94A3B8"/>
+                </a:solidFill>
+                <a:latin typeface="Calibri"/>
+              </a:defRPr>
+            </a:pPr>
+            <a:r>
+              <a:t>- Zidovudine / AZT (Target: HIV Reverse Tr.):</a:t>
+            </a:r>
+          </a:p>
+          <a:p>
+            <a:pPr>
+              <a:spcAft>
+                <a:spcPts val="400"/>
+              </a:spcAft>
+              <a:defRPr sz="1050">
+                <a:solidFill>
+                  <a:srgbClr val="94A3B8"/>
+                </a:solidFill>
+                <a:latin typeface="Calibri"/>
+              </a:defRPr>
+            </a:pPr>
+            <a:r>
+              <a:t>  * Stavudine (93.5%) | Lamivudine (84.3%)</a:t>
+            </a:r>
+          </a:p>
+          <a:p>
+            <a:pPr>
+              <a:spcAft>
+                <a:spcPts val="400"/>
+              </a:spcAft>
+              <a:defRPr sz="1050">
+                <a:solidFill>
+                  <a:srgbClr val="94A3B8"/>
+                </a:solidFill>
+                <a:latin typeface="Calibri"/>
+              </a:defRPr>
+            </a:pPr>
+            <a:r>
+              <a:t>- Efavirenz (Target: NNRTI Allosteric):</a:t>
+            </a:r>
+          </a:p>
+          <a:p>
+            <a:pPr>
+              <a:spcAft>
+                <a:spcPts val="400"/>
+              </a:spcAft>
+              <a:defRPr sz="1050">
+                <a:solidFill>
+                  <a:srgbClr val="94A3B8"/>
+                </a:solidFill>
+                <a:latin typeface="Calibri"/>
+              </a:defRPr>
+            </a:pPr>
+            <a:r>
+              <a:t>  * Nevirapine (87.8%) | Rilpivirine (86.9%)</a:t>
+            </a:r>
+          </a:p>
+          <a:p>
+            <a:pPr>
+              <a:spcAft>
+                <a:spcPts val="400"/>
+              </a:spcAft>
+              <a:defRPr sz="1050">
+                <a:solidFill>
+                  <a:srgbClr val="94A3B8"/>
+                </a:solidFill>
+                <a:latin typeface="Calibri"/>
+              </a:defRPr>
+            </a:pPr>
+            <a:r>
+              <a:t>  * Etravirine (85.6%) | Doravirine (84.2%)</a:t>
+            </a:r>
+          </a:p>
+        </p:txBody>
+      </p:sp>
+      <p:sp>
+        <p:nvSpPr>
+          <p:cNvPr id="7" name="Rounded Rectangle 6"/>
+          <p:cNvSpPr/>
+          <p:nvPr/>
+        </p:nvSpPr>
+        <p:spPr>
+          <a:xfrm>
+            <a:off x="4389120" y="1554480"/>
+            <a:ext cx="3383280" cy="4480560"/>
+          </a:xfrm>
+          <a:prstGeom prst="roundRect">
+            <a:avLst/>
+          </a:prstGeom>
+          <a:solidFill>
+            <a:srgbClr val="111827"/>
+          </a:solidFill>
+          <a:ln w="12700">
+            <a:solidFill>
+              <a:srgbClr val="1E293B"/>
+            </a:solidFill>
+          </a:ln>
+        </p:spPr>
+        <p:style>
+          <a:lnRef idx="1">
+            <a:schemeClr val="accent1"/>
+          </a:lnRef>
+          <a:fillRef idx="3">
+            <a:schemeClr val="accent1"/>
+          </a:fillRef>
+          <a:effectRef idx="2">
+            <a:schemeClr val="accent1"/>
+          </a:effectRef>
+          <a:fontRef idx="minor">
+            <a:schemeClr val="lt1"/>
+          </a:fontRef>
+        </p:style>
+        <p:txBody>
+          <a:bodyPr rtlCol="0" anchor="t" wrap="square" lIns="201168" rIns="201168" tIns="164592" bIns="164592"/>
+          <a:lstStyle/>
+          <a:p>
+            <a:pPr algn="ctr">
+              <a:spcAft>
+                <a:spcPts val="700"/>
+              </a:spcAft>
+              <a:defRPr sz="1400" b="1">
+                <a:solidFill>
+                  <a:srgbClr val="8B5CF6"/>
+                </a:solidFill>
+                <a:latin typeface="Arial"/>
+              </a:defRPr>
+            </a:pPr>
+            <a:r>
+              <a:t>Metabolik &amp; Onkologi</a:t>
+            </a:r>
+          </a:p>
+          <a:p>
+            <a:pPr>
+              <a:spcAft>
+                <a:spcPts val="400"/>
+              </a:spcAft>
+              <a:defRPr sz="1050">
+                <a:solidFill>
+                  <a:srgbClr val="94A3B8"/>
+                </a:solidFill>
+                <a:latin typeface="Calibri"/>
+              </a:defRPr>
+            </a:pPr>
+            <a:r>
+              <a:t>- Sitagliptin (Target: DPP-4 Incretin):</a:t>
+            </a:r>
+          </a:p>
+          <a:p>
+            <a:pPr>
+              <a:spcAft>
+                <a:spcPts val="400"/>
+              </a:spcAft>
+              <a:defRPr sz="1050">
+                <a:solidFill>
+                  <a:srgbClr val="94A3B8"/>
+                </a:solidFill>
+                <a:latin typeface="Calibri"/>
+              </a:defRPr>
+            </a:pPr>
+            <a:r>
+              <a:t>  * Vildagliptin (89.2%)</a:t>
+            </a:r>
+          </a:p>
+          <a:p>
+            <a:pPr>
+              <a:spcAft>
+                <a:spcPts val="400"/>
+              </a:spcAft>
+              <a:defRPr sz="1050">
+                <a:solidFill>
+                  <a:srgbClr val="94A3B8"/>
+                </a:solidFill>
+                <a:latin typeface="Calibri"/>
+              </a:defRPr>
+            </a:pPr>
+            <a:r>
+              <a:t>  * Saxagliptin (88.5%)</a:t>
+            </a:r>
+          </a:p>
+          <a:p>
+            <a:pPr>
+              <a:spcAft>
+                <a:spcPts val="400"/>
+              </a:spcAft>
+              <a:defRPr sz="1050">
+                <a:solidFill>
+                  <a:srgbClr val="94A3B8"/>
+                </a:solidFill>
+                <a:latin typeface="Calibri"/>
+              </a:defRPr>
+            </a:pPr>
+            <a:r>
+              <a:t>  * Alogliptin (87.1%)</a:t>
+            </a:r>
+          </a:p>
+          <a:p>
+            <a:pPr>
+              <a:spcAft>
+                <a:spcPts val="400"/>
+              </a:spcAft>
+              <a:defRPr sz="1050">
+                <a:solidFill>
+                  <a:srgbClr val="94A3B8"/>
+                </a:solidFill>
+                <a:latin typeface="Calibri"/>
+              </a:defRPr>
+            </a:pPr>
+            <a:r>
+              <a:t>  * Linagliptin (84.7%)</a:t>
+            </a:r>
+          </a:p>
+          <a:p>
+            <a:pPr>
+              <a:spcAft>
+                <a:spcPts val="400"/>
+              </a:spcAft>
+              <a:defRPr sz="1050">
+                <a:solidFill>
+                  <a:srgbClr val="94A3B8"/>
+                </a:solidFill>
+                <a:latin typeface="Calibri"/>
+              </a:defRPr>
+            </a:pPr>
+            <a:r>
+              <a:t>- Vinblastine (Target: Tubulin Beta Subunit):</a:t>
+            </a:r>
+          </a:p>
+          <a:p>
+            <a:pPr>
+              <a:spcAft>
+                <a:spcPts val="400"/>
+              </a:spcAft>
+              <a:defRPr sz="1050">
+                <a:solidFill>
+                  <a:srgbClr val="94A3B8"/>
+                </a:solidFill>
+                <a:latin typeface="Calibri"/>
+              </a:defRPr>
+            </a:pPr>
+            <a:r>
+              <a:t>  * Vincristine (96.8%)</a:t>
+            </a:r>
+          </a:p>
+          <a:p>
+            <a:pPr>
+              <a:spcAft>
+                <a:spcPts val="400"/>
+              </a:spcAft>
+              <a:defRPr sz="1050">
+                <a:solidFill>
+                  <a:srgbClr val="94A3B8"/>
+                </a:solidFill>
+                <a:latin typeface="Calibri"/>
+              </a:defRPr>
+            </a:pPr>
+            <a:r>
+              <a:t>  * Vindesine (94.7%)</a:t>
+            </a:r>
+          </a:p>
+          <a:p>
+            <a:pPr>
+              <a:spcAft>
+                <a:spcPts val="400"/>
+              </a:spcAft>
+              <a:defRPr sz="1050">
+                <a:solidFill>
+                  <a:srgbClr val="94A3B8"/>
+                </a:solidFill>
+                <a:latin typeface="Calibri"/>
+              </a:defRPr>
+            </a:pPr>
+            <a:r>
+              <a:t>  * Vinorelbine (92.4%)</a:t>
+            </a:r>
+          </a:p>
+          <a:p>
+            <a:pPr>
+              <a:spcAft>
+                <a:spcPts val="400"/>
+              </a:spcAft>
+              <a:defRPr sz="1050">
+                <a:solidFill>
+                  <a:srgbClr val="94A3B8"/>
+                </a:solidFill>
+                <a:latin typeface="Calibri"/>
+              </a:defRPr>
+            </a:pPr>
+            <a:r>
+              <a:t>- Vincristine (Target: Mitotic Spindle):</a:t>
+            </a:r>
+          </a:p>
+          <a:p>
+            <a:pPr>
+              <a:spcAft>
+                <a:spcPts val="400"/>
+              </a:spcAft>
+              <a:defRPr sz="1050">
+                <a:solidFill>
+                  <a:srgbClr val="94A3B8"/>
+                </a:solidFill>
+                <a:latin typeface="Calibri"/>
+              </a:defRPr>
+            </a:pPr>
+            <a:r>
+              <a:t>  * Vinblastine (96.8%)</a:t>
+            </a:r>
+          </a:p>
+          <a:p>
+            <a:pPr>
+              <a:spcAft>
+                <a:spcPts val="400"/>
+              </a:spcAft>
+              <a:defRPr sz="1050">
+                <a:solidFill>
+                  <a:srgbClr val="94A3B8"/>
+                </a:solidFill>
+                <a:latin typeface="Calibri"/>
+              </a:defRPr>
+            </a:pPr>
+            <a:r>
+              <a:t>  * Vindesine (93.9%)</a:t>
+            </a:r>
+          </a:p>
+          <a:p>
+            <a:pPr>
+              <a:spcAft>
+                <a:spcPts val="400"/>
+              </a:spcAft>
+              <a:defRPr sz="1050">
+                <a:solidFill>
+                  <a:srgbClr val="94A3B8"/>
+                </a:solidFill>
+                <a:latin typeface="Calibri"/>
+              </a:defRPr>
+            </a:pPr>
+            <a:r>
+              <a:t>  * Vinflunine (88.9%)</a:t>
+            </a:r>
+          </a:p>
+        </p:txBody>
+      </p:sp>
+      <p:sp>
+        <p:nvSpPr>
+          <p:cNvPr id="8" name="Rounded Rectangle 7"/>
+          <p:cNvSpPr/>
+          <p:nvPr/>
+        </p:nvSpPr>
+        <p:spPr>
+          <a:xfrm>
+            <a:off x="8046720" y="1554480"/>
+            <a:ext cx="3383280" cy="4480560"/>
+          </a:xfrm>
+          <a:prstGeom prst="roundRect">
+            <a:avLst/>
+          </a:prstGeom>
+          <a:solidFill>
+            <a:srgbClr val="111827"/>
+          </a:solidFill>
+          <a:ln w="12700">
+            <a:solidFill>
+              <a:srgbClr val="1E293B"/>
+            </a:solidFill>
+          </a:ln>
+        </p:spPr>
+        <p:style>
+          <a:lnRef idx="1">
+            <a:schemeClr val="accent1"/>
+          </a:lnRef>
+          <a:fillRef idx="3">
+            <a:schemeClr val="accent1"/>
+          </a:fillRef>
+          <a:effectRef idx="2">
+            <a:schemeClr val="accent1"/>
+          </a:effectRef>
+          <a:fontRef idx="minor">
+            <a:schemeClr val="lt1"/>
+          </a:fontRef>
+        </p:style>
+        <p:txBody>
+          <a:bodyPr rtlCol="0" anchor="t" wrap="square" lIns="201168" rIns="201168" tIns="164592" bIns="164592"/>
+          <a:lstStyle/>
+          <a:p>
+            <a:pPr algn="ctr">
+              <a:spcAft>
+                <a:spcPts val="700"/>
+              </a:spcAft>
+              <a:defRPr sz="1400" b="1">
+                <a:solidFill>
+                  <a:srgbClr val="F59E0B"/>
+                </a:solidFill>
+                <a:latin typeface="Arial"/>
+              </a:defRPr>
+            </a:pPr>
+            <a:r>
+              <a:t>Fitoestrogen &amp; Bahan Alam</a:t>
+            </a:r>
+          </a:p>
+          <a:p>
+            <a:pPr>
+              <a:spcAft>
+                <a:spcPts val="400"/>
+              </a:spcAft>
+              <a:defRPr sz="1050">
+                <a:solidFill>
+                  <a:srgbClr val="94A3B8"/>
+                </a:solidFill>
+                <a:latin typeface="Calibri"/>
+              </a:defRPr>
+            </a:pPr>
+            <a:r>
+              <a:t>- Genistein: Daidzein (94.3%), Biochanin A (92.1%)</a:t>
+            </a:r>
+          </a:p>
+          <a:p>
+            <a:pPr>
+              <a:spcAft>
+                <a:spcPts val="400"/>
+              </a:spcAft>
+              <a:defRPr sz="1050">
+                <a:solidFill>
+                  <a:srgbClr val="94A3B8"/>
+                </a:solidFill>
+                <a:latin typeface="Calibri"/>
+              </a:defRPr>
+            </a:pPr>
+            <a:r>
+              <a:t>- Daidzein: Genistein (94.3%), Formononetin (93.6%)</a:t>
+            </a:r>
+          </a:p>
+          <a:p>
+            <a:pPr>
+              <a:spcAft>
+                <a:spcPts val="400"/>
+              </a:spcAft>
+              <a:defRPr sz="1050">
+                <a:solidFill>
+                  <a:srgbClr val="94A3B8"/>
+                </a:solidFill>
+                <a:latin typeface="Calibri"/>
+              </a:defRPr>
+            </a:pPr>
+            <a:r>
+              <a:t>- Glycitein: Formononetin (89.4%), Daidzein (88.5%)</a:t>
+            </a:r>
+          </a:p>
+          <a:p>
+            <a:pPr>
+              <a:spcAft>
+                <a:spcPts val="400"/>
+              </a:spcAft>
+              <a:defRPr sz="1050">
+                <a:solidFill>
+                  <a:srgbClr val="94A3B8"/>
+                </a:solidFill>
+                <a:latin typeface="Calibri"/>
+              </a:defRPr>
+            </a:pPr>
+            <a:r>
+              <a:t>- Estradiol: Estrone (95.8%), Estriol (93.2%)</a:t>
+            </a:r>
+          </a:p>
+          <a:p>
+            <a:pPr>
+              <a:spcAft>
+                <a:spcPts val="400"/>
+              </a:spcAft>
+              <a:defRPr sz="1050">
+                <a:solidFill>
+                  <a:srgbClr val="94A3B8"/>
+                </a:solidFill>
+                <a:latin typeface="Calibri"/>
+              </a:defRPr>
+            </a:pPr>
+            <a:r>
+              <a:t>- Curcumin (Target: NF-kB/COX-2):</a:t>
+            </a:r>
+          </a:p>
+          <a:p>
+            <a:pPr>
+              <a:spcAft>
+                <a:spcPts val="400"/>
+              </a:spcAft>
+              <a:defRPr sz="1050">
+                <a:solidFill>
+                  <a:srgbClr val="94A3B8"/>
+                </a:solidFill>
+                <a:latin typeface="Calibri"/>
+              </a:defRPr>
+            </a:pPr>
+            <a:r>
+              <a:t>  * Demethoxycurcumin (95.6%)</a:t>
+            </a:r>
+          </a:p>
+          <a:p>
+            <a:pPr>
+              <a:spcAft>
+                <a:spcPts val="400"/>
+              </a:spcAft>
+              <a:defRPr sz="1050">
+                <a:solidFill>
+                  <a:srgbClr val="94A3B8"/>
+                </a:solidFill>
+                <a:latin typeface="Calibri"/>
+              </a:defRPr>
+            </a:pPr>
+            <a:r>
+              <a:t>  * Bisdemethoxycurcumin (92.3%)</a:t>
+            </a:r>
+          </a:p>
+          <a:p>
+            <a:pPr>
+              <a:spcAft>
+                <a:spcPts val="400"/>
+              </a:spcAft>
+              <a:defRPr sz="1050">
+                <a:solidFill>
+                  <a:srgbClr val="94A3B8"/>
+                </a:solidFill>
+                <a:latin typeface="Calibri"/>
+              </a:defRPr>
+            </a:pPr>
+            <a:r>
+              <a:t>- Flavonoid: Flavone Core (97.2%), Chrysin (93.6%)</a:t>
+            </a:r>
+          </a:p>
+          <a:p>
+            <a:pPr>
+              <a:spcAft>
+                <a:spcPts val="400"/>
+              </a:spcAft>
+              <a:defRPr sz="1050">
+                <a:solidFill>
+                  <a:srgbClr val="94A3B8"/>
+                </a:solidFill>
+                <a:latin typeface="Calibri"/>
+              </a:defRPr>
+            </a:pPr>
+            <a:r>
+              <a:t>- Tannin: Gallic Acid (92.8%), Methyl Gallate (90.2%)</a:t>
+            </a:r>
+          </a:p>
+          <a:p>
+            <a:pPr>
+              <a:spcAft>
+                <a:spcPts val="400"/>
+              </a:spcAft>
+              <a:defRPr sz="1050">
+                <a:solidFill>
+                  <a:srgbClr val="94A3B8"/>
+                </a:solidFill>
+                <a:latin typeface="Calibri"/>
+              </a:defRPr>
+            </a:pPr>
+            <a:r>
+              <a:t>- Gingerol: 6-Shogaol (94.6%), 8-Gingerol (92.8%)</a:t>
+            </a:r>
+          </a:p>
+        </p:txBody>
+      </p:sp>
+    </p:spTree>
+  </p:cSld>
+  <p:clrMapOvr>
+    <a:masterClrMapping/>
+  </p:clrMapOvr>
+</p:sld>
+</file>
+
+<file path=ppt/slides/slide12.xml><?xml version="1.0" encoding="utf-8"?>
+<p:sld xmlns:a="http://schemas.openxmlformats.org/drawingml/2006/main" xmlns:p="http://schemas.openxmlformats.org/presentationml/2006/main" xmlns:r="http://schemas.openxmlformats.org/officeDocument/2006/relationships">
+  <p:cSld>
+    <p:bg>
+      <p:bgPr>
+        <a:solidFill>
+          <a:srgbClr val="090D16"/>
+        </a:solidFill>
+        <a:effectLst/>
+      </p:bgPr>
+    </p:bg>
+    <p:spTree>
+      <p:nvGrpSpPr>
+        <p:cNvPr id="1" name=""/>
+        <p:cNvGrpSpPr/>
+        <p:nvPr/>
+      </p:nvGrpSpPr>
+      <p:grpSpPr/>
+      <p:sp>
+        <p:nvSpPr>
+          <p:cNvPr id="2" name="TextBox 1"/>
+          <p:cNvSpPr txBox="1"/>
+          <p:nvPr/>
+        </p:nvSpPr>
+        <p:spPr>
+          <a:xfrm>
+            <a:off x="731520" y="365760"/>
+            <a:ext cx="9144000" cy="320040"/>
+          </a:xfrm>
+          <a:prstGeom prst="rect">
+            <a:avLst/>
+          </a:prstGeom>
+          <a:noFill/>
+        </p:spPr>
+        <p:txBody>
+          <a:bodyPr wrap="none">
+            <a:spAutoFit/>
+          </a:bodyPr>
+          <a:lstStyle/>
+          <a:p>
+            <a:pPr>
+              <a:defRPr sz="1000" b="1">
+                <a:solidFill>
+                  <a:srgbClr val="06B6D4"/>
+                </a:solidFill>
+                <a:latin typeface="Arial"/>
+              </a:defRPr>
+            </a:pPr>
+            <a:r>
+              <a:t>PHARMAPULSE 3D - INOVASI CADD &amp; KIMIA MEDISINAL</a:t>
+            </a:r>
+          </a:p>
+        </p:txBody>
+      </p:sp>
+      <p:sp>
+        <p:nvSpPr>
+          <p:cNvPr id="3" name="TextBox 2"/>
+          <p:cNvSpPr txBox="1"/>
+          <p:nvPr/>
+        </p:nvSpPr>
+        <p:spPr>
+          <a:xfrm>
+            <a:off x="731520" y="640080"/>
+            <a:ext cx="10728655" cy="685800"/>
+          </a:xfrm>
+          <a:prstGeom prst="rect">
+            <a:avLst/>
+          </a:prstGeom>
+          <a:noFill/>
+        </p:spPr>
+        <p:txBody>
+          <a:bodyPr wrap="none">
+            <a:spAutoFit/>
+          </a:bodyPr>
+          <a:lstStyle/>
+          <a:p>
+            <a:pPr>
+              <a:defRPr sz="2100" b="1">
+                <a:solidFill>
+                  <a:srgbClr val="F8FAFC"/>
+                </a:solidFill>
+                <a:latin typeface="Arial"/>
+              </a:defRPr>
+            </a:pPr>
+            <a:r>
+              <a:t>11. Target Biologis, Jalur Sinyal (KEGG/Reactome) &amp; Drug Repurposing</a:t>
+            </a:r>
+          </a:p>
+        </p:txBody>
+      </p:sp>
+      <p:sp>
+        <p:nvSpPr>
+          <p:cNvPr id="4" name="Rectangle 3"/>
+          <p:cNvSpPr/>
+          <p:nvPr/>
+        </p:nvSpPr>
+        <p:spPr>
+          <a:xfrm>
+            <a:off x="731520" y="1325880"/>
+            <a:ext cx="10728655" cy="18288"/>
+          </a:xfrm>
+          <a:prstGeom prst="rect">
+            <a:avLst/>
+          </a:prstGeom>
+          <a:solidFill>
+            <a:srgbClr val="1E293B"/>
+          </a:solidFill>
+          <a:ln>
+            <a:solidFill>
+              <a:srgbClr val="1E293B"/>
+            </a:solidFill>
+          </a:ln>
+        </p:spPr>
+        <p:style>
+          <a:lnRef idx="1">
+            <a:schemeClr val="accent1"/>
+          </a:lnRef>
+          <a:fillRef idx="3">
+            <a:schemeClr val="accent1"/>
+          </a:fillRef>
+          <a:effectRef idx="2">
+            <a:schemeClr val="accent1"/>
+          </a:effectRef>
+          <a:fontRef idx="minor">
+            <a:schemeClr val="lt1"/>
+          </a:fontRef>
+        </p:style>
+        <p:txBody>
+          <a:bodyPr rtlCol="0" anchor="ctr"/>
+          <a:lstStyle/>
+          <a:p>
+            <a:pPr algn="ctr"/>
+          </a:p>
+        </p:txBody>
+      </p:sp>
+      <p:sp>
+        <p:nvSpPr>
+          <p:cNvPr id="5" name="TextBox 4"/>
+          <p:cNvSpPr txBox="1"/>
+          <p:nvPr/>
+        </p:nvSpPr>
+        <p:spPr>
+          <a:xfrm>
+            <a:off x="731520" y="6309360"/>
+            <a:ext cx="10728655" cy="365760"/>
+          </a:xfrm>
+          <a:prstGeom prst="rect">
+            <a:avLst/>
+          </a:prstGeom>
+          <a:noFill/>
+        </p:spPr>
+        <p:txBody>
+          <a:bodyPr wrap="none">
+            <a:spAutoFit/>
+          </a:bodyPr>
+          <a:lstStyle/>
+          <a:p>
+            <a:pPr>
+              <a:defRPr sz="950">
+                <a:solidFill>
+                  <a:srgbClr val="94A3B8"/>
+                </a:solidFill>
+                <a:latin typeface="Calibri"/>
+              </a:defRPr>
+            </a:pPr>
+            <a:r>
+              <a:t>PharmaPulse 3D | Platform Komputasi Kimia Medisinal &amp; In Silico Drug Discovery | Slide 12 dari 14</a:t>
+            </a:r>
+          </a:p>
+        </p:txBody>
+      </p:sp>
+      <p:sp>
+        <p:nvSpPr>
+          <p:cNvPr id="6" name="Rounded Rectangle 5"/>
+          <p:cNvSpPr/>
+          <p:nvPr/>
+        </p:nvSpPr>
+        <p:spPr>
+          <a:xfrm>
+            <a:off x="731520" y="1554480"/>
+            <a:ext cx="3383280" cy="4480560"/>
+          </a:xfrm>
+          <a:prstGeom prst="roundRect">
+            <a:avLst/>
+          </a:prstGeom>
+          <a:solidFill>
+            <a:srgbClr val="111827"/>
+          </a:solidFill>
+          <a:ln w="12700">
+            <a:solidFill>
+              <a:srgbClr val="1E293B"/>
+            </a:solidFill>
+          </a:ln>
+        </p:spPr>
+        <p:style>
+          <a:lnRef idx="1">
+            <a:schemeClr val="accent1"/>
+          </a:lnRef>
+          <a:fillRef idx="3">
+            <a:schemeClr val="accent1"/>
+          </a:fillRef>
+          <a:effectRef idx="2">
+            <a:schemeClr val="accent1"/>
+          </a:effectRef>
+          <a:fontRef idx="minor">
+            <a:schemeClr val="lt1"/>
+          </a:fontRef>
+        </p:style>
+        <p:txBody>
+          <a:bodyPr rtlCol="0" anchor="t" wrap="square" lIns="201168" rIns="201168" tIns="164592" bIns="164592"/>
+          <a:lstStyle/>
+          <a:p>
+            <a:pPr algn="ctr">
+              <a:spcAft>
+                <a:spcPts val="700"/>
+              </a:spcAft>
+              <a:defRPr sz="1400" b="1">
+                <a:solidFill>
+                  <a:srgbClr val="06B6D4"/>
+                </a:solidFill>
+                <a:latin typeface="Arial"/>
+              </a:defRPr>
+            </a:pPr>
+            <a:r>
+              <a:t>Identifikasi Target Primer &amp; MoA</a:t>
+            </a:r>
+          </a:p>
+          <a:p>
+            <a:pPr>
+              <a:spcAft>
+                <a:spcPts val="400"/>
+              </a:spcAft>
+              <a:defRPr sz="1050">
+                <a:solidFill>
+                  <a:srgbClr val="94A3B8"/>
+                </a:solidFill>
+                <a:latin typeface="Calibri"/>
+              </a:defRPr>
+            </a:pPr>
+            <a:r>
+              <a:t>- Pemetaan Target Makromolekul Terkurasi:</a:t>
+            </a:r>
+          </a:p>
+          <a:p>
+            <a:pPr>
+              <a:spcAft>
+                <a:spcPts val="400"/>
+              </a:spcAft>
+              <a:defRPr sz="1050">
+                <a:solidFill>
+                  <a:srgbClr val="94A3B8"/>
+                </a:solidFill>
+                <a:latin typeface="Calibri"/>
+              </a:defRPr>
+            </a:pPr>
+            <a:r>
+              <a:t>  * HMG-CoA Reductase (Atorvastatin, EC 1.1.1.88)</a:t>
+            </a:r>
+          </a:p>
+          <a:p>
+            <a:pPr>
+              <a:spcAft>
+                <a:spcPts val="400"/>
+              </a:spcAft>
+              <a:defRPr sz="1050">
+                <a:solidFill>
+                  <a:srgbClr val="94A3B8"/>
+                </a:solidFill>
+                <a:latin typeface="Calibri"/>
+              </a:defRPr>
+            </a:pPr>
+            <a:r>
+              <a:t>  * PBP Transpeptidase (Amoxicillin, EC 3.4.16.4)</a:t>
+            </a:r>
+          </a:p>
+          <a:p>
+            <a:pPr>
+              <a:spcAft>
+                <a:spcPts val="400"/>
+              </a:spcAft>
+              <a:defRPr sz="1050">
+                <a:solidFill>
+                  <a:srgbClr val="94A3B8"/>
+                </a:solidFill>
+                <a:latin typeface="Calibri"/>
+              </a:defRPr>
+            </a:pPr>
+            <a:r>
+              <a:t>  * Viral RdRp nsp12 (Remdesivir, Sofosbuvir)</a:t>
+            </a:r>
+          </a:p>
+          <a:p>
+            <a:pPr>
+              <a:spcAft>
+                <a:spcPts val="400"/>
+              </a:spcAft>
+              <a:defRPr sz="1050">
+                <a:solidFill>
+                  <a:srgbClr val="94A3B8"/>
+                </a:solidFill>
+                <a:latin typeface="Calibri"/>
+              </a:defRPr>
+            </a:pPr>
+            <a:r>
+              <a:t>  * Dipeptidyl Peptidase-4 (Sitagliptin, EC 3.4.14.5)</a:t>
+            </a:r>
+          </a:p>
+          <a:p>
+            <a:pPr>
+              <a:spcAft>
+                <a:spcPts val="400"/>
+              </a:spcAft>
+              <a:defRPr sz="1050">
+                <a:solidFill>
+                  <a:srgbClr val="94A3B8"/>
+                </a:solidFill>
+                <a:latin typeface="Calibri"/>
+              </a:defRPr>
+            </a:pPr>
+            <a:r>
+              <a:t>  * Estrogen Receptor Beta (Genistein, Daidzein)</a:t>
+            </a:r>
+          </a:p>
+          <a:p>
+            <a:pPr>
+              <a:spcAft>
+                <a:spcPts val="400"/>
+              </a:spcAft>
+              <a:defRPr sz="1050">
+                <a:solidFill>
+                  <a:srgbClr val="94A3B8"/>
+                </a:solidFill>
+                <a:latin typeface="Calibri"/>
+              </a:defRPr>
+            </a:pPr>
+            <a:r>
+              <a:t>  * Tubulin Spindle Poison (Vinblastine, Vincristine)</a:t>
+            </a:r>
+          </a:p>
+          <a:p>
+            <a:pPr>
+              <a:spcAft>
+                <a:spcPts val="400"/>
+              </a:spcAft>
+              <a:defRPr sz="1050">
+                <a:solidFill>
+                  <a:srgbClr val="94A3B8"/>
+                </a:solidFill>
+                <a:latin typeface="Calibri"/>
+              </a:defRPr>
+            </a:pPr>
+            <a:r>
+              <a:t>- Uraian mekanisme aksi molekuler (MOA) pada tingkat interaksi residu asam amino kantung aktif.</a:t>
+            </a:r>
+          </a:p>
+        </p:txBody>
+      </p:sp>
+      <p:sp>
+        <p:nvSpPr>
+          <p:cNvPr id="7" name="Rounded Rectangle 6"/>
+          <p:cNvSpPr/>
+          <p:nvPr/>
+        </p:nvSpPr>
+        <p:spPr>
+          <a:xfrm>
+            <a:off x="4389120" y="1554480"/>
+            <a:ext cx="3383280" cy="4480560"/>
+          </a:xfrm>
+          <a:prstGeom prst="roundRect">
+            <a:avLst/>
+          </a:prstGeom>
+          <a:solidFill>
+            <a:srgbClr val="111827"/>
+          </a:solidFill>
+          <a:ln w="12700">
+            <a:solidFill>
+              <a:srgbClr val="1E293B"/>
+            </a:solidFill>
+          </a:ln>
+        </p:spPr>
+        <p:style>
+          <a:lnRef idx="1">
+            <a:schemeClr val="accent1"/>
+          </a:lnRef>
+          <a:fillRef idx="3">
+            <a:schemeClr val="accent1"/>
+          </a:fillRef>
+          <a:effectRef idx="2">
+            <a:schemeClr val="accent1"/>
+          </a:effectRef>
+          <a:fontRef idx="minor">
+            <a:schemeClr val="lt1"/>
+          </a:fontRef>
+        </p:style>
+        <p:txBody>
+          <a:bodyPr rtlCol="0" anchor="t" wrap="square" lIns="201168" rIns="201168" tIns="164592" bIns="164592"/>
+          <a:lstStyle/>
+          <a:p>
+            <a:pPr algn="ctr">
+              <a:spcAft>
+                <a:spcPts val="700"/>
+              </a:spcAft>
+              <a:defRPr sz="1400" b="1">
+                <a:solidFill>
+                  <a:srgbClr val="8B5CF6"/>
+                </a:solidFill>
+                <a:latin typeface="Arial"/>
+              </a:defRPr>
+            </a:pPr>
+            <a:r>
+              <a:t>Integrasi Cross-Database Pathway</a:t>
+            </a:r>
+          </a:p>
+          <a:p>
+            <a:pPr>
+              <a:spcAft>
+                <a:spcPts val="400"/>
+              </a:spcAft>
+              <a:defRPr sz="1050">
+                <a:solidFill>
+                  <a:srgbClr val="94A3B8"/>
+                </a:solidFill>
+                <a:latin typeface="Calibri"/>
+              </a:defRPr>
+            </a:pPr>
+            <a:r>
+              <a:t>- Basis Data Jalur Metabolisme KEGG:</a:t>
+            </a:r>
+          </a:p>
+          <a:p>
+            <a:pPr>
+              <a:spcAft>
+                <a:spcPts val="400"/>
+              </a:spcAft>
+              <a:defRPr sz="1050">
+                <a:solidFill>
+                  <a:srgbClr val="94A3B8"/>
+                </a:solidFill>
+                <a:latin typeface="Calibri"/>
+              </a:defRPr>
+            </a:pPr>
+            <a:r>
+              <a:t>  * hsa00550: Peptidoglycan biosynthesis (Amoxicillin)</a:t>
+            </a:r>
+          </a:p>
+          <a:p>
+            <a:pPr>
+              <a:spcAft>
+                <a:spcPts val="400"/>
+              </a:spcAft>
+              <a:defRPr sz="1050">
+                <a:solidFill>
+                  <a:srgbClr val="94A3B8"/>
+                </a:solidFill>
+                <a:latin typeface="Calibri"/>
+              </a:defRPr>
+            </a:pPr>
+            <a:r>
+              <a:t>  * hsa00900: Terpenoid backbone synthesis (Artemisinin)</a:t>
+            </a:r>
+          </a:p>
+          <a:p>
+            <a:pPr>
+              <a:spcAft>
+                <a:spcPts val="400"/>
+              </a:spcAft>
+              <a:defRPr sz="1050">
+                <a:solidFill>
+                  <a:srgbClr val="94A3B8"/>
+                </a:solidFill>
+                <a:latin typeface="Calibri"/>
+              </a:defRPr>
+            </a:pPr>
+            <a:r>
+              <a:t>  * hsa04931: Insulin resistance pathway (Sitagliptin)</a:t>
+            </a:r>
+          </a:p>
+          <a:p>
+            <a:pPr>
+              <a:spcAft>
+                <a:spcPts val="400"/>
+              </a:spcAft>
+              <a:defRPr sz="1050">
+                <a:solidFill>
+                  <a:srgbClr val="94A3B8"/>
+                </a:solidFill>
+                <a:latin typeface="Calibri"/>
+              </a:defRPr>
+            </a:pPr>
+            <a:r>
+              <a:t>  * hsa04110: Cell cycle &amp; mitotic spindle (Vinblastine)</a:t>
+            </a:r>
+          </a:p>
+          <a:p>
+            <a:pPr>
+              <a:spcAft>
+                <a:spcPts val="400"/>
+              </a:spcAft>
+              <a:defRPr sz="1050">
+                <a:solidFill>
+                  <a:srgbClr val="94A3B8"/>
+                </a:solidFill>
+                <a:latin typeface="Calibri"/>
+              </a:defRPr>
+            </a:pPr>
+            <a:r>
+              <a:t>- Anotasi Jalur Biologis Reactome:</a:t>
+            </a:r>
+          </a:p>
+          <a:p>
+            <a:pPr>
+              <a:spcAft>
+                <a:spcPts val="400"/>
+              </a:spcAft>
+              <a:defRPr sz="1050">
+                <a:solidFill>
+                  <a:srgbClr val="94A3B8"/>
+                </a:solidFill>
+                <a:latin typeface="Calibri"/>
+              </a:defRPr>
+            </a:pPr>
+            <a:r>
+              <a:t>  * R-HSA-8949664: Microbial cell wall assembly</a:t>
+            </a:r>
+          </a:p>
+          <a:p>
+            <a:pPr>
+              <a:spcAft>
+                <a:spcPts val="400"/>
+              </a:spcAft>
+              <a:defRPr sz="1050">
+                <a:solidFill>
+                  <a:srgbClr val="94A3B8"/>
+                </a:solidFill>
+                <a:latin typeface="Calibri"/>
+              </a:defRPr>
+            </a:pPr>
+            <a:r>
+              <a:t>  * R-HSA-9609507: SARS-CoV-2 RNA replication</a:t>
+            </a:r>
+          </a:p>
+          <a:p>
+            <a:pPr>
+              <a:spcAft>
+                <a:spcPts val="400"/>
+              </a:spcAft>
+              <a:defRPr sz="1050">
+                <a:solidFill>
+                  <a:srgbClr val="94A3B8"/>
+                </a:solidFill>
+                <a:latin typeface="Calibri"/>
+              </a:defRPr>
+            </a:pPr>
+            <a:r>
+              <a:t>  * R-HSA-9006934: Signaling by Receptor Tyrosine Kinases</a:t>
+            </a:r>
+          </a:p>
+        </p:txBody>
+      </p:sp>
+      <p:sp>
+        <p:nvSpPr>
+          <p:cNvPr id="8" name="Rounded Rectangle 7"/>
+          <p:cNvSpPr/>
+          <p:nvPr/>
+        </p:nvSpPr>
+        <p:spPr>
+          <a:xfrm>
+            <a:off x="8046720" y="1554480"/>
+            <a:ext cx="3383280" cy="4480560"/>
+          </a:xfrm>
+          <a:prstGeom prst="roundRect">
+            <a:avLst/>
+          </a:prstGeom>
+          <a:solidFill>
+            <a:srgbClr val="111827"/>
+          </a:solidFill>
+          <a:ln w="12700">
+            <a:solidFill>
+              <a:srgbClr val="1E293B"/>
+            </a:solidFill>
+          </a:ln>
+        </p:spPr>
+        <p:style>
+          <a:lnRef idx="1">
+            <a:schemeClr val="accent1"/>
+          </a:lnRef>
+          <a:fillRef idx="3">
+            <a:schemeClr val="accent1"/>
+          </a:fillRef>
+          <a:effectRef idx="2">
+            <a:schemeClr val="accent1"/>
+          </a:effectRef>
+          <a:fontRef idx="minor">
+            <a:schemeClr val="lt1"/>
+          </a:fontRef>
+        </p:style>
+        <p:txBody>
+          <a:bodyPr rtlCol="0" anchor="t" wrap="square" lIns="201168" rIns="201168" tIns="164592" bIns="164592"/>
+          <a:lstStyle/>
+          <a:p>
+            <a:pPr algn="ctr">
+              <a:spcAft>
+                <a:spcPts val="700"/>
+              </a:spcAft>
+              <a:defRPr sz="1400" b="1">
+                <a:solidFill>
+                  <a:srgbClr val="10B981"/>
+                </a:solidFill>
+                <a:latin typeface="Arial"/>
+              </a:defRPr>
+            </a:pPr>
+            <a:r>
+              <a:t>Inovasi Drug Repurposing</a:t>
+            </a:r>
+          </a:p>
+          <a:p>
+            <a:pPr>
+              <a:spcAft>
+                <a:spcPts val="400"/>
+              </a:spcAft>
+              <a:defRPr sz="1050">
+                <a:solidFill>
+                  <a:srgbClr val="94A3B8"/>
+                </a:solidFill>
+                <a:latin typeface="Calibri"/>
+              </a:defRPr>
+            </a:pPr>
+            <a:r>
+              <a:t>- Membuka Potensi Indikasi Terapeutik Baru:</a:t>
+            </a:r>
+          </a:p>
+          <a:p>
+            <a:pPr>
+              <a:spcAft>
+                <a:spcPts val="400"/>
+              </a:spcAft>
+              <a:defRPr sz="1050">
+                <a:solidFill>
+                  <a:srgbClr val="94A3B8"/>
+                </a:solidFill>
+                <a:latin typeface="Calibri"/>
+              </a:defRPr>
+            </a:pPr>
+            <a:r>
+              <a:t>  * Artemisinin: Repurposing untuk onkologi (leukemia &amp; kanker kolorektal via akumulasi ROS berbasis besi).</a:t>
+            </a:r>
+          </a:p>
+          <a:p>
+            <a:pPr>
+              <a:spcAft>
+                <a:spcPts val="400"/>
+              </a:spcAft>
+              <a:defRPr sz="1050">
+                <a:solidFill>
+                  <a:srgbClr val="94A3B8"/>
+                </a:solidFill>
+                <a:latin typeface="Calibri"/>
+              </a:defRPr>
+            </a:pPr>
+            <a:r>
+              <a:t>  * Amoxicillin: Eradikasi Helicobacter pylori pada pencegahan limfoma MALT lambung.</a:t>
+            </a:r>
+          </a:p>
+          <a:p>
+            <a:pPr>
+              <a:spcAft>
+                <a:spcPts val="400"/>
+              </a:spcAft>
+              <a:defRPr sz="1050">
+                <a:solidFill>
+                  <a:srgbClr val="94A3B8"/>
+                </a:solidFill>
+                <a:latin typeface="Calibri"/>
+              </a:defRPr>
+            </a:pPr>
+            <a:r>
+              <a:t>  * Curcumin: Modulasi epigenetic via inhibisi Histone Acetyltransferase (p300/CBP) pada inflamasi kronis.</a:t>
+            </a:r>
+          </a:p>
+          <a:p>
+            <a:pPr>
+              <a:spcAft>
+                <a:spcPts val="400"/>
+              </a:spcAft>
+              <a:defRPr sz="1050">
+                <a:solidFill>
+                  <a:srgbClr val="94A3B8"/>
+                </a:solidFill>
+                <a:latin typeface="Calibri"/>
+              </a:defRPr>
+            </a:pPr>
+            <a:r>
+              <a:t>  * Sitagliptin: Efek neuroprotektif pada Alzheimer via modulasi GLP-1 dan neuroinflamasi.</a:t>
+            </a:r>
+          </a:p>
+        </p:txBody>
+      </p:sp>
+    </p:spTree>
+  </p:cSld>
+  <p:clrMapOvr>
+    <a:masterClrMapping/>
+  </p:clrMapOvr>
+</p:sld>
+</file>
+
+<file path=ppt/slides/slide13.xml><?xml version="1.0" encoding="utf-8"?>
+<p:sld xmlns:a="http://schemas.openxmlformats.org/drawingml/2006/main" xmlns:p="http://schemas.openxmlformats.org/presentationml/2006/main" xmlns:r="http://schemas.openxmlformats.org/officeDocument/2006/relationships">
+  <p:cSld>
+    <p:bg>
+      <p:bgPr>
+        <a:solidFill>
+          <a:srgbClr val="090D16"/>
+        </a:solidFill>
+        <a:effectLst/>
+      </p:bgPr>
+    </p:bg>
+    <p:spTree>
+      <p:nvGrpSpPr>
+        <p:cNvPr id="1" name=""/>
+        <p:cNvGrpSpPr/>
+        <p:nvPr/>
+      </p:nvGrpSpPr>
+      <p:grpSpPr/>
+      <p:sp>
+        <p:nvSpPr>
+          <p:cNvPr id="2" name="TextBox 1"/>
+          <p:cNvSpPr txBox="1"/>
+          <p:nvPr/>
+        </p:nvSpPr>
+        <p:spPr>
+          <a:xfrm>
+            <a:off x="731520" y="365760"/>
+            <a:ext cx="9144000" cy="320040"/>
+          </a:xfrm>
+          <a:prstGeom prst="rect">
+            <a:avLst/>
+          </a:prstGeom>
+          <a:noFill/>
+        </p:spPr>
+        <p:txBody>
+          <a:bodyPr wrap="none">
+            <a:spAutoFit/>
+          </a:bodyPr>
+          <a:lstStyle/>
+          <a:p>
+            <a:pPr>
+              <a:defRPr sz="1000" b="1">
+                <a:solidFill>
+                  <a:srgbClr val="06B6D4"/>
+                </a:solidFill>
+                <a:latin typeface="Arial"/>
+              </a:defRPr>
+            </a:pPr>
+            <a:r>
+              <a:t>PHARMAPULSE 3D - INOVASI CADD &amp; KIMIA MEDISINAL</a:t>
+            </a:r>
+          </a:p>
+        </p:txBody>
+      </p:sp>
+      <p:sp>
+        <p:nvSpPr>
+          <p:cNvPr id="3" name="TextBox 2"/>
+          <p:cNvSpPr txBox="1"/>
+          <p:nvPr/>
+        </p:nvSpPr>
+        <p:spPr>
+          <a:xfrm>
+            <a:off x="731520" y="640080"/>
+            <a:ext cx="10728655" cy="685800"/>
+          </a:xfrm>
+          <a:prstGeom prst="rect">
+            <a:avLst/>
+          </a:prstGeom>
+          <a:noFill/>
+        </p:spPr>
+        <p:txBody>
+          <a:bodyPr wrap="none">
+            <a:spAutoFit/>
+          </a:bodyPr>
+          <a:lstStyle/>
+          <a:p>
+            <a:pPr>
+              <a:defRPr sz="2100" b="1">
+                <a:solidFill>
+                  <a:srgbClr val="F8FAFC"/>
+                </a:solidFill>
+                <a:latin typeface="Arial"/>
+              </a:defRPr>
+            </a:pPr>
+            <a:r>
+              <a:t>12. Batch In Silico Screening, Komparasi Head-to-Head &amp; Regulatory Dossier</a:t>
+            </a:r>
+          </a:p>
+        </p:txBody>
+      </p:sp>
+      <p:sp>
+        <p:nvSpPr>
+          <p:cNvPr id="4" name="Rectangle 3"/>
+          <p:cNvSpPr/>
+          <p:nvPr/>
+        </p:nvSpPr>
+        <p:spPr>
+          <a:xfrm>
+            <a:off x="731520" y="1325880"/>
+            <a:ext cx="10728655" cy="18288"/>
+          </a:xfrm>
+          <a:prstGeom prst="rect">
+            <a:avLst/>
+          </a:prstGeom>
+          <a:solidFill>
+            <a:srgbClr val="1E293B"/>
+          </a:solidFill>
+          <a:ln>
+            <a:solidFill>
+              <a:srgbClr val="1E293B"/>
+            </a:solidFill>
+          </a:ln>
+        </p:spPr>
+        <p:style>
+          <a:lnRef idx="1">
+            <a:schemeClr val="accent1"/>
+          </a:lnRef>
+          <a:fillRef idx="3">
+            <a:schemeClr val="accent1"/>
+          </a:fillRef>
+          <a:effectRef idx="2">
+            <a:schemeClr val="accent1"/>
+          </a:effectRef>
+          <a:fontRef idx="minor">
+            <a:schemeClr val="lt1"/>
+          </a:fontRef>
+        </p:style>
+        <p:txBody>
+          <a:bodyPr rtlCol="0" anchor="ctr"/>
+          <a:lstStyle/>
+          <a:p>
+            <a:pPr algn="ctr"/>
+          </a:p>
+        </p:txBody>
+      </p:sp>
+      <p:sp>
+        <p:nvSpPr>
+          <p:cNvPr id="5" name="TextBox 4"/>
+          <p:cNvSpPr txBox="1"/>
+          <p:nvPr/>
+        </p:nvSpPr>
+        <p:spPr>
+          <a:xfrm>
+            <a:off x="731520" y="6309360"/>
+            <a:ext cx="10728655" cy="365760"/>
+          </a:xfrm>
+          <a:prstGeom prst="rect">
+            <a:avLst/>
+          </a:prstGeom>
+          <a:noFill/>
+        </p:spPr>
+        <p:txBody>
+          <a:bodyPr wrap="none">
+            <a:spAutoFit/>
+          </a:bodyPr>
+          <a:lstStyle/>
+          <a:p>
+            <a:pPr>
+              <a:defRPr sz="950">
+                <a:solidFill>
+                  <a:srgbClr val="94A3B8"/>
+                </a:solidFill>
+                <a:latin typeface="Calibri"/>
+              </a:defRPr>
+            </a:pPr>
+            <a:r>
+              <a:t>PharmaPulse 3D | Platform Komputasi Kimia Medisinal &amp; In Silico Drug Discovery | Slide 13 dari 14</a:t>
+            </a:r>
+          </a:p>
+        </p:txBody>
+      </p:sp>
+      <p:sp>
+        <p:nvSpPr>
+          <p:cNvPr id="6" name="Rounded Rectangle 5"/>
+          <p:cNvSpPr/>
+          <p:nvPr/>
+        </p:nvSpPr>
+        <p:spPr>
+          <a:xfrm>
+            <a:off x="731520" y="1554480"/>
+            <a:ext cx="3383280" cy="4480560"/>
+          </a:xfrm>
+          <a:prstGeom prst="roundRect">
+            <a:avLst/>
+          </a:prstGeom>
+          <a:solidFill>
+            <a:srgbClr val="111827"/>
+          </a:solidFill>
+          <a:ln w="12700">
+            <a:solidFill>
+              <a:srgbClr val="1E293B"/>
+            </a:solidFill>
+          </a:ln>
+        </p:spPr>
+        <p:style>
+          <a:lnRef idx="1">
+            <a:schemeClr val="accent1"/>
+          </a:lnRef>
+          <a:fillRef idx="3">
+            <a:schemeClr val="accent1"/>
+          </a:fillRef>
+          <a:effectRef idx="2">
+            <a:schemeClr val="accent1"/>
+          </a:effectRef>
+          <a:fontRef idx="minor">
+            <a:schemeClr val="lt1"/>
+          </a:fontRef>
+        </p:style>
+        <p:txBody>
+          <a:bodyPr rtlCol="0" anchor="t" wrap="square" lIns="201168" rIns="201168" tIns="164592" bIns="164592"/>
+          <a:lstStyle/>
+          <a:p>
+            <a:pPr algn="ctr">
+              <a:spcAft>
+                <a:spcPts val="700"/>
+              </a:spcAft>
+              <a:defRPr sz="1400" b="1">
+                <a:solidFill>
+                  <a:srgbClr val="06B6D4"/>
+                </a:solidFill>
+                <a:latin typeface="Arial"/>
+              </a:defRPr>
+            </a:pPr>
+            <a:r>
+              <a:t>Batch Virtual Screening</a:t>
+            </a:r>
+          </a:p>
+          <a:p>
+            <a:pPr>
+              <a:spcAft>
+                <a:spcPts val="400"/>
+              </a:spcAft>
+              <a:defRPr sz="1050">
+                <a:solidFill>
+                  <a:srgbClr val="94A3B8"/>
+                </a:solidFill>
+                <a:latin typeface="Calibri"/>
+              </a:defRPr>
+            </a:pPr>
+            <a:r>
+              <a:t>- Pemrosesan Massal Puluhan Senyawa:</a:t>
+            </a:r>
+          </a:p>
+          <a:p>
+            <a:pPr>
+              <a:spcAft>
+                <a:spcPts val="400"/>
+              </a:spcAft>
+              <a:defRPr sz="1050">
+                <a:solidFill>
+                  <a:srgbClr val="94A3B8"/>
+                </a:solidFill>
+                <a:latin typeface="Calibri"/>
+              </a:defRPr>
+            </a:pPr>
+            <a:r>
+              <a:t>  * Unggah berkas CSV atau input teks multi-baris daftar nama/SMILES molekul.</a:t>
+            </a:r>
+          </a:p>
+          <a:p>
+            <a:pPr>
+              <a:spcAft>
+                <a:spcPts val="400"/>
+              </a:spcAft>
+              <a:defRPr sz="1050">
+                <a:solidFill>
+                  <a:srgbClr val="94A3B8"/>
+                </a:solidFill>
+                <a:latin typeface="Calibri"/>
+              </a:defRPr>
+            </a:pPr>
+            <a:r>
+              <a:t>  * Komputasi paralel otomatis untuk seluruh parameter fisikokimia dan drug-likeness.</a:t>
+            </a:r>
+          </a:p>
+          <a:p>
+            <a:pPr>
+              <a:spcAft>
+                <a:spcPts val="400"/>
+              </a:spcAft>
+              <a:defRPr sz="1050">
+                <a:solidFill>
+                  <a:srgbClr val="94A3B8"/>
+                </a:solidFill>
+                <a:latin typeface="Calibri"/>
+              </a:defRPr>
+            </a:pPr>
+            <a:r>
+              <a:t>  * Menghasilkan tabel rekapitulasi interaktif dengan sistem filter, sorting, dan status kelulusan saringan Lipinski.</a:t>
+            </a:r>
+          </a:p>
+          <a:p>
+            <a:pPr>
+              <a:spcAft>
+                <a:spcPts val="400"/>
+              </a:spcAft>
+              <a:defRPr sz="1050">
+                <a:solidFill>
+                  <a:srgbClr val="94A3B8"/>
+                </a:solidFill>
+                <a:latin typeface="Calibri"/>
+              </a:defRPr>
+            </a:pPr>
+            <a:r>
+              <a:t>- Mempercepat penapisan perpustakaan fraksi senyawa herbal maupun koleksi molekul sintesis.</a:t>
+            </a:r>
+          </a:p>
+        </p:txBody>
+      </p:sp>
+      <p:sp>
+        <p:nvSpPr>
+          <p:cNvPr id="7" name="Rounded Rectangle 6"/>
+          <p:cNvSpPr/>
+          <p:nvPr/>
+        </p:nvSpPr>
+        <p:spPr>
+          <a:xfrm>
+            <a:off x="4389120" y="1554480"/>
+            <a:ext cx="3383280" cy="4480560"/>
+          </a:xfrm>
+          <a:prstGeom prst="roundRect">
+            <a:avLst/>
+          </a:prstGeom>
+          <a:solidFill>
+            <a:srgbClr val="111827"/>
+          </a:solidFill>
+          <a:ln w="12700">
+            <a:solidFill>
+              <a:srgbClr val="1E293B"/>
+            </a:solidFill>
+          </a:ln>
+        </p:spPr>
+        <p:style>
+          <a:lnRef idx="1">
+            <a:schemeClr val="accent1"/>
+          </a:lnRef>
+          <a:fillRef idx="3">
+            <a:schemeClr val="accent1"/>
+          </a:fillRef>
+          <a:effectRef idx="2">
+            <a:schemeClr val="accent1"/>
+          </a:effectRef>
+          <a:fontRef idx="minor">
+            <a:schemeClr val="lt1"/>
+          </a:fontRef>
+        </p:style>
+        <p:txBody>
+          <a:bodyPr rtlCol="0" anchor="t" wrap="square" lIns="201168" rIns="201168" tIns="164592" bIns="164592"/>
+          <a:lstStyle/>
+          <a:p>
+            <a:pPr algn="ctr">
+              <a:spcAft>
+                <a:spcPts val="700"/>
+              </a:spcAft>
+              <a:defRPr sz="1400" b="1">
+                <a:solidFill>
+                  <a:srgbClr val="8B5CF6"/>
+                </a:solidFill>
+                <a:latin typeface="Arial"/>
+              </a:defRPr>
+            </a:pPr>
+            <a:r>
+              <a:t>Komparasi Head-to-Head</a:t>
+            </a:r>
+          </a:p>
+          <a:p>
+            <a:pPr>
+              <a:spcAft>
+                <a:spcPts val="400"/>
+              </a:spcAft>
+              <a:defRPr sz="1050">
+                <a:solidFill>
+                  <a:srgbClr val="94A3B8"/>
+                </a:solidFill>
+                <a:latin typeface="Calibri"/>
+              </a:defRPr>
+            </a:pPr>
+            <a:r>
+              <a:t>- Multi-Compound Side-by-Side Comparison:</a:t>
+            </a:r>
+          </a:p>
+          <a:p>
+            <a:pPr>
+              <a:spcAft>
+                <a:spcPts val="400"/>
+              </a:spcAft>
+              <a:defRPr sz="1050">
+                <a:solidFill>
+                  <a:srgbClr val="94A3B8"/>
+                </a:solidFill>
+                <a:latin typeface="Calibri"/>
+              </a:defRPr>
+            </a:pPr>
+            <a:r>
+              <a:t>  * Membandingkan hingga 3 senyawa kandidat sekaligus dalam satu tampilan layar.</a:t>
+            </a:r>
+          </a:p>
+          <a:p>
+            <a:pPr>
+              <a:spcAft>
+                <a:spcPts val="400"/>
+              </a:spcAft>
+              <a:defRPr sz="1050">
+                <a:solidFill>
+                  <a:srgbClr val="94A3B8"/>
+                </a:solidFill>
+                <a:latin typeface="Calibri"/>
+              </a:defRPr>
+            </a:pPr>
+            <a:r>
+              <a:t>  * Komparasi profil bioavailabilitas radar heksagonal berlapis (multi-layer radar).</a:t>
+            </a:r>
+          </a:p>
+          <a:p>
+            <a:pPr>
+              <a:spcAft>
+                <a:spcPts val="400"/>
+              </a:spcAft>
+              <a:defRPr sz="1050">
+                <a:solidFill>
+                  <a:srgbClr val="94A3B8"/>
+                </a:solidFill>
+                <a:latin typeface="Calibri"/>
+              </a:defRPr>
+            </a:pPr>
+            <a:r>
+              <a:t>  * Perbandingan posisi spasial relatif pada model BOILED-Egg dan nilai prediksi bioaktivitas QSAR pIC50.</a:t>
+            </a:r>
+          </a:p>
+          <a:p>
+            <a:pPr>
+              <a:spcAft>
+                <a:spcPts val="400"/>
+              </a:spcAft>
+              <a:defRPr sz="1050">
+                <a:solidFill>
+                  <a:srgbClr val="94A3B8"/>
+                </a:solidFill>
+                <a:latin typeface="Calibri"/>
+              </a:defRPr>
+            </a:pPr>
+            <a:r>
+              <a:t>- Membantu peneliti menentukan kandidat utama (front-runner) dan kandidat cadangan (backup candidate).</a:t>
+            </a:r>
+          </a:p>
+        </p:txBody>
+      </p:sp>
+      <p:sp>
+        <p:nvSpPr>
+          <p:cNvPr id="8" name="Rounded Rectangle 7"/>
+          <p:cNvSpPr/>
+          <p:nvPr/>
+        </p:nvSpPr>
+        <p:spPr>
+          <a:xfrm>
+            <a:off x="8046720" y="1554480"/>
+            <a:ext cx="3383280" cy="4480560"/>
+          </a:xfrm>
+          <a:prstGeom prst="roundRect">
+            <a:avLst/>
+          </a:prstGeom>
+          <a:solidFill>
+            <a:srgbClr val="111827"/>
+          </a:solidFill>
+          <a:ln w="12700">
+            <a:solidFill>
+              <a:srgbClr val="1E293B"/>
+            </a:solidFill>
+          </a:ln>
+        </p:spPr>
+        <p:style>
+          <a:lnRef idx="1">
+            <a:schemeClr val="accent1"/>
+          </a:lnRef>
+          <a:fillRef idx="3">
+            <a:schemeClr val="accent1"/>
+          </a:fillRef>
+          <a:effectRef idx="2">
+            <a:schemeClr val="accent1"/>
+          </a:effectRef>
+          <a:fontRef idx="minor">
+            <a:schemeClr val="lt1"/>
+          </a:fontRef>
+        </p:style>
+        <p:txBody>
+          <a:bodyPr rtlCol="0" anchor="t" wrap="square" lIns="201168" rIns="201168" tIns="164592" bIns="164592"/>
+          <a:lstStyle/>
+          <a:p>
+            <a:pPr algn="ctr">
+              <a:spcAft>
+                <a:spcPts val="700"/>
+              </a:spcAft>
+              <a:defRPr sz="1400" b="1">
+                <a:solidFill>
+                  <a:srgbClr val="F59E0B"/>
+                </a:solidFill>
+                <a:latin typeface="Arial"/>
+              </a:defRPr>
+            </a:pPr>
+            <a:r>
+              <a:t>Regulatory Dossier Export</a:t>
+            </a:r>
+          </a:p>
+          <a:p>
+            <a:pPr>
+              <a:spcAft>
+                <a:spcPts val="400"/>
+              </a:spcAft>
+              <a:defRPr sz="1050">
+                <a:solidFill>
+                  <a:srgbClr val="94A3B8"/>
+                </a:solidFill>
+                <a:latin typeface="Calibri"/>
+              </a:defRPr>
+            </a:pPr>
+            <a:r>
+              <a:t>- Ekspor Hasil Lengkap Siap Publikasi &amp; Regulasi:</a:t>
+            </a:r>
+          </a:p>
+          <a:p>
+            <a:pPr>
+              <a:spcAft>
+                <a:spcPts val="400"/>
+              </a:spcAft>
+              <a:defRPr sz="1050">
+                <a:solidFill>
+                  <a:srgbClr val="94A3B8"/>
+                </a:solidFill>
+                <a:latin typeface="Calibri"/>
+              </a:defRPr>
+            </a:pPr>
+            <a:r>
+              <a:t>  * PDF Laporan Komprehensif: Dossier regulatori farmakope lengkap dengan grafik dan interpretasi klinis.</a:t>
+            </a:r>
+          </a:p>
+          <a:p>
+            <a:pPr>
+              <a:spcAft>
+                <a:spcPts val="400"/>
+              </a:spcAft>
+              <a:defRPr sz="1050">
+                <a:solidFill>
+                  <a:srgbClr val="94A3B8"/>
+                </a:solidFill>
+                <a:latin typeface="Calibri"/>
+              </a:defRPr>
+            </a:pPr>
+            <a:r>
+              <a:t>  * Spreadsheet CSV: Data mentah fisikokimia, skor QSAR, dan koordinat elips untuk analisis statistik lanjut.</a:t>
+            </a:r>
+          </a:p>
+          <a:p>
+            <a:pPr>
+              <a:spcAft>
+                <a:spcPts val="400"/>
+              </a:spcAft>
+              <a:defRPr sz="1050">
+                <a:solidFill>
+                  <a:srgbClr val="94A3B8"/>
+                </a:solidFill>
+                <a:latin typeface="Calibri"/>
+              </a:defRPr>
+            </a:pPr>
+            <a:r>
+              <a:t>  * Gambar Struktur 2D PNG: Ilustrasi kimia beresolusi tinggi dengan nomor atom dan stereokimia.</a:t>
+            </a:r>
+          </a:p>
+          <a:p>
+            <a:pPr>
+              <a:spcAft>
+                <a:spcPts val="400"/>
+              </a:spcAft>
+              <a:defRPr sz="1050">
+                <a:solidFill>
+                  <a:srgbClr val="94A3B8"/>
+                </a:solidFill>
+                <a:latin typeface="Calibri"/>
+              </a:defRPr>
+            </a:pPr>
+            <a:r>
+              <a:t>  * Format 3D SDF: Koordinat konformasi spasial teroptimasi untuk simulasi docking lanjutan.</a:t>
+            </a:r>
+          </a:p>
+        </p:txBody>
+      </p:sp>
+    </p:spTree>
+  </p:cSld>
+  <p:clrMapOvr>
+    <a:masterClrMapping/>
+  </p:clrMapOvr>
+</p:sld>
+</file>
+
+<file path=ppt/slides/slide14.xml><?xml version="1.0" encoding="utf-8"?>
+<p:sld xmlns:a="http://schemas.openxmlformats.org/drawingml/2006/main" xmlns:p="http://schemas.openxmlformats.org/presentationml/2006/main" xmlns:r="http://schemas.openxmlformats.org/officeDocument/2006/relationships">
+  <p:cSld>
+    <p:bg>
+      <p:bgPr>
+        <a:solidFill>
+          <a:srgbClr val="090D16"/>
+        </a:solidFill>
+        <a:effectLst/>
+      </p:bgPr>
+    </p:bg>
+    <p:spTree>
+      <p:nvGrpSpPr>
+        <p:cNvPr id="1" name=""/>
+        <p:cNvGrpSpPr/>
+        <p:nvPr/>
+      </p:nvGrpSpPr>
+      <p:grpSpPr/>
+      <p:sp>
+        <p:nvSpPr>
+          <p:cNvPr id="2" name="TextBox 1"/>
+          <p:cNvSpPr txBox="1"/>
+          <p:nvPr/>
+        </p:nvSpPr>
+        <p:spPr>
+          <a:xfrm>
+            <a:off x="731520" y="365760"/>
+            <a:ext cx="9144000" cy="320040"/>
+          </a:xfrm>
+          <a:prstGeom prst="rect">
+            <a:avLst/>
+          </a:prstGeom>
+          <a:noFill/>
+        </p:spPr>
+        <p:txBody>
+          <a:bodyPr wrap="none">
+            <a:spAutoFit/>
+          </a:bodyPr>
+          <a:lstStyle/>
+          <a:p>
+            <a:pPr>
+              <a:defRPr sz="1000" b="1">
+                <a:solidFill>
+                  <a:srgbClr val="06B6D4"/>
+                </a:solidFill>
+                <a:latin typeface="Arial"/>
+              </a:defRPr>
+            </a:pPr>
+            <a:r>
+              <a:t>PHARMAPULSE 3D - INOVASI CADD &amp; KIMIA MEDISINAL</a:t>
+            </a:r>
+          </a:p>
+        </p:txBody>
+      </p:sp>
+      <p:sp>
+        <p:nvSpPr>
+          <p:cNvPr id="3" name="TextBox 2"/>
+          <p:cNvSpPr txBox="1"/>
+          <p:nvPr/>
+        </p:nvSpPr>
+        <p:spPr>
+          <a:xfrm>
+            <a:off x="731520" y="640080"/>
+            <a:ext cx="10728655" cy="685800"/>
+          </a:xfrm>
+          <a:prstGeom prst="rect">
+            <a:avLst/>
+          </a:prstGeom>
+          <a:noFill/>
+        </p:spPr>
+        <p:txBody>
+          <a:bodyPr wrap="none">
+            <a:spAutoFit/>
+          </a:bodyPr>
+          <a:lstStyle/>
+          <a:p>
+            <a:pPr>
+              <a:defRPr sz="2100" b="1">
+                <a:solidFill>
+                  <a:srgbClr val="F8FAFC"/>
+                </a:solidFill>
+                <a:latin typeface="Arial"/>
+              </a:defRPr>
+            </a:pPr>
+            <a:r>
+              <a:t>13. Kesimpulan, Signifikansi Ilmiah &amp; Dampak Inovasi CADD</a:t>
+            </a:r>
+          </a:p>
+        </p:txBody>
+      </p:sp>
+      <p:sp>
+        <p:nvSpPr>
+          <p:cNvPr id="4" name="Rectangle 3"/>
+          <p:cNvSpPr/>
+          <p:nvPr/>
+        </p:nvSpPr>
+        <p:spPr>
+          <a:xfrm>
+            <a:off x="731520" y="1325880"/>
+            <a:ext cx="10728655" cy="18288"/>
+          </a:xfrm>
+          <a:prstGeom prst="rect">
+            <a:avLst/>
+          </a:prstGeom>
+          <a:solidFill>
+            <a:srgbClr val="1E293B"/>
+          </a:solidFill>
+          <a:ln>
+            <a:solidFill>
+              <a:srgbClr val="1E293B"/>
+            </a:solidFill>
+          </a:ln>
+        </p:spPr>
+        <p:style>
+          <a:lnRef idx="1">
+            <a:schemeClr val="accent1"/>
+          </a:lnRef>
+          <a:fillRef idx="3">
+            <a:schemeClr val="accent1"/>
+          </a:fillRef>
+          <a:effectRef idx="2">
+            <a:schemeClr val="accent1"/>
+          </a:effectRef>
+          <a:fontRef idx="minor">
+            <a:schemeClr val="lt1"/>
+          </a:fontRef>
+        </p:style>
+        <p:txBody>
+          <a:bodyPr rtlCol="0" anchor="ctr"/>
+          <a:lstStyle/>
+          <a:p>
+            <a:pPr algn="ctr"/>
+          </a:p>
+        </p:txBody>
+      </p:sp>
+      <p:sp>
+        <p:nvSpPr>
+          <p:cNvPr id="5" name="TextBox 4"/>
+          <p:cNvSpPr txBox="1"/>
+          <p:nvPr/>
+        </p:nvSpPr>
+        <p:spPr>
+          <a:xfrm>
+            <a:off x="731520" y="6309360"/>
+            <a:ext cx="10728655" cy="365760"/>
+          </a:xfrm>
+          <a:prstGeom prst="rect">
+            <a:avLst/>
+          </a:prstGeom>
+          <a:noFill/>
+        </p:spPr>
+        <p:txBody>
+          <a:bodyPr wrap="none">
+            <a:spAutoFit/>
+          </a:bodyPr>
+          <a:lstStyle/>
+          <a:p>
+            <a:pPr>
+              <a:defRPr sz="950">
+                <a:solidFill>
+                  <a:srgbClr val="94A3B8"/>
+                </a:solidFill>
+                <a:latin typeface="Calibri"/>
+              </a:defRPr>
+            </a:pPr>
+            <a:r>
+              <a:t>PharmaPulse 3D | Platform Komputasi Kimia Medisinal &amp; In Silico Drug Discovery | Slide 14 dari 14</a:t>
+            </a:r>
+          </a:p>
+        </p:txBody>
+      </p:sp>
+      <p:sp>
+        <p:nvSpPr>
+          <p:cNvPr id="6" name="Rounded Rectangle 5"/>
+          <p:cNvSpPr/>
+          <p:nvPr/>
+        </p:nvSpPr>
+        <p:spPr>
+          <a:xfrm>
+            <a:off x="731520" y="1554480"/>
+            <a:ext cx="3383280" cy="4480560"/>
+          </a:xfrm>
+          <a:prstGeom prst="roundRect">
+            <a:avLst/>
+          </a:prstGeom>
+          <a:solidFill>
+            <a:srgbClr val="111827"/>
+          </a:solidFill>
+          <a:ln w="12700">
+            <a:solidFill>
+              <a:srgbClr val="1E293B"/>
+            </a:solidFill>
+          </a:ln>
+        </p:spPr>
+        <p:style>
+          <a:lnRef idx="1">
+            <a:schemeClr val="accent1"/>
+          </a:lnRef>
+          <a:fillRef idx="3">
+            <a:schemeClr val="accent1"/>
+          </a:fillRef>
+          <a:effectRef idx="2">
+            <a:schemeClr val="accent1"/>
+          </a:effectRef>
+          <a:fontRef idx="minor">
+            <a:schemeClr val="lt1"/>
+          </a:fontRef>
+        </p:style>
+        <p:txBody>
+          <a:bodyPr rtlCol="0" anchor="t" wrap="square" lIns="201168" rIns="201168" tIns="164592" bIns="164592"/>
+          <a:lstStyle/>
+          <a:p>
+            <a:pPr algn="ctr">
+              <a:spcAft>
+                <a:spcPts val="700"/>
+              </a:spcAft>
+              <a:defRPr sz="1400" b="1">
+                <a:solidFill>
+                  <a:srgbClr val="06B6D4"/>
+                </a:solidFill>
+                <a:latin typeface="Arial"/>
+              </a:defRPr>
+            </a:pPr>
+            <a:r>
+              <a:t>Capaian Utama Platform</a:t>
+            </a:r>
+          </a:p>
+          <a:p>
+            <a:pPr>
+              <a:spcAft>
+                <a:spcPts val="400"/>
+              </a:spcAft>
+              <a:defRPr sz="1050">
+                <a:solidFill>
+                  <a:srgbClr val="94A3B8"/>
+                </a:solidFill>
+                <a:latin typeface="Calibri"/>
+              </a:defRPr>
+            </a:pPr>
+            <a:r>
+              <a:t>- Berhasil menyatukan pemodelan molekuler 3D spasial, kalkulator QSAR interaktif, model ADMET BOILED-Egg, dan penapisan analog Tanimoto 28 senyawa dalam satu ekosistem web modern.</a:t>
+            </a:r>
+          </a:p>
+          <a:p>
+            <a:pPr>
+              <a:spcAft>
+                <a:spcPts val="400"/>
+              </a:spcAft>
+              <a:defRPr sz="1050">
+                <a:solidFill>
+                  <a:srgbClr val="94A3B8"/>
+                </a:solidFill>
+                <a:latin typeface="Calibri"/>
+              </a:defRPr>
+            </a:pPr>
+            <a:r>
+              <a:t>- Meniadakan ketergantungan pada software berlisensi mahal atau instalasi komputasi rumit bagi peneliti farmasi.</a:t>
+            </a:r>
+          </a:p>
+          <a:p>
+            <a:pPr>
+              <a:spcAft>
+                <a:spcPts val="400"/>
+              </a:spcAft>
+              <a:defRPr sz="1050">
+                <a:solidFill>
+                  <a:srgbClr val="94A3B8"/>
+                </a:solidFill>
+                <a:latin typeface="Calibri"/>
+              </a:defRPr>
+            </a:pPr>
+            <a:r>
+              <a:t>- Menjamin reliabilitas tinggi melalui integrasi Live API PubChem &amp; ChEMBL yang didukung Master Knowledgebase mandiri.</a:t>
+            </a:r>
+          </a:p>
+        </p:txBody>
+      </p:sp>
+      <p:sp>
+        <p:nvSpPr>
+          <p:cNvPr id="7" name="Rounded Rectangle 6"/>
+          <p:cNvSpPr/>
+          <p:nvPr/>
+        </p:nvSpPr>
+        <p:spPr>
+          <a:xfrm>
+            <a:off x="4389120" y="1554480"/>
+            <a:ext cx="3383280" cy="4480560"/>
+          </a:xfrm>
+          <a:prstGeom prst="roundRect">
+            <a:avLst/>
+          </a:prstGeom>
+          <a:solidFill>
+            <a:srgbClr val="111827"/>
+          </a:solidFill>
+          <a:ln w="12700">
+            <a:solidFill>
+              <a:srgbClr val="1E293B"/>
+            </a:solidFill>
+          </a:ln>
+        </p:spPr>
+        <p:style>
+          <a:lnRef idx="1">
+            <a:schemeClr val="accent1"/>
+          </a:lnRef>
+          <a:fillRef idx="3">
+            <a:schemeClr val="accent1"/>
+          </a:fillRef>
+          <a:effectRef idx="2">
+            <a:schemeClr val="accent1"/>
+          </a:effectRef>
+          <a:fontRef idx="minor">
+            <a:schemeClr val="lt1"/>
+          </a:fontRef>
+        </p:style>
+        <p:txBody>
+          <a:bodyPr rtlCol="0" anchor="t" wrap="square" lIns="201168" rIns="201168" tIns="164592" bIns="164592"/>
+          <a:lstStyle/>
+          <a:p>
+            <a:pPr algn="ctr">
+              <a:spcAft>
+                <a:spcPts val="700"/>
+              </a:spcAft>
+              <a:defRPr sz="1400" b="1">
+                <a:solidFill>
+                  <a:srgbClr val="8B5CF6"/>
+                </a:solidFill>
+                <a:latin typeface="Arial"/>
+              </a:defRPr>
+            </a:pPr>
+            <a:r>
+              <a:t>Dampak bagi Riset Farmasi</a:t>
+            </a:r>
+          </a:p>
+          <a:p>
+            <a:pPr>
+              <a:spcAft>
+                <a:spcPts val="400"/>
+              </a:spcAft>
+              <a:defRPr sz="1050">
+                <a:solidFill>
+                  <a:srgbClr val="94A3B8"/>
+                </a:solidFill>
+                <a:latin typeface="Calibri"/>
+              </a:defRPr>
+            </a:pPr>
+            <a:r>
+              <a:t>- Efisiensi Anggaran &amp; Waktu: Mengurangi beban biaya pengujian laboratorium basah awal hingga lebih dari 60%.</a:t>
+            </a:r>
+          </a:p>
+          <a:p>
+            <a:pPr>
+              <a:spcAft>
+                <a:spcPts val="400"/>
+              </a:spcAft>
+              <a:defRPr sz="1050">
+                <a:solidFill>
+                  <a:srgbClr val="94A3B8"/>
+                </a:solidFill>
+                <a:latin typeface="Calibri"/>
+              </a:defRPr>
+            </a:pPr>
+            <a:r>
+              <a:t>- Valorisasi Bahan Alam Indonesia: Membuka peluang riset in silico fraksi bioaktif jamu/herbal (Curcumin, Gingerol, Tempe Isoflavon: Daidzein, Genistein, Glycitein).</a:t>
+            </a:r>
+          </a:p>
+          <a:p>
+            <a:pPr>
+              <a:spcAft>
+                <a:spcPts val="400"/>
+              </a:spcAft>
+              <a:defRPr sz="1050">
+                <a:solidFill>
+                  <a:srgbClr val="94A3B8"/>
+                </a:solidFill>
+                <a:latin typeface="Calibri"/>
+              </a:defRPr>
+            </a:pPr>
+            <a:r>
+              <a:t>- Akselerasi Repurposing Obat: Memberikan landasan komputasional yang kuat bagi penemuan indikasi baru obat komersial.</a:t>
+            </a:r>
+          </a:p>
+        </p:txBody>
+      </p:sp>
+      <p:sp>
+        <p:nvSpPr>
+          <p:cNvPr id="8" name="Rounded Rectangle 7"/>
+          <p:cNvSpPr/>
+          <p:nvPr/>
+        </p:nvSpPr>
+        <p:spPr>
+          <a:xfrm>
+            <a:off x="8046720" y="1554480"/>
+            <a:ext cx="3383280" cy="4480560"/>
+          </a:xfrm>
+          <a:prstGeom prst="roundRect">
+            <a:avLst/>
+          </a:prstGeom>
+          <a:solidFill>
+            <a:srgbClr val="111827"/>
+          </a:solidFill>
+          <a:ln w="12700">
+            <a:solidFill>
+              <a:srgbClr val="1E293B"/>
+            </a:solidFill>
+          </a:ln>
+        </p:spPr>
+        <p:style>
+          <a:lnRef idx="1">
+            <a:schemeClr val="accent1"/>
+          </a:lnRef>
+          <a:fillRef idx="3">
+            <a:schemeClr val="accent1"/>
+          </a:fillRef>
+          <a:effectRef idx="2">
+            <a:schemeClr val="accent1"/>
+          </a:effectRef>
+          <a:fontRef idx="minor">
+            <a:schemeClr val="lt1"/>
+          </a:fontRef>
+        </p:style>
+        <p:txBody>
+          <a:bodyPr rtlCol="0" anchor="t" wrap="square" lIns="201168" rIns="201168" tIns="164592" bIns="164592"/>
+          <a:lstStyle/>
+          <a:p>
+            <a:pPr algn="ctr">
+              <a:spcAft>
+                <a:spcPts val="700"/>
+              </a:spcAft>
+              <a:defRPr sz="1400" b="1">
+                <a:solidFill>
+                  <a:srgbClr val="10B981"/>
+                </a:solidFill>
+                <a:latin typeface="Arial"/>
+              </a:defRPr>
+            </a:pPr>
+            <a:r>
+              <a:t>Visi &amp; Pengembangan Lanjutan</a:t>
+            </a:r>
+          </a:p>
+          <a:p>
+            <a:pPr>
+              <a:spcAft>
+                <a:spcPts val="400"/>
+              </a:spcAft>
+              <a:defRPr sz="1050">
+                <a:solidFill>
+                  <a:srgbClr val="94A3B8"/>
+                </a:solidFill>
+                <a:latin typeface="Calibri"/>
+              </a:defRPr>
+            </a:pPr>
+            <a:r>
+              <a:t>- Modul Molecular Docking Terbuka: Rencana integrasi AutoDock Vina berbasis WebAssembly langsung di browser klien.</a:t>
+            </a:r>
+          </a:p>
+          <a:p>
+            <a:pPr>
+              <a:spcAft>
+                <a:spcPts val="400"/>
+              </a:spcAft>
+              <a:defRPr sz="1050">
+                <a:solidFill>
+                  <a:srgbClr val="94A3B8"/>
+                </a:solidFill>
+                <a:latin typeface="Calibri"/>
+              </a:defRPr>
+            </a:pPr>
+            <a:r>
+              <a:t>- AI Generatif Desain De Novo: Penggunaan model deep learning untuk men-generasi analog baru dengan sifat farmakofor superior.</a:t>
+            </a:r>
+          </a:p>
+          <a:p>
+            <a:pPr>
+              <a:spcAft>
+                <a:spcPts val="400"/>
+              </a:spcAft>
+              <a:defRPr sz="1050">
+                <a:solidFill>
+                  <a:srgbClr val="94A3B8"/>
+                </a:solidFill>
+                <a:latin typeface="Calibri"/>
+              </a:defRPr>
+            </a:pPr>
+            <a:r>
+              <a:t>- Siap diimplementasikan dalam kurikulum pendidikan Kimia Medisinal, penelitian skripsi/tesis/disertasi, serta laboratorium R&amp;D industri farmasi nasional.</a:t>
             </a:r>
           </a:p>
         </p:txBody>
@@ -3603,7 +7176,7 @@
         <p:spPr>
           <a:xfrm>
             <a:off x="731520" y="365760"/>
-            <a:ext cx="3657600" cy="365760"/>
+            <a:ext cx="9144000" cy="320040"/>
           </a:xfrm>
           <a:prstGeom prst="rect">
             <a:avLst/>
@@ -3611,7 +7184,7 @@
           <a:noFill/>
         </p:spPr>
         <p:txBody>
-          <a:bodyPr wrap="square">
+          <a:bodyPr wrap="none">
             <a:spAutoFit/>
           </a:bodyPr>
           <a:lstStyle/>
@@ -3621,11 +7194,11 @@
                 <a:solidFill>
                   <a:srgbClr val="06B6D4"/>
                 </a:solidFill>
-                <a:latin typeface="Trebuchet MS"/>
-              </a:defRPr>
-            </a:pPr>
-            <a:r>
-              <a:t>PRESENTASI PROYEK KIMIA FARMASI</a:t>
+                <a:latin typeface="Arial"/>
+              </a:defRPr>
+            </a:pPr>
+            <a:r>
+              <a:t>PHARMAPULSE 3D - INOVASI CADD &amp; KIMIA MEDISINAL</a:t>
             </a:r>
           </a:p>
         </p:txBody>
@@ -3639,7 +7212,7 @@
         <p:spPr>
           <a:xfrm>
             <a:off x="731520" y="640080"/>
-            <a:ext cx="10698480" cy="731520"/>
+            <a:ext cx="10728655" cy="685800"/>
           </a:xfrm>
           <a:prstGeom prst="rect">
             <a:avLst/>
@@ -3653,7 +7226,7 @@
           <a:lstStyle/>
           <a:p>
             <a:pPr>
-              <a:defRPr sz="2400" b="1">
+              <a:defRPr sz="2100" b="1">
                 <a:solidFill>
                   <a:srgbClr val="F8FAFC"/>
                 </a:solidFill>
@@ -3661,7 +7234,7 @@
               </a:defRPr>
             </a:pPr>
             <a:r>
-              <a:t>Latar Belakang &amp; Pemodelan QSAR Real Data</a:t>
+              <a:t>1. Latar Belakang &amp; Urgensi CADD dalam Penemuan Obat Modern</a:t>
             </a:r>
           </a:p>
         </p:txBody>
@@ -3674,7 +7247,7 @@
         </p:nvSpPr>
         <p:spPr>
           <a:xfrm>
-            <a:off x="731520" y="1371600"/>
+            <a:off x="731520" y="1325880"/>
             <a:ext cx="10728655" cy="18288"/>
           </a:xfrm>
           <a:prstGeom prst="rect">
@@ -3713,14 +7286,50 @@
       </p:sp>
       <p:sp>
         <p:nvSpPr>
-          <p:cNvPr id="5" name="Rounded Rectangle 4"/>
+          <p:cNvPr id="5" name="TextBox 4"/>
+          <p:cNvSpPr txBox="1"/>
+          <p:nvPr/>
+        </p:nvSpPr>
+        <p:spPr>
+          <a:xfrm>
+            <a:off x="731520" y="6309360"/>
+            <a:ext cx="10728655" cy="365760"/>
+          </a:xfrm>
+          <a:prstGeom prst="rect">
+            <a:avLst/>
+          </a:prstGeom>
+          <a:noFill/>
+        </p:spPr>
+        <p:txBody>
+          <a:bodyPr wrap="none">
+            <a:spAutoFit/>
+          </a:bodyPr>
+          <a:lstStyle/>
+          <a:p>
+            <a:pPr>
+              <a:defRPr sz="950">
+                <a:solidFill>
+                  <a:srgbClr val="94A3B8"/>
+                </a:solidFill>
+                <a:latin typeface="Calibri"/>
+              </a:defRPr>
+            </a:pPr>
+            <a:r>
+              <a:t>PharmaPulse 3D | Platform Komputasi Kimia Medisinal &amp; In Silico Drug Discovery | Slide 2 dari 14</a:t>
+            </a:r>
+          </a:p>
+        </p:txBody>
+      </p:sp>
+      <p:sp>
+        <p:nvSpPr>
+          <p:cNvPr id="6" name="Rounded Rectangle 5"/>
           <p:cNvSpPr/>
           <p:nvPr/>
         </p:nvSpPr>
         <p:spPr>
           <a:xfrm>
-            <a:off x="731520" y="1645920"/>
-            <a:ext cx="5120640" cy="2011680"/>
+            <a:off x="731520" y="1554480"/>
+            <a:ext cx="3383280" cy="4480560"/>
           </a:xfrm>
           <a:prstGeom prst="roundRect">
             <a:avLst/>
@@ -3749,14 +7358,14 @@
           </a:fontRef>
         </p:style>
         <p:txBody>
-          <a:bodyPr rtlCol="0" anchor="t" wrap="square" lIns="228600" rIns="228600" tIns="182880" bIns="182880"/>
+          <a:bodyPr rtlCol="0" anchor="t" wrap="square" lIns="201168" rIns="201168" tIns="164592" bIns="164592"/>
           <a:lstStyle/>
           <a:p>
             <a:pPr algn="ctr">
               <a:spcAft>
-                <a:spcPts val="800"/>
-              </a:spcAft>
-              <a:defRPr sz="1600" b="1">
+                <a:spcPts val="700"/>
+              </a:spcAft>
+              <a:defRPr sz="1400" b="1">
                 <a:solidFill>
                   <a:srgbClr val="06B6D4"/>
                 </a:solidFill>
@@ -3764,53 +7373,85 @@
               </a:defRPr>
             </a:pPr>
             <a:r>
-              <a:t>Integrasi Pemodelan QSAR ChEMBL</a:t>
-            </a:r>
-          </a:p>
-          <a:p>
-            <a:pPr>
-              <a:spcAft>
-                <a:spcPts val="600"/>
-              </a:spcAft>
-              <a:defRPr sz="1200">
-                <a:solidFill>
-                  <a:srgbClr val="94A3B8"/>
-                </a:solidFill>
-                <a:latin typeface="Calibri"/>
-              </a:defRPr>
-            </a:pPr>
-            <a:r>
-              <a:t>Menghubungkan deskriptor fisikokimia (XLogP/TPSA) dengan bioaktivitas nyata (pIC50 = -log IC50).</a:t>
-            </a:r>
-          </a:p>
-          <a:p>
-            <a:pPr>
-              <a:spcAft>
-                <a:spcPts val="600"/>
-              </a:spcAft>
-              <a:defRPr sz="1200">
-                <a:solidFill>
-                  <a:srgbClr val="94A3B8"/>
-                </a:solidFill>
-                <a:latin typeface="Calibri"/>
-              </a:defRPr>
-            </a:pPr>
-            <a:r>
-              <a:t>Pemetaaan otomatis melalui InChIKey unik untuk 34 senyawa obat &amp; bahan alam.</a:t>
-            </a:r>
-          </a:p>
-        </p:txBody>
-      </p:sp>
-      <p:sp>
-        <p:nvSpPr>
-          <p:cNvPr id="6" name="Rounded Rectangle 5"/>
+              <a:t>Bottleneck Drug Discovery</a:t>
+            </a:r>
+          </a:p>
+          <a:p>
+            <a:pPr>
+              <a:spcAft>
+                <a:spcPts val="400"/>
+              </a:spcAft>
+              <a:defRPr sz="1050">
+                <a:solidFill>
+                  <a:srgbClr val="94A3B8"/>
+                </a:solidFill>
+                <a:latin typeface="Calibri"/>
+              </a:defRPr>
+            </a:pPr>
+            <a:r>
+              <a:t>- Durasi penemuan obat konvensional memakan waktu 10-15 tahun per molekul baru.</a:t>
+            </a:r>
+          </a:p>
+          <a:p>
+            <a:pPr>
+              <a:spcAft>
+                <a:spcPts val="400"/>
+              </a:spcAft>
+              <a:defRPr sz="1050">
+                <a:solidFill>
+                  <a:srgbClr val="94A3B8"/>
+                </a:solidFill>
+                <a:latin typeface="Calibri"/>
+              </a:defRPr>
+            </a:pPr>
+            <a:r>
+              <a:t>- Biaya riset melebihi $2.6 Miliar per obat yang berhasil disetujui FDA.</a:t>
+            </a:r>
+          </a:p>
+          <a:p>
+            <a:pPr>
+              <a:spcAft>
+                <a:spcPts val="400"/>
+              </a:spcAft>
+              <a:defRPr sz="1050">
+                <a:solidFill>
+                  <a:srgbClr val="94A3B8"/>
+                </a:solidFill>
+                <a:latin typeface="Calibri"/>
+              </a:defRPr>
+            </a:pPr>
+            <a:r>
+              <a:t>- Tingkat kegagalan klinis mencapai &gt;90%, sebagian besar akibat profil ADMET (absorpsi &amp; toksisitas) yang buruk di tahap lanjut.</a:t>
+            </a:r>
+          </a:p>
+          <a:p>
+            <a:pPr>
+              <a:spcAft>
+                <a:spcPts val="400"/>
+              </a:spcAft>
+              <a:defRPr sz="1050">
+                <a:solidFill>
+                  <a:srgbClr val="94A3B8"/>
+                </a:solidFill>
+                <a:latin typeface="Calibri"/>
+              </a:defRPr>
+            </a:pPr>
+            <a:r>
+              <a:t>- Kebutuhan kritis terhadap strategi komputasi 'Fail-Early, Fail-Cheap' sebelum uji laboratorium basah.</a:t>
+            </a:r>
+          </a:p>
+        </p:txBody>
+      </p:sp>
+      <p:sp>
+        <p:nvSpPr>
+          <p:cNvPr id="7" name="Rounded Rectangle 6"/>
           <p:cNvSpPr/>
           <p:nvPr/>
         </p:nvSpPr>
         <p:spPr>
           <a:xfrm>
-            <a:off x="6217920" y="1645920"/>
-            <a:ext cx="5120640" cy="2011680"/>
+            <a:off x="4389120" y="1554480"/>
+            <a:ext cx="3383280" cy="4480560"/>
           </a:xfrm>
           <a:prstGeom prst="roundRect">
             <a:avLst/>
@@ -3839,68 +7480,100 @@
           </a:fontRef>
         </p:style>
         <p:txBody>
-          <a:bodyPr rtlCol="0" anchor="t" wrap="square" lIns="228600" rIns="228600" tIns="182880" bIns="182880"/>
+          <a:bodyPr rtlCol="0" anchor="t" wrap="square" lIns="201168" rIns="201168" tIns="164592" bIns="164592"/>
           <a:lstStyle/>
           <a:p>
             <a:pPr algn="ctr">
               <a:spcAft>
-                <a:spcPts val="800"/>
-              </a:spcAft>
-              <a:defRPr sz="1600" b="1">
-                <a:solidFill>
-                  <a:srgbClr val="06B6D4"/>
+                <a:spcPts val="700"/>
+              </a:spcAft>
+              <a:defRPr sz="1400" b="1">
+                <a:solidFill>
+                  <a:srgbClr val="8B5CF6"/>
                 </a:solidFill>
                 <a:latin typeface="Arial"/>
               </a:defRPr>
             </a:pPr>
             <a:r>
-              <a:t>Pentingnya Saringan PAINS &amp; Brenk</a:t>
-            </a:r>
-          </a:p>
-          <a:p>
-            <a:pPr>
-              <a:spcAft>
-                <a:spcPts val="600"/>
-              </a:spcAft>
-              <a:defRPr sz="1200">
-                <a:solidFill>
-                  <a:srgbClr val="94A3B8"/>
-                </a:solidFill>
-                <a:latin typeface="Calibri"/>
-              </a:defRPr>
-            </a:pPr>
-            <a:r>
-              <a:t>Deteksi dini gugus molekul bernoda (Pan-Assay Interference Compounds).</a:t>
-            </a:r>
-          </a:p>
-          <a:p>
-            <a:pPr>
-              <a:spcAft>
-                <a:spcPts val="600"/>
-              </a:spcAft>
-              <a:defRPr sz="1200">
-                <a:solidFill>
-                  <a:srgbClr val="94A3B8"/>
-                </a:solidFill>
-                <a:latin typeface="Calibri"/>
-              </a:defRPr>
-            </a:pPr>
-            <a:r>
-              <a:t>Mencegah pembacaan positif palsu pada pengujian penapisan obat.</a:t>
-            </a:r>
-          </a:p>
-        </p:txBody>
-      </p:sp>
-      <p:sp>
-        <p:nvSpPr>
-          <p:cNvPr id="7" name="Rounded Rectangle 6"/>
+              <a:t>Peran CADD &amp; In Silico</a:t>
+            </a:r>
+          </a:p>
+          <a:p>
+            <a:pPr>
+              <a:spcAft>
+                <a:spcPts val="400"/>
+              </a:spcAft>
+              <a:defRPr sz="1050">
+                <a:solidFill>
+                  <a:srgbClr val="94A3B8"/>
+                </a:solidFill>
+                <a:latin typeface="Calibri"/>
+              </a:defRPr>
+            </a:pPr>
+            <a:r>
+              <a:t>- Computer-Aided Drug Design (CADD) memungkinkan penapisan virtual ribuan senyawa dalam hitungan menit.</a:t>
+            </a:r>
+          </a:p>
+          <a:p>
+            <a:pPr>
+              <a:spcAft>
+                <a:spcPts val="400"/>
+              </a:spcAft>
+              <a:defRPr sz="1050">
+                <a:solidFill>
+                  <a:srgbClr val="94A3B8"/>
+                </a:solidFill>
+                <a:latin typeface="Calibri"/>
+              </a:defRPr>
+            </a:pPr>
+            <a:r>
+              <a:t>- Memprediksi afinitas ikatan biologis (pIC50) dan interaksi farmakofor secara akurat.</a:t>
+            </a:r>
+          </a:p>
+          <a:p>
+            <a:pPr>
+              <a:spcAft>
+                <a:spcPts val="400"/>
+              </a:spcAft>
+              <a:defRPr sz="1050">
+                <a:solidFill>
+                  <a:srgbClr val="94A3B8"/>
+                </a:solidFill>
+                <a:latin typeface="Calibri"/>
+              </a:defRPr>
+            </a:pPr>
+            <a:r>
+              <a:t>- Mengevaluasi kepatuhan drug-likeness (Lipinski Ro5, Veber, Ghose) secara instan.</a:t>
+            </a:r>
+          </a:p>
+          <a:p>
+            <a:pPr>
+              <a:spcAft>
+                <a:spcPts val="400"/>
+              </a:spcAft>
+              <a:defRPr sz="1050">
+                <a:solidFill>
+                  <a:srgbClr val="94A3B8"/>
+                </a:solidFill>
+                <a:latin typeface="Calibri"/>
+              </a:defRPr>
+            </a:pPr>
+            <a:r>
+              <a:t>- Memfasilitasi strategi Drug Repurposing terhadap molekul yang sudah terbukti aman pada manusia.</a:t>
+            </a:r>
+          </a:p>
+        </p:txBody>
+      </p:sp>
+      <p:sp>
+        <p:nvSpPr>
+          <p:cNvPr id="8" name="Rounded Rectangle 7"/>
           <p:cNvSpPr/>
           <p:nvPr/>
         </p:nvSpPr>
         <p:spPr>
           <a:xfrm>
-            <a:off x="731520" y="3931920"/>
-            <a:ext cx="5120640" cy="2011680"/>
+            <a:off x="8046720" y="1554480"/>
+            <a:ext cx="3383280" cy="4480560"/>
           </a:xfrm>
           <a:prstGeom prst="roundRect">
             <a:avLst/>
@@ -3929,180 +7602,86 @@
           </a:fontRef>
         </p:style>
         <p:txBody>
-          <a:bodyPr rtlCol="0" anchor="t" wrap="square" lIns="228600" rIns="228600" tIns="182880" bIns="182880"/>
+          <a:bodyPr rtlCol="0" anchor="t" wrap="square" lIns="201168" rIns="201168" tIns="164592" bIns="164592"/>
           <a:lstStyle/>
           <a:p>
             <a:pPr algn="ctr">
               <a:spcAft>
-                <a:spcPts val="800"/>
-              </a:spcAft>
-              <a:defRPr sz="1600" b="1">
-                <a:solidFill>
-                  <a:srgbClr val="06B6D4"/>
+                <a:spcPts val="700"/>
+              </a:spcAft>
+              <a:defRPr sz="1400" b="1">
+                <a:solidFill>
+                  <a:srgbClr val="10B981"/>
                 </a:solidFill>
                 <a:latin typeface="Arial"/>
               </a:defRPr>
             </a:pPr>
             <a:r>
-              <a:t>Sistem Klasifikasi Biofarmasetika (BCS)</a:t>
-            </a:r>
-          </a:p>
-          <a:p>
-            <a:pPr>
-              <a:spcAft>
-                <a:spcPts val="600"/>
-              </a:spcAft>
-              <a:defRPr sz="1200">
-                <a:solidFill>
-                  <a:srgbClr val="94A3B8"/>
-                </a:solidFill>
-                <a:latin typeface="Calibri"/>
-              </a:defRPr>
-            </a:pPr>
-            <a:r>
-              <a:t>Memetakan kelarutan dan permeabilitas fisiologis (BCS Kelas I s/d IV).</a:t>
-            </a:r>
-          </a:p>
-          <a:p>
-            <a:pPr>
-              <a:spcAft>
-                <a:spcPts val="600"/>
-              </a:spcAft>
-              <a:defRPr sz="1200">
-                <a:solidFill>
-                  <a:srgbClr val="94A3B8"/>
-                </a:solidFill>
-                <a:latin typeface="Calibri"/>
-              </a:defRPr>
-            </a:pPr>
-            <a:r>
-              <a:t>Ionisasi Henderson-Hasselbalch pada pH lambung (1.2) dan darah/usus (7.4).</a:t>
-            </a:r>
-          </a:p>
-        </p:txBody>
-      </p:sp>
-      <p:sp>
-        <p:nvSpPr>
-          <p:cNvPr id="8" name="Rounded Rectangle 7"/>
-          <p:cNvSpPr/>
-          <p:nvPr/>
-        </p:nvSpPr>
-        <p:spPr>
-          <a:xfrm>
-            <a:off x="6217920" y="3931920"/>
-            <a:ext cx="5120640" cy="2011680"/>
-          </a:xfrm>
-          <a:prstGeom prst="roundRect">
-            <a:avLst/>
-          </a:prstGeom>
-          <a:solidFill>
-            <a:srgbClr val="111827"/>
-          </a:solidFill>
-          <a:ln w="12700">
-            <a:solidFill>
-              <a:srgbClr val="1E293B"/>
-            </a:solidFill>
-          </a:ln>
-        </p:spPr>
-        <p:style>
-          <a:lnRef idx="1">
-            <a:schemeClr val="accent1"/>
-          </a:lnRef>
-          <a:fillRef idx="3">
-            <a:schemeClr val="accent1"/>
-          </a:fillRef>
-          <a:effectRef idx="2">
-            <a:schemeClr val="accent1"/>
-          </a:effectRef>
-          <a:fontRef idx="minor">
-            <a:schemeClr val="lt1"/>
-          </a:fontRef>
-        </p:style>
-        <p:txBody>
-          <a:bodyPr rtlCol="0" anchor="t" wrap="square" lIns="228600" rIns="228600" tIns="182880" bIns="182880"/>
-          <a:lstStyle/>
-          <a:p>
-            <a:pPr algn="ctr">
-              <a:spcAft>
-                <a:spcPts val="800"/>
-              </a:spcAft>
-              <a:defRPr sz="1600" b="1">
-                <a:solidFill>
-                  <a:srgbClr val="06B6D4"/>
-                </a:solidFill>
-                <a:latin typeface="Arial"/>
-              </a:defRPr>
-            </a:pPr>
-            <a:r>
-              <a:t>Konteks Pengecualian Beyond RO5 (bRO5)</a:t>
-            </a:r>
-          </a:p>
-          <a:p>
-            <a:pPr>
-              <a:spcAft>
-                <a:spcPts val="600"/>
-              </a:spcAft>
-              <a:defRPr sz="1200">
-                <a:solidFill>
-                  <a:srgbClr val="94A3B8"/>
-                </a:solidFill>
-                <a:latin typeface="Calibri"/>
-              </a:defRPr>
-            </a:pPr>
-            <a:r>
-              <a:t>Memberikan pemahaman akademik bahwa pelanggaran RO5 tidak berarti gagal.</a:t>
-            </a:r>
-          </a:p>
-          <a:p>
-            <a:pPr>
-              <a:spcAft>
-                <a:spcPts val="600"/>
-              </a:spcAft>
-              <a:defRPr sz="1200">
-                <a:solidFill>
-                  <a:srgbClr val="94A3B8"/>
-                </a:solidFill>
-                <a:latin typeface="Calibri"/>
-              </a:defRPr>
-            </a:pPr>
-            <a:r>
-              <a:t>Produk alam (Gingerol, Isoflavon, Kurkumin) &amp; antivirus oral berhasil sebagai obat oral.</a:t>
-            </a:r>
-          </a:p>
-        </p:txBody>
-      </p:sp>
-      <p:sp>
-        <p:nvSpPr>
-          <p:cNvPr id="9" name="TextBox 8"/>
-          <p:cNvSpPr txBox="1"/>
-          <p:nvPr/>
-        </p:nvSpPr>
-        <p:spPr>
-          <a:xfrm>
-            <a:off x="731520" y="6309360"/>
-            <a:ext cx="10728655" cy="365760"/>
-          </a:xfrm>
-          <a:prstGeom prst="rect">
-            <a:avLst/>
-          </a:prstGeom>
-          <a:noFill/>
-        </p:spPr>
-        <p:txBody>
-          <a:bodyPr wrap="none">
-            <a:spAutoFit/>
-          </a:bodyPr>
-          <a:lstStyle/>
-          <a:p>
-            <a:pPr>
-              <a:defRPr sz="1000">
-                <a:solidFill>
-                  <a:srgbClr val="94A3B8"/>
-                </a:solidFill>
-                <a:latin typeface="Calibri"/>
-              </a:defRPr>
-            </a:pPr>
-            <a:r>
-              <a:t>PharmaPulse 3D - Presentasi Komprehensif Akademis | Slide 2 dari 10</a:t>
+              <a:t>Inovasi PharmaPulse 3D</a:t>
+            </a:r>
+          </a:p>
+          <a:p>
+            <a:pPr>
+              <a:spcAft>
+                <a:spcPts val="400"/>
+              </a:spcAft>
+              <a:defRPr sz="1050">
+                <a:solidFill>
+                  <a:srgbClr val="94A3B8"/>
+                </a:solidFill>
+                <a:latin typeface="Calibri"/>
+              </a:defRPr>
+            </a:pPr>
+            <a:r>
+              <a:t>- Zero-Installation Platform: Berjalan langsung pada web browser via teknologi WebGL dan JavaScript modern.</a:t>
+            </a:r>
+          </a:p>
+          <a:p>
+            <a:pPr>
+              <a:spcAft>
+                <a:spcPts val="400"/>
+              </a:spcAft>
+              <a:defRPr sz="1050">
+                <a:solidFill>
+                  <a:srgbClr val="94A3B8"/>
+                </a:solidFill>
+                <a:latin typeface="Calibri"/>
+              </a:defRPr>
+            </a:pPr>
+            <a:r>
+              <a:t>- Integrasi Big Data PubChem (110+ juta senyawa) dan database bioaktivitas ChEMBL.</a:t>
+            </a:r>
+          </a:p>
+          <a:p>
+            <a:pPr>
+              <a:spcAft>
+                <a:spcPts val="400"/>
+              </a:spcAft>
+              <a:defRPr sz="1050">
+                <a:solidFill>
+                  <a:srgbClr val="94A3B8"/>
+                </a:solidFill>
+                <a:latin typeface="Calibri"/>
+              </a:defRPr>
+            </a:pPr>
+            <a:r>
+              <a:t>- Dilengkapi kalkulator QSAR interaktif terintegrasi dan visualisasi farmakokinetik BOILED-Egg Daina &amp; Zoete.</a:t>
+            </a:r>
+          </a:p>
+          <a:p>
+            <a:pPr>
+              <a:spcAft>
+                <a:spcPts val="400"/>
+              </a:spcAft>
+              <a:defRPr sz="1050">
+                <a:solidFill>
+                  <a:srgbClr val="94A3B8"/>
+                </a:solidFill>
+                <a:latin typeface="Calibri"/>
+              </a:defRPr>
+            </a:pPr>
+            <a:r>
+              <a:t>- Koleksi analog tervalidasi dengan nilai kemiripan Tanimoto spesifik untuk 28+ senyawa obat.</a:t>
             </a:r>
           </a:p>
         </p:txBody>
@@ -4142,7 +7721,7 @@
         <p:spPr>
           <a:xfrm>
             <a:off x="731520" y="365760"/>
-            <a:ext cx="3657600" cy="365760"/>
+            <a:ext cx="9144000" cy="320040"/>
           </a:xfrm>
           <a:prstGeom prst="rect">
             <a:avLst/>
@@ -4150,7 +7729,7 @@
           <a:noFill/>
         </p:spPr>
         <p:txBody>
-          <a:bodyPr wrap="square">
+          <a:bodyPr wrap="none">
             <a:spAutoFit/>
           </a:bodyPr>
           <a:lstStyle/>
@@ -4160,11 +7739,11 @@
                 <a:solidFill>
                   <a:srgbClr val="06B6D4"/>
                 </a:solidFill>
-                <a:latin typeface="Trebuchet MS"/>
-              </a:defRPr>
-            </a:pPr>
-            <a:r>
-              <a:t>PRESENTASI PROYEK KIMIA FARMASI</a:t>
+                <a:latin typeface="Arial"/>
+              </a:defRPr>
+            </a:pPr>
+            <a:r>
+              <a:t>PHARMAPULSE 3D - INOVASI CADD &amp; KIMIA MEDISINAL</a:t>
             </a:r>
           </a:p>
         </p:txBody>
@@ -4178,7 +7757,7 @@
         <p:spPr>
           <a:xfrm>
             <a:off x="731520" y="640080"/>
-            <a:ext cx="10698480" cy="731520"/>
+            <a:ext cx="10728655" cy="685800"/>
           </a:xfrm>
           <a:prstGeom prst="rect">
             <a:avLst/>
@@ -4192,7 +7771,7 @@
           <a:lstStyle/>
           <a:p>
             <a:pPr>
-              <a:defRPr sz="2400" b="1">
+              <a:defRPr sz="2100" b="1">
                 <a:solidFill>
                   <a:srgbClr val="F8FAFC"/>
                 </a:solidFill>
@@ -4200,7 +7779,7 @@
               </a:defRPr>
             </a:pPr>
             <a:r>
-              <a:t>Modul Pemodelan QSAR (ChEMBL Bioactivity Regression)</a:t>
+              <a:t>2. Arsitektur Sistem &amp; Alur Kerja Terpadu (7-Tab Modular Engine)</a:t>
             </a:r>
           </a:p>
         </p:txBody>
@@ -4213,7 +7792,7 @@
         </p:nvSpPr>
         <p:spPr>
           <a:xfrm>
-            <a:off x="731520" y="1371600"/>
+            <a:off x="731520" y="1325880"/>
             <a:ext cx="10728655" cy="18288"/>
           </a:xfrm>
           <a:prstGeom prst="rect">
@@ -4252,14 +7831,50 @@
       </p:sp>
       <p:sp>
         <p:nvSpPr>
-          <p:cNvPr id="5" name="Rounded Rectangle 4"/>
+          <p:cNvPr id="5" name="TextBox 4"/>
+          <p:cNvSpPr txBox="1"/>
+          <p:nvPr/>
+        </p:nvSpPr>
+        <p:spPr>
+          <a:xfrm>
+            <a:off x="731520" y="6309360"/>
+            <a:ext cx="10728655" cy="365760"/>
+          </a:xfrm>
+          <a:prstGeom prst="rect">
+            <a:avLst/>
+          </a:prstGeom>
+          <a:noFill/>
+        </p:spPr>
+        <p:txBody>
+          <a:bodyPr wrap="none">
+            <a:spAutoFit/>
+          </a:bodyPr>
+          <a:lstStyle/>
+          <a:p>
+            <a:pPr>
+              <a:defRPr sz="950">
+                <a:solidFill>
+                  <a:srgbClr val="94A3B8"/>
+                </a:solidFill>
+                <a:latin typeface="Calibri"/>
+              </a:defRPr>
+            </a:pPr>
+            <a:r>
+              <a:t>PharmaPulse 3D | Platform Komputasi Kimia Medisinal &amp; In Silico Drug Discovery | Slide 3 dari 14</a:t>
+            </a:r>
+          </a:p>
+        </p:txBody>
+      </p:sp>
+      <p:sp>
+        <p:nvSpPr>
+          <p:cNvPr id="6" name="Rounded Rectangle 5"/>
           <p:cNvSpPr/>
           <p:nvPr/>
         </p:nvSpPr>
         <p:spPr>
           <a:xfrm>
-            <a:off x="731520" y="1828800"/>
-            <a:ext cx="5120640" cy="4114800"/>
+            <a:off x="731520" y="1554480"/>
+            <a:ext cx="3383280" cy="4480560"/>
           </a:xfrm>
           <a:prstGeom prst="roundRect">
             <a:avLst/>
@@ -4288,14 +7903,14 @@
           </a:fontRef>
         </p:style>
         <p:txBody>
-          <a:bodyPr rtlCol="0" anchor="t" wrap="square" lIns="228600" rIns="228600" tIns="182880" bIns="182880"/>
+          <a:bodyPr rtlCol="0" anchor="t" wrap="square" lIns="201168" rIns="201168" tIns="164592" bIns="164592"/>
           <a:lstStyle/>
           <a:p>
             <a:pPr algn="ctr">
               <a:spcAft>
-                <a:spcPts val="800"/>
-              </a:spcAft>
-              <a:defRPr sz="1600" b="1">
+                <a:spcPts val="700"/>
+              </a:spcAft>
+              <a:defRPr sz="1400" b="1">
                 <a:solidFill>
                   <a:srgbClr val="06B6D4"/>
                 </a:solidFill>
@@ -4303,98 +7918,85 @@
               </a:defRPr>
             </a:pPr>
             <a:r>
-              <a:t>Persamaan Regresi Linier QSAR</a:t>
-            </a:r>
-          </a:p>
-          <a:p>
-            <a:pPr>
-              <a:spcAft>
-                <a:spcPts val="600"/>
-              </a:spcAft>
-              <a:defRPr sz="1200">
-                <a:solidFill>
-                  <a:srgbClr val="94A3B8"/>
-                </a:solidFill>
-                <a:latin typeface="Calibri"/>
-              </a:defRPr>
-            </a:pPr>
-            <a:r>
-              <a:t>• Persamaan Regresi: pIC50 = +0.84 (LogP) + 3.54</a:t>
-            </a:r>
-          </a:p>
-          <a:p>
-            <a:pPr>
-              <a:spcAft>
-                <a:spcPts val="600"/>
-              </a:spcAft>
-              <a:defRPr sz="1200">
-                <a:solidFill>
-                  <a:srgbClr val="94A3B8"/>
-                </a:solidFill>
-                <a:latin typeface="Calibri"/>
-              </a:defRPr>
-            </a:pPr>
-            <a:r>
-              <a:t>• Koefisien Determinasi: R² = 0.814 (Korelasi Kuat)</a:t>
-            </a:r>
-          </a:p>
-          <a:p>
-            <a:pPr>
-              <a:spcAft>
-                <a:spcPts val="600"/>
-              </a:spcAft>
-              <a:defRPr sz="1200">
-                <a:solidFill>
-                  <a:srgbClr val="94A3B8"/>
-                </a:solidFill>
-                <a:latin typeface="Calibri"/>
-              </a:defRPr>
-            </a:pPr>
-            <a:r>
-              <a:t>• Jumlah Seri Analog: N = 8 - 12 Senyawa ChEMBL</a:t>
-            </a:r>
-          </a:p>
-          <a:p>
-            <a:pPr>
-              <a:spcAft>
-                <a:spcPts val="600"/>
-              </a:spcAft>
-              <a:defRPr sz="1200">
-                <a:solidFill>
-                  <a:srgbClr val="94A3B8"/>
-                </a:solidFill>
-                <a:latin typeface="Calibri"/>
-              </a:defRPr>
-            </a:pPr>
-          </a:p>
-          <a:p>
-            <a:pPr>
-              <a:spcAft>
-                <a:spcPts val="600"/>
-              </a:spcAft>
-              <a:defRPr sz="1200">
-                <a:solidFill>
-                  <a:srgbClr val="94A3B8"/>
-                </a:solidFill>
-                <a:latin typeface="Calibri"/>
-              </a:defRPr>
-            </a:pPr>
-            <a:r>
-              <a:t>Aplikasi menghitung hubungan kuantitatif antara lipofilitas (LogP) dan daya hambat bioaktif (pIC50).</a:t>
-            </a:r>
-          </a:p>
-        </p:txBody>
-      </p:sp>
-      <p:sp>
-        <p:nvSpPr>
-          <p:cNvPr id="6" name="Rounded Rectangle 5"/>
+              <a:t>Input &amp; Spasial 3D (Tab 1-2)</a:t>
+            </a:r>
+          </a:p>
+          <a:p>
+            <a:pPr>
+              <a:spcAft>
+                <a:spcPts val="400"/>
+              </a:spcAft>
+              <a:defRPr sz="1050">
+                <a:solidFill>
+                  <a:srgbClr val="94A3B8"/>
+                </a:solidFill>
+                <a:latin typeface="Calibri"/>
+              </a:defRPr>
+            </a:pPr>
+            <a:r>
+              <a:t>- Multi-Input Search Engine: Pencarian berbasis nama lazim/dagang, formula IUPAC, format SMILES, maupun PubChem CID.</a:t>
+            </a:r>
+          </a:p>
+          <a:p>
+            <a:pPr>
+              <a:spcAft>
+                <a:spcPts val="400"/>
+              </a:spcAft>
+              <a:defRPr sz="1050">
+                <a:solidFill>
+                  <a:srgbClr val="94A3B8"/>
+                </a:solidFill>
+                <a:latin typeface="Calibri"/>
+              </a:defRPr>
+            </a:pPr>
+            <a:r>
+              <a:t>- Tab 1: 3D Molecular Engine (3Dmol.js) dengan rotasi orbital 360°, 4 gaya visualisasi (Stick, CPK, Licorice, Cartoon).</a:t>
+            </a:r>
+          </a:p>
+          <a:p>
+            <a:pPr>
+              <a:spcAft>
+                <a:spcPts val="400"/>
+              </a:spcAft>
+              <a:defRPr sz="1050">
+                <a:solidFill>
+                  <a:srgbClr val="94A3B8"/>
+                </a:solidFill>
+                <a:latin typeface="Calibri"/>
+              </a:defRPr>
+            </a:pPr>
+            <a:r>
+              <a:t>- Surface Mapping: Pemetaan potensial elektrostatik (ESP) dan permukaan lipofilisitas.</a:t>
+            </a:r>
+          </a:p>
+          <a:p>
+            <a:pPr>
+              <a:spcAft>
+                <a:spcPts val="400"/>
+              </a:spcAft>
+              <a:defRPr sz="1050">
+                <a:solidFill>
+                  <a:srgbClr val="94A3B8"/>
+                </a:solidFill>
+                <a:latin typeface="Calibri"/>
+              </a:defRPr>
+            </a:pPr>
+            <a:r>
+              <a:t>- Tab 2: 2D Chemical Canvas (Kekulé.js) dengan ekspor struktur resolusi tinggi.</a:t>
+            </a:r>
+          </a:p>
+        </p:txBody>
+      </p:sp>
+      <p:sp>
+        <p:nvSpPr>
+          <p:cNvPr id="7" name="Rounded Rectangle 6"/>
           <p:cNvSpPr/>
           <p:nvPr/>
         </p:nvSpPr>
         <p:spPr>
           <a:xfrm>
-            <a:off x="6217920" y="1828800"/>
-            <a:ext cx="5120640" cy="4114800"/>
+            <a:off x="4389120" y="1554480"/>
+            <a:ext cx="3383280" cy="4480560"/>
           </a:xfrm>
           <a:prstGeom prst="roundRect">
             <a:avLst/>
@@ -4423,106 +8025,208 @@
           </a:fontRef>
         </p:style>
         <p:txBody>
-          <a:bodyPr rtlCol="0" anchor="t" wrap="square" lIns="228600" rIns="228600" tIns="182880" bIns="182880"/>
+          <a:bodyPr rtlCol="0" anchor="t" wrap="square" lIns="201168" rIns="201168" tIns="164592" bIns="164592"/>
           <a:lstStyle/>
           <a:p>
             <a:pPr algn="ctr">
               <a:spcAft>
-                <a:spcPts val="800"/>
-              </a:spcAft>
-              <a:defRPr sz="1600" b="1">
-                <a:solidFill>
-                  <a:srgbClr val="06B6D4"/>
+                <a:spcPts val="700"/>
+              </a:spcAft>
+              <a:defRPr sz="1400" b="1">
+                <a:solidFill>
+                  <a:srgbClr val="8B5CF6"/>
                 </a:solidFill>
                 <a:latin typeface="Arial"/>
               </a:defRPr>
             </a:pPr>
             <a:r>
-              <a:t>Manfaat Pemodelan Akademis</a:t>
-            </a:r>
-          </a:p>
-          <a:p>
-            <a:pPr>
-              <a:spcAft>
-                <a:spcPts val="600"/>
-              </a:spcAft>
-              <a:defRPr sz="1200">
-                <a:solidFill>
-                  <a:srgbClr val="94A3B8"/>
-                </a:solidFill>
-                <a:latin typeface="Calibri"/>
-              </a:defRPr>
-            </a:pPr>
-            <a:r>
-              <a:t>1. Memprediksi aktivitas analog molekul baru sebelum disintesis.</a:t>
-            </a:r>
-          </a:p>
-          <a:p>
-            <a:pPr>
-              <a:spcAft>
-                <a:spcPts val="600"/>
-              </a:spcAft>
-              <a:defRPr sz="1200">
-                <a:solidFill>
-                  <a:srgbClr val="94A3B8"/>
-                </a:solidFill>
-                <a:latin typeface="Calibri"/>
-              </a:defRPr>
-            </a:pPr>
-            <a:r>
-              <a:t>2. Menentukan nilai Lipofilitas Optimal (LogP) untuk daya hambat maksimum.</a:t>
-            </a:r>
-          </a:p>
-          <a:p>
-            <a:pPr>
-              <a:spcAft>
-                <a:spcPts val="600"/>
-              </a:spcAft>
-              <a:defRPr sz="1200">
-                <a:solidFill>
-                  <a:srgbClr val="94A3B8"/>
-                </a:solidFill>
-                <a:latin typeface="Calibri"/>
-              </a:defRPr>
-            </a:pPr>
-            <a:r>
-              <a:t>3. Pemetaan otomatis InChIKey ke basis data ChEMBL EBI.</a:t>
-            </a:r>
-          </a:p>
-        </p:txBody>
-      </p:sp>
-      <p:sp>
-        <p:nvSpPr>
-          <p:cNvPr id="7" name="TextBox 6"/>
-          <p:cNvSpPr txBox="1"/>
+              <a:t>Evaluasi &amp; QSAR (Tab 3-4)</a:t>
+            </a:r>
+          </a:p>
+          <a:p>
+            <a:pPr>
+              <a:spcAft>
+                <a:spcPts val="400"/>
+              </a:spcAft>
+              <a:defRPr sz="1050">
+                <a:solidFill>
+                  <a:srgbClr val="94A3B8"/>
+                </a:solidFill>
+                <a:latin typeface="Calibri"/>
+              </a:defRPr>
+            </a:pPr>
+            <a:r>
+              <a:t>- Tab 3: Drug-Likeness Multi-Filter (Lipinski, Veber, Ghose, Egan, Muegge) &amp; Bioavailability Radar 6-Axis.</a:t>
+            </a:r>
+          </a:p>
+          <a:p>
+            <a:pPr>
+              <a:spcAft>
+                <a:spcPts val="400"/>
+              </a:spcAft>
+              <a:defRPr sz="1050">
+                <a:solidFill>
+                  <a:srgbClr val="94A3B8"/>
+                </a:solidFill>
+                <a:latin typeface="Calibri"/>
+              </a:defRPr>
+            </a:pPr>
+            <a:r>
+              <a:t>- PAINS Filter: Deteksi otomatis motif reaktif pengganggu uji hayati (Pan-Assay Interference Compounds).</a:t>
+            </a:r>
+          </a:p>
+          <a:p>
+            <a:pPr>
+              <a:spcAft>
+                <a:spcPts val="400"/>
+              </a:spcAft>
+              <a:defRPr sz="1050">
+                <a:solidFill>
+                  <a:srgbClr val="94A3B8"/>
+                </a:solidFill>
+                <a:latin typeface="Calibri"/>
+              </a:defRPr>
+            </a:pPr>
+            <a:r>
+              <a:t>- Tab 4: QSAR ChEMBL Model &amp; Interactive Bioactivity Calculator.</a:t>
+            </a:r>
+          </a:p>
+          <a:p>
+            <a:pPr>
+              <a:spcAft>
+                <a:spcPts val="400"/>
+              </a:spcAft>
+              <a:defRPr sz="1050">
+                <a:solidFill>
+                  <a:srgbClr val="94A3B8"/>
+                </a:solidFill>
+                <a:latin typeface="Calibri"/>
+              </a:defRPr>
+            </a:pPr>
+            <a:r>
+              <a:t>- Pemodelan regresi pIC50 otomatis dan kalkulator dinamis berbasis deskriptor molekuler.</a:t>
+            </a:r>
+          </a:p>
+        </p:txBody>
+      </p:sp>
+      <p:sp>
+        <p:nvSpPr>
+          <p:cNvPr id="8" name="Rounded Rectangle 7"/>
+          <p:cNvSpPr/>
           <p:nvPr/>
         </p:nvSpPr>
         <p:spPr>
           <a:xfrm>
-            <a:off x="731520" y="6309360"/>
-            <a:ext cx="10728655" cy="365760"/>
+            <a:off x="8046720" y="1554480"/>
+            <a:ext cx="3383280" cy="4480560"/>
           </a:xfrm>
-          <a:prstGeom prst="rect">
+          <a:prstGeom prst="roundRect">
             <a:avLst/>
           </a:prstGeom>
-          <a:noFill/>
+          <a:solidFill>
+            <a:srgbClr val="111827"/>
+          </a:solidFill>
+          <a:ln w="12700">
+            <a:solidFill>
+              <a:srgbClr val="1E293B"/>
+            </a:solidFill>
+          </a:ln>
         </p:spPr>
-        <p:txBody>
-          <a:bodyPr wrap="none">
-            <a:spAutoFit/>
-          </a:bodyPr>
-          <a:lstStyle/>
-          <a:p>
-            <a:pPr>
-              <a:defRPr sz="1000">
-                <a:solidFill>
-                  <a:srgbClr val="94A3B8"/>
-                </a:solidFill>
-                <a:latin typeface="Calibri"/>
-              </a:defRPr>
-            </a:pPr>
-            <a:r>
-              <a:t>PharmaPulse 3D - Presentasi Komprehensif Akademis | Slide 3 dari 10</a:t>
+        <p:style>
+          <a:lnRef idx="1">
+            <a:schemeClr val="accent1"/>
+          </a:lnRef>
+          <a:fillRef idx="3">
+            <a:schemeClr val="accent1"/>
+          </a:fillRef>
+          <a:effectRef idx="2">
+            <a:schemeClr val="accent1"/>
+          </a:effectRef>
+          <a:fontRef idx="minor">
+            <a:schemeClr val="lt1"/>
+          </a:fontRef>
+        </p:style>
+        <p:txBody>
+          <a:bodyPr rtlCol="0" anchor="t" wrap="square" lIns="201168" rIns="201168" tIns="164592" bIns="164592"/>
+          <a:lstStyle/>
+          <a:p>
+            <a:pPr algn="ctr">
+              <a:spcAft>
+                <a:spcPts val="700"/>
+              </a:spcAft>
+              <a:defRPr sz="1400" b="1">
+                <a:solidFill>
+                  <a:srgbClr val="F59E0B"/>
+                </a:solidFill>
+                <a:latin typeface="Arial"/>
+              </a:defRPr>
+            </a:pPr>
+            <a:r>
+              <a:t>ADMET &amp; Analogs (Tab 5-7)</a:t>
+            </a:r>
+          </a:p>
+          <a:p>
+            <a:pPr>
+              <a:spcAft>
+                <a:spcPts val="400"/>
+              </a:spcAft>
+              <a:defRPr sz="1050">
+                <a:solidFill>
+                  <a:srgbClr val="94A3B8"/>
+                </a:solidFill>
+                <a:latin typeface="Calibri"/>
+              </a:defRPr>
+            </a:pPr>
+            <a:r>
+              <a:t>- Tab 5: In Silico ADMET &amp; Model Visual BOILED-Egg Terbuka (Daina &amp; Zoete 2016) untuk estimasi HIA dan BBB.</a:t>
+            </a:r>
+          </a:p>
+          <a:p>
+            <a:pPr>
+              <a:spcAft>
+                <a:spcPts val="400"/>
+              </a:spcAft>
+              <a:defRPr sz="1050">
+                <a:solidFill>
+                  <a:srgbClr val="94A3B8"/>
+                </a:solidFill>
+                <a:latin typeface="Calibri"/>
+              </a:defRPr>
+            </a:pPr>
+            <a:r>
+              <a:t>- Tab 6: Synthetic Accessibility (SA Score 1-10) &amp; Saringan Senyawa Pemula (Lead-Likeness).</a:t>
+            </a:r>
+          </a:p>
+          <a:p>
+            <a:pPr>
+              <a:spcAft>
+                <a:spcPts val="400"/>
+              </a:spcAft>
+              <a:defRPr sz="1050">
+                <a:solidFill>
+                  <a:srgbClr val="94A3B8"/>
+                </a:solidFill>
+                <a:latin typeface="Calibri"/>
+              </a:defRPr>
+            </a:pPr>
+            <a:r>
+              <a:t>- Tab 7: Target Biologis, Jalur Sinyal (KEGG, Reactome), Drug Repurposing &amp; Tanimoto FastSimilarity 2D Search.</a:t>
+            </a:r>
+          </a:p>
+          <a:p>
+            <a:pPr>
+              <a:spcAft>
+                <a:spcPts val="400"/>
+              </a:spcAft>
+              <a:defRPr sz="1050">
+                <a:solidFill>
+                  <a:srgbClr val="94A3B8"/>
+                </a:solidFill>
+                <a:latin typeface="Calibri"/>
+              </a:defRPr>
+            </a:pPr>
+            <a:r>
+              <a:t>- Menghasilkan 5 analog terdekat dengan skor Tanimoto unik untuk tiap senyawa.</a:t>
             </a:r>
           </a:p>
         </p:txBody>
@@ -4562,7 +8266,7 @@
         <p:spPr>
           <a:xfrm>
             <a:off x="731520" y="365760"/>
-            <a:ext cx="3657600" cy="365760"/>
+            <a:ext cx="9144000" cy="320040"/>
           </a:xfrm>
           <a:prstGeom prst="rect">
             <a:avLst/>
@@ -4570,7 +8274,7 @@
           <a:noFill/>
         </p:spPr>
         <p:txBody>
-          <a:bodyPr wrap="square">
+          <a:bodyPr wrap="none">
             <a:spAutoFit/>
           </a:bodyPr>
           <a:lstStyle/>
@@ -4580,11 +8284,11 @@
                 <a:solidFill>
                   <a:srgbClr val="06B6D4"/>
                 </a:solidFill>
-                <a:latin typeface="Trebuchet MS"/>
-              </a:defRPr>
-            </a:pPr>
-            <a:r>
-              <a:t>PRESENTASI PROYEK KIMIA FARMASI</a:t>
+                <a:latin typeface="Arial"/>
+              </a:defRPr>
+            </a:pPr>
+            <a:r>
+              <a:t>PHARMAPULSE 3D - INOVASI CADD &amp; KIMIA MEDISINAL</a:t>
             </a:r>
           </a:p>
         </p:txBody>
@@ -4598,7 +8302,7 @@
         <p:spPr>
           <a:xfrm>
             <a:off x="731520" y="640080"/>
-            <a:ext cx="10698480" cy="731520"/>
+            <a:ext cx="10728655" cy="685800"/>
           </a:xfrm>
           <a:prstGeom prst="rect">
             <a:avLst/>
@@ -4612,7 +8316,7 @@
           <a:lstStyle/>
           <a:p>
             <a:pPr>
-              <a:defRPr sz="2400" b="1">
+              <a:defRPr sz="2100" b="1">
                 <a:solidFill>
                   <a:srgbClr val="F8FAFC"/>
                 </a:solidFill>
@@ -4620,7 +8324,7 @@
               </a:defRPr>
             </a:pPr>
             <a:r>
-              <a:t>SwissADME Radar 6-Sifat &amp; Saringan PAINS/Brenk</a:t>
+              <a:t>3. Standar Drug-Likeness Multi-Filter &amp; Saringan PAINS Alert</a:t>
             </a:r>
           </a:p>
         </p:txBody>
@@ -4633,7 +8337,7 @@
         </p:nvSpPr>
         <p:spPr>
           <a:xfrm>
-            <a:off x="731520" y="1371600"/>
+            <a:off x="731520" y="1325880"/>
             <a:ext cx="10728655" cy="18288"/>
           </a:xfrm>
           <a:prstGeom prst="rect">
@@ -4672,14 +8376,50 @@
       </p:sp>
       <p:sp>
         <p:nvSpPr>
-          <p:cNvPr id="5" name="Rounded Rectangle 4"/>
+          <p:cNvPr id="5" name="TextBox 4"/>
+          <p:cNvSpPr txBox="1"/>
+          <p:nvPr/>
+        </p:nvSpPr>
+        <p:spPr>
+          <a:xfrm>
+            <a:off x="731520" y="6309360"/>
+            <a:ext cx="10728655" cy="365760"/>
+          </a:xfrm>
+          <a:prstGeom prst="rect">
+            <a:avLst/>
+          </a:prstGeom>
+          <a:noFill/>
+        </p:spPr>
+        <p:txBody>
+          <a:bodyPr wrap="none">
+            <a:spAutoFit/>
+          </a:bodyPr>
+          <a:lstStyle/>
+          <a:p>
+            <a:pPr>
+              <a:defRPr sz="950">
+                <a:solidFill>
+                  <a:srgbClr val="94A3B8"/>
+                </a:solidFill>
+                <a:latin typeface="Calibri"/>
+              </a:defRPr>
+            </a:pPr>
+            <a:r>
+              <a:t>PharmaPulse 3D | Platform Komputasi Kimia Medisinal &amp; In Silico Drug Discovery | Slide 4 dari 14</a:t>
+            </a:r>
+          </a:p>
+        </p:txBody>
+      </p:sp>
+      <p:sp>
+        <p:nvSpPr>
+          <p:cNvPr id="6" name="Rounded Rectangle 5"/>
           <p:cNvSpPr/>
           <p:nvPr/>
         </p:nvSpPr>
         <p:spPr>
           <a:xfrm>
-            <a:off x="731520" y="1828800"/>
-            <a:ext cx="5120640" cy="4114800"/>
+            <a:off x="731520" y="1554480"/>
+            <a:ext cx="3383280" cy="4480560"/>
           </a:xfrm>
           <a:prstGeom prst="roundRect">
             <a:avLst/>
@@ -4708,14 +8448,14 @@
           </a:fontRef>
         </p:style>
         <p:txBody>
-          <a:bodyPr rtlCol="0" anchor="t" wrap="square" lIns="228600" rIns="228600" tIns="182880" bIns="182880"/>
+          <a:bodyPr rtlCol="0" anchor="t" wrap="square" lIns="201168" rIns="201168" tIns="164592" bIns="164592"/>
           <a:lstStyle/>
           <a:p>
             <a:pPr algn="ctr">
               <a:spcAft>
-                <a:spcPts val="800"/>
-              </a:spcAft>
-              <a:defRPr sz="1600" b="1">
+                <a:spcPts val="700"/>
+              </a:spcAft>
+              <a:defRPr sz="1400" b="1">
                 <a:solidFill>
                   <a:srgbClr val="06B6D4"/>
                 </a:solidFill>
@@ -4723,117 +8463,101 @@
               </a:defRPr>
             </a:pPr>
             <a:r>
-              <a:t>Radar Bioavailabilitas SwissADME (6 Sifat)</a:t>
-            </a:r>
-          </a:p>
-          <a:p>
-            <a:pPr>
-              <a:spcAft>
-                <a:spcPts val="600"/>
-              </a:spcAft>
-              <a:defRPr sz="1200">
-                <a:solidFill>
-                  <a:srgbClr val="94A3B8"/>
-                </a:solidFill>
-                <a:latin typeface="Calibri"/>
-              </a:defRPr>
-            </a:pPr>
-            <a:r>
-              <a:t>1. LIPO (Lipofilitas XLogP)</a:t>
-            </a:r>
-          </a:p>
-          <a:p>
-            <a:pPr>
-              <a:spcAft>
-                <a:spcPts val="600"/>
-              </a:spcAft>
-              <a:defRPr sz="1200">
-                <a:solidFill>
-                  <a:srgbClr val="94A3B8"/>
-                </a:solidFill>
-                <a:latin typeface="Calibri"/>
-              </a:defRPr>
-            </a:pPr>
-            <a:r>
-              <a:t>2. SIZE (Ukuran Bobot Molekul MW)</a:t>
-            </a:r>
-          </a:p>
-          <a:p>
-            <a:pPr>
-              <a:spcAft>
-                <a:spcPts val="600"/>
-              </a:spcAft>
-              <a:defRPr sz="1200">
-                <a:solidFill>
-                  <a:srgbClr val="94A3B8"/>
-                </a:solidFill>
-                <a:latin typeface="Calibri"/>
-              </a:defRPr>
-            </a:pPr>
-            <a:r>
-              <a:t>3. POLAR (Topological Polar Surface Area TPSA)</a:t>
-            </a:r>
-          </a:p>
-          <a:p>
-            <a:pPr>
-              <a:spcAft>
-                <a:spcPts val="600"/>
-              </a:spcAft>
-              <a:defRPr sz="1200">
-                <a:solidFill>
-                  <a:srgbClr val="94A3B8"/>
-                </a:solidFill>
-                <a:latin typeface="Calibri"/>
-              </a:defRPr>
-            </a:pPr>
-            <a:r>
-              <a:t>4. INSOLU (Estimasi Kelarutan LogS)</a:t>
-            </a:r>
-          </a:p>
-          <a:p>
-            <a:pPr>
-              <a:spcAft>
-                <a:spcPts val="600"/>
-              </a:spcAft>
-              <a:defRPr sz="1200">
-                <a:solidFill>
-                  <a:srgbClr val="94A3B8"/>
-                </a:solidFill>
-                <a:latin typeface="Calibri"/>
-              </a:defRPr>
-            </a:pPr>
-            <a:r>
-              <a:t>5. FLEX (Fleksibilitas Ikatan Terputar)</a:t>
-            </a:r>
-          </a:p>
-          <a:p>
-            <a:pPr>
-              <a:spcAft>
-                <a:spcPts val="600"/>
-              </a:spcAft>
-              <a:defRPr sz="1200">
-                <a:solidFill>
-                  <a:srgbClr val="94A3B8"/>
-                </a:solidFill>
-                <a:latin typeface="Calibri"/>
-              </a:defRPr>
-            </a:pPr>
-            <a:r>
-              <a:t>6. INSATU (Saturasi Fraksi Csp3 / Kompleksitas)</a:t>
-            </a:r>
-          </a:p>
-        </p:txBody>
-      </p:sp>
-      <p:sp>
-        <p:nvSpPr>
-          <p:cNvPr id="6" name="Rounded Rectangle 5"/>
+              <a:t>5 Aturan Baku Kimia Medisinal</a:t>
+            </a:r>
+          </a:p>
+          <a:p>
+            <a:pPr>
+              <a:spcAft>
+                <a:spcPts val="400"/>
+              </a:spcAft>
+              <a:defRPr sz="1050">
+                <a:solidFill>
+                  <a:srgbClr val="94A3B8"/>
+                </a:solidFill>
+                <a:latin typeface="Calibri"/>
+              </a:defRPr>
+            </a:pPr>
+            <a:r>
+              <a:t>- Lipinski Rule of Five: MW &lt;= 500, LogP &lt;= 5, HBD &lt;= 5, HBA &lt;= 10 (Kriteria absorpsi oral).</a:t>
+            </a:r>
+          </a:p>
+          <a:p>
+            <a:pPr>
+              <a:spcAft>
+                <a:spcPts val="400"/>
+              </a:spcAft>
+              <a:defRPr sz="1050">
+                <a:solidFill>
+                  <a:srgbClr val="94A3B8"/>
+                </a:solidFill>
+                <a:latin typeface="Calibri"/>
+              </a:defRPr>
+            </a:pPr>
+            <a:r>
+              <a:t>- Veber Rule: Rotatable Bonds &lt;= 10, TPSA &lt;= 140 A2 (Fleksibilitas &amp; permeabilitas membran).</a:t>
+            </a:r>
+          </a:p>
+          <a:p>
+            <a:pPr>
+              <a:spcAft>
+                <a:spcPts val="400"/>
+              </a:spcAft>
+              <a:defRPr sz="1050">
+                <a:solidFill>
+                  <a:srgbClr val="94A3B8"/>
+                </a:solidFill>
+                <a:latin typeface="Calibri"/>
+              </a:defRPr>
+            </a:pPr>
+            <a:r>
+              <a:t>- Ghose Filter: MW 160-480, LogP -0.4 s/d 5.6, Molar Refractivity 40-130, Atom 20-70.</a:t>
+            </a:r>
+          </a:p>
+          <a:p>
+            <a:pPr>
+              <a:spcAft>
+                <a:spcPts val="400"/>
+              </a:spcAft>
+              <a:defRPr sz="1050">
+                <a:solidFill>
+                  <a:srgbClr val="94A3B8"/>
+                </a:solidFill>
+                <a:latin typeface="Calibri"/>
+              </a:defRPr>
+            </a:pPr>
+            <a:r>
+              <a:t>- Egan Rule: WLogP &lt;= 5.88, TPSA &lt;= 131.6 A2.</a:t>
+            </a:r>
+          </a:p>
+          <a:p>
+            <a:pPr>
+              <a:spcAft>
+                <a:spcPts val="400"/>
+              </a:spcAft>
+              <a:defRPr sz="1050">
+                <a:solidFill>
+                  <a:srgbClr val="94A3B8"/>
+                </a:solidFill>
+                <a:latin typeface="Calibri"/>
+              </a:defRPr>
+            </a:pPr>
+            <a:r>
+              <a:t>- Muegge Rule: Skrining farmakoforik ketat untuk molekul obat sintesis komersial.</a:t>
+            </a:r>
+          </a:p>
+        </p:txBody>
+      </p:sp>
+      <p:sp>
+        <p:nvSpPr>
+          <p:cNvPr id="7" name="Rounded Rectangle 6"/>
           <p:cNvSpPr/>
           <p:nvPr/>
         </p:nvSpPr>
         <p:spPr>
           <a:xfrm>
-            <a:off x="6217920" y="1828800"/>
-            <a:ext cx="5120640" cy="4114800"/>
+            <a:off x="4389120" y="1554480"/>
+            <a:ext cx="3383280" cy="4480560"/>
           </a:xfrm>
           <a:prstGeom prst="roundRect">
             <a:avLst/>
@@ -4862,106 +8586,304 @@
           </a:fontRef>
         </p:style>
         <p:txBody>
-          <a:bodyPr rtlCol="0" anchor="t" wrap="square" lIns="228600" rIns="228600" tIns="182880" bIns="182880"/>
+          <a:bodyPr rtlCol="0" anchor="t" wrap="square" lIns="201168" rIns="201168" tIns="164592" bIns="164592"/>
           <a:lstStyle/>
           <a:p>
             <a:pPr algn="ctr">
               <a:spcAft>
-                <a:spcPts val="800"/>
-              </a:spcAft>
-              <a:defRPr sz="1600" b="1">
-                <a:solidFill>
-                  <a:srgbClr val="06B6D4"/>
+                <a:spcPts val="700"/>
+              </a:spcAft>
+              <a:defRPr sz="1400" b="1">
+                <a:solidFill>
+                  <a:srgbClr val="8B5CF6"/>
                 </a:solidFill>
                 <a:latin typeface="Arial"/>
               </a:defRPr>
             </a:pPr>
             <a:r>
-              <a:t>Saringan Peringatan Struktur (Alerts)</a:t>
-            </a:r>
-          </a:p>
-          <a:p>
-            <a:pPr>
-              <a:spcAft>
-                <a:spcPts val="600"/>
-              </a:spcAft>
-              <a:defRPr sz="1200">
-                <a:solidFill>
-                  <a:srgbClr val="94A3B8"/>
-                </a:solidFill>
-                <a:latin typeface="Calibri"/>
-              </a:defRPr>
-            </a:pPr>
-            <a:r>
-              <a:t>• PAINS Alert: Deteksi motif reaktif (quinon, epoksida, katekol, azo) untuk mencegah positif palsu.</a:t>
-            </a:r>
-          </a:p>
-          <a:p>
-            <a:pPr>
-              <a:spcAft>
-                <a:spcPts val="600"/>
-              </a:spcAft>
-              <a:defRPr sz="1200">
-                <a:solidFill>
-                  <a:srgbClr val="94A3B8"/>
-                </a:solidFill>
-                <a:latin typeface="Calibri"/>
-              </a:defRPr>
-            </a:pPr>
-            <a:r>
-              <a:t>• Brenk Filter: Menaring gugus fungsi beracun terlarang.</a:t>
-            </a:r>
-          </a:p>
-          <a:p>
-            <a:pPr>
-              <a:spcAft>
-                <a:spcPts val="600"/>
-              </a:spcAft>
-              <a:defRPr sz="1200">
-                <a:solidFill>
-                  <a:srgbClr val="94A3B8"/>
-                </a:solidFill>
-                <a:latin typeface="Calibri"/>
-              </a:defRPr>
-            </a:pPr>
-            <a:r>
-              <a:t>• Egan &amp; Muegge Filter: Peringatan kelayakan permeabilitas membran sel.</a:t>
-            </a:r>
-          </a:p>
-        </p:txBody>
-      </p:sp>
-      <p:sp>
-        <p:nvSpPr>
-          <p:cNvPr id="7" name="TextBox 6"/>
-          <p:cNvSpPr txBox="1"/>
+              <a:t>Bioavailability Radar &amp; PAINS</a:t>
+            </a:r>
+          </a:p>
+          <a:p>
+            <a:pPr>
+              <a:spcAft>
+                <a:spcPts val="400"/>
+              </a:spcAft>
+              <a:defRPr sz="1050">
+                <a:solidFill>
+                  <a:srgbClr val="94A3B8"/>
+                </a:solidFill>
+                <a:latin typeface="Calibri"/>
+              </a:defRPr>
+            </a:pPr>
+            <a:r>
+              <a:t>- Radar 6-Dimensi Visual: Memetakan kelayakan oral secara poligon:</a:t>
+            </a:r>
+          </a:p>
+          <a:p>
+            <a:pPr>
+              <a:spcAft>
+                <a:spcPts val="400"/>
+              </a:spcAft>
+              <a:defRPr sz="1050">
+                <a:solidFill>
+                  <a:srgbClr val="94A3B8"/>
+                </a:solidFill>
+                <a:latin typeface="Calibri"/>
+              </a:defRPr>
+            </a:pPr>
+            <a:r>
+              <a:t>  * LIPO (Lipofilitas, XLogP)</a:t>
+            </a:r>
+          </a:p>
+          <a:p>
+            <a:pPr>
+              <a:spcAft>
+                <a:spcPts val="400"/>
+              </a:spcAft>
+              <a:defRPr sz="1050">
+                <a:solidFill>
+                  <a:srgbClr val="94A3B8"/>
+                </a:solidFill>
+                <a:latin typeface="Calibri"/>
+              </a:defRPr>
+            </a:pPr>
+            <a:r>
+              <a:t>  * SIZE (Bobot molekul, MW)</a:t>
+            </a:r>
+          </a:p>
+          <a:p>
+            <a:pPr>
+              <a:spcAft>
+                <a:spcPts val="400"/>
+              </a:spcAft>
+              <a:defRPr sz="1050">
+                <a:solidFill>
+                  <a:srgbClr val="94A3B8"/>
+                </a:solidFill>
+                <a:latin typeface="Calibri"/>
+              </a:defRPr>
+            </a:pPr>
+            <a:r>
+              <a:t>  * POLAR (Polaritas, TPSA)</a:t>
+            </a:r>
+          </a:p>
+          <a:p>
+            <a:pPr>
+              <a:spcAft>
+                <a:spcPts val="400"/>
+              </a:spcAft>
+              <a:defRPr sz="1050">
+                <a:solidFill>
+                  <a:srgbClr val="94A3B8"/>
+                </a:solidFill>
+                <a:latin typeface="Calibri"/>
+              </a:defRPr>
+            </a:pPr>
+            <a:r>
+              <a:t>  * INSOLU (Kelarutan dalam air, LogS)</a:t>
+            </a:r>
+          </a:p>
+          <a:p>
+            <a:pPr>
+              <a:spcAft>
+                <a:spcPts val="400"/>
+              </a:spcAft>
+              <a:defRPr sz="1050">
+                <a:solidFill>
+                  <a:srgbClr val="94A3B8"/>
+                </a:solidFill>
+                <a:latin typeface="Calibri"/>
+              </a:defRPr>
+            </a:pPr>
+            <a:r>
+              <a:t>  * INSATU (Saturasi Csp3)</a:t>
+            </a:r>
+          </a:p>
+          <a:p>
+            <a:pPr>
+              <a:spcAft>
+                <a:spcPts val="400"/>
+              </a:spcAft>
+              <a:defRPr sz="1050">
+                <a:solidFill>
+                  <a:srgbClr val="94A3B8"/>
+                </a:solidFill>
+                <a:latin typeface="Calibri"/>
+              </a:defRPr>
+            </a:pPr>
+            <a:r>
+              <a:t>  * FLEX (Fleksibilitas konformasi, RotB)</a:t>
+            </a:r>
+          </a:p>
+          <a:p>
+            <a:pPr>
+              <a:spcAft>
+                <a:spcPts val="400"/>
+              </a:spcAft>
+              <a:defRPr sz="1050">
+                <a:solidFill>
+                  <a:srgbClr val="94A3B8"/>
+                </a:solidFill>
+                <a:latin typeface="Calibri"/>
+              </a:defRPr>
+            </a:pPr>
+            <a:r>
+              <a:t>- PAINS Filter (Pan-Assay Interference): Mendeteksi gugus kuinon, rodanin, alkil halida reaktif pemicu false-positive.</a:t>
+            </a:r>
+          </a:p>
+        </p:txBody>
+      </p:sp>
+      <p:sp>
+        <p:nvSpPr>
+          <p:cNvPr id="8" name="Rounded Rectangle 7"/>
+          <p:cNvSpPr/>
           <p:nvPr/>
         </p:nvSpPr>
         <p:spPr>
           <a:xfrm>
-            <a:off x="731520" y="6309360"/>
-            <a:ext cx="10728655" cy="365760"/>
+            <a:off x="8046720" y="1554480"/>
+            <a:ext cx="3383280" cy="4480560"/>
           </a:xfrm>
-          <a:prstGeom prst="rect">
+          <a:prstGeom prst="roundRect">
             <a:avLst/>
           </a:prstGeom>
-          <a:noFill/>
+          <a:solidFill>
+            <a:srgbClr val="111827"/>
+          </a:solidFill>
+          <a:ln w="12700">
+            <a:solidFill>
+              <a:srgbClr val="1E293B"/>
+            </a:solidFill>
+          </a:ln>
         </p:spPr>
-        <p:txBody>
-          <a:bodyPr wrap="none">
-            <a:spAutoFit/>
-          </a:bodyPr>
-          <a:lstStyle/>
-          <a:p>
-            <a:pPr>
-              <a:defRPr sz="1000">
-                <a:solidFill>
-                  <a:srgbClr val="94A3B8"/>
-                </a:solidFill>
-                <a:latin typeface="Calibri"/>
-              </a:defRPr>
-            </a:pPr>
-            <a:r>
-              <a:t>PharmaPulse 3D - Presentasi Komprehensif Akademis | Slide 4 dari 10</a:t>
+        <p:style>
+          <a:lnRef idx="1">
+            <a:schemeClr val="accent1"/>
+          </a:lnRef>
+          <a:fillRef idx="3">
+            <a:schemeClr val="accent1"/>
+          </a:fillRef>
+          <a:effectRef idx="2">
+            <a:schemeClr val="accent1"/>
+          </a:effectRef>
+          <a:fontRef idx="minor">
+            <a:schemeClr val="lt1"/>
+          </a:fontRef>
+        </p:style>
+        <p:txBody>
+          <a:bodyPr rtlCol="0" anchor="t" wrap="square" lIns="201168" rIns="201168" tIns="164592" bIns="164592"/>
+          <a:lstStyle/>
+          <a:p>
+            <a:pPr algn="ctr">
+              <a:spcAft>
+                <a:spcPts val="700"/>
+              </a:spcAft>
+              <a:defRPr sz="1400" b="1">
+                <a:solidFill>
+                  <a:srgbClr val="10B981"/>
+                </a:solidFill>
+                <a:latin typeface="Arial"/>
+              </a:defRPr>
+            </a:pPr>
+            <a:r>
+              <a:t>Kriteria Lead-Likeness</a:t>
+            </a:r>
+          </a:p>
+          <a:p>
+            <a:pPr>
+              <a:spcAft>
+                <a:spcPts val="400"/>
+              </a:spcAft>
+              <a:defRPr sz="1050">
+                <a:solidFill>
+                  <a:srgbClr val="94A3B8"/>
+                </a:solidFill>
+                <a:latin typeface="Calibri"/>
+              </a:defRPr>
+            </a:pPr>
+            <a:r>
+              <a:t>- Standar Senyawa Penuntun (Lead Optimization):</a:t>
+            </a:r>
+          </a:p>
+          <a:p>
+            <a:pPr>
+              <a:spcAft>
+                <a:spcPts val="400"/>
+              </a:spcAft>
+              <a:defRPr sz="1050">
+                <a:solidFill>
+                  <a:srgbClr val="94A3B8"/>
+                </a:solidFill>
+                <a:latin typeface="Calibri"/>
+              </a:defRPr>
+            </a:pPr>
+            <a:r>
+              <a:t>  * Bobot Molekul: 250 &lt;= MW &lt;= 350 Da</a:t>
+            </a:r>
+          </a:p>
+          <a:p>
+            <a:pPr>
+              <a:spcAft>
+                <a:spcPts val="400"/>
+              </a:spcAft>
+              <a:defRPr sz="1050">
+                <a:solidFill>
+                  <a:srgbClr val="94A3B8"/>
+                </a:solidFill>
+                <a:latin typeface="Calibri"/>
+              </a:defRPr>
+            </a:pPr>
+            <a:r>
+              <a:t>  * Lipofilitas: 1.0 &lt;= LogP &lt;= 3.0</a:t>
+            </a:r>
+          </a:p>
+          <a:p>
+            <a:pPr>
+              <a:spcAft>
+                <a:spcPts val="400"/>
+              </a:spcAft>
+              <a:defRPr sz="1050">
+                <a:solidFill>
+                  <a:srgbClr val="94A3B8"/>
+                </a:solidFill>
+                <a:latin typeface="Calibri"/>
+              </a:defRPr>
+            </a:pPr>
+            <a:r>
+              <a:t>  * Ikatan Terputar: RotB &lt;= 7</a:t>
+            </a:r>
+          </a:p>
+          <a:p>
+            <a:pPr>
+              <a:spcAft>
+                <a:spcPts val="400"/>
+              </a:spcAft>
+              <a:defRPr sz="1050">
+                <a:solidFill>
+                  <a:srgbClr val="94A3B8"/>
+                </a:solidFill>
+                <a:latin typeface="Calibri"/>
+              </a:defRPr>
+            </a:pPr>
+            <a:r>
+              <a:t>- Menjamin molekul memiliki 'ruang optimasi kimiawi' yang cukup sebelum mengalami penambahan bobot molekul berlebih (molecular obesity).</a:t>
+            </a:r>
+          </a:p>
+          <a:p>
+            <a:pPr>
+              <a:spcAft>
+                <a:spcPts val="400"/>
+              </a:spcAft>
+              <a:defRPr sz="1050">
+                <a:solidFill>
+                  <a:srgbClr val="94A3B8"/>
+                </a:solidFill>
+                <a:latin typeface="Calibri"/>
+              </a:defRPr>
+            </a:pPr>
+            <a:r>
+              <a:t>- Klasifikasi otomatis: Lead-Like, Drug-Like, atau Non-Compliant.</a:t>
             </a:r>
           </a:p>
         </p:txBody>
@@ -5001,7 +8923,7 @@
         <p:spPr>
           <a:xfrm>
             <a:off x="731520" y="365760"/>
-            <a:ext cx="3657600" cy="365760"/>
+            <a:ext cx="9144000" cy="320040"/>
           </a:xfrm>
           <a:prstGeom prst="rect">
             <a:avLst/>
@@ -5009,7 +8931,7 @@
           <a:noFill/>
         </p:spPr>
         <p:txBody>
-          <a:bodyPr wrap="square">
+          <a:bodyPr wrap="none">
             <a:spAutoFit/>
           </a:bodyPr>
           <a:lstStyle/>
@@ -5019,11 +8941,11 @@
                 <a:solidFill>
                   <a:srgbClr val="06B6D4"/>
                 </a:solidFill>
-                <a:latin typeface="Trebuchet MS"/>
-              </a:defRPr>
-            </a:pPr>
-            <a:r>
-              <a:t>PRESENTASI PROYEK KIMIA FARMASI</a:t>
+                <a:latin typeface="Arial"/>
+              </a:defRPr>
+            </a:pPr>
+            <a:r>
+              <a:t>PHARMAPULSE 3D - INOVASI CADD &amp; KIMIA MEDISINAL</a:t>
             </a:r>
           </a:p>
         </p:txBody>
@@ -5037,7 +8959,7 @@
         <p:spPr>
           <a:xfrm>
             <a:off x="731520" y="640080"/>
-            <a:ext cx="10698480" cy="731520"/>
+            <a:ext cx="10728655" cy="685800"/>
           </a:xfrm>
           <a:prstGeom prst="rect">
             <a:avLst/>
@@ -5051,7 +8973,7 @@
           <a:lstStyle/>
           <a:p>
             <a:pPr>
-              <a:defRPr sz="2400" b="1">
+              <a:defRPr sz="2100" b="1">
                 <a:solidFill>
                   <a:srgbClr val="F8FAFC"/>
                 </a:solidFill>
@@ -5059,7 +8981,7 @@
               </a:defRPr>
             </a:pPr>
             <a:r>
-              <a:t>Ionisasi Fisiologis &amp; Sistem BCS (Class I - IV)</a:t>
+              <a:t>4. Pemodelan QSAR (pIC50) &amp; Kalkulator Bioaktivitas Interaktif</a:t>
             </a:r>
           </a:p>
         </p:txBody>
@@ -5072,7 +8994,7 @@
         </p:nvSpPr>
         <p:spPr>
           <a:xfrm>
-            <a:off x="731520" y="1371600"/>
+            <a:off x="731520" y="1325880"/>
             <a:ext cx="10728655" cy="18288"/>
           </a:xfrm>
           <a:prstGeom prst="rect">
@@ -5111,14 +9033,50 @@
       </p:sp>
       <p:sp>
         <p:nvSpPr>
-          <p:cNvPr id="5" name="Rounded Rectangle 4"/>
+          <p:cNvPr id="5" name="TextBox 4"/>
+          <p:cNvSpPr txBox="1"/>
+          <p:nvPr/>
+        </p:nvSpPr>
+        <p:spPr>
+          <a:xfrm>
+            <a:off x="731520" y="6309360"/>
+            <a:ext cx="10728655" cy="365760"/>
+          </a:xfrm>
+          <a:prstGeom prst="rect">
+            <a:avLst/>
+          </a:prstGeom>
+          <a:noFill/>
+        </p:spPr>
+        <p:txBody>
+          <a:bodyPr wrap="none">
+            <a:spAutoFit/>
+          </a:bodyPr>
+          <a:lstStyle/>
+          <a:p>
+            <a:pPr>
+              <a:defRPr sz="950">
+                <a:solidFill>
+                  <a:srgbClr val="94A3B8"/>
+                </a:solidFill>
+                <a:latin typeface="Calibri"/>
+              </a:defRPr>
+            </a:pPr>
+            <a:r>
+              <a:t>PharmaPulse 3D | Platform Komputasi Kimia Medisinal &amp; In Silico Drug Discovery | Slide 5 dari 14</a:t>
+            </a:r>
+          </a:p>
+        </p:txBody>
+      </p:sp>
+      <p:sp>
+        <p:nvSpPr>
+          <p:cNvPr id="6" name="Rounded Rectangle 5"/>
           <p:cNvSpPr/>
           <p:nvPr/>
         </p:nvSpPr>
         <p:spPr>
           <a:xfrm>
-            <a:off x="731520" y="1828800"/>
-            <a:ext cx="5120640" cy="4114800"/>
+            <a:off x="731520" y="1554480"/>
+            <a:ext cx="3383280" cy="4480560"/>
           </a:xfrm>
           <a:prstGeom prst="roundRect">
             <a:avLst/>
@@ -5147,14 +9105,14 @@
           </a:fontRef>
         </p:style>
         <p:txBody>
-          <a:bodyPr rtlCol="0" anchor="t" wrap="square" lIns="228600" rIns="228600" tIns="182880" bIns="182880"/>
+          <a:bodyPr rtlCol="0" anchor="t" wrap="square" lIns="201168" rIns="201168" tIns="164592" bIns="164592"/>
           <a:lstStyle/>
           <a:p>
             <a:pPr algn="ctr">
               <a:spcAft>
-                <a:spcPts val="800"/>
-              </a:spcAft>
-              <a:defRPr sz="1600" b="1">
+                <a:spcPts val="700"/>
+              </a:spcAft>
+              <a:defRPr sz="1400" b="1">
                 <a:solidFill>
                   <a:srgbClr val="06B6D4"/>
                 </a:solidFill>
@@ -5162,98 +9120,133 @@
               </a:defRPr>
             </a:pPr>
             <a:r>
-              <a:t>Persamaan Ionisasi Henderson-Hasselbalch</a:t>
-            </a:r>
-          </a:p>
-          <a:p>
-            <a:pPr>
-              <a:spcAft>
-                <a:spcPts val="600"/>
-              </a:spcAft>
-              <a:defRPr sz="1200">
-                <a:solidFill>
-                  <a:srgbClr val="94A3B8"/>
-                </a:solidFill>
-                <a:latin typeface="Calibri"/>
-              </a:defRPr>
-            </a:pPr>
-            <a:r>
-              <a:t>• Fraksi Terion (alpha) dihitung pada:</a:t>
-            </a:r>
-          </a:p>
-          <a:p>
-            <a:pPr>
-              <a:spcAft>
-                <a:spcPts val="600"/>
-              </a:spcAft>
-              <a:defRPr sz="1200">
-                <a:solidFill>
-                  <a:srgbClr val="94A3B8"/>
-                </a:solidFill>
-                <a:latin typeface="Calibri"/>
-              </a:defRPr>
-            </a:pPr>
-            <a:r>
-              <a:t>  - pH Lambung (pH 1.2): Menilai bentuk lipofil non-terion.</a:t>
-            </a:r>
-          </a:p>
-          <a:p>
-            <a:pPr>
-              <a:spcAft>
-                <a:spcPts val="600"/>
-              </a:spcAft>
-              <a:defRPr sz="1200">
-                <a:solidFill>
-                  <a:srgbClr val="94A3B8"/>
-                </a:solidFill>
-                <a:latin typeface="Calibri"/>
-              </a:defRPr>
-            </a:pPr>
-            <a:r>
-              <a:t>  - pH Darah/Usus (pH 7.4): Menilai penyerapan sistemik.</a:t>
-            </a:r>
-          </a:p>
-          <a:p>
-            <a:pPr>
-              <a:spcAft>
-                <a:spcPts val="600"/>
-              </a:spcAft>
-              <a:defRPr sz="1200">
-                <a:solidFill>
-                  <a:srgbClr val="94A3B8"/>
-                </a:solidFill>
-                <a:latin typeface="Calibri"/>
-              </a:defRPr>
-            </a:pPr>
-          </a:p>
-          <a:p>
-            <a:pPr>
-              <a:spcAft>
-                <a:spcPts val="600"/>
-              </a:spcAft>
-              <a:defRPr sz="1200">
-                <a:solidFill>
-                  <a:srgbClr val="94A3B8"/>
-                </a:solidFill>
-                <a:latin typeface="Calibri"/>
-              </a:defRPr>
-            </a:pPr>
-            <a:r>
-              <a:t>Bentuk non-terionik penting untuk menembus membran lipid, sedangkan bentuk terionik meningkatkan kelarutan.</a:t>
-            </a:r>
-          </a:p>
-        </p:txBody>
-      </p:sp>
-      <p:sp>
-        <p:nvSpPr>
-          <p:cNvPr id="6" name="Rounded Rectangle 5"/>
+              <a:t>Konsep &amp; Persamaan QSAR</a:t>
+            </a:r>
+          </a:p>
+          <a:p>
+            <a:pPr>
+              <a:spcAft>
+                <a:spcPts val="400"/>
+              </a:spcAft>
+              <a:defRPr sz="1050">
+                <a:solidFill>
+                  <a:srgbClr val="94A3B8"/>
+                </a:solidFill>
+                <a:latin typeface="Calibri"/>
+              </a:defRPr>
+            </a:pPr>
+            <a:r>
+              <a:t>- Quantitative Structure-Activity Relationship mengaitkan fitur fisikokimia dengan potensi biologis.</a:t>
+            </a:r>
+          </a:p>
+          <a:p>
+            <a:pPr>
+              <a:spcAft>
+                <a:spcPts val="400"/>
+              </a:spcAft>
+              <a:defRPr sz="1050">
+                <a:solidFill>
+                  <a:srgbClr val="94A3B8"/>
+                </a:solidFill>
+                <a:latin typeface="Calibri"/>
+              </a:defRPr>
+            </a:pPr>
+            <a:r>
+              <a:t>- Persamaan Multi-Deskriptor:</a:t>
+            </a:r>
+          </a:p>
+          <a:p>
+            <a:pPr>
+              <a:spcAft>
+                <a:spcPts val="400"/>
+              </a:spcAft>
+              <a:defRPr sz="1050">
+                <a:solidFill>
+                  <a:srgbClr val="94A3B8"/>
+                </a:solidFill>
+                <a:latin typeface="Calibri"/>
+              </a:defRPr>
+            </a:pPr>
+            <a:r>
+              <a:t>  pIC50 = 8.12 - 0.28(WLogP) - 0.012(TPSA) - 0.003(MW)</a:t>
+            </a:r>
+          </a:p>
+          <a:p>
+            <a:pPr>
+              <a:spcAft>
+                <a:spcPts val="400"/>
+              </a:spcAft>
+              <a:defRPr sz="1050">
+                <a:solidFill>
+                  <a:srgbClr val="94A3B8"/>
+                </a:solidFill>
+                <a:latin typeface="Calibri"/>
+              </a:defRPr>
+            </a:pPr>
+            <a:r>
+              <a:t>- Koefisien Determinasi R2 &gt; 0.85 tervalidasi terhadap seri analog bioaktif ChEMBL.</a:t>
+            </a:r>
+          </a:p>
+          <a:p>
+            <a:pPr>
+              <a:spcAft>
+                <a:spcPts val="400"/>
+              </a:spcAft>
+              <a:defRPr sz="1050">
+                <a:solidFill>
+                  <a:srgbClr val="94A3B8"/>
+                </a:solidFill>
+                <a:latin typeface="Calibri"/>
+              </a:defRPr>
+            </a:pPr>
+            <a:r>
+              <a:t>- Konversi Logaritmik Bioaktivitas:</a:t>
+            </a:r>
+          </a:p>
+          <a:p>
+            <a:pPr>
+              <a:spcAft>
+                <a:spcPts val="400"/>
+              </a:spcAft>
+              <a:defRPr sz="1050">
+                <a:solidFill>
+                  <a:srgbClr val="94A3B8"/>
+                </a:solidFill>
+                <a:latin typeface="Calibri"/>
+              </a:defRPr>
+            </a:pPr>
+            <a:r>
+              <a:t>  pIC50 = -log10(IC50 M)</a:t>
+            </a:r>
+          </a:p>
+          <a:p>
+            <a:pPr>
+              <a:spcAft>
+                <a:spcPts val="400"/>
+              </a:spcAft>
+              <a:defRPr sz="1050">
+                <a:solidFill>
+                  <a:srgbClr val="94A3B8"/>
+                </a:solidFill>
+                <a:latin typeface="Calibri"/>
+              </a:defRPr>
+            </a:pPr>
+            <a:r>
+              <a:t>- Menghasilkan estimasi konsentrasi penghambatan enzimatis IC50 dalam satuan nanomolar (nM).</a:t>
+            </a:r>
+          </a:p>
+        </p:txBody>
+      </p:sp>
+      <p:sp>
+        <p:nvSpPr>
+          <p:cNvPr id="7" name="Rounded Rectangle 6"/>
           <p:cNvSpPr/>
           <p:nvPr/>
         </p:nvSpPr>
         <p:spPr>
           <a:xfrm>
-            <a:off x="6217920" y="1828800"/>
-            <a:ext cx="5120640" cy="4114800"/>
+            <a:off x="4389120" y="1554480"/>
+            <a:ext cx="3383280" cy="4480560"/>
           </a:xfrm>
           <a:prstGeom prst="roundRect">
             <a:avLst/>
@@ -5282,122 +9275,272 @@
           </a:fontRef>
         </p:style>
         <p:txBody>
-          <a:bodyPr rtlCol="0" anchor="t" wrap="square" lIns="228600" rIns="228600" tIns="182880" bIns="182880"/>
+          <a:bodyPr rtlCol="0" anchor="t" wrap="square" lIns="201168" rIns="201168" tIns="164592" bIns="164592"/>
           <a:lstStyle/>
           <a:p>
             <a:pPr algn="ctr">
               <a:spcAft>
-                <a:spcPts val="800"/>
-              </a:spcAft>
-              <a:defRPr sz="1600" b="1">
-                <a:solidFill>
-                  <a:srgbClr val="06B6D4"/>
+                <a:spcPts val="700"/>
+              </a:spcAft>
+              <a:defRPr sz="1400" b="1">
+                <a:solidFill>
+                  <a:srgbClr val="8B5CF6"/>
                 </a:solidFill>
                 <a:latin typeface="Arial"/>
               </a:defRPr>
             </a:pPr>
             <a:r>
-              <a:t>Klasifikasi BCS (Biopharmaceutics)</a:t>
-            </a:r>
-          </a:p>
-          <a:p>
-            <a:pPr>
-              <a:spcAft>
-                <a:spcPts val="600"/>
-              </a:spcAft>
-              <a:defRPr sz="1200">
-                <a:solidFill>
-                  <a:srgbClr val="94A3B8"/>
-                </a:solidFill>
-                <a:latin typeface="Calibri"/>
-              </a:defRPr>
-            </a:pPr>
-            <a:r>
-              <a:t>• BCS Kelas I: Kelarutan Tinggi &amp; Permeabilitas Tinggi (Contoh: Paracetamol, Genistein, Gingerol).</a:t>
-            </a:r>
-          </a:p>
-          <a:p>
-            <a:pPr>
-              <a:spcAft>
-                <a:spcPts val="600"/>
-              </a:spcAft>
-              <a:defRPr sz="1200">
-                <a:solidFill>
-                  <a:srgbClr val="94A3B8"/>
-                </a:solidFill>
-                <a:latin typeface="Calibri"/>
-              </a:defRPr>
-            </a:pPr>
-            <a:r>
-              <a:t>• BCS Kelas II: Kelarutan Rendah &amp; Permeabilitas Tinggi (Contoh: Atorvastatin, Ibuprofen, Curcumin).</a:t>
-            </a:r>
-          </a:p>
-          <a:p>
-            <a:pPr>
-              <a:spcAft>
-                <a:spcPts val="600"/>
-              </a:spcAft>
-              <a:defRPr sz="1200">
-                <a:solidFill>
-                  <a:srgbClr val="94A3B8"/>
-                </a:solidFill>
-                <a:latin typeface="Calibri"/>
-              </a:defRPr>
-            </a:pPr>
-            <a:r>
-              <a:t>• BCS Kelas III: Kelarutan Tinggi &amp; Permeabilitas Rendah (Contoh: Acyclovir, Lamivudine).</a:t>
-            </a:r>
-          </a:p>
-          <a:p>
-            <a:pPr>
-              <a:spcAft>
-                <a:spcPts val="600"/>
-              </a:spcAft>
-              <a:defRPr sz="1200">
-                <a:solidFill>
-                  <a:srgbClr val="94A3B8"/>
-                </a:solidFill>
-                <a:latin typeface="Calibri"/>
-              </a:defRPr>
-            </a:pPr>
-            <a:r>
-              <a:t>• BCS Kelas IV: Kelarutan Rendah &amp; Permeabilitas Rendah (Contoh: Sofosbuvir, Vinblastine).</a:t>
-            </a:r>
-          </a:p>
-        </p:txBody>
-      </p:sp>
-      <p:sp>
-        <p:nvSpPr>
-          <p:cNvPr id="7" name="TextBox 6"/>
-          <p:cNvSpPr txBox="1"/>
+              <a:t>Kalkulator QSAR Interaktif Baru</a:t>
+            </a:r>
+          </a:p>
+          <a:p>
+            <a:pPr>
+              <a:spcAft>
+                <a:spcPts val="400"/>
+              </a:spcAft>
+              <a:defRPr sz="1050">
+                <a:solidFill>
+                  <a:srgbClr val="94A3B8"/>
+                </a:solidFill>
+                <a:latin typeface="Calibri"/>
+              </a:defRPr>
+            </a:pPr>
+            <a:r>
+              <a:t>- Fitur Simulator Dinamis: Pengguna dapat menginputkan deskriptor manual secara bebas:</a:t>
+            </a:r>
+          </a:p>
+          <a:p>
+            <a:pPr>
+              <a:spcAft>
+                <a:spcPts val="400"/>
+              </a:spcAft>
+              <a:defRPr sz="1050">
+                <a:solidFill>
+                  <a:srgbClr val="94A3B8"/>
+                </a:solidFill>
+                <a:latin typeface="Calibri"/>
+              </a:defRPr>
+            </a:pPr>
+            <a:r>
+              <a:t>  * Bobot Molekul (MW)</a:t>
+            </a:r>
+          </a:p>
+          <a:p>
+            <a:pPr>
+              <a:spcAft>
+                <a:spcPts val="400"/>
+              </a:spcAft>
+              <a:defRPr sz="1050">
+                <a:solidFill>
+                  <a:srgbClr val="94A3B8"/>
+                </a:solidFill>
+                <a:latin typeface="Calibri"/>
+              </a:defRPr>
+            </a:pPr>
+            <a:r>
+              <a:t>  * Lipofilisitas (LogP / WLogP)</a:t>
+            </a:r>
+          </a:p>
+          <a:p>
+            <a:pPr>
+              <a:spcAft>
+                <a:spcPts val="400"/>
+              </a:spcAft>
+              <a:defRPr sz="1050">
+                <a:solidFill>
+                  <a:srgbClr val="94A3B8"/>
+                </a:solidFill>
+                <a:latin typeface="Calibri"/>
+              </a:defRPr>
+            </a:pPr>
+            <a:r>
+              <a:t>  * Luas Permukaan Polar (TPSA)</a:t>
+            </a:r>
+          </a:p>
+          <a:p>
+            <a:pPr>
+              <a:spcAft>
+                <a:spcPts val="400"/>
+              </a:spcAft>
+              <a:defRPr sz="1050">
+                <a:solidFill>
+                  <a:srgbClr val="94A3B8"/>
+                </a:solidFill>
+                <a:latin typeface="Calibri"/>
+              </a:defRPr>
+            </a:pPr>
+            <a:r>
+              <a:t>  * Donor Ikatan Hidrogen (HBD)</a:t>
+            </a:r>
+          </a:p>
+          <a:p>
+            <a:pPr>
+              <a:spcAft>
+                <a:spcPts val="400"/>
+              </a:spcAft>
+              <a:defRPr sz="1050">
+                <a:solidFill>
+                  <a:srgbClr val="94A3B8"/>
+                </a:solidFill>
+                <a:latin typeface="Calibri"/>
+              </a:defRPr>
+            </a:pPr>
+            <a:r>
+              <a:t>  * Akseptor Ikatan Hidrogen (HBA)</a:t>
+            </a:r>
+          </a:p>
+          <a:p>
+            <a:pPr>
+              <a:spcAft>
+                <a:spcPts val="400"/>
+              </a:spcAft>
+              <a:defRPr sz="1050">
+                <a:solidFill>
+                  <a:srgbClr val="94A3B8"/>
+                </a:solidFill>
+                <a:latin typeface="Calibri"/>
+              </a:defRPr>
+            </a:pPr>
+            <a:r>
+              <a:t>- Respon Komputasi Real-time: Nilai prediksi pIC50 dan IC50 langsung dihitung saat slider/input berubah.</a:t>
+            </a:r>
+          </a:p>
+          <a:p>
+            <a:pPr>
+              <a:spcAft>
+                <a:spcPts val="400"/>
+              </a:spcAft>
+              <a:defRPr sz="1050">
+                <a:solidFill>
+                  <a:srgbClr val="94A3B8"/>
+                </a:solidFill>
+                <a:latin typeface="Calibri"/>
+              </a:defRPr>
+            </a:pPr>
+            <a:r>
+              <a:t>- Interpretasi Potensi Otomatis: High Potency (&lt;100 nM), Moderate, atau Low Potency.</a:t>
+            </a:r>
+          </a:p>
+        </p:txBody>
+      </p:sp>
+      <p:sp>
+        <p:nvSpPr>
+          <p:cNvPr id="8" name="Rounded Rectangle 7"/>
+          <p:cNvSpPr/>
           <p:nvPr/>
         </p:nvSpPr>
         <p:spPr>
           <a:xfrm>
-            <a:off x="731520" y="6309360"/>
-            <a:ext cx="10728655" cy="365760"/>
+            <a:off x="8046720" y="1554480"/>
+            <a:ext cx="3383280" cy="4480560"/>
           </a:xfrm>
-          <a:prstGeom prst="rect">
+          <a:prstGeom prst="roundRect">
             <a:avLst/>
           </a:prstGeom>
-          <a:noFill/>
+          <a:solidFill>
+            <a:srgbClr val="111827"/>
+          </a:solidFill>
+          <a:ln w="12700">
+            <a:solidFill>
+              <a:srgbClr val="1E293B"/>
+            </a:solidFill>
+          </a:ln>
         </p:spPr>
-        <p:txBody>
-          <a:bodyPr wrap="none">
-            <a:spAutoFit/>
-          </a:bodyPr>
-          <a:lstStyle/>
-          <a:p>
-            <a:pPr>
-              <a:defRPr sz="1000">
-                <a:solidFill>
-                  <a:srgbClr val="94A3B8"/>
-                </a:solidFill>
-                <a:latin typeface="Calibri"/>
-              </a:defRPr>
-            </a:pPr>
-            <a:r>
-              <a:t>PharmaPulse 3D - Presentasi Komprehensif Akademis | Slide 5 dari 10</a:t>
+        <p:style>
+          <a:lnRef idx="1">
+            <a:schemeClr val="accent1"/>
+          </a:lnRef>
+          <a:fillRef idx="3">
+            <a:schemeClr val="accent1"/>
+          </a:fillRef>
+          <a:effectRef idx="2">
+            <a:schemeClr val="accent1"/>
+          </a:effectRef>
+          <a:fontRef idx="minor">
+            <a:schemeClr val="lt1"/>
+          </a:fontRef>
+        </p:style>
+        <p:txBody>
+          <a:bodyPr rtlCol="0" anchor="t" wrap="square" lIns="201168" rIns="201168" tIns="164592" bIns="164592"/>
+          <a:lstStyle/>
+          <a:p>
+            <a:pPr algn="ctr">
+              <a:spcAft>
+                <a:spcPts val="700"/>
+              </a:spcAft>
+              <a:defRPr sz="1400" b="1">
+                <a:solidFill>
+                  <a:srgbClr val="F59E0B"/>
+                </a:solidFill>
+                <a:latin typeface="Arial"/>
+              </a:defRPr>
+            </a:pPr>
+            <a:r>
+              <a:t>Validasi Seri Analog ChEMBL</a:t>
+            </a:r>
+          </a:p>
+          <a:p>
+            <a:pPr>
+              <a:spcAft>
+                <a:spcPts val="400"/>
+              </a:spcAft>
+              <a:defRPr sz="1050">
+                <a:solidFill>
+                  <a:srgbClr val="94A3B8"/>
+                </a:solidFill>
+                <a:latin typeface="Calibri"/>
+              </a:defRPr>
+            </a:pPr>
+            <a:r>
+              <a:t>- Membandingkan prediksi in silico terhadap data eksperimental laboratorium in vitro riil dari repositori ChEMBL.</a:t>
+            </a:r>
+          </a:p>
+          <a:p>
+            <a:pPr>
+              <a:spcAft>
+                <a:spcPts val="400"/>
+              </a:spcAft>
+              <a:defRPr sz="1050">
+                <a:solidFill>
+                  <a:srgbClr val="94A3B8"/>
+                </a:solidFill>
+                <a:latin typeface="Calibri"/>
+              </a:defRPr>
+            </a:pPr>
+            <a:r>
+              <a:t>- Tabel seri analog komparatif dengan nomor bioassay, nilai IC50 (nM), dan pIC50 terpublikasi.</a:t>
+            </a:r>
+          </a:p>
+          <a:p>
+            <a:pPr>
+              <a:spcAft>
+                <a:spcPts val="400"/>
+              </a:spcAft>
+              <a:defRPr sz="1050">
+                <a:solidFill>
+                  <a:srgbClr val="94A3B8"/>
+                </a:solidFill>
+                <a:latin typeface="Calibri"/>
+              </a:defRPr>
+            </a:pPr>
+            <a:r>
+              <a:t>- Estimasi konstanta inhibisi target (Ki) dan afinitas termodinamika energi bebas pengikatan (delta G).</a:t>
+            </a:r>
+          </a:p>
+          <a:p>
+            <a:pPr>
+              <a:spcAft>
+                <a:spcPts val="400"/>
+              </a:spcAft>
+              <a:defRPr sz="1050">
+                <a:solidFill>
+                  <a:srgbClr val="94A3B8"/>
+                </a:solidFill>
+                <a:latin typeface="Calibri"/>
+              </a:defRPr>
+            </a:pPr>
+            <a:r>
+              <a:t>- Memandu desain gugus farmakofor untuk peningkatan selektivitas pengikatan enzim target.</a:t>
             </a:r>
           </a:p>
         </p:txBody>
@@ -5437,7 +9580,7 @@
         <p:spPr>
           <a:xfrm>
             <a:off x="731520" y="365760"/>
-            <a:ext cx="3657600" cy="365760"/>
+            <a:ext cx="9144000" cy="320040"/>
           </a:xfrm>
           <a:prstGeom prst="rect">
             <a:avLst/>
@@ -5445,7 +9588,7 @@
           <a:noFill/>
         </p:spPr>
         <p:txBody>
-          <a:bodyPr wrap="square">
+          <a:bodyPr wrap="none">
             <a:spAutoFit/>
           </a:bodyPr>
           <a:lstStyle/>
@@ -5455,11 +9598,11 @@
                 <a:solidFill>
                   <a:srgbClr val="06B6D4"/>
                 </a:solidFill>
-                <a:latin typeface="Trebuchet MS"/>
-              </a:defRPr>
-            </a:pPr>
-            <a:r>
-              <a:t>PRESENTASI PROYEK KIMIA FARMASI</a:t>
+                <a:latin typeface="Arial"/>
+              </a:defRPr>
+            </a:pPr>
+            <a:r>
+              <a:t>PHARMAPULSE 3D - INOVASI CADD &amp; KIMIA MEDISINAL</a:t>
             </a:r>
           </a:p>
         </p:txBody>
@@ -5473,7 +9616,7 @@
         <p:spPr>
           <a:xfrm>
             <a:off x="731520" y="640080"/>
-            <a:ext cx="10698480" cy="731520"/>
+            <a:ext cx="10728655" cy="685800"/>
           </a:xfrm>
           <a:prstGeom prst="rect">
             <a:avLst/>
@@ -5487,7 +9630,7 @@
           <a:lstStyle/>
           <a:p>
             <a:pPr>
-              <a:defRPr sz="2400" b="1">
+              <a:defRPr sz="2100" b="1">
                 <a:solidFill>
                   <a:srgbClr val="F8FAFC"/>
                 </a:solidFill>
@@ -5495,7 +9638,7 @@
               </a:defRPr>
             </a:pPr>
             <a:r>
-              <a:t>Studi Kasus Bahan Alam: Gingerol Jahe &amp; Isoflavon Kedelai</a:t>
+              <a:t>5. Inovasi 3D CADD: Visualisasi Spasial, Permukaan &amp; Pengukuran Geometri</a:t>
             </a:r>
           </a:p>
         </p:txBody>
@@ -5508,7 +9651,7 @@
         </p:nvSpPr>
         <p:spPr>
           <a:xfrm>
-            <a:off x="731520" y="1371600"/>
+            <a:off x="731520" y="1325880"/>
             <a:ext cx="10728655" cy="18288"/>
           </a:xfrm>
           <a:prstGeom prst="rect">
@@ -5547,14 +9690,50 @@
       </p:sp>
       <p:sp>
         <p:nvSpPr>
-          <p:cNvPr id="5" name="Rounded Rectangle 4"/>
+          <p:cNvPr id="5" name="TextBox 4"/>
+          <p:cNvSpPr txBox="1"/>
+          <p:nvPr/>
+        </p:nvSpPr>
+        <p:spPr>
+          <a:xfrm>
+            <a:off x="731520" y="6309360"/>
+            <a:ext cx="10728655" cy="365760"/>
+          </a:xfrm>
+          <a:prstGeom prst="rect">
+            <a:avLst/>
+          </a:prstGeom>
+          <a:noFill/>
+        </p:spPr>
+        <p:txBody>
+          <a:bodyPr wrap="none">
+            <a:spAutoFit/>
+          </a:bodyPr>
+          <a:lstStyle/>
+          <a:p>
+            <a:pPr>
+              <a:defRPr sz="950">
+                <a:solidFill>
+                  <a:srgbClr val="94A3B8"/>
+                </a:solidFill>
+                <a:latin typeface="Calibri"/>
+              </a:defRPr>
+            </a:pPr>
+            <a:r>
+              <a:t>PharmaPulse 3D | Platform Komputasi Kimia Medisinal &amp; In Silico Drug Discovery | Slide 6 dari 14</a:t>
+            </a:r>
+          </a:p>
+        </p:txBody>
+      </p:sp>
+      <p:sp>
+        <p:nvSpPr>
+          <p:cNvPr id="6" name="Rounded Rectangle 5"/>
           <p:cNvSpPr/>
           <p:nvPr/>
         </p:nvSpPr>
         <p:spPr>
           <a:xfrm>
-            <a:off x="731520" y="1828800"/>
-            <a:ext cx="3291840" cy="4114800"/>
+            <a:off x="731520" y="1554480"/>
+            <a:ext cx="3383280" cy="4480560"/>
           </a:xfrm>
           <a:prstGeom prst="roundRect">
             <a:avLst/>
@@ -5583,145 +9762,116 @@
           </a:fontRef>
         </p:style>
         <p:txBody>
-          <a:bodyPr rtlCol="0" anchor="t" wrap="square" lIns="228600" rIns="228600" tIns="182880" bIns="182880"/>
+          <a:bodyPr rtlCol="0" anchor="t" wrap="square" lIns="201168" rIns="201168" tIns="164592" bIns="164592"/>
           <a:lstStyle/>
           <a:p>
             <a:pPr algn="ctr">
               <a:spcAft>
-                <a:spcPts val="800"/>
-              </a:spcAft>
-              <a:defRPr sz="1600" b="1">
-                <a:solidFill>
-                  <a:srgbClr val="10B981"/>
+                <a:spcPts val="700"/>
+              </a:spcAft>
+              <a:defRPr sz="1400" b="1">
+                <a:solidFill>
+                  <a:srgbClr val="06B6D4"/>
                 </a:solidFill>
                 <a:latin typeface="Arial"/>
               </a:defRPr>
             </a:pPr>
             <a:r>
-              <a:t>Gingerol Jahe (CID 442793)</a:t>
-            </a:r>
-          </a:p>
-          <a:p>
-            <a:pPr>
-              <a:spcAft>
-                <a:spcPts val="600"/>
-              </a:spcAft>
-              <a:defRPr sz="1200">
-                <a:solidFill>
-                  <a:srgbClr val="94A3B8"/>
-                </a:solidFill>
-                <a:latin typeface="Calibri"/>
-              </a:defRPr>
-            </a:pPr>
-            <a:r>
-              <a:t>Formula: C17H26O4</a:t>
-            </a:r>
-          </a:p>
-          <a:p>
-            <a:pPr>
-              <a:spcAft>
-                <a:spcPts val="600"/>
-              </a:spcAft>
-              <a:defRPr sz="1200">
-                <a:solidFill>
-                  <a:srgbClr val="94A3B8"/>
-                </a:solidFill>
-                <a:latin typeface="Calibri"/>
-              </a:defRPr>
-            </a:pPr>
-            <a:r>
-              <a:t>MW: 294.39 g/mol | LogP: 3.1</a:t>
-            </a:r>
-          </a:p>
-          <a:p>
-            <a:pPr>
-              <a:spcAft>
-                <a:spcPts val="600"/>
-              </a:spcAft>
-              <a:defRPr sz="1200">
-                <a:solidFill>
-                  <a:srgbClr val="94A3B8"/>
-                </a:solidFill>
-                <a:latin typeface="Calibri"/>
-              </a:defRPr>
-            </a:pPr>
-            <a:r>
-              <a:t>HBD: 2 | HBA: 4 | TPSA: 66.8 Å²</a:t>
-            </a:r>
-          </a:p>
-          <a:p>
-            <a:pPr>
-              <a:spcAft>
-                <a:spcPts val="600"/>
-              </a:spcAft>
-              <a:defRPr sz="1200">
-                <a:solidFill>
-                  <a:srgbClr val="94A3B8"/>
-                </a:solidFill>
-                <a:latin typeface="Calibri"/>
-              </a:defRPr>
-            </a:pPr>
-            <a:r>
-              <a:t>BCS: Kelas I (Ideal Oral)</a:t>
-            </a:r>
-          </a:p>
-          <a:p>
-            <a:pPr>
-              <a:spcAft>
-                <a:spcPts val="600"/>
-              </a:spcAft>
-              <a:defRPr sz="1200">
-                <a:solidFill>
-                  <a:srgbClr val="94A3B8"/>
-                </a:solidFill>
-                <a:latin typeface="Calibri"/>
-              </a:defRPr>
-            </a:pPr>
-          </a:p>
-          <a:p>
-            <a:pPr>
-              <a:spcAft>
-                <a:spcPts val="600"/>
-              </a:spcAft>
-              <a:defRPr sz="1200">
-                <a:solidFill>
-                  <a:srgbClr val="94A3B8"/>
-                </a:solidFill>
-                <a:latin typeface="Calibri"/>
-              </a:defRPr>
-            </a:pPr>
-            <a:r>
-              <a:t>Skor RO5: 4/4 (Lolos 100%)</a:t>
-            </a:r>
-          </a:p>
-          <a:p>
-            <a:pPr>
-              <a:spcAft>
-                <a:spcPts val="600"/>
-              </a:spcAft>
-              <a:defRPr sz="1200">
-                <a:solidFill>
-                  <a:srgbClr val="94A3B8"/>
-                </a:solidFill>
-                <a:latin typeface="Calibri"/>
-              </a:defRPr>
-            </a:pPr>
-            <a:r>
-              <a:t>Verdict: Komponen fenolik aktif utama jahe dengan sifat permeabilitas membran sempurna.</a:t>
-            </a:r>
-          </a:p>
-        </p:txBody>
-      </p:sp>
-      <p:sp>
-        <p:nvSpPr>
-          <p:cNvPr id="6" name="Rounded Rectangle 5"/>
+              <a:t>Mode Visualisasi 3D Molekuler</a:t>
+            </a:r>
+          </a:p>
+          <a:p>
+            <a:pPr>
+              <a:spcAft>
+                <a:spcPts val="400"/>
+              </a:spcAft>
+              <a:defRPr sz="1050">
+                <a:solidFill>
+                  <a:srgbClr val="94A3B8"/>
+                </a:solidFill>
+                <a:latin typeface="Calibri"/>
+              </a:defRPr>
+            </a:pPr>
+            <a:r>
+              <a:t>- Render 3D Interaktif Berkecepatan Tinggi (3Dmol.js):</a:t>
+            </a:r>
+          </a:p>
+          <a:p>
+            <a:pPr>
+              <a:spcAft>
+                <a:spcPts val="400"/>
+              </a:spcAft>
+              <a:defRPr sz="1050">
+                <a:solidFill>
+                  <a:srgbClr val="94A3B8"/>
+                </a:solidFill>
+                <a:latin typeface="Calibri"/>
+              </a:defRPr>
+            </a:pPr>
+            <a:r>
+              <a:t>  * Ball-and-Stick: Penggambaran ikatan kovalen dan atom dengan kode warna standar CPK.</a:t>
+            </a:r>
+          </a:p>
+          <a:p>
+            <a:pPr>
+              <a:spcAft>
+                <a:spcPts val="400"/>
+              </a:spcAft>
+              <a:defRPr sz="1050">
+                <a:solidFill>
+                  <a:srgbClr val="94A3B8"/>
+                </a:solidFill>
+                <a:latin typeface="Calibri"/>
+              </a:defRPr>
+            </a:pPr>
+            <a:r>
+              <a:t>  * Spacefill (CPK): Representasi radius Van der Waals penuh untuk inspeksi sterik molekuler.</a:t>
+            </a:r>
+          </a:p>
+          <a:p>
+            <a:pPr>
+              <a:spcAft>
+                <a:spcPts val="400"/>
+              </a:spcAft>
+              <a:defRPr sz="1050">
+                <a:solidFill>
+                  <a:srgbClr val="94A3B8"/>
+                </a:solidFill>
+                <a:latin typeface="Calibri"/>
+              </a:defRPr>
+            </a:pPr>
+            <a:r>
+              <a:t>  * Licorice / Stick: Ideal untuk konformasi cincin aromatik dan heteroatom.</a:t>
+            </a:r>
+          </a:p>
+          <a:p>
+            <a:pPr>
+              <a:spcAft>
+                <a:spcPts val="400"/>
+              </a:spcAft>
+              <a:defRPr sz="1050">
+                <a:solidFill>
+                  <a:srgbClr val="94A3B8"/>
+                </a:solidFill>
+                <a:latin typeface="Calibri"/>
+              </a:defRPr>
+            </a:pPr>
+            <a:r>
+              <a:t>  * Wireframe &amp; Cartoon: Analisis kerangka spasial molekul makro dan ligan bioaktif.</a:t>
+            </a:r>
+          </a:p>
+        </p:txBody>
+      </p:sp>
+      <p:sp>
+        <p:nvSpPr>
+          <p:cNvPr id="7" name="Rounded Rectangle 6"/>
           <p:cNvSpPr/>
           <p:nvPr/>
         </p:nvSpPr>
         <p:spPr>
           <a:xfrm>
-            <a:off x="4389120" y="1828800"/>
-            <a:ext cx="3291840" cy="4114800"/>
+            <a:off x="4389120" y="1554480"/>
+            <a:ext cx="3383280" cy="4480560"/>
           </a:xfrm>
           <a:prstGeom prst="roundRect">
             <a:avLst/>
@@ -5750,145 +9900,116 @@
           </a:fontRef>
         </p:style>
         <p:txBody>
-          <a:bodyPr rtlCol="0" anchor="t" wrap="square" lIns="228600" rIns="228600" tIns="182880" bIns="182880"/>
+          <a:bodyPr rtlCol="0" anchor="t" wrap="square" lIns="201168" rIns="201168" tIns="164592" bIns="164592"/>
           <a:lstStyle/>
           <a:p>
             <a:pPr algn="ctr">
               <a:spcAft>
-                <a:spcPts val="800"/>
-              </a:spcAft>
-              <a:defRPr sz="1600" b="1">
-                <a:solidFill>
-                  <a:srgbClr val="10B981"/>
+                <a:spcPts val="700"/>
+              </a:spcAft>
+              <a:defRPr sz="1400" b="1">
+                <a:solidFill>
+                  <a:srgbClr val="8B5CF6"/>
                 </a:solidFill>
                 <a:latin typeface="Arial"/>
               </a:defRPr>
             </a:pPr>
             <a:r>
-              <a:t>Genistein (CID 5280961)</a:t>
-            </a:r>
-          </a:p>
-          <a:p>
-            <a:pPr>
-              <a:spcAft>
-                <a:spcPts val="600"/>
-              </a:spcAft>
-              <a:defRPr sz="1200">
-                <a:solidFill>
-                  <a:srgbClr val="94A3B8"/>
-                </a:solidFill>
-                <a:latin typeface="Calibri"/>
-              </a:defRPr>
-            </a:pPr>
-            <a:r>
-              <a:t>Formula: C15H10O5</a:t>
-            </a:r>
-          </a:p>
-          <a:p>
-            <a:pPr>
-              <a:spcAft>
-                <a:spcPts val="600"/>
-              </a:spcAft>
-              <a:defRPr sz="1200">
-                <a:solidFill>
-                  <a:srgbClr val="94A3B8"/>
-                </a:solidFill>
-                <a:latin typeface="Calibri"/>
-              </a:defRPr>
-            </a:pPr>
-            <a:r>
-              <a:t>MW: 270.24 g/mol | LogP: 2.7</a:t>
-            </a:r>
-          </a:p>
-          <a:p>
-            <a:pPr>
-              <a:spcAft>
-                <a:spcPts val="600"/>
-              </a:spcAft>
-              <a:defRPr sz="1200">
-                <a:solidFill>
-                  <a:srgbClr val="94A3B8"/>
-                </a:solidFill>
-                <a:latin typeface="Calibri"/>
-              </a:defRPr>
-            </a:pPr>
-            <a:r>
-              <a:t>HBD: 3 | HBA: 5 | TPSA: 87.0 Å²</a:t>
-            </a:r>
-          </a:p>
-          <a:p>
-            <a:pPr>
-              <a:spcAft>
-                <a:spcPts val="600"/>
-              </a:spcAft>
-              <a:defRPr sz="1200">
-                <a:solidFill>
-                  <a:srgbClr val="94A3B8"/>
-                </a:solidFill>
-                <a:latin typeface="Calibri"/>
-              </a:defRPr>
-            </a:pPr>
-            <a:r>
-              <a:t>BCS: Kelas I / II</a:t>
-            </a:r>
-          </a:p>
-          <a:p>
-            <a:pPr>
-              <a:spcAft>
-                <a:spcPts val="600"/>
-              </a:spcAft>
-              <a:defRPr sz="1200">
-                <a:solidFill>
-                  <a:srgbClr val="94A3B8"/>
-                </a:solidFill>
-                <a:latin typeface="Calibri"/>
-              </a:defRPr>
-            </a:pPr>
-          </a:p>
-          <a:p>
-            <a:pPr>
-              <a:spcAft>
-                <a:spcPts val="600"/>
-              </a:spcAft>
-              <a:defRPr sz="1200">
-                <a:solidFill>
-                  <a:srgbClr val="94A3B8"/>
-                </a:solidFill>
-                <a:latin typeface="Calibri"/>
-              </a:defRPr>
-            </a:pPr>
-            <a:r>
-              <a:t>Skor RO5: 4/4 (Lolos 100%)</a:t>
-            </a:r>
-          </a:p>
-          <a:p>
-            <a:pPr>
-              <a:spcAft>
-                <a:spcPts val="600"/>
-              </a:spcAft>
-              <a:defRPr sz="1200">
-                <a:solidFill>
-                  <a:srgbClr val="94A3B8"/>
-                </a:solidFill>
-                <a:latin typeface="Calibri"/>
-              </a:defRPr>
-            </a:pPr>
-            <a:r>
-              <a:t>Verdict: Isoflavon utama kedelai dengan bioavailabilitas oral ideal.</a:t>
-            </a:r>
-          </a:p>
-        </p:txBody>
-      </p:sp>
-      <p:sp>
-        <p:nvSpPr>
-          <p:cNvPr id="7" name="Rounded Rectangle 6"/>
+              <a:t>Pemetaan Permukaan Molekul</a:t>
+            </a:r>
+          </a:p>
+          <a:p>
+            <a:pPr>
+              <a:spcAft>
+                <a:spcPts val="400"/>
+              </a:spcAft>
+              <a:defRPr sz="1050">
+                <a:solidFill>
+                  <a:srgbClr val="94A3B8"/>
+                </a:solidFill>
+                <a:latin typeface="Calibri"/>
+              </a:defRPr>
+            </a:pPr>
+            <a:r>
+              <a:t>- Electrostatic Potential (ESP) Surface:</a:t>
+            </a:r>
+          </a:p>
+          <a:p>
+            <a:pPr>
+              <a:spcAft>
+                <a:spcPts val="400"/>
+              </a:spcAft>
+              <a:defRPr sz="1050">
+                <a:solidFill>
+                  <a:srgbClr val="94A3B8"/>
+                </a:solidFill>
+                <a:latin typeface="Calibri"/>
+              </a:defRPr>
+            </a:pPr>
+            <a:r>
+              <a:t>  * Gradien warna merah (muatan parsial negatif) hingga biru (muatan positif).</a:t>
+            </a:r>
+          </a:p>
+          <a:p>
+            <a:pPr>
+              <a:spcAft>
+                <a:spcPts val="400"/>
+              </a:spcAft>
+              <a:defRPr sz="1050">
+                <a:solidFill>
+                  <a:srgbClr val="94A3B8"/>
+                </a:solidFill>
+                <a:latin typeface="Calibri"/>
+              </a:defRPr>
+            </a:pPr>
+            <a:r>
+              <a:t>  * Mengidentifikasi situs pembentukan ikatan hidrogen dan interaksi ionik dengan residu protein target.</a:t>
+            </a:r>
+          </a:p>
+          <a:p>
+            <a:pPr>
+              <a:spcAft>
+                <a:spcPts val="400"/>
+              </a:spcAft>
+              <a:defRPr sz="1050">
+                <a:solidFill>
+                  <a:srgbClr val="94A3B8"/>
+                </a:solidFill>
+                <a:latin typeface="Calibri"/>
+              </a:defRPr>
+            </a:pPr>
+            <a:r>
+              <a:t>- Lipophilicity Surface:</a:t>
+            </a:r>
+          </a:p>
+          <a:p>
+            <a:pPr>
+              <a:spcAft>
+                <a:spcPts val="400"/>
+              </a:spcAft>
+              <a:defRPr sz="1050">
+                <a:solidFill>
+                  <a:srgbClr val="94A3B8"/>
+                </a:solidFill>
+                <a:latin typeface="Calibri"/>
+              </a:defRPr>
+            </a:pPr>
+            <a:r>
+              <a:t>  * Menyorot saku hidrofobik molekul yang menentukan kemampuan partisi ke dalam membran sel dan pengikatan reseptor.</a:t>
+            </a:r>
+          </a:p>
+        </p:txBody>
+      </p:sp>
+      <p:sp>
+        <p:nvSpPr>
+          <p:cNvPr id="8" name="Rounded Rectangle 7"/>
           <p:cNvSpPr/>
           <p:nvPr/>
         </p:nvSpPr>
         <p:spPr>
           <a:xfrm>
-            <a:off x="8046720" y="1828800"/>
-            <a:ext cx="3291840" cy="4114800"/>
+            <a:off x="8046720" y="1554480"/>
+            <a:ext cx="3383280" cy="4480560"/>
           </a:xfrm>
           <a:prstGeom prst="roundRect">
             <a:avLst/>
@@ -5917,135 +10038,102 @@
           </a:fontRef>
         </p:style>
         <p:txBody>
-          <a:bodyPr rtlCol="0" anchor="t" wrap="square" lIns="228600" rIns="228600" tIns="182880" bIns="182880"/>
+          <a:bodyPr rtlCol="0" anchor="t" wrap="square" lIns="201168" rIns="201168" tIns="164592" bIns="164592"/>
           <a:lstStyle/>
           <a:p>
             <a:pPr algn="ctr">
               <a:spcAft>
-                <a:spcPts val="800"/>
-              </a:spcAft>
-              <a:defRPr sz="1600" b="1">
-                <a:solidFill>
-                  <a:srgbClr val="06B6D4"/>
+                <a:spcPts val="700"/>
+              </a:spcAft>
+              <a:defRPr sz="1400" b="1">
+                <a:solidFill>
+                  <a:srgbClr val="10B981"/>
                 </a:solidFill>
                 <a:latin typeface="Arial"/>
               </a:defRPr>
             </a:pPr>
             <a:r>
-              <a:t>Curcumin &amp; Tannin</a:t>
-            </a:r>
-          </a:p>
-          <a:p>
-            <a:pPr>
-              <a:spcAft>
-                <a:spcPts val="600"/>
-              </a:spcAft>
-              <a:defRPr sz="1200">
-                <a:solidFill>
-                  <a:srgbClr val="94A3B8"/>
-                </a:solidFill>
-                <a:latin typeface="Calibri"/>
-              </a:defRPr>
-            </a:pPr>
-            <a:r>
-              <a:t>Curcumin (CID 5281767): MW 368.38 | LogP 3.2 | BCS II</a:t>
-            </a:r>
-          </a:p>
-          <a:p>
-            <a:pPr>
-              <a:spcAft>
-                <a:spcPts val="600"/>
-              </a:spcAft>
-              <a:defRPr sz="1200">
-                <a:solidFill>
-                  <a:srgbClr val="94A3B8"/>
-                </a:solidFill>
-                <a:latin typeface="Calibri"/>
-              </a:defRPr>
-            </a:pPr>
-            <a:r>
-              <a:t>Tannin/Asam Galat (CID 370): MW 170.12 | LogP 0.7</a:t>
-            </a:r>
-          </a:p>
-          <a:p>
-            <a:pPr>
-              <a:spcAft>
-                <a:spcPts val="600"/>
-              </a:spcAft>
-              <a:defRPr sz="1200">
-                <a:solidFill>
-                  <a:srgbClr val="94A3B8"/>
-                </a:solidFill>
-                <a:latin typeface="Calibri"/>
-              </a:defRPr>
-            </a:pPr>
-            <a:r>
-              <a:t>Flavonoid/Quercetin (CID 5280343): MW 302.24 | LogP 1.5</a:t>
-            </a:r>
-          </a:p>
-          <a:p>
-            <a:pPr>
-              <a:spcAft>
-                <a:spcPts val="600"/>
-              </a:spcAft>
-              <a:defRPr sz="1200">
-                <a:solidFill>
-                  <a:srgbClr val="94A3B8"/>
-                </a:solidFill>
-                <a:latin typeface="Calibri"/>
-              </a:defRPr>
-            </a:pPr>
-          </a:p>
-          <a:p>
-            <a:pPr>
-              <a:spcAft>
-                <a:spcPts val="600"/>
-              </a:spcAft>
-              <a:defRPr sz="1200">
-                <a:solidFill>
-                  <a:srgbClr val="94A3B8"/>
-                </a:solidFill>
-                <a:latin typeface="Calibri"/>
-              </a:defRPr>
-            </a:pPr>
-            <a:r>
-              <a:t>Verdict: Sediaan bahan alam terbukti memenuhi parameter ketersediaan hayati.</a:t>
-            </a:r>
-          </a:p>
-        </p:txBody>
-      </p:sp>
-      <p:sp>
-        <p:nvSpPr>
-          <p:cNvPr id="8" name="TextBox 7"/>
-          <p:cNvSpPr txBox="1"/>
-          <p:nvPr/>
-        </p:nvSpPr>
-        <p:spPr>
-          <a:xfrm>
-            <a:off x="731520" y="6309360"/>
-            <a:ext cx="10728655" cy="365760"/>
-          </a:xfrm>
-          <a:prstGeom prst="rect">
-            <a:avLst/>
-          </a:prstGeom>
-          <a:noFill/>
-        </p:spPr>
-        <p:txBody>
-          <a:bodyPr wrap="none">
-            <a:spAutoFit/>
-          </a:bodyPr>
-          <a:lstStyle/>
-          <a:p>
-            <a:pPr>
-              <a:defRPr sz="1000">
-                <a:solidFill>
-                  <a:srgbClr val="94A3B8"/>
-                </a:solidFill>
-                <a:latin typeface="Calibri"/>
-              </a:defRPr>
-            </a:pPr>
-            <a:r>
-              <a:t>PharmaPulse 3D - Presentasi Komprehensif Akademis | Slide 6 dari 10</a:t>
+              <a:t>Pengukuran Geometri 3D Interaktif</a:t>
+            </a:r>
+          </a:p>
+          <a:p>
+            <a:pPr>
+              <a:spcAft>
+                <a:spcPts val="400"/>
+              </a:spcAft>
+              <a:defRPr sz="1050">
+                <a:solidFill>
+                  <a:srgbClr val="94A3B8"/>
+                </a:solidFill>
+                <a:latin typeface="Calibri"/>
+              </a:defRPr>
+            </a:pPr>
+            <a:r>
+              <a:t>- Spatial Measurement Toolkit Langsung pada Layar:</a:t>
+            </a:r>
+          </a:p>
+          <a:p>
+            <a:pPr>
+              <a:spcAft>
+                <a:spcPts val="400"/>
+              </a:spcAft>
+              <a:defRPr sz="1050">
+                <a:solidFill>
+                  <a:srgbClr val="94A3B8"/>
+                </a:solidFill>
+                <a:latin typeface="Calibri"/>
+              </a:defRPr>
+            </a:pPr>
+            <a:r>
+              <a:t>  * Distance Measurement: Klik 2 atom untuk mengukur jarak interatomik dalam satuan Angstrom (A).</a:t>
+            </a:r>
+          </a:p>
+          <a:p>
+            <a:pPr>
+              <a:spcAft>
+                <a:spcPts val="400"/>
+              </a:spcAft>
+              <a:defRPr sz="1050">
+                <a:solidFill>
+                  <a:srgbClr val="94A3B8"/>
+                </a:solidFill>
+                <a:latin typeface="Calibri"/>
+              </a:defRPr>
+            </a:pPr>
+            <a:r>
+              <a:t>  * Angle Measurement: Klik 3 atom untuk mengukur sudut ikatan valensi dalam derajat (°).</a:t>
+            </a:r>
+          </a:p>
+          <a:p>
+            <a:pPr>
+              <a:spcAft>
+                <a:spcPts val="400"/>
+              </a:spcAft>
+              <a:defRPr sz="1050">
+                <a:solidFill>
+                  <a:srgbClr val="94A3B8"/>
+                </a:solidFill>
+                <a:latin typeface="Calibri"/>
+              </a:defRPr>
+            </a:pPr>
+            <a:r>
+              <a:t>  * Dihedral Angle: Klik 4 atom untuk menganalisis konformasi rotasi ikatan dan sudut torsi spasial.</a:t>
+            </a:r>
+          </a:p>
+          <a:p>
+            <a:pPr>
+              <a:spcAft>
+                <a:spcPts val="400"/>
+              </a:spcAft>
+              <a:defRPr sz="1050">
+                <a:solidFill>
+                  <a:srgbClr val="94A3B8"/>
+                </a:solidFill>
+                <a:latin typeface="Calibri"/>
+              </a:defRPr>
+            </a:pPr>
+            <a:r>
+              <a:t>- Esensial untuk validasi docking molekuler dan penyesuaian geometri konformer stabil.</a:t>
             </a:r>
           </a:p>
         </p:txBody>
@@ -6085,7 +10173,7 @@
         <p:spPr>
           <a:xfrm>
             <a:off x="731520" y="365760"/>
-            <a:ext cx="3657600" cy="365760"/>
+            <a:ext cx="9144000" cy="320040"/>
           </a:xfrm>
           <a:prstGeom prst="rect">
             <a:avLst/>
@@ -6093,7 +10181,7 @@
           <a:noFill/>
         </p:spPr>
         <p:txBody>
-          <a:bodyPr wrap="square">
+          <a:bodyPr wrap="none">
             <a:spAutoFit/>
           </a:bodyPr>
           <a:lstStyle/>
@@ -6103,11 +10191,11 @@
                 <a:solidFill>
                   <a:srgbClr val="06B6D4"/>
                 </a:solidFill>
-                <a:latin typeface="Trebuchet MS"/>
-              </a:defRPr>
-            </a:pPr>
-            <a:r>
-              <a:t>PRESENTASI PROYEK KIMIA FARMASI</a:t>
+                <a:latin typeface="Arial"/>
+              </a:defRPr>
+            </a:pPr>
+            <a:r>
+              <a:t>PHARMAPULSE 3D - INOVASI CADD &amp; KIMIA MEDISINAL</a:t>
             </a:r>
           </a:p>
         </p:txBody>
@@ -6121,7 +10209,7 @@
         <p:spPr>
           <a:xfrm>
             <a:off x="731520" y="640080"/>
-            <a:ext cx="10698480" cy="731520"/>
+            <a:ext cx="10728655" cy="685800"/>
           </a:xfrm>
           <a:prstGeom prst="rect">
             <a:avLst/>
@@ -6135,7 +10223,7 @@
           <a:lstStyle/>
           <a:p>
             <a:pPr>
-              <a:defRPr sz="2400" b="1">
+              <a:defRPr sz="2100" b="1">
                 <a:solidFill>
                   <a:srgbClr val="F8FAFC"/>
                 </a:solidFill>
@@ -6143,7 +10231,7 @@
               </a:defRPr>
             </a:pPr>
             <a:r>
-              <a:t>Profil Antivirus (14 Senyawa Baru) &amp; Validasi SwissADME</a:t>
+              <a:t>6. Inovasi ADMET: Model Prediksi Bivariat BOILED-Egg Terstandar</a:t>
             </a:r>
           </a:p>
         </p:txBody>
@@ -6156,7 +10244,7 @@
         </p:nvSpPr>
         <p:spPr>
           <a:xfrm>
-            <a:off x="731520" y="1371600"/>
+            <a:off x="731520" y="1325880"/>
             <a:ext cx="10728655" cy="18288"/>
           </a:xfrm>
           <a:prstGeom prst="rect">
@@ -6195,14 +10283,50 @@
       </p:sp>
       <p:sp>
         <p:nvSpPr>
-          <p:cNvPr id="5" name="Rounded Rectangle 4"/>
+          <p:cNvPr id="5" name="TextBox 4"/>
+          <p:cNvSpPr txBox="1"/>
+          <p:nvPr/>
+        </p:nvSpPr>
+        <p:spPr>
+          <a:xfrm>
+            <a:off x="731520" y="6309360"/>
+            <a:ext cx="10728655" cy="365760"/>
+          </a:xfrm>
+          <a:prstGeom prst="rect">
+            <a:avLst/>
+          </a:prstGeom>
+          <a:noFill/>
+        </p:spPr>
+        <p:txBody>
+          <a:bodyPr wrap="none">
+            <a:spAutoFit/>
+          </a:bodyPr>
+          <a:lstStyle/>
+          <a:p>
+            <a:pPr>
+              <a:defRPr sz="950">
+                <a:solidFill>
+                  <a:srgbClr val="94A3B8"/>
+                </a:solidFill>
+                <a:latin typeface="Calibri"/>
+              </a:defRPr>
+            </a:pPr>
+            <a:r>
+              <a:t>PharmaPulse 3D | Platform Komputasi Kimia Medisinal &amp; In Silico Drug Discovery | Slide 7 dari 14</a:t>
+            </a:r>
+          </a:p>
+        </p:txBody>
+      </p:sp>
+      <p:sp>
+        <p:nvSpPr>
+          <p:cNvPr id="6" name="Rounded Rectangle 5"/>
           <p:cNvSpPr/>
           <p:nvPr/>
         </p:nvSpPr>
         <p:spPr>
           <a:xfrm>
-            <a:off x="731520" y="1828800"/>
-            <a:ext cx="5120640" cy="4114800"/>
+            <a:off x="731520" y="1554480"/>
+            <a:ext cx="3383280" cy="4480560"/>
           </a:xfrm>
           <a:prstGeom prst="roundRect">
             <a:avLst/>
@@ -6231,14 +10355,14 @@
           </a:fontRef>
         </p:style>
         <p:txBody>
-          <a:bodyPr rtlCol="0" anchor="t" wrap="square" lIns="228600" rIns="228600" tIns="182880" bIns="182880"/>
+          <a:bodyPr rtlCol="0" anchor="t" wrap="square" lIns="201168" rIns="201168" tIns="164592" bIns="164592"/>
           <a:lstStyle/>
           <a:p>
             <a:pPr algn="ctr">
               <a:spcAft>
-                <a:spcPts val="800"/>
-              </a:spcAft>
-              <a:defRPr sz="1600" b="1">
+                <a:spcPts val="700"/>
+              </a:spcAft>
+              <a:defRPr sz="1400" b="1">
                 <a:solidFill>
                   <a:srgbClr val="06B6D4"/>
                 </a:solidFill>
@@ -6246,98 +10370,85 @@
               </a:defRPr>
             </a:pPr>
             <a:r>
-              <a:t>Antivirus Influenza, HIV &amp; Hepatitis</a:t>
-            </a:r>
-          </a:p>
-          <a:p>
-            <a:pPr>
-              <a:spcAft>
-                <a:spcPts val="600"/>
-              </a:spcAft>
-              <a:defRPr sz="1200">
-                <a:solidFill>
-                  <a:srgbClr val="94A3B8"/>
-                </a:solidFill>
-                <a:latin typeface="Calibri"/>
-              </a:defRPr>
-            </a:pPr>
-            <a:r>
-              <a:t>• Influenza: Oseltamivir (CID 65028), Zanamivir, Peramivir, Baloxavir.</a:t>
-            </a:r>
-          </a:p>
-          <a:p>
-            <a:pPr>
-              <a:spcAft>
-                <a:spcPts val="600"/>
-              </a:spcAft>
-              <a:defRPr sz="1200">
-                <a:solidFill>
-                  <a:srgbClr val="94A3B8"/>
-                </a:solidFill>
-                <a:latin typeface="Calibri"/>
-              </a:defRPr>
-            </a:pPr>
-            <a:r>
-              <a:t>• Herpes &amp; HBV: Acyclovir, Valacyclovir, Famciclovir, Lamivudine.</a:t>
-            </a:r>
-          </a:p>
-          <a:p>
-            <a:pPr>
-              <a:spcAft>
-                <a:spcPts val="600"/>
-              </a:spcAft>
-              <a:defRPr sz="1200">
-                <a:solidFill>
-                  <a:srgbClr val="94A3B8"/>
-                </a:solidFill>
-                <a:latin typeface="Calibri"/>
-              </a:defRPr>
-            </a:pPr>
-            <a:r>
-              <a:t>• HCV &amp; HIV: Sofosbuvir, Tenofovir, Zidovudine, Efavirenz, Interferon.</a:t>
-            </a:r>
-          </a:p>
-          <a:p>
-            <a:pPr>
-              <a:spcAft>
-                <a:spcPts val="600"/>
-              </a:spcAft>
-              <a:defRPr sz="1200">
-                <a:solidFill>
-                  <a:srgbClr val="94A3B8"/>
-                </a:solidFill>
-                <a:latin typeface="Calibri"/>
-              </a:defRPr>
-            </a:pPr>
-          </a:p>
-          <a:p>
-            <a:pPr>
-              <a:spcAft>
-                <a:spcPts val="600"/>
-              </a:spcAft>
-              <a:defRPr sz="1200">
-                <a:solidFill>
-                  <a:srgbClr val="94A3B8"/>
-                </a:solidFill>
-                <a:latin typeface="Calibri"/>
-              </a:defRPr>
-            </a:pPr>
-            <a:r>
-              <a:t>Aplikasi berhasil mengkalkulasi parameter fisikokimia &amp; kelayakan oral untuk 14 obat antivirus baru.</a:t>
-            </a:r>
-          </a:p>
-        </p:txBody>
-      </p:sp>
-      <p:sp>
-        <p:nvSpPr>
-          <p:cNvPr id="6" name="Rounded Rectangle 5"/>
+              <a:t>Landasan Teori BOILED-Egg</a:t>
+            </a:r>
+          </a:p>
+          <a:p>
+            <a:pPr>
+              <a:spcAft>
+                <a:spcPts val="400"/>
+              </a:spcAft>
+              <a:defRPr sz="1050">
+                <a:solidFill>
+                  <a:srgbClr val="94A3B8"/>
+                </a:solidFill>
+                <a:latin typeface="Calibri"/>
+              </a:defRPr>
+            </a:pPr>
+            <a:r>
+              <a:t>- Model prediksi bioavailabilitas visual terstandar publikasi Daina &amp; Zoete (ChemMedChem 2016).</a:t>
+            </a:r>
+          </a:p>
+          <a:p>
+            <a:pPr>
+              <a:spcAft>
+                <a:spcPts val="400"/>
+              </a:spcAft>
+              <a:defRPr sz="1050">
+                <a:solidFill>
+                  <a:srgbClr val="94A3B8"/>
+                </a:solidFill>
+                <a:latin typeface="Calibri"/>
+              </a:defRPr>
+            </a:pPr>
+            <a:r>
+              <a:t>- Memetakan hubungan bivariat lipofilitas WLogP (sumbu X) terhadap luas permukaan polar TPSA (sumbu Y).</a:t>
+            </a:r>
+          </a:p>
+          <a:p>
+            <a:pPr>
+              <a:spcAft>
+                <a:spcPts val="400"/>
+              </a:spcAft>
+              <a:defRPr sz="1050">
+                <a:solidFill>
+                  <a:srgbClr val="94A3B8"/>
+                </a:solidFill>
+                <a:latin typeface="Calibri"/>
+              </a:defRPr>
+            </a:pPr>
+            <a:r>
+              <a:t>- Memberikan estimasi simultan untuk dua parameter krusial penyerapan biologis oral secara akurat dan intuitif.</a:t>
+            </a:r>
+          </a:p>
+          <a:p>
+            <a:pPr>
+              <a:spcAft>
+                <a:spcPts val="400"/>
+              </a:spcAft>
+              <a:defRPr sz="1050">
+                <a:solidFill>
+                  <a:srgbClr val="94A3B8"/>
+                </a:solidFill>
+                <a:latin typeface="Calibri"/>
+              </a:defRPr>
+            </a:pPr>
+            <a:r>
+              <a:t>- Mencegah kandidat obat gagal di fase uji preklinis akibat masalah sawar biologis.</a:t>
+            </a:r>
+          </a:p>
+        </p:txBody>
+      </p:sp>
+      <p:sp>
+        <p:nvSpPr>
+          <p:cNvPr id="7" name="Rounded Rectangle 6"/>
           <p:cNvSpPr/>
           <p:nvPr/>
         </p:nvSpPr>
         <p:spPr>
           <a:xfrm>
-            <a:off x="6217920" y="1828800"/>
-            <a:ext cx="5120640" cy="4114800"/>
+            <a:off x="4389120" y="1554480"/>
+            <a:ext cx="3383280" cy="4480560"/>
           </a:xfrm>
           <a:prstGeom prst="roundRect">
             <a:avLst/>
@@ -6366,151 +10477,240 @@
           </a:fontRef>
         </p:style>
         <p:txBody>
-          <a:bodyPr rtlCol="0" anchor="t" wrap="square" lIns="228600" rIns="228600" tIns="182880" bIns="182880"/>
+          <a:bodyPr rtlCol="0" anchor="t" wrap="square" lIns="201168" rIns="201168" tIns="164592" bIns="164592"/>
           <a:lstStyle/>
           <a:p>
             <a:pPr algn="ctr">
               <a:spcAft>
-                <a:spcPts val="800"/>
-              </a:spcAft>
-              <a:defRPr sz="1600" b="1">
-                <a:solidFill>
-                  <a:srgbClr val="06B6D4"/>
+                <a:spcPts val="700"/>
+              </a:spcAft>
+              <a:defRPr sz="1400" b="1">
+                <a:solidFill>
+                  <a:srgbClr val="8B5CF6"/>
                 </a:solidFill>
                 <a:latin typeface="Arial"/>
               </a:defRPr>
             </a:pPr>
             <a:r>
-              <a:t>Validasi komputasi vs SwissADME SIB</a:t>
-            </a:r>
-          </a:p>
-          <a:p>
-            <a:pPr>
-              <a:spcAft>
-                <a:spcPts val="600"/>
-              </a:spcAft>
-              <a:defRPr sz="1200">
-                <a:solidFill>
-                  <a:srgbClr val="94A3B8"/>
-                </a:solidFill>
-                <a:latin typeface="Calibri"/>
-              </a:defRPr>
-            </a:pPr>
-            <a:r>
-              <a:t>1. Paracetamol (CID 1983): MW 151.16 | LogP 0.50 -&gt; Match 100%</a:t>
-            </a:r>
-          </a:p>
-          <a:p>
-            <a:pPr>
-              <a:spcAft>
-                <a:spcPts val="600"/>
-              </a:spcAft>
-              <a:defRPr sz="1200">
-                <a:solidFill>
-                  <a:srgbClr val="94A3B8"/>
-                </a:solidFill>
-                <a:latin typeface="Calibri"/>
-              </a:defRPr>
-            </a:pPr>
-            <a:r>
-              <a:t>2. Atorvastatin (CID 60823): MW 558.64 | LogP 5.70 -&gt; Match 100%</a:t>
-            </a:r>
-          </a:p>
-          <a:p>
-            <a:pPr>
-              <a:spcAft>
-                <a:spcPts val="600"/>
-              </a:spcAft>
-              <a:defRPr sz="1200">
-                <a:solidFill>
-                  <a:srgbClr val="94A3B8"/>
-                </a:solidFill>
-                <a:latin typeface="Calibri"/>
-              </a:defRPr>
-            </a:pPr>
-            <a:r>
-              <a:t>3. Gingerol (CID 442793): MW 294.39 | LogP 3.10 -&gt; Match 100%</a:t>
-            </a:r>
-          </a:p>
-          <a:p>
-            <a:pPr>
-              <a:spcAft>
-                <a:spcPts val="600"/>
-              </a:spcAft>
-              <a:defRPr sz="1200">
-                <a:solidFill>
-                  <a:srgbClr val="94A3B8"/>
-                </a:solidFill>
-                <a:latin typeface="Calibri"/>
-              </a:defRPr>
-            </a:pPr>
-            <a:r>
-              <a:t>4. Genistein (CID 5280961): MW 270.24 | LogP 2.70 -&gt; Match 100%</a:t>
-            </a:r>
-          </a:p>
-          <a:p>
-            <a:pPr>
-              <a:spcAft>
-                <a:spcPts val="600"/>
-              </a:spcAft>
-              <a:defRPr sz="1200">
-                <a:solidFill>
-                  <a:srgbClr val="94A3B8"/>
-                </a:solidFill>
-                <a:latin typeface="Calibri"/>
-              </a:defRPr>
-            </a:pPr>
-          </a:p>
-          <a:p>
-            <a:pPr>
-              <a:spcAft>
-                <a:spcPts val="600"/>
-              </a:spcAft>
-              <a:defRPr sz="1200">
-                <a:solidFill>
-                  <a:srgbClr val="94A3B8"/>
-                </a:solidFill>
-                <a:latin typeface="Calibri"/>
-              </a:defRPr>
-            </a:pPr>
-            <a:r>
-              <a:t>Presisi komputasi terbukti 100% konsisten dengan SwissADME acuan.</a:t>
-            </a:r>
-          </a:p>
-        </p:txBody>
-      </p:sp>
-      <p:sp>
-        <p:nvSpPr>
-          <p:cNvPr id="7" name="TextBox 6"/>
-          <p:cNvSpPr txBox="1"/>
+              <a:t>Zonasi Fungsional &amp; Efflux P-gp</a:t>
+            </a:r>
+          </a:p>
+          <a:p>
+            <a:pPr>
+              <a:spcAft>
+                <a:spcPts val="400"/>
+              </a:spcAft>
+              <a:defRPr sz="1050">
+                <a:solidFill>
+                  <a:srgbClr val="94A3B8"/>
+                </a:solidFill>
+                <a:latin typeface="Calibri"/>
+              </a:defRPr>
+            </a:pPr>
+            <a:r>
+              <a:t>- White Zone (Putih Telur): Daerah penyerapan gastrointestinal manusia (Human Intestinal Absorption / HIA) tinggi.</a:t>
+            </a:r>
+          </a:p>
+          <a:p>
+            <a:pPr>
+              <a:spcAft>
+                <a:spcPts val="400"/>
+              </a:spcAft>
+              <a:defRPr sz="1050">
+                <a:solidFill>
+                  <a:srgbClr val="94A3B8"/>
+                </a:solidFill>
+                <a:latin typeface="Calibri"/>
+              </a:defRPr>
+            </a:pPr>
+            <a:r>
+              <a:t>- Yolk Zone (Kuning Telur): Daerah penetrasi Sawar Darah Otak (Blood-Brain Barrier / BBB) untuk target sistem saraf pusat.</a:t>
+            </a:r>
+          </a:p>
+          <a:p>
+            <a:pPr>
+              <a:spcAft>
+                <a:spcPts val="400"/>
+              </a:spcAft>
+              <a:defRPr sz="1050">
+                <a:solidFill>
+                  <a:srgbClr val="94A3B8"/>
+                </a:solidFill>
+                <a:latin typeface="Calibri"/>
+              </a:defRPr>
+            </a:pPr>
+            <a:r>
+              <a:t>- Grey Zone: Absorpsi saluran cerna rendah dan tidak menembus sawar otak.</a:t>
+            </a:r>
+          </a:p>
+          <a:p>
+            <a:pPr>
+              <a:spcAft>
+                <a:spcPts val="400"/>
+              </a:spcAft>
+              <a:defRPr sz="1050">
+                <a:solidFill>
+                  <a:srgbClr val="94A3B8"/>
+                </a:solidFill>
+                <a:latin typeface="Calibri"/>
+              </a:defRPr>
+            </a:pPr>
+            <a:r>
+              <a:t>- P-glycoprotein Efflux Status:</a:t>
+            </a:r>
+          </a:p>
+          <a:p>
+            <a:pPr>
+              <a:spcAft>
+                <a:spcPts val="400"/>
+              </a:spcAft>
+              <a:defRPr sz="1050">
+                <a:solidFill>
+                  <a:srgbClr val="94A3B8"/>
+                </a:solidFill>
+                <a:latin typeface="Calibri"/>
+              </a:defRPr>
+            </a:pPr>
+            <a:r>
+              <a:t>  * PGP+: Substrat aktif pompa efluks ABCB1.</a:t>
+            </a:r>
+          </a:p>
+          <a:p>
+            <a:pPr>
+              <a:spcAft>
+                <a:spcPts val="400"/>
+              </a:spcAft>
+              <a:defRPr sz="1050">
+                <a:solidFill>
+                  <a:srgbClr val="94A3B8"/>
+                </a:solidFill>
+                <a:latin typeface="Calibri"/>
+              </a:defRPr>
+            </a:pPr>
+            <a:r>
+              <a:t>  * PGP-: Tidak dipompa keluar, retensi intraseluler tinggi.</a:t>
+            </a:r>
+          </a:p>
+        </p:txBody>
+      </p:sp>
+      <p:sp>
+        <p:nvSpPr>
+          <p:cNvPr id="8" name="Rounded Rectangle 7"/>
+          <p:cNvSpPr/>
           <p:nvPr/>
         </p:nvSpPr>
         <p:spPr>
           <a:xfrm>
-            <a:off x="731520" y="6309360"/>
-            <a:ext cx="10728655" cy="365760"/>
+            <a:off x="8046720" y="1554480"/>
+            <a:ext cx="3383280" cy="4480560"/>
           </a:xfrm>
-          <a:prstGeom prst="rect">
+          <a:prstGeom prst="roundRect">
             <a:avLst/>
           </a:prstGeom>
-          <a:noFill/>
+          <a:solidFill>
+            <a:srgbClr val="111827"/>
+          </a:solidFill>
+          <a:ln w="12700">
+            <a:solidFill>
+              <a:srgbClr val="1E293B"/>
+            </a:solidFill>
+          </a:ln>
         </p:spPr>
-        <p:txBody>
-          <a:bodyPr wrap="none">
-            <a:spAutoFit/>
-          </a:bodyPr>
-          <a:lstStyle/>
-          <a:p>
-            <a:pPr>
-              <a:defRPr sz="1000">
-                <a:solidFill>
-                  <a:srgbClr val="94A3B8"/>
-                </a:solidFill>
-                <a:latin typeface="Calibri"/>
-              </a:defRPr>
-            </a:pPr>
-            <a:r>
-              <a:t>PharmaPulse 3D - Presentasi Komprehensif Akademis | Slide 7 dari 10</a:t>
+        <p:style>
+          <a:lnRef idx="1">
+            <a:schemeClr val="accent1"/>
+          </a:lnRef>
+          <a:fillRef idx="3">
+            <a:schemeClr val="accent1"/>
+          </a:fillRef>
+          <a:effectRef idx="2">
+            <a:schemeClr val="accent1"/>
+          </a:effectRef>
+          <a:fontRef idx="minor">
+            <a:schemeClr val="lt1"/>
+          </a:fontRef>
+        </p:style>
+        <p:txBody>
+          <a:bodyPr rtlCol="0" anchor="t" wrap="square" lIns="201168" rIns="201168" tIns="164592" bIns="164592"/>
+          <a:lstStyle/>
+          <a:p>
+            <a:pPr algn="ctr">
+              <a:spcAft>
+                <a:spcPts val="700"/>
+              </a:spcAft>
+              <a:defRPr sz="1400" b="1">
+                <a:solidFill>
+                  <a:srgbClr val="F59E0B"/>
+                </a:solidFill>
+                <a:latin typeface="Arial"/>
+              </a:defRPr>
+            </a:pPr>
+            <a:r>
+              <a:t>Fitur Koordinat &amp; Interpretasi Dinamis</a:t>
+            </a:r>
+          </a:p>
+          <a:p>
+            <a:pPr>
+              <a:spcAft>
+                <a:spcPts val="400"/>
+              </a:spcAft>
+              <a:defRPr sz="1050">
+                <a:solidFill>
+                  <a:srgbClr val="94A3B8"/>
+                </a:solidFill>
+                <a:latin typeface="Calibri"/>
+              </a:defRPr>
+            </a:pPr>
+            <a:r>
+              <a:t>- Komputasi Titik Koordinat Eksak: Setiap senyawa dihitung dan diplotkan posisinya (WLogP, TPSA) secara presisi.</a:t>
+            </a:r>
+          </a:p>
+          <a:p>
+            <a:pPr>
+              <a:spcAft>
+                <a:spcPts val="400"/>
+              </a:spcAft>
+              <a:defRPr sz="1050">
+                <a:solidFill>
+                  <a:srgbClr val="94A3B8"/>
+                </a:solidFill>
+                <a:latin typeface="Calibri"/>
+              </a:defRPr>
+            </a:pPr>
+            <a:r>
+              <a:t>- Kotak Interpretasi Klinis Dinamis: Menjelaskan profil bioavailabilitas dan rekomendasi rute administrasi (oral vs parenteral).</a:t>
+            </a:r>
+          </a:p>
+          <a:p>
+            <a:pPr>
+              <a:spcAft>
+                <a:spcPts val="400"/>
+              </a:spcAft>
+              <a:defRPr sz="1050">
+                <a:solidFill>
+                  <a:srgbClr val="94A3B8"/>
+                </a:solidFill>
+                <a:latin typeface="Calibri"/>
+              </a:defRPr>
+            </a:pPr>
+            <a:r>
+              <a:t>- Multi-Compound Reference Landmark: Titik pembanding statin, antibiotik, NSAID, dan alkaloid pada ruang elips bivariat.</a:t>
+            </a:r>
+          </a:p>
+          <a:p>
+            <a:pPr>
+              <a:spcAft>
+                <a:spcPts val="400"/>
+              </a:spcAft>
+              <a:defRPr sz="1050">
+                <a:solidFill>
+                  <a:srgbClr val="94A3B8"/>
+                </a:solidFill>
+                <a:latin typeface="Calibri"/>
+              </a:defRPr>
+            </a:pPr>
+            <a:r>
+              <a:t>- Terhubung langsung dengan kalkulator deskriptor QSAR.</a:t>
             </a:r>
           </a:p>
         </p:txBody>
@@ -6550,7 +10750,7 @@
         <p:spPr>
           <a:xfrm>
             <a:off x="731520" y="365760"/>
-            <a:ext cx="3657600" cy="365760"/>
+            <a:ext cx="9144000" cy="320040"/>
           </a:xfrm>
           <a:prstGeom prst="rect">
             <a:avLst/>
@@ -6558,7 +10758,7 @@
           <a:noFill/>
         </p:spPr>
         <p:txBody>
-          <a:bodyPr wrap="square">
+          <a:bodyPr wrap="none">
             <a:spAutoFit/>
           </a:bodyPr>
           <a:lstStyle/>
@@ -6568,11 +10768,11 @@
                 <a:solidFill>
                   <a:srgbClr val="06B6D4"/>
                 </a:solidFill>
-                <a:latin typeface="Trebuchet MS"/>
-              </a:defRPr>
-            </a:pPr>
-            <a:r>
-              <a:t>PRESENTASI PROYEK KIMIA FARMASI</a:t>
+                <a:latin typeface="Arial"/>
+              </a:defRPr>
+            </a:pPr>
+            <a:r>
+              <a:t>PHARMAPULSE 3D - INOVASI CADD &amp; KIMIA MEDISINAL</a:t>
             </a:r>
           </a:p>
         </p:txBody>
@@ -6586,7 +10786,7 @@
         <p:spPr>
           <a:xfrm>
             <a:off x="731520" y="640080"/>
-            <a:ext cx="10698480" cy="731520"/>
+            <a:ext cx="10728655" cy="685800"/>
           </a:xfrm>
           <a:prstGeom prst="rect">
             <a:avLst/>
@@ -6600,7 +10800,7 @@
           <a:lstStyle/>
           <a:p>
             <a:pPr>
-              <a:defRPr sz="2400" b="1">
+              <a:defRPr sz="2100" b="1">
                 <a:solidFill>
                   <a:srgbClr val="F8FAFC"/>
                 </a:solidFill>
@@ -6608,7 +10808,7 @@
               </a:defRPr>
             </a:pPr>
             <a:r>
-              <a:t>Fitur Penapisan Massal (Batch CSV Sifter 34 Senyawa)</a:t>
+              <a:t>7. Kemudahan Sintesis (SA Score) &amp; Analisis Kekompleksan Molekul</a:t>
             </a:r>
           </a:p>
         </p:txBody>
@@ -6621,7 +10821,7 @@
         </p:nvSpPr>
         <p:spPr>
           <a:xfrm>
-            <a:off x="731520" y="1371600"/>
+            <a:off x="731520" y="1325880"/>
             <a:ext cx="10728655" cy="18288"/>
           </a:xfrm>
           <a:prstGeom prst="rect">
@@ -6660,14 +10860,50 @@
       </p:sp>
       <p:sp>
         <p:nvSpPr>
-          <p:cNvPr id="5" name="Rounded Rectangle 4"/>
+          <p:cNvPr id="5" name="TextBox 4"/>
+          <p:cNvSpPr txBox="1"/>
+          <p:nvPr/>
+        </p:nvSpPr>
+        <p:spPr>
+          <a:xfrm>
+            <a:off x="731520" y="6309360"/>
+            <a:ext cx="10728655" cy="365760"/>
+          </a:xfrm>
+          <a:prstGeom prst="rect">
+            <a:avLst/>
+          </a:prstGeom>
+          <a:noFill/>
+        </p:spPr>
+        <p:txBody>
+          <a:bodyPr wrap="none">
+            <a:spAutoFit/>
+          </a:bodyPr>
+          <a:lstStyle/>
+          <a:p>
+            <a:pPr>
+              <a:defRPr sz="950">
+                <a:solidFill>
+                  <a:srgbClr val="94A3B8"/>
+                </a:solidFill>
+                <a:latin typeface="Calibri"/>
+              </a:defRPr>
+            </a:pPr>
+            <a:r>
+              <a:t>PharmaPulse 3D | Platform Komputasi Kimia Medisinal &amp; In Silico Drug Discovery | Slide 8 dari 14</a:t>
+            </a:r>
+          </a:p>
+        </p:txBody>
+      </p:sp>
+      <p:sp>
+        <p:nvSpPr>
+          <p:cNvPr id="6" name="Rounded Rectangle 5"/>
           <p:cNvSpPr/>
           <p:nvPr/>
         </p:nvSpPr>
         <p:spPr>
           <a:xfrm>
-            <a:off x="731520" y="1828800"/>
-            <a:ext cx="5120640" cy="4114800"/>
+            <a:off x="731520" y="1554480"/>
+            <a:ext cx="3383280" cy="4480560"/>
           </a:xfrm>
           <a:prstGeom prst="roundRect">
             <a:avLst/>
@@ -6696,14 +10932,14 @@
           </a:fontRef>
         </p:style>
         <p:txBody>
-          <a:bodyPr rtlCol="0" anchor="t" wrap="square" lIns="228600" rIns="228600" tIns="182880" bIns="182880"/>
+          <a:bodyPr rtlCol="0" anchor="t" wrap="square" lIns="201168" rIns="201168" tIns="164592" bIns="164592"/>
           <a:lstStyle/>
           <a:p>
             <a:pPr algn="ctr">
               <a:spcAft>
-                <a:spcPts val="800"/>
-              </a:spcAft>
-              <a:defRPr sz="1600" b="1">
+                <a:spcPts val="700"/>
+              </a:spcAft>
+              <a:defRPr sz="1400" b="1">
                 <a:solidFill>
                   <a:srgbClr val="06B6D4"/>
                 </a:solidFill>
@@ -6711,69 +10947,117 @@
               </a:defRPr>
             </a:pPr>
             <a:r>
-              <a:t>Penyaringan Massal Pustaka Senyawa</a:t>
-            </a:r>
-          </a:p>
-          <a:p>
-            <a:pPr>
-              <a:spcAft>
-                <a:spcPts val="600"/>
-              </a:spcAft>
-              <a:defRPr sz="1200">
-                <a:solidFill>
-                  <a:srgbClr val="94A3B8"/>
-                </a:solidFill>
-                <a:latin typeface="Calibri"/>
-              </a:defRPr>
-            </a:pPr>
-            <a:r>
-              <a:t>• Memproses 34 senyawa obat &amp; bahan alam sekaligus.</a:t>
-            </a:r>
-          </a:p>
-          <a:p>
-            <a:pPr>
-              <a:spcAft>
-                <a:spcPts val="600"/>
-              </a:spcAft>
-              <a:defRPr sz="1200">
-                <a:solidFill>
-                  <a:srgbClr val="94A3B8"/>
-                </a:solidFill>
-                <a:latin typeface="Calibri"/>
-              </a:defRPr>
-            </a:pPr>
-            <a:r>
-              <a:t>• Skrining otomatis Lipinski RO5, Veber, PAINS Alert, &amp; Druglikeness Score.</a:t>
-            </a:r>
-          </a:p>
-          <a:p>
-            <a:pPr>
-              <a:spcAft>
-                <a:spcPts val="600"/>
-              </a:spcAft>
-              <a:defRPr sz="1200">
-                <a:solidFill>
-                  <a:srgbClr val="94A3B8"/>
-                </a:solidFill>
-                <a:latin typeface="Calibri"/>
-              </a:defRPr>
-            </a:pPr>
-            <a:r>
-              <a:t>• Menghemat waktu evaluasi bahan alam / library senyawa turunan.</a:t>
-            </a:r>
-          </a:p>
-        </p:txBody>
-      </p:sp>
-      <p:sp>
-        <p:nvSpPr>
-          <p:cNvPr id="6" name="Rounded Rectangle 5"/>
+              <a:t>Konsep SA Score</a:t>
+            </a:r>
+          </a:p>
+          <a:p>
+            <a:pPr>
+              <a:spcAft>
+                <a:spcPts val="400"/>
+              </a:spcAft>
+              <a:defRPr sz="1050">
+                <a:solidFill>
+                  <a:srgbClr val="94A3B8"/>
+                </a:solidFill>
+                <a:latin typeface="Calibri"/>
+              </a:defRPr>
+            </a:pPr>
+            <a:r>
+              <a:t>- Synthetic Accessibility Score mengukur kemudahan/kesulitan relatif sintesis kimia organik.</a:t>
+            </a:r>
+          </a:p>
+          <a:p>
+            <a:pPr>
+              <a:spcAft>
+                <a:spcPts val="400"/>
+              </a:spcAft>
+              <a:defRPr sz="1050">
+                <a:solidFill>
+                  <a:srgbClr val="94A3B8"/>
+                </a:solidFill>
+                <a:latin typeface="Calibri"/>
+              </a:defRPr>
+            </a:pPr>
+            <a:r>
+              <a:t>- Skala Terstandar 1.0 s/d 10.0:</a:t>
+            </a:r>
+          </a:p>
+          <a:p>
+            <a:pPr>
+              <a:spcAft>
+                <a:spcPts val="400"/>
+              </a:spcAft>
+              <a:defRPr sz="1050">
+                <a:solidFill>
+                  <a:srgbClr val="94A3B8"/>
+                </a:solidFill>
+                <a:latin typeface="Calibri"/>
+              </a:defRPr>
+            </a:pPr>
+            <a:r>
+              <a:t>  * 1.0 - 4.0: Mudah disintesis (reagen komersial tersedia, reaksi standar).</a:t>
+            </a:r>
+          </a:p>
+          <a:p>
+            <a:pPr>
+              <a:spcAft>
+                <a:spcPts val="400"/>
+              </a:spcAft>
+              <a:defRPr sz="1050">
+                <a:solidFill>
+                  <a:srgbClr val="94A3B8"/>
+                </a:solidFill>
+                <a:latin typeface="Calibri"/>
+              </a:defRPr>
+            </a:pPr>
+            <a:r>
+              <a:t>  * 4.1 - 7.0: Kesulitan moderat (memerlukan multi-tahap sintesis).</a:t>
+            </a:r>
+          </a:p>
+          <a:p>
+            <a:pPr>
+              <a:spcAft>
+                <a:spcPts val="400"/>
+              </a:spcAft>
+              <a:defRPr sz="1050">
+                <a:solidFill>
+                  <a:srgbClr val="94A3B8"/>
+                </a:solidFill>
+                <a:latin typeface="Calibri"/>
+              </a:defRPr>
+            </a:pPr>
+            <a:r>
+              <a:t>  * 7.1 - 10.0: Sangat sulit disintesis (struktur kompleks, banyak stereosenter).</a:t>
+            </a:r>
+          </a:p>
+          <a:p>
+            <a:pPr>
+              <a:spcAft>
+                <a:spcPts val="400"/>
+              </a:spcAft>
+              <a:defRPr sz="1050">
+                <a:solidFill>
+                  <a:srgbClr val="94A3B8"/>
+                </a:solidFill>
+                <a:latin typeface="Calibri"/>
+              </a:defRPr>
+            </a:pPr>
+            <a:r>
+              <a:t>- Menghindarkan tim laboratorium dari sintesis molekul teoritis yang mustahil diproduksi.</a:t>
+            </a:r>
+          </a:p>
+        </p:txBody>
+      </p:sp>
+      <p:sp>
+        <p:nvSpPr>
+          <p:cNvPr id="7" name="Rounded Rectangle 6"/>
           <p:cNvSpPr/>
           <p:nvPr/>
         </p:nvSpPr>
         <p:spPr>
           <a:xfrm>
-            <a:off x="6217920" y="1828800"/>
-            <a:ext cx="5120640" cy="4114800"/>
+            <a:off x="4389120" y="1554480"/>
+            <a:ext cx="3383280" cy="4480560"/>
           </a:xfrm>
           <a:prstGeom prst="roundRect">
             <a:avLst/>
@@ -6802,106 +11086,240 @@
           </a:fontRef>
         </p:style>
         <p:txBody>
-          <a:bodyPr rtlCol="0" anchor="t" wrap="square" lIns="228600" rIns="228600" tIns="182880" bIns="182880"/>
+          <a:bodyPr rtlCol="0" anchor="t" wrap="square" lIns="201168" rIns="201168" tIns="164592" bIns="164592"/>
           <a:lstStyle/>
           <a:p>
             <a:pPr algn="ctr">
               <a:spcAft>
-                <a:spcPts val="800"/>
-              </a:spcAft>
-              <a:defRPr sz="1600" b="1">
-                <a:solidFill>
-                  <a:srgbClr val="06B6D4"/>
+                <a:spcPts val="700"/>
+              </a:spcAft>
+              <a:defRPr sz="1400" b="1">
+                <a:solidFill>
+                  <a:srgbClr val="8B5CF6"/>
                 </a:solidFill>
                 <a:latin typeface="Arial"/>
               </a:defRPr>
             </a:pPr>
             <a:r>
-              <a:t>Efisiensi Kerja Peneliti &amp; QC</a:t>
-            </a:r>
-          </a:p>
-          <a:p>
-            <a:pPr>
-              <a:spcAft>
-                <a:spcPts val="600"/>
-              </a:spcAft>
-              <a:defRPr sz="1200">
-                <a:solidFill>
-                  <a:srgbClr val="94A3B8"/>
-                </a:solidFill>
-                <a:latin typeface="Calibri"/>
-              </a:defRPr>
-            </a:pPr>
-            <a:r>
-              <a:t>1. Praktis untuk evaluasi cepat hasil isolasi tumbuhan obat.</a:t>
-            </a:r>
-          </a:p>
-          <a:p>
-            <a:pPr>
-              <a:spcAft>
-                <a:spcPts val="600"/>
-              </a:spcAft>
-              <a:defRPr sz="1200">
-                <a:solidFill>
-                  <a:srgbClr val="94A3B8"/>
-                </a:solidFill>
-                <a:latin typeface="Calibri"/>
-              </a:defRPr>
-            </a:pPr>
-            <a:r>
-              <a:t>2. Ekspor hasil tabel saringan untuk laporan jurnal ilmiah.</a:t>
-            </a:r>
-          </a:p>
-          <a:p>
-            <a:pPr>
-              <a:spcAft>
-                <a:spcPts val="600"/>
-              </a:spcAft>
-              <a:defRPr sz="1200">
-                <a:solidFill>
-                  <a:srgbClr val="94A3B8"/>
-                </a:solidFill>
-                <a:latin typeface="Calibri"/>
-              </a:defRPr>
-            </a:pPr>
-            <a:r>
-              <a:t>3. Didukung penampung cache offline untuk kecepatan maksimal.</a:t>
-            </a:r>
-          </a:p>
-        </p:txBody>
-      </p:sp>
-      <p:sp>
-        <p:nvSpPr>
-          <p:cNvPr id="7" name="TextBox 6"/>
-          <p:cNvSpPr txBox="1"/>
+              <a:t>Faktor Penentu Kompleksitas</a:t>
+            </a:r>
+          </a:p>
+          <a:p>
+            <a:pPr>
+              <a:spcAft>
+                <a:spcPts val="400"/>
+              </a:spcAft>
+              <a:defRPr sz="1050">
+                <a:solidFill>
+                  <a:srgbClr val="94A3B8"/>
+                </a:solidFill>
+                <a:latin typeface="Calibri"/>
+              </a:defRPr>
+            </a:pPr>
+            <a:r>
+              <a:t>- Kontribusi Skor Fragmen:</a:t>
+            </a:r>
+          </a:p>
+          <a:p>
+            <a:pPr>
+              <a:spcAft>
+                <a:spcPts val="400"/>
+              </a:spcAft>
+              <a:defRPr sz="1050">
+                <a:solidFill>
+                  <a:srgbClr val="94A3B8"/>
+                </a:solidFill>
+                <a:latin typeface="Calibri"/>
+              </a:defRPr>
+            </a:pPr>
+            <a:r>
+              <a:t>  * Analisis kemunculan sub-struktur dalam database molekul komersial (PubChem/ZINC).</a:t>
+            </a:r>
+          </a:p>
+          <a:p>
+            <a:pPr>
+              <a:spcAft>
+                <a:spcPts val="400"/>
+              </a:spcAft>
+              <a:defRPr sz="1050">
+                <a:solidFill>
+                  <a:srgbClr val="94A3B8"/>
+                </a:solidFill>
+                <a:latin typeface="Calibri"/>
+              </a:defRPr>
+            </a:pPr>
+            <a:r>
+              <a:t>- Penalti Kompleksitas Struktur:</a:t>
+            </a:r>
+          </a:p>
+          <a:p>
+            <a:pPr>
+              <a:spcAft>
+                <a:spcPts val="400"/>
+              </a:spcAft>
+              <a:defRPr sz="1050">
+                <a:solidFill>
+                  <a:srgbClr val="94A3B8"/>
+                </a:solidFill>
+                <a:latin typeface="Calibri"/>
+              </a:defRPr>
+            </a:pPr>
+            <a:r>
+              <a:t>  * Jumlah atom stereosenter (pusat kiralitas).</a:t>
+            </a:r>
+          </a:p>
+          <a:p>
+            <a:pPr>
+              <a:spcAft>
+                <a:spcPts val="400"/>
+              </a:spcAft>
+              <a:defRPr sz="1050">
+                <a:solidFill>
+                  <a:srgbClr val="94A3B8"/>
+                </a:solidFill>
+                <a:latin typeface="Calibri"/>
+              </a:defRPr>
+            </a:pPr>
+            <a:r>
+              <a:t>  * Cincin berfusi ganda dan sistem spiro.</a:t>
+            </a:r>
+          </a:p>
+          <a:p>
+            <a:pPr>
+              <a:spcAft>
+                <a:spcPts val="400"/>
+              </a:spcAft>
+              <a:defRPr sz="1050">
+                <a:solidFill>
+                  <a:srgbClr val="94A3B8"/>
+                </a:solidFill>
+                <a:latin typeface="Calibri"/>
+              </a:defRPr>
+            </a:pPr>
+            <a:r>
+              <a:t>  * Ukuran cincin makrosiklik (&gt;8 atom).</a:t>
+            </a:r>
+          </a:p>
+          <a:p>
+            <a:pPr>
+              <a:spcAft>
+                <a:spcPts val="400"/>
+              </a:spcAft>
+              <a:defRPr sz="1050">
+                <a:solidFill>
+                  <a:srgbClr val="94A3B8"/>
+                </a:solidFill>
+                <a:latin typeface="Calibri"/>
+              </a:defRPr>
+            </a:pPr>
+            <a:r>
+              <a:t>  * Kepadatan heteroatom (N, O, S, halogen) yang tidak biasa.</a:t>
+            </a:r>
+          </a:p>
+        </p:txBody>
+      </p:sp>
+      <p:sp>
+        <p:nvSpPr>
+          <p:cNvPr id="8" name="Rounded Rectangle 7"/>
+          <p:cNvSpPr/>
           <p:nvPr/>
         </p:nvSpPr>
         <p:spPr>
           <a:xfrm>
-            <a:off x="731520" y="6309360"/>
-            <a:ext cx="10728655" cy="365760"/>
+            <a:off x="8046720" y="1554480"/>
+            <a:ext cx="3383280" cy="4480560"/>
           </a:xfrm>
-          <a:prstGeom prst="rect">
+          <a:prstGeom prst="roundRect">
             <a:avLst/>
           </a:prstGeom>
-          <a:noFill/>
+          <a:solidFill>
+            <a:srgbClr val="111827"/>
+          </a:solidFill>
+          <a:ln w="12700">
+            <a:solidFill>
+              <a:srgbClr val="1E293B"/>
+            </a:solidFill>
+          </a:ln>
         </p:spPr>
-        <p:txBody>
-          <a:bodyPr wrap="none">
-            <a:spAutoFit/>
-          </a:bodyPr>
-          <a:lstStyle/>
-          <a:p>
-            <a:pPr>
-              <a:defRPr sz="1000">
-                <a:solidFill>
-                  <a:srgbClr val="94A3B8"/>
-                </a:solidFill>
-                <a:latin typeface="Calibri"/>
-              </a:defRPr>
-            </a:pPr>
-            <a:r>
-              <a:t>PharmaPulse 3D - Presentasi Komprehensif Akademis | Slide 8 dari 10</a:t>
+        <p:style>
+          <a:lnRef idx="1">
+            <a:schemeClr val="accent1"/>
+          </a:lnRef>
+          <a:fillRef idx="3">
+            <a:schemeClr val="accent1"/>
+          </a:fillRef>
+          <a:effectRef idx="2">
+            <a:schemeClr val="accent1"/>
+          </a:effectRef>
+          <a:fontRef idx="minor">
+            <a:schemeClr val="lt1"/>
+          </a:fontRef>
+        </p:style>
+        <p:txBody>
+          <a:bodyPr rtlCol="0" anchor="t" wrap="square" lIns="201168" rIns="201168" tIns="164592" bIns="164592"/>
+          <a:lstStyle/>
+          <a:p>
+            <a:pPr algn="ctr">
+              <a:spcAft>
+                <a:spcPts val="700"/>
+              </a:spcAft>
+              <a:defRPr sz="1400" b="1">
+                <a:solidFill>
+                  <a:srgbClr val="10B981"/>
+                </a:solidFill>
+                <a:latin typeface="Arial"/>
+              </a:defRPr>
+            </a:pPr>
+            <a:r>
+              <a:t>Implementasi dalam CADD</a:t>
+            </a:r>
+          </a:p>
+          <a:p>
+            <a:pPr>
+              <a:spcAft>
+                <a:spcPts val="400"/>
+              </a:spcAft>
+              <a:defRPr sz="1050">
+                <a:solidFill>
+                  <a:srgbClr val="94A3B8"/>
+                </a:solidFill>
+                <a:latin typeface="Calibri"/>
+              </a:defRPr>
+            </a:pPr>
+            <a:r>
+              <a:t>- Memandu Optimasi Struktur Ligan: Memilih analog dengan afinitas biologis tinggi namun memiliki SA Score rendah (mudah dibuat).</a:t>
+            </a:r>
+          </a:p>
+          <a:p>
+            <a:pPr>
+              <a:spcAft>
+                <a:spcPts val="400"/>
+              </a:spcAft>
+              <a:defRPr sz="1050">
+                <a:solidFill>
+                  <a:srgbClr val="94A3B8"/>
+                </a:solidFill>
+                <a:latin typeface="Calibri"/>
+              </a:defRPr>
+            </a:pPr>
+            <a:r>
+              <a:t>- Evaluasi Produk Bahan Alam: Molekul alami seperti Vinblastine atau Artemisinin memiliki SA Score tinggi akibat cincin lakton/endoperoksida kompleks.</a:t>
+            </a:r>
+          </a:p>
+          <a:p>
+            <a:pPr>
+              <a:spcAft>
+                <a:spcPts val="400"/>
+              </a:spcAft>
+              <a:defRPr sz="1050">
+                <a:solidFill>
+                  <a:srgbClr val="94A3B8"/>
+                </a:solidFill>
+                <a:latin typeface="Calibri"/>
+              </a:defRPr>
+            </a:pPr>
+            <a:r>
+              <a:t>- Integrasi dengan filter Lead-Likeness untuk menjamin efisiensi alur sintesis tahap penemuan obat.</a:t>
             </a:r>
           </a:p>
         </p:txBody>
@@ -6941,7 +11359,7 @@
         <p:spPr>
           <a:xfrm>
             <a:off x="731520" y="365760"/>
-            <a:ext cx="3657600" cy="365760"/>
+            <a:ext cx="9144000" cy="320040"/>
           </a:xfrm>
           <a:prstGeom prst="rect">
             <a:avLst/>
@@ -6949,7 +11367,7 @@
           <a:noFill/>
         </p:spPr>
         <p:txBody>
-          <a:bodyPr wrap="square">
+          <a:bodyPr wrap="none">
             <a:spAutoFit/>
           </a:bodyPr>
           <a:lstStyle/>
@@ -6959,11 +11377,11 @@
                 <a:solidFill>
                   <a:srgbClr val="06B6D4"/>
                 </a:solidFill>
-                <a:latin typeface="Trebuchet MS"/>
-              </a:defRPr>
-            </a:pPr>
-            <a:r>
-              <a:t>PRESENTASI PROYEK KIMIA FARMASI</a:t>
+                <a:latin typeface="Arial"/>
+              </a:defRPr>
+            </a:pPr>
+            <a:r>
+              <a:t>PHARMAPULSE 3D - INOVASI CADD &amp; KIMIA MEDISINAL</a:t>
             </a:r>
           </a:p>
         </p:txBody>
@@ -6977,7 +11395,7 @@
         <p:spPr>
           <a:xfrm>
             <a:off x="731520" y="640080"/>
-            <a:ext cx="10698480" cy="731520"/>
+            <a:ext cx="10728655" cy="685800"/>
           </a:xfrm>
           <a:prstGeom prst="rect">
             <a:avLst/>
@@ -6991,7 +11409,7 @@
           <a:lstStyle/>
           <a:p>
             <a:pPr>
-              <a:defRPr sz="2400" b="1">
+              <a:defRPr sz="2100" b="1">
                 <a:solidFill>
                   <a:srgbClr val="F8FAFC"/>
                 </a:solidFill>
@@ -6999,7 +11417,7 @@
               </a:defRPr>
             </a:pPr>
             <a:r>
-              <a:t>Keandalan System &amp; Cache 34 Senyawa</a:t>
+              <a:t>8. Penapisan Analog Cerdas: Tanimoto FastSimilarity Live Search</a:t>
             </a:r>
           </a:p>
         </p:txBody>
@@ -7012,7 +11430,7 @@
         </p:nvSpPr>
         <p:spPr>
           <a:xfrm>
-            <a:off x="731520" y="1371600"/>
+            <a:off x="731520" y="1325880"/>
             <a:ext cx="10728655" cy="18288"/>
           </a:xfrm>
           <a:prstGeom prst="rect">
@@ -7051,14 +11469,50 @@
       </p:sp>
       <p:sp>
         <p:nvSpPr>
-          <p:cNvPr id="5" name="Rounded Rectangle 4"/>
+          <p:cNvPr id="5" name="TextBox 4"/>
+          <p:cNvSpPr txBox="1"/>
+          <p:nvPr/>
+        </p:nvSpPr>
+        <p:spPr>
+          <a:xfrm>
+            <a:off x="731520" y="6309360"/>
+            <a:ext cx="10728655" cy="365760"/>
+          </a:xfrm>
+          <a:prstGeom prst="rect">
+            <a:avLst/>
+          </a:prstGeom>
+          <a:noFill/>
+        </p:spPr>
+        <p:txBody>
+          <a:bodyPr wrap="none">
+            <a:spAutoFit/>
+          </a:bodyPr>
+          <a:lstStyle/>
+          <a:p>
+            <a:pPr>
+              <a:defRPr sz="950">
+                <a:solidFill>
+                  <a:srgbClr val="94A3B8"/>
+                </a:solidFill>
+                <a:latin typeface="Calibri"/>
+              </a:defRPr>
+            </a:pPr>
+            <a:r>
+              <a:t>PharmaPulse 3D | Platform Komputasi Kimia Medisinal &amp; In Silico Drug Discovery | Slide 9 dari 14</a:t>
+            </a:r>
+          </a:p>
+        </p:txBody>
+      </p:sp>
+      <p:sp>
+        <p:nvSpPr>
+          <p:cNvPr id="6" name="Rounded Rectangle 5"/>
           <p:cNvSpPr/>
           <p:nvPr/>
         </p:nvSpPr>
         <p:spPr>
           <a:xfrm>
-            <a:off x="731520" y="1828800"/>
-            <a:ext cx="5120640" cy="4114800"/>
+            <a:off x="731520" y="1554480"/>
+            <a:ext cx="3383280" cy="4480560"/>
           </a:xfrm>
           <a:prstGeom prst="roundRect">
             <a:avLst/>
@@ -7087,14 +11541,14 @@
           </a:fontRef>
         </p:style>
         <p:txBody>
-          <a:bodyPr rtlCol="0" anchor="t" wrap="square" lIns="228600" rIns="228600" tIns="182880" bIns="182880"/>
+          <a:bodyPr rtlCol="0" anchor="t" wrap="square" lIns="201168" rIns="201168" tIns="164592" bIns="164592"/>
           <a:lstStyle/>
           <a:p>
             <a:pPr algn="ctr">
               <a:spcAft>
-                <a:spcPts val="800"/>
-              </a:spcAft>
-              <a:defRPr sz="1600" b="1">
+                <a:spcPts val="700"/>
+              </a:spcAft>
+              <a:defRPr sz="1400" b="1">
                 <a:solidFill>
                   <a:srgbClr val="06B6D4"/>
                 </a:solidFill>
@@ -7102,69 +11556,133 @@
               </a:defRPr>
             </a:pPr>
             <a:r>
-              <a:t>Tiered Property Fallback Query</a:t>
-            </a:r>
-          </a:p>
-          <a:p>
-            <a:pPr>
-              <a:spcAft>
-                <a:spcPts val="600"/>
-              </a:spcAft>
-              <a:defRPr sz="1200">
-                <a:solidFill>
-                  <a:srgbClr val="94A3B8"/>
-                </a:solidFill>
-                <a:latin typeface="Calibri"/>
-              </a:defRPr>
-            </a:pPr>
-            <a:r>
-              <a:t>Menangani dinamika penamaan properti di PubChem API (XLogP vs XLogP3).</a:t>
-            </a:r>
-          </a:p>
-          <a:p>
-            <a:pPr>
-              <a:spcAft>
-                <a:spcPts val="600"/>
-              </a:spcAft>
-              <a:defRPr sz="1200">
-                <a:solidFill>
-                  <a:srgbClr val="94A3B8"/>
-                </a:solidFill>
-                <a:latin typeface="Calibri"/>
-              </a:defRPr>
-            </a:pPr>
-            <a:r>
-              <a:t>Mencoba XLogP -&gt; XLogP3 -&gt; Base Properties secara otomatis.</a:t>
-            </a:r>
-          </a:p>
-          <a:p>
-            <a:pPr>
-              <a:spcAft>
-                <a:spcPts val="600"/>
-              </a:spcAft>
-              <a:defRPr sz="1200">
-                <a:solidFill>
-                  <a:srgbClr val="94A3B8"/>
-                </a:solidFill>
-                <a:latin typeface="Calibri"/>
-              </a:defRPr>
-            </a:pPr>
-            <a:r>
-              <a:t>Mencegah terjadinya error HTTP 400 Bad Request pada senyawa obat mana pun.</a:t>
-            </a:r>
-          </a:p>
-        </p:txBody>
-      </p:sp>
-      <p:sp>
-        <p:nvSpPr>
-          <p:cNvPr id="6" name="Rounded Rectangle 5"/>
+              <a:t>Metrik Kemiripan Tanimoto 2D</a:t>
+            </a:r>
+          </a:p>
+          <a:p>
+            <a:pPr>
+              <a:spcAft>
+                <a:spcPts val="400"/>
+              </a:spcAft>
+              <a:defRPr sz="1050">
+                <a:solidFill>
+                  <a:srgbClr val="94A3B8"/>
+                </a:solidFill>
+                <a:latin typeface="Calibri"/>
+              </a:defRPr>
+            </a:pPr>
+            <a:r>
+              <a:t>- Koefisien Tanimoto Fingerprint:</a:t>
+            </a:r>
+          </a:p>
+          <a:p>
+            <a:pPr>
+              <a:spcAft>
+                <a:spcPts val="400"/>
+              </a:spcAft>
+              <a:defRPr sz="1050">
+                <a:solidFill>
+                  <a:srgbClr val="94A3B8"/>
+                </a:solidFill>
+                <a:latin typeface="Calibri"/>
+              </a:defRPr>
+            </a:pPr>
+            <a:r>
+              <a:t>  T(A,B) = c / (a + b - c)</a:t>
+            </a:r>
+          </a:p>
+          <a:p>
+            <a:pPr>
+              <a:spcAft>
+                <a:spcPts val="400"/>
+              </a:spcAft>
+              <a:defRPr sz="1050">
+                <a:solidFill>
+                  <a:srgbClr val="94A3B8"/>
+                </a:solidFill>
+                <a:latin typeface="Calibri"/>
+              </a:defRPr>
+            </a:pPr>
+            <a:r>
+              <a:t>  * a: bit aktif pada molekul A</a:t>
+            </a:r>
+          </a:p>
+          <a:p>
+            <a:pPr>
+              <a:spcAft>
+                <a:spcPts val="400"/>
+              </a:spcAft>
+              <a:defRPr sz="1050">
+                <a:solidFill>
+                  <a:srgbClr val="94A3B8"/>
+                </a:solidFill>
+                <a:latin typeface="Calibri"/>
+              </a:defRPr>
+            </a:pPr>
+            <a:r>
+              <a:t>  * b: bit aktif pada molekul B</a:t>
+            </a:r>
+          </a:p>
+          <a:p>
+            <a:pPr>
+              <a:spcAft>
+                <a:spcPts val="400"/>
+              </a:spcAft>
+              <a:defRPr sz="1050">
+                <a:solidFill>
+                  <a:srgbClr val="94A3B8"/>
+                </a:solidFill>
+                <a:latin typeface="Calibri"/>
+              </a:defRPr>
+            </a:pPr>
+            <a:r>
+              <a:t>  * c: bit bersama (shared) pada kedua molekul.</a:t>
+            </a:r>
+          </a:p>
+          <a:p>
+            <a:pPr>
+              <a:spcAft>
+                <a:spcPts val="400"/>
+              </a:spcAft>
+              <a:defRPr sz="1050">
+                <a:solidFill>
+                  <a:srgbClr val="94A3B8"/>
+                </a:solidFill>
+                <a:latin typeface="Calibri"/>
+              </a:defRPr>
+            </a:pPr>
+            <a:r>
+              <a:t>- Rentang nilai: 0.0 (tidak ada kesamaan) hingga 1.0 (identik 100%).</a:t>
+            </a:r>
+          </a:p>
+          <a:p>
+            <a:pPr>
+              <a:spcAft>
+                <a:spcPts val="400"/>
+              </a:spcAft>
+              <a:defRPr sz="1050">
+                <a:solidFill>
+                  <a:srgbClr val="94A3B8"/>
+                </a:solidFill>
+                <a:latin typeface="Calibri"/>
+              </a:defRPr>
+            </a:pPr>
+            <a:r>
+              <a:t>- Standar threshold kimia medisinal: Kemiripan &gt;= 85% untuk seri analog farmakofor sekerabat.</a:t>
+            </a:r>
+          </a:p>
+        </p:txBody>
+      </p:sp>
+      <p:sp>
+        <p:nvSpPr>
+          <p:cNvPr id="7" name="Rounded Rectangle 6"/>
           <p:cNvSpPr/>
           <p:nvPr/>
         </p:nvSpPr>
         <p:spPr>
           <a:xfrm>
-            <a:off x="6217920" y="1828800"/>
-            <a:ext cx="5120640" cy="4114800"/>
+            <a:off x="4389120" y="1554480"/>
+            <a:ext cx="3383280" cy="4480560"/>
           </a:xfrm>
           <a:prstGeom prst="roundRect">
             <a:avLst/>
@@ -7193,106 +11711,256 @@
           </a:fontRef>
         </p:style>
         <p:txBody>
-          <a:bodyPr rtlCol="0" anchor="t" wrap="square" lIns="228600" rIns="228600" tIns="182880" bIns="182880"/>
+          <a:bodyPr rtlCol="0" anchor="t" wrap="square" lIns="201168" rIns="201168" tIns="164592" bIns="164592"/>
           <a:lstStyle/>
           <a:p>
             <a:pPr algn="ctr">
               <a:spcAft>
-                <a:spcPts val="800"/>
-              </a:spcAft>
-              <a:defRPr sz="1600" b="1">
-                <a:solidFill>
-                  <a:srgbClr val="06B6D4"/>
+                <a:spcPts val="700"/>
+              </a:spcAft>
+              <a:defRPr sz="1400" b="1">
+                <a:solidFill>
+                  <a:srgbClr val="8B5CF6"/>
                 </a:solidFill>
                 <a:latin typeface="Arial"/>
               </a:defRPr>
             </a:pPr>
             <a:r>
-              <a:t>Offline Dataset Cache (34 Senyawa)</a:t>
-            </a:r>
-          </a:p>
-          <a:p>
-            <a:pPr>
-              <a:spcAft>
-                <a:spcPts val="600"/>
-              </a:spcAft>
-              <a:defRPr sz="1200">
-                <a:solidFill>
-                  <a:srgbClr val="94A3B8"/>
-                </a:solidFill>
-                <a:latin typeface="Calibri"/>
-              </a:defRPr>
-            </a:pPr>
-            <a:r>
-              <a:t>Menyediakan basis data pra-cache untuk 34 senyawa obat sintetik &amp; bahan alam.</a:t>
-            </a:r>
-          </a:p>
-          <a:p>
-            <a:pPr>
-              <a:spcAft>
-                <a:spcPts val="600"/>
-              </a:spcAft>
-              <a:defRPr sz="1200">
-                <a:solidFill>
-                  <a:srgbClr val="94A3B8"/>
-                </a:solidFill>
-                <a:latin typeface="Calibri"/>
-              </a:defRPr>
-            </a:pPr>
-            <a:r>
-              <a:t>Menjamin aplikasi tetap beroperasi 100% lancar meski tanpa jaringan internet.</a:t>
-            </a:r>
-          </a:p>
-          <a:p>
-            <a:pPr>
-              <a:spcAft>
-                <a:spcPts val="600"/>
-              </a:spcAft>
-              <a:defRPr sz="1200">
-                <a:solidFill>
-                  <a:srgbClr val="94A3B8"/>
-                </a:solidFill>
-                <a:latin typeface="Calibri"/>
-              </a:defRPr>
-            </a:pPr>
-            <a:r>
-              <a:t>Penanganan error gracefully tanpa dialog popup mengganggu.</a:t>
-            </a:r>
-          </a:p>
-        </p:txBody>
-      </p:sp>
-      <p:sp>
-        <p:nvSpPr>
-          <p:cNvPr id="7" name="TextBox 6"/>
-          <p:cNvSpPr txBox="1"/>
+              <a:t>Live FastSimilarity PubChem API</a:t>
+            </a:r>
+          </a:p>
+          <a:p>
+            <a:pPr>
+              <a:spcAft>
+                <a:spcPts val="400"/>
+              </a:spcAft>
+              <a:defRPr sz="1050">
+                <a:solidFill>
+                  <a:srgbClr val="94A3B8"/>
+                </a:solidFill>
+                <a:latin typeface="Calibri"/>
+              </a:defRPr>
+            </a:pPr>
+            <a:r>
+              <a:t>- Terhubung langsung ke mesin pencari PubChem REST FastSimilarity NIH.</a:t>
+            </a:r>
+          </a:p>
+          <a:p>
+            <a:pPr>
+              <a:spcAft>
+                <a:spcPts val="400"/>
+              </a:spcAft>
+              <a:defRPr sz="1050">
+                <a:solidFill>
+                  <a:srgbClr val="94A3B8"/>
+                </a:solidFill>
+                <a:latin typeface="Calibri"/>
+              </a:defRPr>
+            </a:pPr>
+            <a:r>
+              <a:t>- Menyaring lebih dari 110 juta senyawa kimia secara paralel dalam beberapa detik.</a:t>
+            </a:r>
+          </a:p>
+          <a:p>
+            <a:pPr>
+              <a:spcAft>
+                <a:spcPts val="400"/>
+              </a:spcAft>
+              <a:defRPr sz="1050">
+                <a:solidFill>
+                  <a:srgbClr val="94A3B8"/>
+                </a:solidFill>
+                <a:latin typeface="Calibri"/>
+              </a:defRPr>
+            </a:pPr>
+            <a:r>
+              <a:t>- Mengambil 5 analog struktural teratas lengkap dengan:</a:t>
+            </a:r>
+          </a:p>
+          <a:p>
+            <a:pPr>
+              <a:spcAft>
+                <a:spcPts val="400"/>
+              </a:spcAft>
+              <a:defRPr sz="1050">
+                <a:solidFill>
+                  <a:srgbClr val="94A3B8"/>
+                </a:solidFill>
+                <a:latin typeface="Calibri"/>
+              </a:defRPr>
+            </a:pPr>
+            <a:r>
+              <a:t>  * Nama Senyawa &amp; Nomor CID</a:t>
+            </a:r>
+          </a:p>
+          <a:p>
+            <a:pPr>
+              <a:spcAft>
+                <a:spcPts val="400"/>
+              </a:spcAft>
+              <a:defRPr sz="1050">
+                <a:solidFill>
+                  <a:srgbClr val="94A3B8"/>
+                </a:solidFill>
+                <a:latin typeface="Calibri"/>
+              </a:defRPr>
+            </a:pPr>
+            <a:r>
+              <a:t>  * Persentase Tanimoto Similarity</a:t>
+            </a:r>
+          </a:p>
+          <a:p>
+            <a:pPr>
+              <a:spcAft>
+                <a:spcPts val="400"/>
+              </a:spcAft>
+              <a:defRPr sz="1050">
+                <a:solidFill>
+                  <a:srgbClr val="94A3B8"/>
+                </a:solidFill>
+                <a:latin typeface="Calibri"/>
+              </a:defRPr>
+            </a:pPr>
+            <a:r>
+              <a:t>  * Bobot Molekul (MW), LogP, dan TPSA</a:t>
+            </a:r>
+          </a:p>
+          <a:p>
+            <a:pPr>
+              <a:spcAft>
+                <a:spcPts val="400"/>
+              </a:spcAft>
+              <a:defRPr sz="1050">
+                <a:solidFill>
+                  <a:srgbClr val="94A3B8"/>
+                </a:solidFill>
+                <a:latin typeface="Calibri"/>
+              </a:defRPr>
+            </a:pPr>
+            <a:r>
+              <a:t>  * Thumbnail struktur 2D kimia instan.</a:t>
+            </a:r>
+          </a:p>
+        </p:txBody>
+      </p:sp>
+      <p:sp>
+        <p:nvSpPr>
+          <p:cNvPr id="8" name="Rounded Rectangle 7"/>
+          <p:cNvSpPr/>
           <p:nvPr/>
         </p:nvSpPr>
         <p:spPr>
           <a:xfrm>
-            <a:off x="731520" y="6309360"/>
-            <a:ext cx="10728655" cy="365760"/>
+            <a:off x="8046720" y="1554480"/>
+            <a:ext cx="3383280" cy="4480560"/>
           </a:xfrm>
-          <a:prstGeom prst="rect">
+          <a:prstGeom prst="roundRect">
             <a:avLst/>
           </a:prstGeom>
-          <a:noFill/>
+          <a:solidFill>
+            <a:srgbClr val="111827"/>
+          </a:solidFill>
+          <a:ln w="12700">
+            <a:solidFill>
+              <a:srgbClr val="1E293B"/>
+            </a:solidFill>
+          </a:ln>
         </p:spPr>
-        <p:txBody>
-          <a:bodyPr wrap="none">
-            <a:spAutoFit/>
-          </a:bodyPr>
-          <a:lstStyle/>
-          <a:p>
-            <a:pPr>
-              <a:defRPr sz="1000">
-                <a:solidFill>
-                  <a:srgbClr val="94A3B8"/>
-                </a:solidFill>
-                <a:latin typeface="Calibri"/>
-              </a:defRPr>
-            </a:pPr>
-            <a:r>
-              <a:t>PharmaPulse 3D - Presentasi Komprehensif Akademis | Slide 9 dari 10</a:t>
+        <p:style>
+          <a:lnRef idx="1">
+            <a:schemeClr val="accent1"/>
+          </a:lnRef>
+          <a:fillRef idx="3">
+            <a:schemeClr val="accent1"/>
+          </a:fillRef>
+          <a:effectRef idx="2">
+            <a:schemeClr val="accent1"/>
+          </a:effectRef>
+          <a:fontRef idx="minor">
+            <a:schemeClr val="lt1"/>
+          </a:fontRef>
+        </p:style>
+        <p:txBody>
+          <a:bodyPr rtlCol="0" anchor="t" wrap="square" lIns="201168" rIns="201168" tIns="164592" bIns="164592"/>
+          <a:lstStyle/>
+          <a:p>
+            <a:pPr algn="ctr">
+              <a:spcAft>
+                <a:spcPts val="700"/>
+              </a:spcAft>
+              <a:defRPr sz="1400" b="1">
+                <a:solidFill>
+                  <a:srgbClr val="F59E0B"/>
+                </a:solidFill>
+                <a:latin typeface="Arial"/>
+              </a:defRPr>
+            </a:pPr>
+            <a:r>
+              <a:t>Mekanisme Fallback Cerdas</a:t>
+            </a:r>
+          </a:p>
+          <a:p>
+            <a:pPr>
+              <a:spcAft>
+                <a:spcPts val="400"/>
+              </a:spcAft>
+              <a:defRPr sz="1050">
+                <a:solidFill>
+                  <a:srgbClr val="94A3B8"/>
+                </a:solidFill>
+                <a:latin typeface="Calibri"/>
+              </a:defRPr>
+            </a:pPr>
+            <a:r>
+              <a:t>- Offline &amp; Network Resilience:</a:t>
+            </a:r>
+          </a:p>
+          <a:p>
+            <a:pPr>
+              <a:spcAft>
+                <a:spcPts val="400"/>
+              </a:spcAft>
+              <a:defRPr sz="1050">
+                <a:solidFill>
+                  <a:srgbClr val="94A3B8"/>
+                </a:solidFill>
+                <a:latin typeface="Calibri"/>
+              </a:defRPr>
+            </a:pPr>
+            <a:r>
+              <a:t>  * Jika API eksternal terhambat latensi jaringan atau limit kuota, sistem secara mulus beralih ke Master Curated Analog Knowledgebase.</a:t>
+            </a:r>
+          </a:p>
+          <a:p>
+            <a:pPr>
+              <a:spcAft>
+                <a:spcPts val="400"/>
+              </a:spcAft>
+              <a:defRPr sz="1050">
+                <a:solidFill>
+                  <a:srgbClr val="94A3B8"/>
+                </a:solidFill>
+                <a:latin typeface="Calibri"/>
+              </a:defRPr>
+            </a:pPr>
+            <a:r>
+              <a:t>- Seluruh analog memiliki data fisikokimia tervalidasi dan skor Tanimoto otentik spesifik.</a:t>
+            </a:r>
+          </a:p>
+          <a:p>
+            <a:pPr>
+              <a:spcAft>
+                <a:spcPts val="400"/>
+              </a:spcAft>
+              <a:defRPr sz="1050">
+                <a:solidFill>
+                  <a:srgbClr val="94A3B8"/>
+                </a:solidFill>
+                <a:latin typeface="Calibri"/>
+              </a:defRPr>
+            </a:pPr>
+            <a:r>
+              <a:t>- Interaktif 1-Klik 'Analisis Senyawa Ini' untuk pivoting penelusuran analog secara rekursif.</a:t>
             </a:r>
           </a:p>
         </p:txBody>
